--- a/output/上市公司董事会秘书选聘指引.pptx
+++ b/output/上市公司董事会秘书选聘指引.pptx
@@ -7761,7 +7761,7 @@
                 <a:ea typeface="华文楷体" panose="02010600040101010101" pitchFamily="2" charset="-122"/>
                 <a:cs typeface="Times New Roman" panose="02020603050405020304" pitchFamily="18" charset="0"/>
               </a:rPr>
-              <a:t>七、一页看懂：怎么挑到合适的人</a:t>
+              <a:t>七、候选人遴选与核查要点</a:t>
             </a:r>
           </a:p>
         </p:txBody>
@@ -7814,7 +7814,7 @@
                 <a:ea typeface="华文楷体" panose="02010600040101010101" pitchFamily="2" charset="-122"/>
                 <a:cs typeface="Times New Roman" panose="02020603050405020304" pitchFamily="18" charset="0"/>
               </a:rPr>
-              <a:t>① 硬条件：先排除硬伤</a:t>
+              <a:t>① 任职资格：逐条核查</a:t>
             </a:r>
           </a:p>
           <a:p>
@@ -7844,7 +7844,7 @@
                 <a:ea typeface="华文楷体" panose="02010600040101010101" pitchFamily="2" charset="-122"/>
                 <a:cs typeface="Times New Roman" panose="02020603050405020304" pitchFamily="18" charset="0"/>
               </a:rPr>
-              <a:t>五年以上相关工作经验，或法职资格、注会证书＋五年经验</a:t>
+              <a:t>五年以上相关工作经验，或法律职业资格、注会证书＋五年经验</a:t>
             </a:r>
           </a:p>
           <a:p>
@@ -7934,7 +7934,7 @@
                 <a:ea typeface="华文楷体" panose="02010600040101010101" pitchFamily="2" charset="-122"/>
                 <a:cs typeface="Times New Roman" panose="02020603050405020304" pitchFamily="18" charset="0"/>
               </a:rPr>
-              <a:t>最近36个月无证监会处罚、无交易所公开谴责</a:t>
+              <a:t>最近三十六个月无证监会处罚、无交易所公开谴责</a:t>
             </a:r>
           </a:p>
           <a:p>
@@ -7994,7 +7994,7 @@
                 <a:ea typeface="华文楷体" panose="02010600040101010101" pitchFamily="2" charset="-122"/>
                 <a:cs typeface="Times New Roman" panose="02020603050405020304" pitchFamily="18" charset="0"/>
               </a:rPr>
-              <a:t>不兼任经理、分管经营副经理、财务负责人</a:t>
+              <a:t>不兼任经理、分管经营业务的副经理、财务负责人</a:t>
             </a:r>
           </a:p>
         </p:txBody>
@@ -8047,7 +8047,7 @@
                 <a:ea typeface="华文楷体" panose="02010600040101010101" pitchFamily="2" charset="-122"/>
                 <a:cs typeface="Times New Roman" panose="02020603050405020304" pitchFamily="18" charset="0"/>
               </a:rPr>
-              <a:t>② 软能力：能不能扛事</a:t>
+              <a:t>② 履职能力：重点评估</a:t>
             </a:r>
           </a:p>
           <a:p>
@@ -8077,7 +8077,7 @@
                 <a:ea typeface="华文楷体" panose="02010600040101010101" pitchFamily="2" charset="-122"/>
                 <a:cs typeface="Times New Roman" panose="02020603050405020304" pitchFamily="18" charset="0"/>
               </a:rPr>
-              <a:t>熟悉信息披露规则，扛得住定期报告和临时报告</a:t>
+              <a:t>熟悉信息披露规则，胜任定期报告与临时报告编制</a:t>
             </a:r>
           </a:p>
           <a:p>
@@ -8107,7 +8107,7 @@
                 <a:ea typeface="华文楷体" panose="02010600040101010101" pitchFamily="2" charset="-122"/>
                 <a:cs typeface="Times New Roman" panose="02020603050405020304" pitchFamily="18" charset="0"/>
               </a:rPr>
-              <a:t>组织协调能力：董事会、股东会开得起来、开得合规</a:t>
+              <a:t>组织协调能力：保障董事会、股东会合规召开</a:t>
             </a:r>
           </a:p>
           <a:p>
@@ -8137,7 +8137,7 @@
                 <a:ea typeface="华文楷体" panose="02010600040101010101" pitchFamily="2" charset="-122"/>
                 <a:cs typeface="Times New Roman" panose="02020603050405020304" pitchFamily="18" charset="0"/>
               </a:rPr>
-              <a:t>沟通能力：面对投资者、监管与媒体</a:t>
+              <a:t>沟通能力：应对投资者、监管机构与媒体</a:t>
             </a:r>
           </a:p>
           <a:p>
@@ -8167,7 +8167,7 @@
                 <a:ea typeface="华文楷体" panose="02010600040101010101" pitchFamily="2" charset="-122"/>
                 <a:cs typeface="Times New Roman" panose="02020603050405020304" pitchFamily="18" charset="0"/>
               </a:rPr>
-              <a:t>风险敏感，敢于提示和报告，不和稀泥</a:t>
+              <a:t>风险意识：敢于提示风险并如实报告</a:t>
             </a:r>
           </a:p>
           <a:p>
@@ -8227,7 +8227,7 @@
                 <a:ea typeface="华文楷体" panose="02010600040101010101" pitchFamily="2" charset="-122"/>
                 <a:cs typeface="Times New Roman" panose="02020603050405020304" pitchFamily="18" charset="0"/>
               </a:rPr>
-              <a:t>有足够时间与精力，不被其他工作挤占</a:t>
+              <a:t>时间与精力投入充分，不被其他职务挤占</a:t>
             </a:r>
           </a:p>
         </p:txBody>
@@ -8280,7 +8280,7 @@
                 <a:ea typeface="华文楷体" panose="02010600040101010101" pitchFamily="2" charset="-122"/>
                 <a:cs typeface="Times New Roman" panose="02020603050405020304" pitchFamily="18" charset="0"/>
               </a:rPr>
-              <a:t>③ 怎么核实</a:t>
+              <a:t>③ 核查渠道与方式</a:t>
             </a:r>
           </a:p>
           <a:p>
@@ -8518,7 +8518,7 @@
                 <a:ea typeface="华文楷体" panose="02010600040101010101" pitchFamily="2" charset="-122"/>
                 <a:cs typeface="Times New Roman" panose="02020603050405020304" pitchFamily="18" charset="0"/>
               </a:rPr>
-              <a:t>一句话：先看有没有“硬伤”，再看能不能扛事。</a:t>
+              <a:t>遴选顺序：先核查任职资格，再评估履职能力。</a:t>
             </a:r>
             <a:r>
               <a:rPr lang="zh-CN" altLang="en-US" sz="1400" b="0" kern="1200" dirty="0">
@@ -8529,7 +8529,7 @@
                 <a:ea typeface="华文楷体" panose="02010600040101010101" pitchFamily="2" charset="-122"/>
                 <a:cs typeface="Times New Roman" panose="02020603050405020304" pitchFamily="18" charset="0"/>
               </a:rPr>
-              <a:t xml:space="preserve">　资格是底线，专业能力和责任心才决定董秘的价值。</a:t>
+              <a:t xml:space="preserve">　资格是准入底线，专业能力与责任意识决定履职质量。</a:t>
             </a:r>
           </a:p>
         </p:txBody>
@@ -8652,20 +8652,117 @@
                 <a:ea typeface="华文楷体" panose="02010600040101010101" pitchFamily="2" charset="-122"/>
                 <a:cs typeface="Times New Roman" panose="02020603050405020304" pitchFamily="18" charset="0"/>
               </a:rPr>
-              <a:t>一、新规概览：董秘是“高管”，不是“办公室主任”</a:t>
-            </a:r>
-          </a:p>
-        </p:txBody>
-      </p:sp>
-      <p:sp>
-        <p:nvSpPr>
-          <p:cNvPr id="102" name="SectionBar"/>
+              <a:t>一、法律地位与职责边界</a:t>
+            </a:r>
+          </a:p>
+        </p:txBody>
+      </p:sp>
+      <p:sp>
+        <p:nvSpPr>
+          <p:cNvPr id="102" name="Context"/>
           <p:cNvSpPr/>
           <p:nvPr/>
         </p:nvSpPr>
         <p:spPr>
           <a:xfrm>
             <a:off x="773430" y="1010000"/>
+            <a:ext cx="10645140" cy="460000"/>
+          </a:xfrm>
+          <a:prstGeom prst="rect">
+            <a:avLst/>
+          </a:prstGeom>
+          <a:solidFill>
+            <a:srgbClr val="E8F1FA"/>
+          </a:solidFill>
+          <a:ln w="12700">
+            <a:solidFill>
+              <a:srgbClr val="C8D9EA"/>
+            </a:solidFill>
+          </a:ln>
+        </p:spPr>
+        <p:txBody>
+          <a:bodyPr wrap="square" lIns="182880" tIns="68580" rIns="137160" bIns="68580" rtlCol="0" anchor="ctr"/>
+          <a:lstStyle/>
+          <a:p>
+            <a:pPr marL="0" indent="0" algn="l">
+              <a:lnSpc>
+                <a:spcPct val="125000"/>
+              </a:lnSpc>
+              <a:spcBef>
+                <a:spcPts val="0"/>
+              </a:spcBef>
+              <a:spcAft>
+                <a:spcPts val="0"/>
+              </a:spcAft>
+              <a:buNone/>
+            </a:pPr>
+            <a:r>
+              <a:rPr lang="zh-CN" altLang="en-US" sz="1250" b="0" kern="1200" dirty="0">
+                <a:solidFill>
+                  <a:srgbClr val="262626"/>
+                </a:solidFill>
+                <a:latin typeface="Times New Roman" panose="02020603050405020304" pitchFamily="18" charset="0"/>
+                <a:ea typeface="华文楷体" panose="02010600040101010101" pitchFamily="2" charset="-122"/>
+                <a:cs typeface="Times New Roman" panose="02020603050405020304" pitchFamily="18" charset="0"/>
+              </a:rPr>
+              <a:t>《上市公司董事会秘书监管规则》（证监会公告〔2026〕8号）自</a:t>
+            </a:r>
+            <a:r>
+              <a:rPr lang="zh-CN" altLang="en-US" sz="1250" b="1" kern="1200" dirty="0">
+                <a:solidFill>
+                  <a:srgbClr val="004E98"/>
+                </a:solidFill>
+                <a:latin typeface="Times New Roman" panose="02020603050405020304" pitchFamily="18" charset="0"/>
+                <a:ea typeface="华文楷体" panose="02010600040101010101" pitchFamily="2" charset="-122"/>
+                <a:cs typeface="Times New Roman" panose="02020603050405020304" pitchFamily="18" charset="0"/>
+              </a:rPr>
+              <a:t>2026年5月24日</a:t>
+            </a:r>
+            <a:r>
+              <a:rPr lang="zh-CN" altLang="en-US" sz="1250" b="0" kern="1200" dirty="0">
+                <a:solidFill>
+                  <a:srgbClr val="262626"/>
+                </a:solidFill>
+                <a:latin typeface="Times New Roman" panose="02020603050405020304" pitchFamily="18" charset="0"/>
+                <a:ea typeface="华文楷体" panose="02010600040101010101" pitchFamily="2" charset="-122"/>
+                <a:cs typeface="Times New Roman" panose="02020603050405020304" pitchFamily="18" charset="0"/>
+              </a:rPr>
+              <a:t>起施行，共38条；现有任职、兼职安排不符合规定的，应在</a:t>
+            </a:r>
+            <a:r>
+              <a:rPr lang="zh-CN" altLang="en-US" sz="1250" b="1" kern="1200" dirty="0">
+                <a:solidFill>
+                  <a:srgbClr val="004E98"/>
+                </a:solidFill>
+                <a:latin typeface="Times New Roman" panose="02020603050405020304" pitchFamily="18" charset="0"/>
+                <a:ea typeface="华文楷体" panose="02010600040101010101" pitchFamily="2" charset="-122"/>
+                <a:cs typeface="Times New Roman" panose="02020603050405020304" pitchFamily="18" charset="0"/>
+              </a:rPr>
+              <a:t>2027年12月31日</a:t>
+            </a:r>
+            <a:r>
+              <a:rPr lang="zh-CN" altLang="en-US" sz="1250" b="0" kern="1200" dirty="0">
+                <a:solidFill>
+                  <a:srgbClr val="262626"/>
+                </a:solidFill>
+                <a:latin typeface="Times New Roman" panose="02020603050405020304" pitchFamily="18" charset="0"/>
+                <a:ea typeface="华文楷体" panose="02010600040101010101" pitchFamily="2" charset="-122"/>
+                <a:cs typeface="Times New Roman" panose="02020603050405020304" pitchFamily="18" charset="0"/>
+              </a:rPr>
+              <a:t>前调整到位。</a:t>
+            </a:r>
+          </a:p>
+        </p:txBody>
+      </p:sp>
+      <p:sp>
+        <p:nvSpPr>
+          <p:cNvPr id="103" name="SectionBar"/>
+          <p:cNvSpPr/>
+          <p:nvPr/>
+        </p:nvSpPr>
+        <p:spPr>
+          <a:xfrm>
+            <a:off x="773430" y="1550000"/>
             <a:ext cx="10645140" cy="337185"/>
           </a:xfrm>
           <a:prstGeom prst="rect">
@@ -8710,21 +8807,21 @@
                 <a:ea typeface="华文楷体" panose="02010600040101010101" pitchFamily="2" charset="-122"/>
                 <a:cs typeface="Times New Roman" panose="02020603050405020304" pitchFamily="18" charset="0"/>
               </a:rPr>
-              <a:t>新规基本情况</a:t>
-            </a:r>
-          </a:p>
-        </p:txBody>
-      </p:sp>
-      <p:sp>
-        <p:nvSpPr>
-          <p:cNvPr id="103" name="Fact"/>
+              <a:t>法律地位：董事会秘书是法定高级管理人员</a:t>
+            </a:r>
+          </a:p>
+        </p:txBody>
+      </p:sp>
+      <p:sp>
+        <p:nvSpPr>
+          <p:cNvPr id="104" name="Fact"/>
           <p:cNvSpPr/>
           <p:nvPr/>
         </p:nvSpPr>
         <p:spPr>
           <a:xfrm>
-            <a:off x="773430" y="1470000"/>
-            <a:ext cx="3415046" cy="1400000"/>
+            <a:off x="773430" y="1970000"/>
+            <a:ext cx="2541285" cy="1130000"/>
           </a:xfrm>
           <a:prstGeom prst="rect">
             <a:avLst/>
@@ -8739,12 +8836,12 @@
           </a:ln>
         </p:spPr>
         <p:txBody>
-          <a:bodyPr wrap="square" lIns="137160" tIns="137160" rIns="137160" bIns="91440" rtlCol="0" anchor="ctr"/>
+          <a:bodyPr wrap="square" lIns="160020" tIns="137160" rIns="137160" bIns="91440" rtlCol="0" anchor="t"/>
           <a:lstStyle/>
           <a:p>
-            <a:pPr marL="0" indent="0" algn="ctr">
-              <a:lnSpc>
-                <a:spcPct val="100000"/>
+            <a:pPr marL="0" indent="0" algn="l">
+              <a:lnSpc>
+                <a:spcPct val="105000"/>
               </a:lnSpc>
               <a:spcBef>
                 <a:spcPts val="0"/>
@@ -8755,7 +8852,7 @@
               <a:buNone/>
             </a:pPr>
             <a:r>
-              <a:rPr lang="zh-CN" altLang="en-US" sz="2600" b="1" kern="1200" dirty="0">
+              <a:rPr lang="zh-CN" altLang="en-US" sz="1250" b="1" kern="1200" dirty="0">
                 <a:solidFill>
                   <a:srgbClr val="004E98"/>
                 </a:solidFill>
@@ -8763,16 +8860,16 @@
                 <a:ea typeface="华文楷体" panose="02010600040101010101" pitchFamily="2" charset="-122"/>
                 <a:cs typeface="Times New Roman" panose="02020603050405020304" pitchFamily="18" charset="0"/>
               </a:rPr>
-              <a:t>2026.5.24</a:t>
-            </a:r>
-          </a:p>
-          <a:p>
-            <a:pPr marL="0" indent="0" algn="ctr">
-              <a:lnSpc>
-                <a:spcPct val="100000"/>
-              </a:lnSpc>
-              <a:spcBef>
-                <a:spcPts val="250"/>
+              <a:t>法定高管身份</a:t>
+            </a:r>
+          </a:p>
+          <a:p>
+            <a:pPr marL="0" indent="0" algn="l">
+              <a:lnSpc>
+                <a:spcPct val="140000"/>
+              </a:lnSpc>
+              <a:spcBef>
+                <a:spcPts val="400"/>
               </a:spcBef>
               <a:spcAft>
                 <a:spcPts val="0"/>
@@ -8780,32 +8877,7 @@
               <a:buNone/>
             </a:pPr>
             <a:r>
-              <a:rPr lang="zh-CN" altLang="en-US" sz="1300" b="1" kern="1200" dirty="0">
-                <a:solidFill>
-                  <a:srgbClr val="00335F"/>
-                </a:solidFill>
-                <a:latin typeface="Times New Roman" panose="02020603050405020304" pitchFamily="18" charset="0"/>
-                <a:ea typeface="华文楷体" panose="02010600040101010101" pitchFamily="2" charset="-122"/>
-                <a:cs typeface="Times New Roman" panose="02020603050405020304" pitchFamily="18" charset="0"/>
-              </a:rPr>
-              <a:t>正式施行</a:t>
-            </a:r>
-          </a:p>
-          <a:p>
-            <a:pPr marL="0" indent="0" algn="ctr">
-              <a:lnSpc>
-                <a:spcPct val="130000"/>
-              </a:lnSpc>
-              <a:spcBef>
-                <a:spcPts val="450"/>
-              </a:spcBef>
-              <a:spcAft>
-                <a:spcPts val="0"/>
-              </a:spcAft>
-              <a:buNone/>
-            </a:pPr>
-            <a:r>
-              <a:rPr lang="zh-CN" altLang="en-US" sz="1100" b="0" kern="1200" dirty="0">
+              <a:rPr lang="zh-CN" altLang="en-US" sz="1050" b="0" kern="1200" dirty="0">
                 <a:solidFill>
                   <a:srgbClr val="262626"/>
                 </a:solidFill>
@@ -8813,21 +8885,21 @@
                 <a:ea typeface="华文楷体" panose="02010600040101010101" pitchFamily="2" charset="-122"/>
                 <a:cs typeface="Times New Roman" panose="02020603050405020304" pitchFamily="18" charset="0"/>
               </a:rPr>
-              <a:t>证监会公告〔2026〕8号，全文38条</a:t>
-            </a:r>
-          </a:p>
-        </p:txBody>
-      </p:sp>
-      <p:sp>
-        <p:nvSpPr>
-          <p:cNvPr id="104" name="Fact"/>
+              <a:t>《公司法》项下的高级管理人员，与经理、财务负责人同属高管序列</a:t>
+            </a:r>
+          </a:p>
+        </p:txBody>
+      </p:sp>
+      <p:sp>
+        <p:nvSpPr>
+          <p:cNvPr id="105" name="Fact"/>
           <p:cNvSpPr/>
           <p:nvPr/>
         </p:nvSpPr>
         <p:spPr>
           <a:xfrm>
-            <a:off x="4388476" y="1470000"/>
-            <a:ext cx="3415046" cy="1400000"/>
+            <a:off x="3474715" y="1970000"/>
+            <a:ext cx="2541285" cy="1130000"/>
           </a:xfrm>
           <a:prstGeom prst="rect">
             <a:avLst/>
@@ -8842,12 +8914,12 @@
           </a:ln>
         </p:spPr>
         <p:txBody>
-          <a:bodyPr wrap="square" lIns="137160" tIns="137160" rIns="137160" bIns="91440" rtlCol="0" anchor="ctr"/>
+          <a:bodyPr wrap="square" lIns="160020" tIns="137160" rIns="137160" bIns="91440" rtlCol="0" anchor="t"/>
           <a:lstStyle/>
           <a:p>
-            <a:pPr marL="0" indent="0" algn="ctr">
-              <a:lnSpc>
-                <a:spcPct val="100000"/>
+            <a:pPr marL="0" indent="0" algn="l">
+              <a:lnSpc>
+                <a:spcPct val="105000"/>
               </a:lnSpc>
               <a:spcBef>
                 <a:spcPts val="0"/>
@@ -8858,7 +8930,7 @@
               <a:buNone/>
             </a:pPr>
             <a:r>
-              <a:rPr lang="zh-CN" altLang="en-US" sz="2600" b="1" kern="1200" dirty="0">
+              <a:rPr lang="zh-CN" altLang="en-US" sz="1250" b="1" kern="1200" dirty="0">
                 <a:solidFill>
                   <a:srgbClr val="004E98"/>
                 </a:solidFill>
@@ -8866,16 +8938,16 @@
                 <a:ea typeface="华文楷体" panose="02010600040101010101" pitchFamily="2" charset="-122"/>
                 <a:cs typeface="Times New Roman" panose="02020603050405020304" pitchFamily="18" charset="0"/>
               </a:rPr>
-              <a:t>首部</a:t>
-            </a:r>
-          </a:p>
-          <a:p>
-            <a:pPr marL="0" indent="0" algn="ctr">
-              <a:lnSpc>
-                <a:spcPct val="100000"/>
-              </a:lnSpc>
-              <a:spcBef>
-                <a:spcPts val="250"/>
+              <a:t>由董事会聘任</a:t>
+            </a:r>
+          </a:p>
+          <a:p>
+            <a:pPr marL="0" indent="0" algn="l">
+              <a:lnSpc>
+                <a:spcPct val="140000"/>
+              </a:lnSpc>
+              <a:spcBef>
+                <a:spcPts val="400"/>
               </a:spcBef>
               <a:spcAft>
                 <a:spcPts val="0"/>
@@ -8883,32 +8955,7 @@
               <a:buNone/>
             </a:pPr>
             <a:r>
-              <a:rPr lang="zh-CN" altLang="en-US" sz="1300" b="1" kern="1200" dirty="0">
-                <a:solidFill>
-                  <a:srgbClr val="00335F"/>
-                </a:solidFill>
-                <a:latin typeface="Times New Roman" panose="02020603050405020304" pitchFamily="18" charset="0"/>
-                <a:ea typeface="华文楷体" panose="02010600040101010101" pitchFamily="2" charset="-122"/>
-                <a:cs typeface="Times New Roman" panose="02020603050405020304" pitchFamily="18" charset="0"/>
-              </a:rPr>
-              <a:t>董秘专门监管规则</a:t>
-            </a:r>
-          </a:p>
-          <a:p>
-            <a:pPr marL="0" indent="0" algn="ctr">
-              <a:lnSpc>
-                <a:spcPct val="130000"/>
-              </a:lnSpc>
-              <a:spcBef>
-                <a:spcPts val="450"/>
-              </a:spcBef>
-              <a:spcAft>
-                <a:spcPts val="0"/>
-              </a:spcAft>
-              <a:buNone/>
-            </a:pPr>
-            <a:r>
-              <a:rPr lang="zh-CN" altLang="en-US" sz="1100" b="0" kern="1200" dirty="0">
+              <a:rPr lang="zh-CN" altLang="en-US" sz="1050" b="0" kern="1200" dirty="0">
                 <a:solidFill>
                   <a:srgbClr val="262626"/>
                 </a:solidFill>
@@ -8916,21 +8963,21 @@
                 <a:ea typeface="华文楷体" panose="02010600040101010101" pitchFamily="2" charset="-122"/>
                 <a:cs typeface="Times New Roman" panose="02020603050405020304" pitchFamily="18" charset="0"/>
               </a:rPr>
-              <a:t>把职责、任职资格、履职保障、责任追究写清楚</a:t>
-            </a:r>
-          </a:p>
-        </p:txBody>
-      </p:sp>
-      <p:sp>
-        <p:nvSpPr>
-          <p:cNvPr id="105" name="Fact"/>
+              <a:t>董事会聘任与解聘，向董事会报告工作</a:t>
+            </a:r>
+          </a:p>
+        </p:txBody>
+      </p:sp>
+      <p:sp>
+        <p:nvSpPr>
+          <p:cNvPr id="106" name="Fact"/>
           <p:cNvSpPr/>
           <p:nvPr/>
         </p:nvSpPr>
         <p:spPr>
           <a:xfrm>
-            <a:off x="8003522" y="1470000"/>
-            <a:ext cx="3415046" cy="1400000"/>
+            <a:off x="6176000" y="1970000"/>
+            <a:ext cx="2541285" cy="1130000"/>
           </a:xfrm>
           <a:prstGeom prst="rect">
             <a:avLst/>
@@ -8945,12 +8992,12 @@
           </a:ln>
         </p:spPr>
         <p:txBody>
-          <a:bodyPr wrap="square" lIns="137160" tIns="137160" rIns="137160" bIns="91440" rtlCol="0" anchor="ctr"/>
+          <a:bodyPr wrap="square" lIns="160020" tIns="137160" rIns="137160" bIns="91440" rtlCol="0" anchor="t"/>
           <a:lstStyle/>
           <a:p>
-            <a:pPr marL="0" indent="0" algn="ctr">
-              <a:lnSpc>
-                <a:spcPct val="100000"/>
+            <a:pPr marL="0" indent="0" algn="l">
+              <a:lnSpc>
+                <a:spcPct val="105000"/>
               </a:lnSpc>
               <a:spcBef>
                 <a:spcPts val="0"/>
@@ -8961,7 +9008,7 @@
               <a:buNone/>
             </a:pPr>
             <a:r>
-              <a:rPr lang="zh-CN" altLang="en-US" sz="2600" b="1" kern="1200" dirty="0">
+              <a:rPr lang="zh-CN" altLang="en-US" sz="1250" b="1" kern="1200" dirty="0">
                 <a:solidFill>
                   <a:srgbClr val="004E98"/>
                 </a:solidFill>
@@ -8969,16 +9016,16 @@
                 <a:ea typeface="华文楷体" panose="02010600040101010101" pitchFamily="2" charset="-122"/>
                 <a:cs typeface="Times New Roman" panose="02020603050405020304" pitchFamily="18" charset="0"/>
               </a:rPr>
-              <a:t>2027.12.31</a:t>
-            </a:r>
-          </a:p>
-          <a:p>
-            <a:pPr marL="0" indent="0" algn="ctr">
-              <a:lnSpc>
-                <a:spcPct val="100000"/>
-              </a:lnSpc>
-              <a:spcBef>
-                <a:spcPts val="250"/>
+              <a:t>必须设置，不得长期空缺</a:t>
+            </a:r>
+          </a:p>
+          <a:p>
+            <a:pPr marL="0" indent="0" algn="l">
+              <a:lnSpc>
+                <a:spcPct val="140000"/>
+              </a:lnSpc>
+              <a:spcBef>
+                <a:spcPts val="400"/>
               </a:spcBef>
               <a:spcAft>
                 <a:spcPts val="0"/>
@@ -8986,32 +9033,7 @@
               <a:buNone/>
             </a:pPr>
             <a:r>
-              <a:rPr lang="zh-CN" altLang="en-US" sz="1300" b="1" kern="1200" dirty="0">
-                <a:solidFill>
-                  <a:srgbClr val="00335F"/>
-                </a:solidFill>
-                <a:latin typeface="Times New Roman" panose="02020603050405020304" pitchFamily="18" charset="0"/>
-                <a:ea typeface="华文楷体" panose="02010600040101010101" pitchFamily="2" charset="-122"/>
-                <a:cs typeface="Times New Roman" panose="02020603050405020304" pitchFamily="18" charset="0"/>
-              </a:rPr>
-              <a:t>过渡期截止</a:t>
-            </a:r>
-          </a:p>
-          <a:p>
-            <a:pPr marL="0" indent="0" algn="ctr">
-              <a:lnSpc>
-                <a:spcPct val="130000"/>
-              </a:lnSpc>
-              <a:spcBef>
-                <a:spcPts val="450"/>
-              </a:spcBef>
-              <a:spcAft>
-                <a:spcPts val="0"/>
-              </a:spcAft>
-              <a:buNone/>
-            </a:pPr>
-            <a:r>
-              <a:rPr lang="zh-CN" altLang="en-US" sz="1100" b="0" kern="1200" dirty="0">
+              <a:rPr lang="zh-CN" altLang="en-US" sz="1050" b="0" kern="1200" dirty="0">
                 <a:solidFill>
                   <a:srgbClr val="262626"/>
                 </a:solidFill>
@@ -9019,20 +9041,98 @@
                 <a:ea typeface="华文楷体" panose="02010600040101010101" pitchFamily="2" charset="-122"/>
                 <a:cs typeface="Times New Roman" panose="02020603050405020304" pitchFamily="18" charset="0"/>
               </a:rPr>
-              <a:t>现有人选与兼职安排不符合的，须在此前调整到位</a:t>
-            </a:r>
-          </a:p>
-        </p:txBody>
-      </p:sp>
-      <p:sp>
-        <p:nvSpPr>
-          <p:cNvPr id="106" name="SectionBar"/>
+              <a:t>空缺期间由董事长代行，并在六个月内完成补聘</a:t>
+            </a:r>
+          </a:p>
+        </p:txBody>
+      </p:sp>
+      <p:sp>
+        <p:nvSpPr>
+          <p:cNvPr id="107" name="Fact"/>
           <p:cNvSpPr/>
           <p:nvPr/>
         </p:nvSpPr>
         <p:spPr>
           <a:xfrm>
-            <a:off x="773430" y="3170000"/>
+            <a:off x="8877285" y="1970000"/>
+            <a:ext cx="2541285" cy="1130000"/>
+          </a:xfrm>
+          <a:prstGeom prst="rect">
+            <a:avLst/>
+          </a:prstGeom>
+          <a:solidFill>
+            <a:srgbClr val="F2F6FB"/>
+          </a:solidFill>
+          <a:ln w="12700">
+            <a:solidFill>
+              <a:srgbClr val="C8D9EA"/>
+            </a:solidFill>
+          </a:ln>
+        </p:spPr>
+        <p:txBody>
+          <a:bodyPr wrap="square" lIns="160020" tIns="137160" rIns="137160" bIns="91440" rtlCol="0" anchor="t"/>
+          <a:lstStyle/>
+          <a:p>
+            <a:pPr marL="0" indent="0" algn="l">
+              <a:lnSpc>
+                <a:spcPct val="105000"/>
+              </a:lnSpc>
+              <a:spcBef>
+                <a:spcPts val="0"/>
+              </a:spcBef>
+              <a:spcAft>
+                <a:spcPts val="0"/>
+              </a:spcAft>
+              <a:buNone/>
+            </a:pPr>
+            <a:r>
+              <a:rPr lang="zh-CN" altLang="en-US" sz="1250" b="1" kern="1200" dirty="0">
+                <a:solidFill>
+                  <a:srgbClr val="004E98"/>
+                </a:solidFill>
+                <a:latin typeface="Times New Roman" panose="02020603050405020304" pitchFamily="18" charset="0"/>
+                <a:ea typeface="华文楷体" panose="02010600040101010101" pitchFamily="2" charset="-122"/>
+                <a:cs typeface="Times New Roman" panose="02020603050405020304" pitchFamily="18" charset="0"/>
+              </a:rPr>
+              <a:t>依法独立履职受保障</a:t>
+            </a:r>
+          </a:p>
+          <a:p>
+            <a:pPr marL="0" indent="0" algn="l">
+              <a:lnSpc>
+                <a:spcPct val="140000"/>
+              </a:lnSpc>
+              <a:spcBef>
+                <a:spcPts val="400"/>
+              </a:spcBef>
+              <a:spcAft>
+                <a:spcPts val="0"/>
+              </a:spcAft>
+              <a:buNone/>
+            </a:pPr>
+            <a:r>
+              <a:rPr lang="zh-CN" altLang="en-US" sz="1050" b="0" kern="1200" dirty="0">
+                <a:solidFill>
+                  <a:srgbClr val="262626"/>
+                </a:solidFill>
+                <a:latin typeface="Times New Roman" panose="02020603050405020304" pitchFamily="18" charset="0"/>
+                <a:ea typeface="华文楷体" panose="02010600040101010101" pitchFamily="2" charset="-122"/>
+                <a:cs typeface="Times New Roman" panose="02020603050405020304" pitchFamily="18" charset="0"/>
+              </a:rPr>
+              <a:t>有权列席会议、查阅资料、要求相关部门说明，任何人不得阻碍</a:t>
+            </a:r>
+          </a:p>
+        </p:txBody>
+      </p:sp>
+      <p:sp>
+        <p:nvSpPr>
+          <p:cNvPr id="108" name="SectionBar"/>
+          <p:cNvSpPr/>
+          <p:nvPr/>
+        </p:nvSpPr>
+        <p:spPr>
+          <a:xfrm>
+            <a:off x="773430" y="3190000"/>
             <a:ext cx="10645140" cy="337185"/>
           </a:xfrm>
           <a:prstGeom prst="rect">
@@ -9077,373 +9177,417 @@
                 <a:ea typeface="华文楷体" panose="02010600040101010101" pitchFamily="2" charset="-122"/>
                 <a:cs typeface="Times New Roman" panose="02020603050405020304" pitchFamily="18" charset="0"/>
               </a:rPr>
-              <a:t>董秘的角色定位</a:t>
-            </a:r>
-          </a:p>
-        </p:txBody>
-      </p:sp>
-      <p:sp>
-        <p:nvSpPr>
-          <p:cNvPr id="107" name="Bullets"/>
-          <p:cNvSpPr txBox="1"/>
+              <a:t>职责边界：董事会秘书负责的事项与应当区分的事项</a:t>
+            </a:r>
+          </a:p>
+        </p:txBody>
+      </p:sp>
+      <p:sp>
+        <p:nvSpPr>
+          <p:cNvPr id="109" name="Card"/>
+          <p:cNvSpPr/>
           <p:nvPr/>
         </p:nvSpPr>
         <p:spPr>
           <a:xfrm>
-            <a:off x="773430" y="3700000"/>
-            <a:ext cx="10645140" cy="1600000"/>
-          </a:xfrm>
-          <a:prstGeom prst="rect">
-            <a:avLst/>
-          </a:prstGeom>
-          <a:noFill/>
-          <a:ln>
-            <a:noFill/>
-          </a:ln>
-        </p:spPr>
-        <p:txBody>
-          <a:bodyPr wrap="square" lIns="0" tIns="0" rIns="0" bIns="0" rtlCol="0" anchor="t"/>
-          <a:lstStyle/>
-          <a:p>
-            <a:pPr marL="190500" indent="-176530" algn="l">
-              <a:lnSpc>
-                <a:spcPct val="165000"/>
-              </a:lnSpc>
-              <a:spcBef>
-                <a:spcPts val="0"/>
-              </a:spcBef>
-              <a:spcAft>
-                <a:spcPts val="0"/>
-              </a:spcAft>
-              <a:buClr>
-                <a:srgbClr val="004E98"/>
-              </a:buClr>
-              <a:buFont typeface="Wingdings" panose="05000000000000000000" pitchFamily="2" charset="2"/>
-              <a:buChar char="n"/>
-            </a:pPr>
-            <a:r>
-              <a:rPr lang="zh-CN" altLang="en-US" sz="1450" b="0" kern="1200" dirty="0">
-                <a:solidFill>
-                  <a:srgbClr val="262626"/>
-                </a:solidFill>
-                <a:latin typeface="Times New Roman" panose="02020603050405020304" pitchFamily="18" charset="0"/>
-                <a:ea typeface="华文楷体" panose="02010600040101010101" pitchFamily="2" charset="-122"/>
-                <a:cs typeface="Times New Roman" panose="02020603050405020304" pitchFamily="18" charset="0"/>
-              </a:rPr>
-              <a:t>董秘是《公司法》规定的</a:t>
-            </a:r>
-            <a:r>
-              <a:rPr lang="zh-CN" altLang="en-US" sz="1450" b="1" kern="1200" dirty="0">
-                <a:solidFill>
-                  <a:srgbClr val="004E98"/>
-                </a:solidFill>
-                <a:highlight>
-                  <a:srgbClr val="FFFF00"/>
-                </a:highlight>
-                <a:latin typeface="Times New Roman" panose="02020603050405020304" pitchFamily="18" charset="0"/>
-                <a:ea typeface="华文楷体" panose="02010600040101010101" pitchFamily="2" charset="-122"/>
-                <a:cs typeface="Times New Roman" panose="02020603050405020304" pitchFamily="18" charset="0"/>
-              </a:rPr>
-              <a:t>高级管理人员</a:t>
-            </a:r>
-            <a:r>
-              <a:rPr lang="zh-CN" altLang="en-US" sz="1450" b="0" kern="1200" dirty="0">
-                <a:solidFill>
-                  <a:srgbClr val="262626"/>
-                </a:solidFill>
-                <a:latin typeface="Times New Roman" panose="02020603050405020304" pitchFamily="18" charset="0"/>
-                <a:ea typeface="华文楷体" panose="02010600040101010101" pitchFamily="2" charset="-122"/>
-                <a:cs typeface="Times New Roman" panose="02020603050405020304" pitchFamily="18" charset="0"/>
-              </a:rPr>
-              <a:t>，由</a:t>
-            </a:r>
-            <a:r>
-              <a:rPr lang="zh-CN" altLang="en-US" sz="1450" b="1" kern="1200" dirty="0">
-                <a:solidFill>
-                  <a:srgbClr val="004E98"/>
-                </a:solidFill>
-                <a:latin typeface="Times New Roman" panose="02020603050405020304" pitchFamily="18" charset="0"/>
-                <a:ea typeface="华文楷体" panose="02010600040101010101" pitchFamily="2" charset="-122"/>
-                <a:cs typeface="Times New Roman" panose="02020603050405020304" pitchFamily="18" charset="0"/>
-              </a:rPr>
-              <a:t>董事会聘任</a:t>
-            </a:r>
-            <a:r>
-              <a:rPr lang="zh-CN" altLang="en-US" sz="1450" b="0" kern="1200" dirty="0">
-                <a:solidFill>
-                  <a:srgbClr val="262626"/>
-                </a:solidFill>
-                <a:latin typeface="Times New Roman" panose="02020603050405020304" pitchFamily="18" charset="0"/>
-                <a:ea typeface="华文楷体" panose="02010600040101010101" pitchFamily="2" charset="-122"/>
-                <a:cs typeface="Times New Roman" panose="02020603050405020304" pitchFamily="18" charset="0"/>
-              </a:rPr>
-              <a:t>，向董事会报告工作。</a:t>
-            </a:r>
-          </a:p>
-          <a:p>
-            <a:pPr marL="190500" indent="-176530" algn="l">
-              <a:lnSpc>
-                <a:spcPct val="165000"/>
-              </a:lnSpc>
-              <a:spcBef>
-                <a:spcPts val="0"/>
-              </a:spcBef>
-              <a:spcAft>
-                <a:spcPts val="0"/>
-              </a:spcAft>
-              <a:buClr>
-                <a:srgbClr val="004E98"/>
-              </a:buClr>
-              <a:buFont typeface="Wingdings" panose="05000000000000000000" pitchFamily="2" charset="2"/>
-              <a:buChar char="n"/>
-            </a:pPr>
-            <a:r>
-              <a:rPr lang="zh-CN" altLang="en-US" sz="1450" b="0" kern="1200" dirty="0">
-                <a:solidFill>
-                  <a:srgbClr val="262626"/>
-                </a:solidFill>
-                <a:latin typeface="Times New Roman" panose="02020603050405020304" pitchFamily="18" charset="0"/>
-                <a:ea typeface="华文楷体" panose="02010600040101010101" pitchFamily="2" charset="-122"/>
-                <a:cs typeface="Times New Roman" panose="02020603050405020304" pitchFamily="18" charset="0"/>
-              </a:rPr>
-              <a:t>上市公司</a:t>
-            </a:r>
-            <a:r>
-              <a:rPr lang="zh-CN" altLang="en-US" sz="1450" b="1" kern="1200" dirty="0">
-                <a:solidFill>
-                  <a:srgbClr val="004E98"/>
-                </a:solidFill>
-                <a:latin typeface="Times New Roman" panose="02020603050405020304" pitchFamily="18" charset="0"/>
-                <a:ea typeface="华文楷体" panose="02010600040101010101" pitchFamily="2" charset="-122"/>
-                <a:cs typeface="Times New Roman" panose="02020603050405020304" pitchFamily="18" charset="0"/>
-              </a:rPr>
-              <a:t>必须设董秘</a:t>
-            </a:r>
-            <a:r>
-              <a:rPr lang="zh-CN" altLang="en-US" sz="1450" b="0" kern="1200" dirty="0">
-                <a:solidFill>
-                  <a:srgbClr val="262626"/>
-                </a:solidFill>
-                <a:latin typeface="Times New Roman" panose="02020603050405020304" pitchFamily="18" charset="0"/>
-                <a:ea typeface="华文楷体" panose="02010600040101010101" pitchFamily="2" charset="-122"/>
-                <a:cs typeface="Times New Roman" panose="02020603050405020304" pitchFamily="18" charset="0"/>
-              </a:rPr>
-              <a:t>。董秘空缺期间由</a:t>
-            </a:r>
-            <a:r>
-              <a:rPr lang="zh-CN" altLang="en-US" sz="1450" b="1" kern="1200" dirty="0">
-                <a:solidFill>
-                  <a:srgbClr val="004E98"/>
-                </a:solidFill>
-                <a:latin typeface="Times New Roman" panose="02020603050405020304" pitchFamily="18" charset="0"/>
-                <a:ea typeface="华文楷体" panose="02010600040101010101" pitchFamily="2" charset="-122"/>
-                <a:cs typeface="Times New Roman" panose="02020603050405020304" pitchFamily="18" charset="0"/>
-              </a:rPr>
-              <a:t>董事长代行</a:t>
-            </a:r>
-            <a:r>
-              <a:rPr lang="zh-CN" altLang="en-US" sz="1450" b="0" kern="1200" dirty="0">
-                <a:solidFill>
-                  <a:srgbClr val="262626"/>
-                </a:solidFill>
-                <a:latin typeface="Times New Roman" panose="02020603050405020304" pitchFamily="18" charset="0"/>
-                <a:ea typeface="华文楷体" panose="02010600040101010101" pitchFamily="2" charset="-122"/>
-                <a:cs typeface="Times New Roman" panose="02020603050405020304" pitchFamily="18" charset="0"/>
-              </a:rPr>
-              <a:t>职责，并在</a:t>
-            </a:r>
-            <a:r>
-              <a:rPr lang="zh-CN" altLang="en-US" sz="1450" b="1" kern="1200" dirty="0">
-                <a:solidFill>
-                  <a:srgbClr val="004E98"/>
-                </a:solidFill>
-                <a:latin typeface="Times New Roman" panose="02020603050405020304" pitchFamily="18" charset="0"/>
-                <a:ea typeface="华文楷体" panose="02010600040101010101" pitchFamily="2" charset="-122"/>
-                <a:cs typeface="Times New Roman" panose="02020603050405020304" pitchFamily="18" charset="0"/>
-              </a:rPr>
-              <a:t>六个月内</a:t>
-            </a:r>
-            <a:r>
-              <a:rPr lang="zh-CN" altLang="en-US" sz="1450" b="0" kern="1200" dirty="0">
-                <a:solidFill>
-                  <a:srgbClr val="262626"/>
-                </a:solidFill>
-                <a:latin typeface="Times New Roman" panose="02020603050405020304" pitchFamily="18" charset="0"/>
-                <a:ea typeface="华文楷体" panose="02010600040101010101" pitchFamily="2" charset="-122"/>
-                <a:cs typeface="Times New Roman" panose="02020603050405020304" pitchFamily="18" charset="0"/>
-              </a:rPr>
-              <a:t>完成新的聘任。</a:t>
-            </a:r>
-          </a:p>
-          <a:p>
-            <a:pPr marL="190500" indent="-176530" algn="l">
-              <a:lnSpc>
-                <a:spcPct val="165000"/>
-              </a:lnSpc>
-              <a:spcBef>
-                <a:spcPts val="0"/>
-              </a:spcBef>
-              <a:spcAft>
-                <a:spcPts val="0"/>
-              </a:spcAft>
-              <a:buClr>
-                <a:srgbClr val="004E98"/>
-              </a:buClr>
-              <a:buFont typeface="Wingdings" panose="05000000000000000000" pitchFamily="2" charset="2"/>
-              <a:buChar char="n"/>
-            </a:pPr>
-            <a:r>
-              <a:rPr lang="zh-CN" altLang="en-US" sz="1450" b="0" kern="1200" dirty="0">
-                <a:solidFill>
-                  <a:srgbClr val="262626"/>
-                </a:solidFill>
-                <a:latin typeface="Times New Roman" panose="02020603050405020304" pitchFamily="18" charset="0"/>
-                <a:ea typeface="华文楷体" panose="02010600040101010101" pitchFamily="2" charset="-122"/>
-                <a:cs typeface="Times New Roman" panose="02020603050405020304" pitchFamily="18" charset="0"/>
-              </a:rPr>
-              <a:t>董秘管两件大事：</a:t>
-            </a:r>
-            <a:r>
-              <a:rPr lang="zh-CN" altLang="en-US" sz="1450" b="1" kern="1200" dirty="0">
-                <a:solidFill>
-                  <a:srgbClr val="004E98"/>
-                </a:solidFill>
-                <a:latin typeface="Times New Roman" panose="02020603050405020304" pitchFamily="18" charset="0"/>
-                <a:ea typeface="华文楷体" panose="02010600040101010101" pitchFamily="2" charset="-122"/>
-                <a:cs typeface="Times New Roman" panose="02020603050405020304" pitchFamily="18" charset="0"/>
-              </a:rPr>
-              <a:t>信息披露</a:t>
-            </a:r>
-            <a:r>
-              <a:rPr lang="zh-CN" altLang="en-US" sz="1450" b="0" kern="1200" dirty="0">
-                <a:solidFill>
-                  <a:srgbClr val="262626"/>
-                </a:solidFill>
-                <a:latin typeface="Times New Roman" panose="02020603050405020304" pitchFamily="18" charset="0"/>
-                <a:ea typeface="华文楷体" panose="02010600040101010101" pitchFamily="2" charset="-122"/>
-                <a:cs typeface="Times New Roman" panose="02020603050405020304" pitchFamily="18" charset="0"/>
-              </a:rPr>
-              <a:t>和</a:t>
-            </a:r>
-            <a:r>
-              <a:rPr lang="zh-CN" altLang="en-US" sz="1450" b="1" kern="1200" dirty="0">
-                <a:solidFill>
-                  <a:srgbClr val="004E98"/>
-                </a:solidFill>
-                <a:latin typeface="Times New Roman" panose="02020603050405020304" pitchFamily="18" charset="0"/>
-                <a:ea typeface="华文楷体" panose="02010600040101010101" pitchFamily="2" charset="-122"/>
-                <a:cs typeface="Times New Roman" panose="02020603050405020304" pitchFamily="18" charset="0"/>
-              </a:rPr>
-              <a:t>公司治理合规</a:t>
-            </a:r>
-            <a:r>
-              <a:rPr lang="zh-CN" altLang="en-US" sz="1450" b="0" kern="1200" dirty="0">
-                <a:solidFill>
-                  <a:srgbClr val="262626"/>
-                </a:solidFill>
-                <a:latin typeface="Times New Roman" panose="02020603050405020304" pitchFamily="18" charset="0"/>
-                <a:ea typeface="华文楷体" panose="02010600040101010101" pitchFamily="2" charset="-122"/>
-                <a:cs typeface="Times New Roman" panose="02020603050405020304" pitchFamily="18" charset="0"/>
-              </a:rPr>
-              <a:t>。这两件事出问题，公司就会被监管问责。</a:t>
-            </a:r>
-          </a:p>
-          <a:p>
-            <a:pPr marL="190500" indent="-176530" algn="l">
-              <a:lnSpc>
-                <a:spcPct val="165000"/>
-              </a:lnSpc>
-              <a:spcBef>
-                <a:spcPts val="0"/>
-              </a:spcBef>
-              <a:spcAft>
-                <a:spcPts val="0"/>
-              </a:spcAft>
-              <a:buClr>
-                <a:srgbClr val="004E98"/>
-              </a:buClr>
-              <a:buFont typeface="Wingdings" panose="05000000000000000000" pitchFamily="2" charset="2"/>
-              <a:buChar char="n"/>
-            </a:pPr>
-            <a:r>
-              <a:rPr lang="zh-CN" altLang="en-US" sz="1450" b="0" kern="1200" dirty="0">
-                <a:solidFill>
-                  <a:srgbClr val="262626"/>
-                </a:solidFill>
-                <a:latin typeface="Times New Roman" panose="02020603050405020304" pitchFamily="18" charset="0"/>
-                <a:ea typeface="华文楷体" panose="02010600040101010101" pitchFamily="2" charset="-122"/>
-                <a:cs typeface="Times New Roman" panose="02020603050405020304" pitchFamily="18" charset="0"/>
-              </a:rPr>
-              <a:t>董秘未勤勉尽责的，证监会可以对其采取监管措施直至</a:t>
-            </a:r>
-            <a:r>
-              <a:rPr lang="zh-CN" altLang="en-US" sz="1450" b="1" kern="1200" dirty="0">
-                <a:solidFill>
-                  <a:srgbClr val="C00000"/>
-                </a:solidFill>
-                <a:latin typeface="Times New Roman" panose="02020603050405020304" pitchFamily="18" charset="0"/>
-                <a:ea typeface="华文楷体" panose="02010600040101010101" pitchFamily="2" charset="-122"/>
-                <a:cs typeface="Times New Roman" panose="02020603050405020304" pitchFamily="18" charset="0"/>
-              </a:rPr>
-              <a:t>行政处罚</a:t>
-            </a:r>
-            <a:r>
-              <a:rPr lang="zh-CN" altLang="en-US" sz="1450" b="0" kern="1200" dirty="0">
-                <a:solidFill>
-                  <a:srgbClr val="262626"/>
-                </a:solidFill>
-                <a:latin typeface="Times New Roman" panose="02020603050405020304" pitchFamily="18" charset="0"/>
-                <a:ea typeface="华文楷体" panose="02010600040101010101" pitchFamily="2" charset="-122"/>
-                <a:cs typeface="Times New Roman" panose="02020603050405020304" pitchFamily="18" charset="0"/>
-              </a:rPr>
-              <a:t>——</a:t>
-            </a:r>
-            <a:r>
-              <a:rPr lang="zh-CN" altLang="en-US" sz="1450" b="1" kern="1200" dirty="0">
-                <a:solidFill>
-                  <a:srgbClr val="C00000"/>
-                </a:solidFill>
-                <a:latin typeface="Times New Roman" panose="02020603050405020304" pitchFamily="18" charset="0"/>
-                <a:ea typeface="华文楷体" panose="02010600040101010101" pitchFamily="2" charset="-122"/>
-                <a:cs typeface="Times New Roman" panose="02020603050405020304" pitchFamily="18" charset="0"/>
-              </a:rPr>
-              <a:t>选错人，公司和个人都要担责。</a:t>
-            </a:r>
-          </a:p>
-        </p:txBody>
-      </p:sp>
-      <p:sp>
-        <p:nvSpPr>
-          <p:cNvPr id="108" name="Conclusion"/>
-          <p:cNvSpPr/>
-          <p:nvPr/>
-        </p:nvSpPr>
-        <p:spPr>
-          <a:xfrm>
-            <a:off x="773430" y="5400000"/>
-            <a:ext cx="10645140" cy="620000"/>
+            <a:off x="773430" y="3610000"/>
+            <a:ext cx="5172570" cy="1760000"/>
           </a:xfrm>
           <a:prstGeom prst="rect">
             <a:avLst/>
           </a:prstGeom>
           <a:solidFill>
-            <a:srgbClr val="004E98"/>
+            <a:srgbClr val="F2F6FB"/>
           </a:solidFill>
-          <a:ln>
-            <a:noFill/>
+          <a:ln w="12700">
+            <a:solidFill>
+              <a:srgbClr val="C8D9EA"/>
+            </a:solidFill>
           </a:ln>
-          <a:effectLst>
-            <a:outerShdw blurRad="50800" dist="38100" dir="2700000" algn="tl" rotWithShape="0">
-              <a:prstClr val="black">
-                <a:alpha val="40000"/>
-              </a:prstClr>
-            </a:outerShdw>
-          </a:effectLst>
         </p:spPr>
         <p:txBody>
-          <a:bodyPr wrap="square" lIns="182880" tIns="91440" rIns="182880" bIns="91440" rtlCol="0" anchor="ctr"/>
+          <a:bodyPr wrap="square" lIns="182880" tIns="137160" rIns="137160" bIns="91440" rtlCol="0" anchor="t"/>
           <a:lstStyle/>
           <a:p>
+            <a:pPr marL="0" indent="0" algn="l">
+              <a:lnSpc>
+                <a:spcPct val="100000"/>
+              </a:lnSpc>
+              <a:spcBef>
+                <a:spcPts val="0"/>
+              </a:spcBef>
+              <a:spcAft>
+                <a:spcPts val="0"/>
+              </a:spcAft>
+              <a:buNone/>
+            </a:pPr>
+            <a:r>
+              <a:rPr lang="zh-CN" altLang="en-US" sz="1400" b="1" kern="1200" dirty="0">
+                <a:solidFill>
+                  <a:srgbClr val="004E98"/>
+                </a:solidFill>
+                <a:latin typeface="Times New Roman" panose="02020603050405020304" pitchFamily="18" charset="0"/>
+                <a:ea typeface="华文楷体" panose="02010600040101010101" pitchFamily="2" charset="-122"/>
+                <a:cs typeface="Times New Roman" panose="02020603050405020304" pitchFamily="18" charset="0"/>
+              </a:rPr>
+              <a:t>董事会秘书负责的事项</a:t>
+            </a:r>
+          </a:p>
+          <a:p>
+            <a:pPr marL="171450" indent="-171450" algn="l">
+              <a:lnSpc>
+                <a:spcPct val="135000"/>
+              </a:lnSpc>
+              <a:spcBef>
+                <a:spcPts val="340"/>
+              </a:spcBef>
+              <a:spcAft>
+                <a:spcPts val="0"/>
+              </a:spcAft>
+              <a:buClr>
+                <a:srgbClr val="197BC0"/>
+              </a:buClr>
+              <a:buSzPct val="60"/>
+              <a:buFont typeface="Wingdings" panose="05000000000000000000" pitchFamily="2" charset="2"/>
+              <a:buChar char="n"/>
+            </a:pPr>
+            <a:r>
+              <a:rPr lang="zh-CN" altLang="en-US" sz="1150" b="0" kern="1200" dirty="0">
+                <a:solidFill>
+                  <a:srgbClr val="262626"/>
+                </a:solidFill>
+                <a:latin typeface="Times New Roman" panose="02020603050405020304" pitchFamily="18" charset="0"/>
+                <a:ea typeface="华文楷体" panose="02010600040101010101" pitchFamily="2" charset="-122"/>
+                <a:cs typeface="Times New Roman" panose="02020603050405020304" pitchFamily="18" charset="0"/>
+              </a:rPr>
+              <a:t>信息披露事务：</a:t>
+            </a:r>
+            <a:r>
+              <a:rPr lang="zh-CN" altLang="en-US" sz="1150" b="1" kern="1200" dirty="0">
+                <a:solidFill>
+                  <a:srgbClr val="004E98"/>
+                </a:solidFill>
+                <a:latin typeface="Times New Roman" panose="02020603050405020304" pitchFamily="18" charset="0"/>
+                <a:ea typeface="华文楷体" panose="02010600040101010101" pitchFamily="2" charset="-122"/>
+                <a:cs typeface="Times New Roman" panose="02020603050405020304" pitchFamily="18" charset="0"/>
+              </a:rPr>
+              <a:t>定期报告、临时报告</a:t>
+            </a:r>
+            <a:r>
+              <a:rPr lang="zh-CN" altLang="en-US" sz="1150" b="0" kern="1200" dirty="0">
+                <a:solidFill>
+                  <a:srgbClr val="262626"/>
+                </a:solidFill>
+                <a:latin typeface="Times New Roman" panose="02020603050405020304" pitchFamily="18" charset="0"/>
+                <a:ea typeface="华文楷体" panose="02010600040101010101" pitchFamily="2" charset="-122"/>
+                <a:cs typeface="Times New Roman" panose="02020603050405020304" pitchFamily="18" charset="0"/>
+              </a:rPr>
+              <a:t>的组织编制与披露</a:t>
+            </a:r>
+          </a:p>
+          <a:p>
+            <a:pPr marL="171450" indent="-171450" algn="l">
+              <a:lnSpc>
+                <a:spcPct val="135000"/>
+              </a:lnSpc>
+              <a:spcBef>
+                <a:spcPts val="250"/>
+              </a:spcBef>
+              <a:spcAft>
+                <a:spcPts val="0"/>
+              </a:spcAft>
+              <a:buClr>
+                <a:srgbClr val="197BC0"/>
+              </a:buClr>
+              <a:buSzPct val="60"/>
+              <a:buFont typeface="Wingdings" panose="05000000000000000000" pitchFamily="2" charset="2"/>
+              <a:buChar char="n"/>
+            </a:pPr>
+            <a:r>
+              <a:rPr lang="zh-CN" altLang="en-US" sz="1150" b="0" kern="1200" dirty="0">
+                <a:solidFill>
+                  <a:srgbClr val="262626"/>
+                </a:solidFill>
+                <a:latin typeface="Times New Roman" panose="02020603050405020304" pitchFamily="18" charset="0"/>
+                <a:ea typeface="华文楷体" panose="02010600040101010101" pitchFamily="2" charset="-122"/>
+                <a:cs typeface="Times New Roman" panose="02020603050405020304" pitchFamily="18" charset="0"/>
+              </a:rPr>
+              <a:t>会议与治理：股东会、董事会的召集、召开与会议记录</a:t>
+            </a:r>
+          </a:p>
+          <a:p>
+            <a:pPr marL="171450" indent="-171450" algn="l">
+              <a:lnSpc>
+                <a:spcPct val="135000"/>
+              </a:lnSpc>
+              <a:spcBef>
+                <a:spcPts val="250"/>
+              </a:spcBef>
+              <a:spcAft>
+                <a:spcPts val="0"/>
+              </a:spcAft>
+              <a:buClr>
+                <a:srgbClr val="197BC0"/>
+              </a:buClr>
+              <a:buSzPct val="60"/>
+              <a:buFont typeface="Wingdings" panose="05000000000000000000" pitchFamily="2" charset="2"/>
+              <a:buChar char="n"/>
+            </a:pPr>
+            <a:r>
+              <a:rPr lang="zh-CN" altLang="en-US" sz="1150" b="0" kern="1200" dirty="0">
+                <a:solidFill>
+                  <a:srgbClr val="262626"/>
+                </a:solidFill>
+                <a:latin typeface="Times New Roman" panose="02020603050405020304" pitchFamily="18" charset="0"/>
+                <a:ea typeface="华文楷体" panose="02010600040101010101" pitchFamily="2" charset="-122"/>
+                <a:cs typeface="Times New Roman" panose="02020603050405020304" pitchFamily="18" charset="0"/>
+              </a:rPr>
+              <a:t>内外沟通：股东、投资者、董事与</a:t>
+            </a:r>
+            <a:r>
+              <a:rPr lang="zh-CN" altLang="en-US" sz="1150" b="1" kern="1200" dirty="0">
+                <a:solidFill>
+                  <a:srgbClr val="004E98"/>
+                </a:solidFill>
+                <a:latin typeface="Times New Roman" panose="02020603050405020304" pitchFamily="18" charset="0"/>
+                <a:ea typeface="华文楷体" panose="02010600040101010101" pitchFamily="2" charset="-122"/>
+                <a:cs typeface="Times New Roman" panose="02020603050405020304" pitchFamily="18" charset="0"/>
+              </a:rPr>
+              <a:t>证监会、证券交易所</a:t>
+            </a:r>
+          </a:p>
+          <a:p>
+            <a:pPr marL="171450" indent="-171450" algn="l">
+              <a:lnSpc>
+                <a:spcPct val="135000"/>
+              </a:lnSpc>
+              <a:spcBef>
+                <a:spcPts val="250"/>
+              </a:spcBef>
+              <a:spcAft>
+                <a:spcPts val="0"/>
+              </a:spcAft>
+              <a:buClr>
+                <a:srgbClr val="197BC0"/>
+              </a:buClr>
+              <a:buSzPct val="60"/>
+              <a:buFont typeface="Wingdings" panose="05000000000000000000" pitchFamily="2" charset="2"/>
+              <a:buChar char="n"/>
+            </a:pPr>
+            <a:r>
+              <a:rPr lang="zh-CN" altLang="en-US" sz="1150" b="0" kern="1200" dirty="0">
+                <a:solidFill>
+                  <a:srgbClr val="262626"/>
+                </a:solidFill>
+                <a:latin typeface="Times New Roman" panose="02020603050405020304" pitchFamily="18" charset="0"/>
+                <a:ea typeface="华文楷体" panose="02010600040101010101" pitchFamily="2" charset="-122"/>
+                <a:cs typeface="Times New Roman" panose="02020603050405020304" pitchFamily="18" charset="0"/>
+              </a:rPr>
+              <a:t>内幕信息与保密：内幕信息知情人档案的登记与保管</a:t>
+            </a:r>
+          </a:p>
+        </p:txBody>
+      </p:sp>
+      <p:sp>
+        <p:nvSpPr>
+          <p:cNvPr id="110" name="Card"/>
+          <p:cNvSpPr/>
+          <p:nvPr/>
+        </p:nvSpPr>
+        <p:spPr>
+          <a:xfrm>
+            <a:off x="6246000" y="3610000"/>
+            <a:ext cx="5172570" cy="1760000"/>
+          </a:xfrm>
+          <a:prstGeom prst="rect">
+            <a:avLst/>
+          </a:prstGeom>
+          <a:solidFill>
+            <a:srgbClr val="F2F6FB"/>
+          </a:solidFill>
+          <a:ln w="12700">
+            <a:solidFill>
+              <a:srgbClr val="C8D9EA"/>
+            </a:solidFill>
+          </a:ln>
+        </p:spPr>
+        <p:txBody>
+          <a:bodyPr wrap="square" lIns="182880" tIns="137160" rIns="137160" bIns="91440" rtlCol="0" anchor="t"/>
+          <a:lstStyle/>
+          <a:p>
+            <a:pPr marL="0" indent="0" algn="l">
+              <a:lnSpc>
+                <a:spcPct val="100000"/>
+              </a:lnSpc>
+              <a:spcBef>
+                <a:spcPts val="0"/>
+              </a:spcBef>
+              <a:spcAft>
+                <a:spcPts val="0"/>
+              </a:spcAft>
+              <a:buNone/>
+            </a:pPr>
+            <a:r>
+              <a:rPr lang="zh-CN" altLang="en-US" sz="1400" b="1" kern="1200" dirty="0">
+                <a:solidFill>
+                  <a:srgbClr val="004E98"/>
+                </a:solidFill>
+                <a:latin typeface="Times New Roman" panose="02020603050405020304" pitchFamily="18" charset="0"/>
+                <a:ea typeface="华文楷体" panose="02010600040101010101" pitchFamily="2" charset="-122"/>
+                <a:cs typeface="Times New Roman" panose="02020603050405020304" pitchFamily="18" charset="0"/>
+              </a:rPr>
+              <a:t>应当与其职责相区分的事项</a:t>
+            </a:r>
+          </a:p>
+          <a:p>
+            <a:pPr marL="171450" indent="-171450" algn="l">
+              <a:lnSpc>
+                <a:spcPct val="135000"/>
+              </a:lnSpc>
+              <a:spcBef>
+                <a:spcPts val="340"/>
+              </a:spcBef>
+              <a:spcAft>
+                <a:spcPts val="0"/>
+              </a:spcAft>
+              <a:buClr>
+                <a:srgbClr val="197BC0"/>
+              </a:buClr>
+              <a:buSzPct val="60"/>
+              <a:buFont typeface="Wingdings" panose="05000000000000000000" pitchFamily="2" charset="2"/>
+              <a:buChar char="n"/>
+            </a:pPr>
+            <a:r>
+              <a:rPr lang="zh-CN" altLang="en-US" sz="1150" b="0" kern="1200" dirty="0">
+                <a:solidFill>
+                  <a:srgbClr val="262626"/>
+                </a:solidFill>
+                <a:latin typeface="Times New Roman" panose="02020603050405020304" pitchFamily="18" charset="0"/>
+                <a:ea typeface="华文楷体" panose="02010600040101010101" pitchFamily="2" charset="-122"/>
+                <a:cs typeface="Times New Roman" panose="02020603050405020304" pitchFamily="18" charset="0"/>
+              </a:rPr>
+              <a:t>经营决策与业务执行——属经理层职责</a:t>
+            </a:r>
+          </a:p>
+          <a:p>
+            <a:pPr marL="171450" indent="-171450" algn="l">
+              <a:lnSpc>
+                <a:spcPct val="135000"/>
+              </a:lnSpc>
+              <a:spcBef>
+                <a:spcPts val="250"/>
+              </a:spcBef>
+              <a:spcAft>
+                <a:spcPts val="0"/>
+              </a:spcAft>
+              <a:buClr>
+                <a:srgbClr val="197BC0"/>
+              </a:buClr>
+              <a:buSzPct val="60"/>
+              <a:buFont typeface="Wingdings" panose="05000000000000000000" pitchFamily="2" charset="2"/>
+              <a:buChar char="n"/>
+            </a:pPr>
+            <a:r>
+              <a:rPr lang="zh-CN" altLang="en-US" sz="1150" b="0" kern="1200" dirty="0">
+                <a:solidFill>
+                  <a:srgbClr val="262626"/>
+                </a:solidFill>
+                <a:latin typeface="Times New Roman" panose="02020603050405020304" pitchFamily="18" charset="0"/>
+                <a:ea typeface="华文楷体" panose="02010600040101010101" pitchFamily="2" charset="-122"/>
+                <a:cs typeface="Times New Roman" panose="02020603050405020304" pitchFamily="18" charset="0"/>
+              </a:rPr>
+              <a:t>财务核算与资金管理——属财务负责人职责</a:t>
+            </a:r>
+          </a:p>
+          <a:p>
+            <a:pPr marL="171450" indent="-171450" algn="l">
+              <a:lnSpc>
+                <a:spcPct val="135000"/>
+              </a:lnSpc>
+              <a:spcBef>
+                <a:spcPts val="250"/>
+              </a:spcBef>
+              <a:spcAft>
+                <a:spcPts val="0"/>
+              </a:spcAft>
+              <a:buClr>
+                <a:srgbClr val="197BC0"/>
+              </a:buClr>
+              <a:buSzPct val="60"/>
+              <a:buFont typeface="Wingdings" panose="05000000000000000000" pitchFamily="2" charset="2"/>
+              <a:buChar char="n"/>
+            </a:pPr>
+            <a:r>
+              <a:rPr lang="zh-CN" altLang="en-US" sz="1150" b="1" kern="1200" dirty="0">
+                <a:solidFill>
+                  <a:srgbClr val="C00000"/>
+                </a:solidFill>
+                <a:latin typeface="Times New Roman" panose="02020603050405020304" pitchFamily="18" charset="0"/>
+                <a:ea typeface="华文楷体" panose="02010600040101010101" pitchFamily="2" charset="-122"/>
+                <a:cs typeface="Times New Roman" panose="02020603050405020304" pitchFamily="18" charset="0"/>
+              </a:rPr>
+              <a:t>故不得兼任经理、分管经营业务的副经理、财务负责人</a:t>
+            </a:r>
+          </a:p>
+          <a:p>
+            <a:pPr marL="171450" indent="-171450" algn="l">
+              <a:lnSpc>
+                <a:spcPct val="135000"/>
+              </a:lnSpc>
+              <a:spcBef>
+                <a:spcPts val="250"/>
+              </a:spcBef>
+              <a:spcAft>
+                <a:spcPts val="0"/>
+              </a:spcAft>
+              <a:buClr>
+                <a:srgbClr val="197BC0"/>
+              </a:buClr>
+              <a:buSzPct val="60"/>
+              <a:buFont typeface="Wingdings" panose="05000000000000000000" pitchFamily="2" charset="2"/>
+              <a:buChar char="n"/>
+            </a:pPr>
+            <a:r>
+              <a:rPr lang="zh-CN" altLang="en-US" sz="1150" b="0" kern="1200" dirty="0">
+                <a:solidFill>
+                  <a:srgbClr val="262626"/>
+                </a:solidFill>
+                <a:latin typeface="Times New Roman" panose="02020603050405020304" pitchFamily="18" charset="0"/>
+                <a:ea typeface="华文楷体" panose="02010600040101010101" pitchFamily="2" charset="-122"/>
+                <a:cs typeface="Times New Roman" panose="02020603050405020304" pitchFamily="18" charset="0"/>
+              </a:rPr>
+              <a:t>兼任其他职务的，应明确区分职责并保证时间精力</a:t>
+            </a:r>
+          </a:p>
+        </p:txBody>
+      </p:sp>
+      <p:sp>
+        <p:nvSpPr>
+          <p:cNvPr id="111" name="Liability"/>
+          <p:cNvSpPr/>
+          <p:nvPr/>
+        </p:nvSpPr>
+        <p:spPr>
+          <a:xfrm>
+            <a:off x="773430" y="5460000"/>
+            <a:ext cx="10645140" cy="460000"/>
+          </a:xfrm>
+          <a:prstGeom prst="rect">
+            <a:avLst/>
+          </a:prstGeom>
+          <a:solidFill>
+            <a:srgbClr val="FDF1F1"/>
+          </a:solidFill>
+          <a:ln w="9525">
+            <a:solidFill>
+              <a:srgbClr val="C00000"/>
+            </a:solidFill>
+          </a:ln>
+        </p:spPr>
+        <p:txBody>
+          <a:bodyPr wrap="square" lIns="182880" tIns="68580" rIns="182880" bIns="68580" rtlCol="0" anchor="ctr"/>
+          <a:lstStyle/>
+          <a:p>
             <a:pPr marL="0" indent="0" algn="ctr">
               <a:lnSpc>
                 <a:spcPct val="120000"/>
@@ -9457,39 +9601,28 @@
               <a:buNone/>
             </a:pPr>
             <a:r>
-              <a:rPr lang="zh-CN" altLang="en-US" sz="1500" b="1" kern="1200" dirty="0">
-                <a:solidFill>
-                  <a:srgbClr val="FFFFFF"/>
-                </a:solidFill>
-                <a:latin typeface="Times New Roman" panose="02020603050405020304" pitchFamily="18" charset="0"/>
-                <a:ea typeface="华文楷体" panose="02010600040101010101" pitchFamily="2" charset="-122"/>
-                <a:cs typeface="Times New Roman" panose="02020603050405020304" pitchFamily="18" charset="0"/>
-              </a:rPr>
-              <a:t>所以：</a:t>
-            </a:r>
-            <a:r>
-              <a:rPr lang="zh-CN" altLang="en-US" sz="1500" b="1" kern="1200" dirty="0">
-                <a:solidFill>
-                  <a:srgbClr val="FFFFFF"/>
-                </a:solidFill>
-                <a:latin typeface="Times New Roman" panose="02020603050405020304" pitchFamily="18" charset="0"/>
-                <a:ea typeface="华文楷体" panose="02010600040101010101" pitchFamily="2" charset="-122"/>
-                <a:cs typeface="Times New Roman" panose="02020603050405020304" pitchFamily="18" charset="0"/>
-              </a:rPr>
-              <a:t>选董秘不是选一个“会写公告的人”，而是选一个能替董事会守住合规底线的人。</a:t>
-            </a:r>
-          </a:p>
-        </p:txBody>
-      </p:sp>
-      <p:sp>
-        <p:nvSpPr>
-          <p:cNvPr id="109" name="Footnote"/>
+              <a:rPr lang="zh-CN" altLang="en-US" sz="1400" b="1" kern="1200" dirty="0">
+                <a:solidFill>
+                  <a:srgbClr val="C00000"/>
+                </a:solidFill>
+                <a:latin typeface="Times New Roman" panose="02020603050405020304" pitchFamily="18" charset="0"/>
+                <a:ea typeface="华文楷体" panose="02010600040101010101" pitchFamily="2" charset="-122"/>
+                <a:cs typeface="Times New Roman" panose="02020603050405020304" pitchFamily="18" charset="0"/>
+              </a:rPr>
+              <a:t>董事长、经理、董事会秘书对临时报告信息披露的真实、准确、完整、及时、公平承担主要责任。</a:t>
+            </a:r>
+          </a:p>
+        </p:txBody>
+      </p:sp>
+      <p:sp>
+        <p:nvSpPr>
+          <p:cNvPr id="112" name="Footnote"/>
           <p:cNvSpPr txBox="1"/>
           <p:nvPr/>
         </p:nvSpPr>
         <p:spPr>
           <a:xfrm>
-            <a:off x="773430" y="6180000"/>
+            <a:off x="773430" y="6010000"/>
             <a:ext cx="10645140" cy="260000"/>
           </a:xfrm>
           <a:prstGeom prst="rect">
@@ -9525,7 +9658,7 @@
                 <a:ea typeface="华文楷体" panose="02010600040101010101" pitchFamily="2" charset="-122"/>
                 <a:cs typeface="Times New Roman" panose="02020603050405020304" pitchFamily="18" charset="0"/>
               </a:rPr>
-              <a:t>依据：《上市公司董事会秘书监管规则》第一条、第二条、第二十五条、第三十六条；《公司法》第一百九十二条。</a:t>
+              <a:t>依据：《公司法》第二百六十五条；《上市公司董事会秘书监管规则》第二条、第七条、第二十五条、第二十六条、第二十八条、第三十八条。</a:t>
             </a:r>
           </a:p>
         </p:txBody>
@@ -9599,7 +9732,7 @@
                 <a:ea typeface="华文楷体" panose="02010600040101010101" pitchFamily="2" charset="-122"/>
                 <a:cs typeface="Times New Roman" panose="02020603050405020304" pitchFamily="18" charset="0"/>
               </a:rPr>
-              <a:t>二、任职资格（上）：专业经验是第一道门槛</a:t>
+              <a:t>二、任职资格（一）：专业背景与从业年限</a:t>
             </a:r>
           </a:p>
         </p:txBody>
@@ -9657,7 +9790,7 @@
                 <a:ea typeface="华文楷体" panose="02010600040101010101" pitchFamily="2" charset="-122"/>
                 <a:cs typeface="Times New Roman" panose="02020603050405020304" pitchFamily="18" charset="0"/>
               </a:rPr>
-              <a:t>三条路径，满足其中一条即可（规则第二十二条第一项）</a:t>
+              <a:t>专业背景要求：下列三类情形符合其一即可（规则第二十二条第一项）</a:t>
             </a:r>
           </a:p>
         </p:txBody>
@@ -9671,7 +9804,7 @@
         <p:spPr>
           <a:xfrm>
             <a:off x="773430" y="1470000"/>
-            <a:ext cx="3401713" cy="1500000"/>
+            <a:ext cx="3401713" cy="1180000"/>
           </a:xfrm>
           <a:prstGeom prst="rect">
             <a:avLst/>
@@ -9691,7 +9824,7 @@
           <a:p>
             <a:pPr marL="0" indent="0" algn="l">
               <a:lnSpc>
-                <a:spcPct val="100000"/>
+                <a:spcPct val="105000"/>
               </a:lnSpc>
               <a:spcBef>
                 <a:spcPts val="0"/>
@@ -9702,7 +9835,7 @@
               <a:buNone/>
             </a:pPr>
             <a:r>
-              <a:rPr lang="zh-CN" altLang="en-US" sz="1500" b="1" kern="1200" dirty="0">
+              <a:rPr lang="zh-CN" altLang="en-US" sz="1450" b="1" kern="1200" dirty="0">
                 <a:solidFill>
                   <a:srgbClr val="004E98"/>
                 </a:solidFill>
@@ -9710,11 +9843,11 @@
                 <a:ea typeface="华文楷体" panose="02010600040101010101" pitchFamily="2" charset="-122"/>
                 <a:cs typeface="Times New Roman" panose="02020603050405020304" pitchFamily="18" charset="0"/>
               </a:rPr>
-              <a:t>路径一 ｜ 工作经验</a:t>
-            </a:r>
-          </a:p>
-          <a:p>
-            <a:pPr marL="171450" indent="-171450" algn="l">
+              <a:t>路径一 ｜ 相关工作经验</a:t>
+            </a:r>
+          </a:p>
+          <a:p>
+            <a:pPr marL="0" indent="0" algn="l">
               <a:lnSpc>
                 <a:spcPct val="145000"/>
               </a:lnSpc>
@@ -9724,15 +9857,10 @@
               <a:spcAft>
                 <a:spcPts val="0"/>
               </a:spcAft>
-              <a:buClr>
-                <a:srgbClr val="197BC0"/>
-              </a:buClr>
-              <a:buSzPct val="60"/>
-              <a:buFont typeface="Wingdings" panose="05000000000000000000" pitchFamily="2" charset="2"/>
-              <a:buChar char="n"/>
+              <a:buNone/>
             </a:pPr>
             <a:r>
-              <a:rPr lang="zh-CN" altLang="en-US" sz="1250" b="0" kern="1200" dirty="0">
+              <a:rPr lang="zh-CN" altLang="en-US" sz="1200" b="0" kern="1200" dirty="0">
                 <a:solidFill>
                   <a:srgbClr val="262626"/>
                 </a:solidFill>
@@ -9740,57 +9868,7 @@
                 <a:ea typeface="华文楷体" panose="02010600040101010101" pitchFamily="2" charset="-122"/>
                 <a:cs typeface="Times New Roman" panose="02020603050405020304" pitchFamily="18" charset="0"/>
               </a:rPr>
-              <a:t>具备</a:t>
-            </a:r>
-            <a:r>
-              <a:rPr lang="zh-CN" altLang="en-US" sz="1250" b="1" kern="1200" dirty="0">
-                <a:solidFill>
-                  <a:srgbClr val="004E98"/>
-                </a:solidFill>
-                <a:latin typeface="Times New Roman" panose="02020603050405020304" pitchFamily="18" charset="0"/>
-                <a:ea typeface="华文楷体" panose="02010600040101010101" pitchFamily="2" charset="-122"/>
-                <a:cs typeface="Times New Roman" panose="02020603050405020304" pitchFamily="18" charset="0"/>
-              </a:rPr>
-              <a:t>财务、会计、审计、法律合规、金融从业</a:t>
-            </a:r>
-            <a:r>
-              <a:rPr lang="zh-CN" altLang="en-US" sz="1250" b="0" kern="1200" dirty="0">
-                <a:solidFill>
-                  <a:srgbClr val="262626"/>
-                </a:solidFill>
-                <a:latin typeface="Times New Roman" panose="02020603050405020304" pitchFamily="18" charset="0"/>
-                <a:ea typeface="华文楷体" panose="02010600040101010101" pitchFamily="2" charset="-122"/>
-                <a:cs typeface="Times New Roman" panose="02020603050405020304" pitchFamily="18" charset="0"/>
-              </a:rPr>
-              <a:t>，或其他与履行董秘职责相关的工作经验</a:t>
-            </a:r>
-          </a:p>
-          <a:p>
-            <a:pPr marL="0" indent="0" algn="l">
-              <a:lnSpc>
-                <a:spcPct val="100000"/>
-              </a:lnSpc>
-              <a:spcBef>
-                <a:spcPts val="500"/>
-              </a:spcBef>
-              <a:spcAft>
-                <a:spcPts val="0"/>
-              </a:spcAft>
-              <a:buNone/>
-            </a:pPr>
-            <a:r>
-              <a:rPr lang="zh-CN" altLang="en-US" sz="1400" b="1" kern="1200" dirty="0">
-                <a:solidFill>
-                  <a:srgbClr val="004E98"/>
-                </a:solidFill>
-                <a:highlight>
-                  <a:srgbClr val="FFFF00"/>
-                </a:highlight>
-                <a:latin typeface="Times New Roman" panose="02020603050405020304" pitchFamily="18" charset="0"/>
-                <a:ea typeface="华文楷体" panose="02010600040101010101" pitchFamily="2" charset="-122"/>
-                <a:cs typeface="Times New Roman" panose="02020603050405020304" pitchFamily="18" charset="0"/>
-              </a:rPr>
-              <a:t>＋ 五年以上工作经验</a:t>
+              <a:t>财务、会计、审计、法律合规、金融从业，或其他与履行董事会秘书职责相关的工作经验</a:t>
             </a:r>
           </a:p>
         </p:txBody>
@@ -9804,7 +9882,7 @@
         <p:spPr>
           <a:xfrm>
             <a:off x="4395143" y="1470000"/>
-            <a:ext cx="3401713" cy="1500000"/>
+            <a:ext cx="3401713" cy="1180000"/>
           </a:xfrm>
           <a:prstGeom prst="rect">
             <a:avLst/>
@@ -9824,7 +9902,7 @@
           <a:p>
             <a:pPr marL="0" indent="0" algn="l">
               <a:lnSpc>
-                <a:spcPct val="100000"/>
+                <a:spcPct val="105000"/>
               </a:lnSpc>
               <a:spcBef>
                 <a:spcPts val="0"/>
@@ -9835,7 +9913,7 @@
               <a:buNone/>
             </a:pPr>
             <a:r>
-              <a:rPr lang="zh-CN" altLang="en-US" sz="1500" b="1" kern="1200" dirty="0">
+              <a:rPr lang="zh-CN" altLang="en-US" sz="1450" b="1" kern="1200" dirty="0">
                 <a:solidFill>
                   <a:srgbClr val="004E98"/>
                 </a:solidFill>
@@ -9847,7 +9925,7 @@
             </a:r>
           </a:p>
           <a:p>
-            <a:pPr marL="171450" indent="-171450" algn="l">
+            <a:pPr marL="0" indent="0" algn="l">
               <a:lnSpc>
                 <a:spcPct val="145000"/>
               </a:lnSpc>
@@ -9857,15 +9935,10 @@
               <a:spcAft>
                 <a:spcPts val="0"/>
               </a:spcAft>
-              <a:buClr>
-                <a:srgbClr val="197BC0"/>
-              </a:buClr>
-              <a:buSzPct val="60"/>
-              <a:buFont typeface="Wingdings" panose="05000000000000000000" pitchFamily="2" charset="2"/>
-              <a:buChar char="n"/>
+              <a:buNone/>
             </a:pPr>
             <a:r>
-              <a:rPr lang="zh-CN" altLang="en-US" sz="1250" b="0" kern="1200" dirty="0">
+              <a:rPr lang="zh-CN" altLang="en-US" sz="1200" b="0" kern="1200" dirty="0">
                 <a:solidFill>
                   <a:srgbClr val="262626"/>
                 </a:solidFill>
@@ -9873,46 +9946,7 @@
                 <a:ea typeface="华文楷体" panose="02010600040101010101" pitchFamily="2" charset="-122"/>
                 <a:cs typeface="Times New Roman" panose="02020603050405020304" pitchFamily="18" charset="0"/>
               </a:rPr>
-              <a:t>取得</a:t>
-            </a:r>
-            <a:r>
-              <a:rPr lang="zh-CN" altLang="en-US" sz="1250" b="1" kern="1200" dirty="0">
-                <a:solidFill>
-                  <a:srgbClr val="004E98"/>
-                </a:solidFill>
-                <a:latin typeface="Times New Roman" panose="02020603050405020304" pitchFamily="18" charset="0"/>
-                <a:ea typeface="华文楷体" panose="02010600040101010101" pitchFamily="2" charset="-122"/>
-                <a:cs typeface="Times New Roman" panose="02020603050405020304" pitchFamily="18" charset="0"/>
-              </a:rPr>
-              <a:t>法律职业资格证书</a:t>
-            </a:r>
-          </a:p>
-          <a:p>
-            <a:pPr marL="0" indent="0" algn="l">
-              <a:lnSpc>
-                <a:spcPct val="100000"/>
-              </a:lnSpc>
-              <a:spcBef>
-                <a:spcPts val="500"/>
-              </a:spcBef>
-              <a:spcAft>
-                <a:spcPts val="0"/>
-              </a:spcAft>
-              <a:buNone/>
-            </a:pPr>
-            <a:r>
-              <a:rPr lang="zh-CN" altLang="en-US" sz="1400" b="1" kern="1200" dirty="0">
-                <a:solidFill>
-                  <a:srgbClr val="004E98"/>
-                </a:solidFill>
-                <a:highlight>
-                  <a:srgbClr val="FFFF00"/>
-                </a:highlight>
-                <a:latin typeface="Times New Roman" panose="02020603050405020304" pitchFamily="18" charset="0"/>
-                <a:ea typeface="华文楷体" panose="02010600040101010101" pitchFamily="2" charset="-122"/>
-                <a:cs typeface="Times New Roman" panose="02020603050405020304" pitchFamily="18" charset="0"/>
-              </a:rPr>
-              <a:t>＋ 五年以上工作经验</a:t>
+              <a:t>取得法律职业资格证书</a:t>
             </a:r>
           </a:p>
         </p:txBody>
@@ -9926,7 +9960,7 @@
         <p:spPr>
           <a:xfrm>
             <a:off x="8016856" y="1470000"/>
-            <a:ext cx="3401713" cy="1500000"/>
+            <a:ext cx="3401713" cy="1180000"/>
           </a:xfrm>
           <a:prstGeom prst="rect">
             <a:avLst/>
@@ -9946,7 +9980,7 @@
           <a:p>
             <a:pPr marL="0" indent="0" algn="l">
               <a:lnSpc>
-                <a:spcPct val="100000"/>
+                <a:spcPct val="105000"/>
               </a:lnSpc>
               <a:spcBef>
                 <a:spcPts val="0"/>
@@ -9957,7 +9991,7 @@
               <a:buNone/>
             </a:pPr>
             <a:r>
-              <a:rPr lang="zh-CN" altLang="en-US" sz="1500" b="1" kern="1200" dirty="0">
+              <a:rPr lang="zh-CN" altLang="en-US" sz="1450" b="1" kern="1200" dirty="0">
                 <a:solidFill>
                   <a:srgbClr val="004E98"/>
                 </a:solidFill>
@@ -9969,7 +10003,7 @@
             </a:r>
           </a:p>
           <a:p>
-            <a:pPr marL="171450" indent="-171450" algn="l">
+            <a:pPr marL="0" indent="0" algn="l">
               <a:lnSpc>
                 <a:spcPct val="145000"/>
               </a:lnSpc>
@@ -9979,15 +10013,10 @@
               <a:spcAft>
                 <a:spcPts val="0"/>
               </a:spcAft>
-              <a:buClr>
-                <a:srgbClr val="197BC0"/>
-              </a:buClr>
-              <a:buSzPct val="60"/>
-              <a:buFont typeface="Wingdings" panose="05000000000000000000" pitchFamily="2" charset="2"/>
-              <a:buChar char="n"/>
+              <a:buNone/>
             </a:pPr>
             <a:r>
-              <a:rPr lang="zh-CN" altLang="en-US" sz="1250" b="0" kern="1200" dirty="0">
+              <a:rPr lang="zh-CN" altLang="en-US" sz="1200" b="0" kern="1200" dirty="0">
                 <a:solidFill>
                   <a:srgbClr val="262626"/>
                 </a:solidFill>
@@ -9995,80 +10024,46 @@
                 <a:ea typeface="华文楷体" panose="02010600040101010101" pitchFamily="2" charset="-122"/>
                 <a:cs typeface="Times New Roman" panose="02020603050405020304" pitchFamily="18" charset="0"/>
               </a:rPr>
-              <a:t>取得</a:t>
-            </a:r>
-            <a:r>
-              <a:rPr lang="zh-CN" altLang="en-US" sz="1250" b="1" kern="1200" dirty="0">
-                <a:solidFill>
-                  <a:srgbClr val="004E98"/>
-                </a:solidFill>
-                <a:latin typeface="Times New Roman" panose="02020603050405020304" pitchFamily="18" charset="0"/>
-                <a:ea typeface="华文楷体" panose="02010600040101010101" pitchFamily="2" charset="-122"/>
-                <a:cs typeface="Times New Roman" panose="02020603050405020304" pitchFamily="18" charset="0"/>
-              </a:rPr>
-              <a:t>注册会计师证书</a:t>
-            </a:r>
-          </a:p>
-          <a:p>
-            <a:pPr marL="0" indent="0" algn="l">
-              <a:lnSpc>
-                <a:spcPct val="100000"/>
-              </a:lnSpc>
-              <a:spcBef>
-                <a:spcPts val="500"/>
-              </a:spcBef>
-              <a:spcAft>
-                <a:spcPts val="0"/>
-              </a:spcAft>
-              <a:buNone/>
-            </a:pPr>
-            <a:r>
-              <a:rPr lang="zh-CN" altLang="en-US" sz="1400" b="1" kern="1200" dirty="0">
-                <a:solidFill>
-                  <a:srgbClr val="004E98"/>
-                </a:solidFill>
-                <a:highlight>
-                  <a:srgbClr val="FFFF00"/>
-                </a:highlight>
-                <a:latin typeface="Times New Roman" panose="02020603050405020304" pitchFamily="18" charset="0"/>
-                <a:ea typeface="华文楷体" panose="02010600040101010101" pitchFamily="2" charset="-122"/>
-                <a:cs typeface="Times New Roman" panose="02020603050405020304" pitchFamily="18" charset="0"/>
-              </a:rPr>
-              <a:t>＋ 五年以上工作经验</a:t>
-            </a:r>
-          </a:p>
-        </p:txBody>
-      </p:sp>
-      <p:sp>
-        <p:nvSpPr>
-          <p:cNvPr id="106" name="Tip"/>
+              <a:t>取得注册会计师证书</a:t>
+            </a:r>
+          </a:p>
+        </p:txBody>
+      </p:sp>
+      <p:sp>
+        <p:nvSpPr>
+          <p:cNvPr id="106" name="KeyBar"/>
           <p:cNvSpPr/>
           <p:nvPr/>
         </p:nvSpPr>
         <p:spPr>
           <a:xfrm>
-            <a:off x="773430" y="3170000"/>
-            <a:ext cx="10645140" cy="560000"/>
+            <a:off x="773430" y="2760000"/>
+            <a:ext cx="10645140" cy="620000"/>
           </a:xfrm>
           <a:prstGeom prst="rect">
             <a:avLst/>
           </a:prstGeom>
           <a:solidFill>
-            <a:srgbClr val="E8F1FA"/>
+            <a:srgbClr val="004E98"/>
           </a:solidFill>
-          <a:ln w="12700">
-            <a:solidFill>
-              <a:srgbClr val="C8D9EA"/>
-            </a:solidFill>
+          <a:ln>
+            <a:noFill/>
           </a:ln>
+          <a:effectLst>
+            <a:outerShdw blurRad="50800" dist="38100" dir="2700000" algn="tl" rotWithShape="0">
+              <a:prstClr val="black">
+                <a:alpha val="40000"/>
+              </a:prstClr>
+            </a:outerShdw>
+          </a:effectLst>
         </p:spPr>
         <p:txBody>
-          <a:bodyPr wrap="square" lIns="182880" tIns="91440" rIns="137160" bIns="91440" rtlCol="0" anchor="ctr"/>
+          <a:bodyPr wrap="square" lIns="182880" tIns="91440" rIns="182880" bIns="91440" rtlCol="0" anchor="ctr"/>
           <a:lstStyle/>
           <a:p>
-            <a:pPr marL="0" indent="0" algn="l">
-              <a:lnSpc>
-                <a:spcPct val="130000"/>
+            <a:pPr marL="0" indent="0" algn="ctr">
+              <a:lnSpc>
+                <a:spcPct val="115000"/>
               </a:lnSpc>
               <a:spcBef>
                 <a:spcPts val="0"/>
@@ -10079,59 +10074,15 @@
               <a:buNone/>
             </a:pPr>
             <a:r>
-              <a:rPr lang="zh-CN" altLang="en-US" sz="1300" b="0" kern="1200" dirty="0">
-                <a:solidFill>
-                  <a:srgbClr val="262626"/>
-                </a:solidFill>
-                <a:latin typeface="Times New Roman" panose="02020603050405020304" pitchFamily="18" charset="0"/>
-                <a:ea typeface="华文楷体" panose="02010600040101010101" pitchFamily="2" charset="-122"/>
-                <a:cs typeface="Times New Roman" panose="02020603050405020304" pitchFamily="18" charset="0"/>
-              </a:rPr>
-              <a:t>提示：长期在上市公司担任</a:t>
-            </a:r>
-            <a:r>
-              <a:rPr lang="zh-CN" altLang="en-US" sz="1300" b="1" kern="1200" dirty="0">
-                <a:solidFill>
-                  <a:srgbClr val="004E98"/>
-                </a:solidFill>
-                <a:latin typeface="Times New Roman" panose="02020603050405020304" pitchFamily="18" charset="0"/>
-                <a:ea typeface="华文楷体" panose="02010600040101010101" pitchFamily="2" charset="-122"/>
-                <a:cs typeface="Times New Roman" panose="02020603050405020304" pitchFamily="18" charset="0"/>
-              </a:rPr>
-              <a:t>董事会秘书</a:t>
-            </a:r>
-            <a:r>
-              <a:rPr lang="zh-CN" altLang="en-US" sz="1300" b="0" kern="1200" dirty="0">
-                <a:solidFill>
-                  <a:srgbClr val="262626"/>
-                </a:solidFill>
-                <a:latin typeface="Times New Roman" panose="02020603050405020304" pitchFamily="18" charset="0"/>
-                <a:ea typeface="华文楷体" panose="02010600040101010101" pitchFamily="2" charset="-122"/>
-                <a:cs typeface="Times New Roman" panose="02020603050405020304" pitchFamily="18" charset="0"/>
-              </a:rPr>
-              <a:t>或</a:t>
-            </a:r>
-            <a:r>
-              <a:rPr lang="zh-CN" altLang="en-US" sz="1300" b="1" kern="1200" dirty="0">
-                <a:solidFill>
-                  <a:srgbClr val="004E98"/>
-                </a:solidFill>
-                <a:latin typeface="Times New Roman" panose="02020603050405020304" pitchFamily="18" charset="0"/>
-                <a:ea typeface="华文楷体" panose="02010600040101010101" pitchFamily="2" charset="-122"/>
-                <a:cs typeface="Times New Roman" panose="02020603050405020304" pitchFamily="18" charset="0"/>
-              </a:rPr>
-              <a:t>证券事务代表</a:t>
-            </a:r>
-            <a:r>
-              <a:rPr lang="zh-CN" altLang="en-US" sz="1300" b="0" kern="1200" dirty="0">
-                <a:solidFill>
-                  <a:srgbClr val="262626"/>
-                </a:solidFill>
-                <a:latin typeface="Times New Roman" panose="02020603050405020304" pitchFamily="18" charset="0"/>
-                <a:ea typeface="华文楷体" panose="02010600040101010101" pitchFamily="2" charset="-122"/>
-                <a:cs typeface="Times New Roman" panose="02020603050405020304" pitchFamily="18" charset="0"/>
-              </a:rPr>
-              <a:t>的，可以认定为“其他与履行董事会秘书职责相关的工作经验”。（证监会起草说明）</a:t>
+              <a:rPr lang="zh-CN" altLang="en-US" sz="1800" b="1" kern="1200" dirty="0">
+                <a:solidFill>
+                  <a:srgbClr val="FFFFFF"/>
+                </a:solidFill>
+                <a:latin typeface="Times New Roman" panose="02020603050405020304" pitchFamily="18" charset="0"/>
+                <a:ea typeface="华文楷体" panose="02010600040101010101" pitchFamily="2" charset="-122"/>
+                <a:cs typeface="Times New Roman" panose="02020603050405020304" pitchFamily="18" charset="0"/>
+              </a:rPr>
+              <a:t>三类情形均须同时具备：五年以上工作经验</a:t>
             </a:r>
           </a:p>
         </p:txBody>
@@ -10144,7 +10095,7 @@
         </p:nvSpPr>
         <p:spPr>
           <a:xfrm>
-            <a:off x="773430" y="3990000"/>
+            <a:off x="773430" y="3540000"/>
             <a:ext cx="10645140" cy="337185"/>
           </a:xfrm>
           <a:prstGeom prst="rect">
@@ -10189,7 +10140,7 @@
                 <a:ea typeface="华文楷体" panose="02010600040101010101" pitchFamily="2" charset="-122"/>
                 <a:cs typeface="Times New Roman" panose="02020603050405020304" pitchFamily="18" charset="0"/>
               </a:rPr>
-              <a:t>两条容易被忽略、却必须写进公告的要求</a:t>
+              <a:t>同时应当具备的素质要求与聘任时的披露义务</a:t>
             </a:r>
           </a:p>
         </p:txBody>
@@ -10202,8 +10153,8 @@
         </p:nvSpPr>
         <p:spPr>
           <a:xfrm>
-            <a:off x="773430" y="4520000"/>
-            <a:ext cx="10645140" cy="1400000"/>
+            <a:off x="773430" y="4100000"/>
+            <a:ext cx="10645140" cy="1500000"/>
           </a:xfrm>
           <a:prstGeom prst="rect">
             <a:avLst/>
@@ -10234,7 +10185,7 @@
               <a:buChar char="n"/>
             </a:pPr>
             <a:r>
-              <a:rPr lang="zh-CN" altLang="en-US" sz="1500" b="0" kern="1200" dirty="0">
+              <a:rPr lang="zh-CN" altLang="en-US" sz="1400" b="0" kern="1200" dirty="0">
                 <a:solidFill>
                   <a:srgbClr val="262626"/>
                 </a:solidFill>
@@ -10245,7 +10196,7 @@
               <a:t>具有</a:t>
             </a:r>
             <a:r>
-              <a:rPr lang="zh-CN" altLang="en-US" sz="1500" b="1" kern="1200" dirty="0">
+              <a:rPr lang="zh-CN" altLang="en-US" sz="1400" b="1" kern="1200" dirty="0">
                 <a:solidFill>
                   <a:srgbClr val="004E98"/>
                 </a:solidFill>
@@ -10256,7 +10207,7 @@
               <a:t>良好的职业道德和个人品德</a:t>
             </a:r>
             <a:r>
-              <a:rPr lang="zh-CN" altLang="en-US" sz="1500" b="0" kern="1200" dirty="0">
+              <a:rPr lang="zh-CN" altLang="en-US" sz="1400" b="0" kern="1200" dirty="0">
                 <a:solidFill>
                   <a:srgbClr val="262626"/>
                 </a:solidFill>
@@ -10264,10 +10215,10 @@
                 <a:ea typeface="华文楷体" panose="02010600040101010101" pitchFamily="2" charset="-122"/>
                 <a:cs typeface="Times New Roman" panose="02020603050405020304" pitchFamily="18" charset="0"/>
               </a:rPr>
-              <a:t>；</a:t>
-            </a:r>
-            <a:r>
-              <a:rPr lang="zh-CN" altLang="en-US" sz="1500" b="1" kern="1200" dirty="0">
+              <a:t>，</a:t>
+            </a:r>
+            <a:r>
+              <a:rPr lang="zh-CN" altLang="en-US" sz="1400" b="1" kern="1200" dirty="0">
                 <a:solidFill>
                   <a:srgbClr val="004E98"/>
                 </a:solidFill>
@@ -10278,7 +10229,7 @@
               <a:t>熟悉证券法律法规和证券交易所业务规则</a:t>
             </a:r>
             <a:r>
-              <a:rPr lang="zh-CN" altLang="en-US" sz="1500" b="0" kern="1200" dirty="0">
+              <a:rPr lang="zh-CN" altLang="en-US" sz="1400" b="0" kern="1200" dirty="0">
                 <a:solidFill>
                   <a:srgbClr val="262626"/>
                 </a:solidFill>
@@ -10307,7 +10258,7 @@
               <a:buChar char="n"/>
             </a:pPr>
             <a:r>
-              <a:rPr lang="zh-CN" altLang="en-US" sz="1500" b="0" kern="1200" dirty="0">
+              <a:rPr lang="zh-CN" altLang="en-US" sz="1400" b="0" kern="1200" dirty="0">
                 <a:solidFill>
                   <a:srgbClr val="262626"/>
                 </a:solidFill>
@@ -10315,10 +10266,10 @@
                 <a:ea typeface="华文楷体" panose="02010600040101010101" pitchFamily="2" charset="-122"/>
                 <a:cs typeface="Times New Roman" panose="02020603050405020304" pitchFamily="18" charset="0"/>
               </a:rPr>
-              <a:t>公司聘任董秘时，必须就候选人是否符合以上条件</a:t>
-            </a:r>
-            <a:r>
-              <a:rPr lang="zh-CN" altLang="en-US" sz="1500" b="1" kern="1200" dirty="0">
+              <a:t>聘任董事会秘书时，公司应当就候选人符合上述各项情形</a:t>
+            </a:r>
+            <a:r>
+              <a:rPr lang="zh-CN" altLang="en-US" sz="1400" b="1" kern="1200" dirty="0">
                 <a:solidFill>
                   <a:srgbClr val="004E98"/>
                 </a:solidFill>
@@ -10332,7 +10283,7 @@
               <a:t>作出说明并予以披露</a:t>
             </a:r>
             <a:r>
-              <a:rPr lang="zh-CN" altLang="en-US" sz="1500" b="0" kern="1200" dirty="0">
+              <a:rPr lang="zh-CN" altLang="en-US" sz="1400" b="0" kern="1200" dirty="0">
                 <a:solidFill>
                   <a:srgbClr val="262626"/>
                 </a:solidFill>
@@ -10361,15 +10312,37 @@
               <a:buChar char="n"/>
             </a:pPr>
             <a:r>
-              <a:rPr lang="zh-CN" altLang="en-US" sz="1500" b="1" kern="1200" dirty="0">
-                <a:solidFill>
-                  <a:srgbClr val="C00000"/>
-                </a:solidFill>
-                <a:latin typeface="Times New Roman" panose="02020603050405020304" pitchFamily="18" charset="0"/>
-                <a:ea typeface="华文楷体" panose="02010600040101010101" pitchFamily="2" charset="-122"/>
-                <a:cs typeface="Times New Roman" panose="02020603050405020304" pitchFamily="18" charset="0"/>
-              </a:rPr>
-              <a:t>一句话：公告里写不出来的人，就不是合适的人选。</a:t>
+              <a:rPr lang="zh-CN" altLang="en-US" sz="1400" b="0" kern="1200" dirty="0">
+                <a:solidFill>
+                  <a:srgbClr val="262626"/>
+                </a:solidFill>
+                <a:latin typeface="Times New Roman" panose="02020603050405020304" pitchFamily="18" charset="0"/>
+                <a:ea typeface="华文楷体" panose="02010600040101010101" pitchFamily="2" charset="-122"/>
+                <a:cs typeface="Times New Roman" panose="02020603050405020304" pitchFamily="18" charset="0"/>
+              </a:rPr>
+              <a:t>长期在上市公司担任</a:t>
+            </a:r>
+            <a:r>
+              <a:rPr lang="zh-CN" altLang="en-US" sz="1400" b="1" kern="1200" dirty="0">
+                <a:solidFill>
+                  <a:srgbClr val="004E98"/>
+                </a:solidFill>
+                <a:latin typeface="Times New Roman" panose="02020603050405020304" pitchFamily="18" charset="0"/>
+                <a:ea typeface="华文楷体" panose="02010600040101010101" pitchFamily="2" charset="-122"/>
+                <a:cs typeface="Times New Roman" panose="02020603050405020304" pitchFamily="18" charset="0"/>
+              </a:rPr>
+              <a:t>董事会秘书或证券事务代表</a:t>
+            </a:r>
+            <a:r>
+              <a:rPr lang="zh-CN" altLang="en-US" sz="1400" b="0" kern="1200" dirty="0">
+                <a:solidFill>
+                  <a:srgbClr val="262626"/>
+                </a:solidFill>
+                <a:latin typeface="Times New Roman" panose="02020603050405020304" pitchFamily="18" charset="0"/>
+                <a:ea typeface="华文楷体" panose="02010600040101010101" pitchFamily="2" charset="-122"/>
+                <a:cs typeface="Times New Roman" panose="02020603050405020304" pitchFamily="18" charset="0"/>
+              </a:rPr>
+              <a:t>的，可认定为“其他与履行董事会秘书职责相关的工作经验”。（证监会起草说明）</a:t>
             </a:r>
           </a:p>
         </p:txBody>
@@ -10382,7 +10355,7 @@
         </p:nvSpPr>
         <p:spPr>
           <a:xfrm>
-            <a:off x="773430" y="6180000"/>
+            <a:off x="773430" y="5880000"/>
             <a:ext cx="10645140" cy="260000"/>
           </a:xfrm>
           <a:prstGeom prst="rect">
@@ -10418,7 +10391,7 @@
                 <a:ea typeface="华文楷体" panose="02010600040101010101" pitchFamily="2" charset="-122"/>
                 <a:cs typeface="Times New Roman" panose="02020603050405020304" pitchFamily="18" charset="0"/>
               </a:rPr>
-              <a:t>依据：《上市公司董事会秘书监管规则》第二十二条第一项及第一款。</a:t>
+              <a:t>依据：《上市公司董事会秘书监管规则》第二十二条第一款、第一项；《〈上市公司董事会秘书监管规则〉起草说明》。</a:t>
             </a:r>
           </a:p>
         </p:txBody>
@@ -10492,7 +10465,7 @@
                 <a:ea typeface="华文楷体" panose="02010600040101010101" pitchFamily="2" charset="-122"/>
                 <a:cs typeface="Times New Roman" panose="02020603050405020304" pitchFamily="18" charset="0"/>
               </a:rPr>
-              <a:t>三、任职资格（下）：两类“一票否决”情形</a:t>
+              <a:t>三、任职资格（二）：不得担任董事会秘书的情形</a:t>
             </a:r>
           </a:p>
         </p:txBody>
@@ -10545,7 +10518,7 @@
                 <a:ea typeface="华文楷体" panose="02010600040101010101" pitchFamily="2" charset="-122"/>
                 <a:cs typeface="Times New Roman" panose="02020603050405020304" pitchFamily="18" charset="0"/>
               </a:rPr>
-              <a:t>Ａ ｜ 《公司法》第一百七十八条：五种情形</a:t>
+              <a:t>Ａ ｜ 《公司法》第一百七十八条规定的五种情形</a:t>
             </a:r>
           </a:p>
           <a:p>
@@ -10569,7 +10542,7 @@
             <a:r>
               <a:rPr lang="zh-CN" altLang="en-US" sz="1350" b="1" kern="1200" dirty="0">
                 <a:solidFill>
-                  <a:srgbClr val="262626"/>
+                  <a:srgbClr val="004E98"/>
                 </a:solidFill>
                 <a:latin typeface="Times New Roman" panose="02020603050405020304" pitchFamily="18" charset="0"/>
                 <a:ea typeface="华文楷体" panose="02010600040101010101" pitchFamily="2" charset="-122"/>
@@ -10632,8 +10605,11 @@
             <a:r>
               <a:rPr lang="zh-CN" altLang="en-US" sz="1350" b="1" kern="1200" dirty="0">
                 <a:solidFill>
-                  <a:srgbClr val="C00000"/>
-                </a:solidFill>
+                  <a:srgbClr val="004E98"/>
+                </a:solidFill>
+                <a:highlight>
+                  <a:srgbClr val="FFFF00"/>
+                </a:highlight>
                 <a:latin typeface="Times New Roman" panose="02020603050405020304" pitchFamily="18" charset="0"/>
                 <a:ea typeface="华文楷体" panose="02010600040101010101" pitchFamily="2" charset="-122"/>
                 <a:cs typeface="Times New Roman" panose="02020603050405020304" pitchFamily="18" charset="0"/>
@@ -10684,8 +10660,11 @@
             <a:r>
               <a:rPr lang="zh-CN" altLang="en-US" sz="1350" b="1" kern="1200" dirty="0">
                 <a:solidFill>
-                  <a:srgbClr val="C00000"/>
-                </a:solidFill>
+                  <a:srgbClr val="004E98"/>
+                </a:solidFill>
+                <a:highlight>
+                  <a:srgbClr val="FFFF00"/>
+                </a:highlight>
                 <a:latin typeface="Times New Roman" panose="02020603050405020304" pitchFamily="18" charset="0"/>
                 <a:ea typeface="华文楷体" panose="02010600040101010101" pitchFamily="2" charset="-122"/>
                 <a:cs typeface="Times New Roman" panose="02020603050405020304" pitchFamily="18" charset="0"/>
@@ -10725,8 +10704,11 @@
             <a:r>
               <a:rPr lang="zh-CN" altLang="en-US" sz="1350" b="1" kern="1200" dirty="0">
                 <a:solidFill>
-                  <a:srgbClr val="C00000"/>
-                </a:solidFill>
+                  <a:srgbClr val="004E98"/>
+                </a:solidFill>
+                <a:highlight>
+                  <a:srgbClr val="FFFF00"/>
+                </a:highlight>
                 <a:latin typeface="Times New Roman" panose="02020603050405020304" pitchFamily="18" charset="0"/>
                 <a:ea typeface="华文楷体" panose="02010600040101010101" pitchFamily="2" charset="-122"/>
                 <a:cs typeface="Times New Roman" panose="02020603050405020304" pitchFamily="18" charset="0"/>
@@ -10768,9 +10750,6 @@
                 <a:solidFill>
                   <a:srgbClr val="004E98"/>
                 </a:solidFill>
-                <a:highlight>
-                  <a:srgbClr val="FFFF00"/>
-                </a:highlight>
                 <a:latin typeface="Times New Roman" panose="02020603050405020304" pitchFamily="18" charset="0"/>
                 <a:ea typeface="华文楷体" panose="02010600040101010101" pitchFamily="2" charset="-122"/>
                 <a:cs typeface="Times New Roman" panose="02020603050405020304" pitchFamily="18" charset="0"/>
@@ -10828,7 +10807,7 @@
                 <a:ea typeface="华文楷体" panose="02010600040101010101" pitchFamily="2" charset="-122"/>
                 <a:cs typeface="Times New Roman" panose="02020603050405020304" pitchFamily="18" charset="0"/>
               </a:rPr>
-              <a:t>Ｂ ｜ 规则第二十二条：三条“记录门槛”＋兜底</a:t>
+              <a:t>Ｂ ｜ 规则第二十二条规定的监管与自律处分记录</a:t>
             </a:r>
           </a:p>
           <a:p>
@@ -10888,7 +10867,7 @@
             <a:r>
               <a:rPr lang="zh-CN" altLang="en-US" sz="1350" b="1" kern="1200" dirty="0">
                 <a:solidFill>
-                  <a:srgbClr val="C00000"/>
+                  <a:srgbClr val="004E98"/>
                 </a:solidFill>
                 <a:latin typeface="Times New Roman" panose="02020603050405020304" pitchFamily="18" charset="0"/>
                 <a:ea typeface="华文楷体" panose="02010600040101010101" pitchFamily="2" charset="-122"/>
@@ -10910,7 +10889,7 @@
             <a:r>
               <a:rPr lang="zh-CN" altLang="en-US" sz="1350" b="1" kern="1200" dirty="0">
                 <a:solidFill>
-                  <a:srgbClr val="C00000"/>
+                  <a:srgbClr val="004E98"/>
                 </a:solidFill>
                 <a:latin typeface="Times New Roman" panose="02020603050405020304" pitchFamily="18" charset="0"/>
                 <a:ea typeface="华文楷体" panose="02010600040101010101" pitchFamily="2" charset="-122"/>
@@ -10987,7 +10966,7 @@
             <a:r>
               <a:rPr lang="zh-CN" altLang="en-US" sz="1350" b="1" kern="1200" dirty="0">
                 <a:solidFill>
-                  <a:srgbClr val="C00000"/>
+                  <a:srgbClr val="004E98"/>
                 </a:solidFill>
                 <a:latin typeface="Times New Roman" panose="02020603050405020304" pitchFamily="18" charset="0"/>
                 <a:ea typeface="华文楷体" panose="02010600040101010101" pitchFamily="2" charset="-122"/>
@@ -11009,7 +10988,7 @@
             <a:r>
               <a:rPr lang="zh-CN" altLang="en-US" sz="1350" b="1" kern="1200" dirty="0">
                 <a:solidFill>
-                  <a:srgbClr val="C00000"/>
+                  <a:srgbClr val="004E98"/>
                 </a:solidFill>
                 <a:latin typeface="Times New Roman" panose="02020603050405020304" pitchFamily="18" charset="0"/>
                 <a:ea typeface="华文楷体" panose="02010600040101010101" pitchFamily="2" charset="-122"/>
@@ -11050,7 +11029,7 @@
             <a:r>
               <a:rPr lang="zh-CN" altLang="en-US" sz="1350" b="1" kern="1200" dirty="0">
                 <a:solidFill>
-                  <a:srgbClr val="C00000"/>
+                  <a:srgbClr val="004E98"/>
                 </a:solidFill>
                 <a:latin typeface="Times New Roman" panose="02020603050405020304" pitchFamily="18" charset="0"/>
                 <a:ea typeface="华文楷体" panose="02010600040101010101" pitchFamily="2" charset="-122"/>
@@ -11072,7 +11051,7 @@
             <a:r>
               <a:rPr lang="zh-CN" altLang="en-US" sz="1350" b="1" kern="1200" dirty="0">
                 <a:solidFill>
-                  <a:srgbClr val="C00000"/>
+                  <a:srgbClr val="004E98"/>
                 </a:solidFill>
                 <a:latin typeface="Times New Roman" panose="02020603050405020304" pitchFamily="18" charset="0"/>
                 <a:ea typeface="华文楷体" panose="02010600040101010101" pitchFamily="2" charset="-122"/>
@@ -11113,7 +11092,7 @@
             <a:r>
               <a:rPr lang="zh-CN" altLang="en-US" sz="1350" b="1" kern="1200" dirty="0">
                 <a:solidFill>
-                  <a:srgbClr val="262626"/>
+                  <a:srgbClr val="004E98"/>
                 </a:solidFill>
                 <a:latin typeface="Times New Roman" panose="02020603050405020304" pitchFamily="18" charset="0"/>
                 <a:ea typeface="华文楷体" panose="02010600040101010101" pitchFamily="2" charset="-122"/>
@@ -11227,18 +11206,7 @@
                 <a:ea typeface="华文楷体" panose="02010600040101010101" pitchFamily="2" charset="-122"/>
                 <a:cs typeface="Times New Roman" panose="02020603050405020304" pitchFamily="18" charset="0"/>
               </a:rPr>
-              <a:t>。因此，</a:t>
-            </a:r>
-            <a:r>
-              <a:rPr lang="zh-CN" altLang="en-US" sz="1400" b="1" kern="1200" dirty="0">
-                <a:solidFill>
-                  <a:srgbClr val="C00000"/>
-                </a:solidFill>
-                <a:latin typeface="Times New Roman" panose="02020603050405020304" pitchFamily="18" charset="0"/>
-                <a:ea typeface="华文楷体" panose="02010600040101010101" pitchFamily="2" charset="-122"/>
-                <a:cs typeface="Times New Roman" panose="02020603050405020304" pitchFamily="18" charset="0"/>
-              </a:rPr>
-              <a:t>这一页必须在拟聘前逐条核实。</a:t>
+              <a:t>。上述情形应当在拟聘前逐条核查并留痕。</a:t>
             </a:r>
           </a:p>
         </p:txBody>
@@ -11361,7 +11329,7 @@
                 <a:ea typeface="华文楷体" panose="02010600040101010101" pitchFamily="2" charset="-122"/>
                 <a:cs typeface="Times New Roman" panose="02020603050405020304" pitchFamily="18" charset="0"/>
               </a:rPr>
-              <a:t>四、兼职红线：三个岗位绝对不能兼</a:t>
+              <a:t>四、兼任限制与利益冲突防范</a:t>
             </a:r>
           </a:p>
         </p:txBody>
@@ -11419,7 +11387,7 @@
                 <a:ea typeface="华文楷体" panose="02010600040101010101" pitchFamily="2" charset="-122"/>
                 <a:cs typeface="Times New Roman" panose="02020603050405020304" pitchFamily="18" charset="0"/>
               </a:rPr>
-              <a:t>规则第二十六条：董事会秘书不得兼任下列职务</a:t>
+              <a:t>不得兼任的三类职务（规则第二十六条）</a:t>
             </a:r>
           </a:p>
         </p:txBody>
@@ -11522,7 +11490,7 @@
                 <a:ea typeface="华文楷体" panose="02010600040101010101" pitchFamily="2" charset="-122"/>
                 <a:cs typeface="Times New Roman" panose="02020603050405020304" pitchFamily="18" charset="0"/>
               </a:rPr>
-              <a:t>不得兼任</a:t>
+              <a:t>全面负责公司经营管理</a:t>
             </a:r>
           </a:p>
         </p:txBody>
@@ -11625,7 +11593,7 @@
                 <a:ea typeface="华文楷体" panose="02010600040101010101" pitchFamily="2" charset="-122"/>
                 <a:cs typeface="Times New Roman" panose="02020603050405020304" pitchFamily="18" charset="0"/>
               </a:rPr>
-              <a:t>不得兼任</a:t>
+              <a:t>直接主管具体经营业务</a:t>
             </a:r>
           </a:p>
         </p:txBody>
@@ -11728,7 +11696,7 @@
                 <a:ea typeface="华文楷体" panose="02010600040101010101" pitchFamily="2" charset="-122"/>
                 <a:cs typeface="Times New Roman" panose="02020603050405020304" pitchFamily="18" charset="0"/>
               </a:rPr>
-              <a:t>不得兼任</a:t>
+              <a:t>主管财务核算与资金</a:t>
             </a:r>
           </a:p>
         </p:txBody>
@@ -11781,7 +11749,7 @@
                 <a:ea typeface="华文楷体" panose="02010600040101010101" pitchFamily="2" charset="-122"/>
                 <a:cs typeface="Times New Roman" panose="02020603050405020304" pitchFamily="18" charset="0"/>
               </a:rPr>
-              <a:t>为什么？这三个岗位直接管经营、管账，与董秘</a:t>
+              <a:t>上述三类职务直接主管经营与财务，与董事会秘书</a:t>
             </a:r>
             <a:r>
               <a:rPr lang="zh-CN" altLang="en-US" sz="1300" b="1" kern="1200" dirty="0">
@@ -11792,7 +11760,7 @@
                 <a:ea typeface="华文楷体" panose="02010600040101010101" pitchFamily="2" charset="-122"/>
                 <a:cs typeface="Times New Roman" panose="02020603050405020304" pitchFamily="18" charset="0"/>
               </a:rPr>
-              <a:t>“看住信息披露、看住合规”</a:t>
+              <a:t>监督信息披露、保障治理合规</a:t>
             </a:r>
             <a:r>
               <a:rPr lang="zh-CN" altLang="en-US" sz="1300" b="0" kern="1200" dirty="0">
@@ -11803,7 +11771,7 @@
                 <a:ea typeface="华文楷体" panose="02010600040101010101" pitchFamily="2" charset="-122"/>
                 <a:cs typeface="Times New Roman" panose="02020603050405020304" pitchFamily="18" charset="0"/>
               </a:rPr>
-              <a:t>的职责存在天然利益冲突。</a:t>
+              <a:t>的职责存在利益冲突。</a:t>
             </a:r>
           </a:p>
         </p:txBody>
@@ -11861,7 +11829,7 @@
                 <a:ea typeface="华文楷体" panose="02010600040101010101" pitchFamily="2" charset="-122"/>
                 <a:cs typeface="Times New Roman" panose="02020603050405020304" pitchFamily="18" charset="0"/>
               </a:rPr>
-              <a:t>兼任公司其他职务的，必须同时做到两件事</a:t>
+              <a:t>兼任公司其他职务的，应当同时满足两项条件</a:t>
             </a:r>
           </a:p>
         </p:txBody>
@@ -11914,7 +11882,7 @@
                 <a:ea typeface="华文楷体" panose="02010600040101010101" pitchFamily="2" charset="-122"/>
                 <a:cs typeface="Times New Roman" panose="02020603050405020304" pitchFamily="18" charset="0"/>
               </a:rPr>
-              <a:t>① 职责边界要分开</a:t>
+              <a:t>① 职责边界应当明确区分</a:t>
             </a:r>
           </a:p>
           <a:p>
@@ -11944,7 +11912,7 @@
                 <a:ea typeface="华文楷体" panose="02010600040101010101" pitchFamily="2" charset="-122"/>
                 <a:cs typeface="Times New Roman" panose="02020603050405020304" pitchFamily="18" charset="0"/>
               </a:rPr>
-              <a:t>明确区分董秘职责与其他职务职责，避免</a:t>
+              <a:t>明确区分董事会秘书职责与其他职务职责，避免</a:t>
             </a:r>
             <a:r>
               <a:rPr lang="zh-CN" altLang="en-US" sz="1250" b="1" kern="1200" dirty="0">
@@ -12008,7 +11976,7 @@
                 <a:ea typeface="华文楷体" panose="02010600040101010101" pitchFamily="2" charset="-122"/>
                 <a:cs typeface="Times New Roman" panose="02020603050405020304" pitchFamily="18" charset="0"/>
               </a:rPr>
-              <a:t>② 时间精力要保证</a:t>
+              <a:t>② 时间与精力应当充分保证</a:t>
             </a:r>
           </a:p>
           <a:p>
@@ -12049,7 +12017,7 @@
                 <a:ea typeface="华文楷体" panose="02010600040101010101" pitchFamily="2" charset="-122"/>
                 <a:cs typeface="Times New Roman" panose="02020603050405020304" pitchFamily="18" charset="0"/>
               </a:rPr>
-              <a:t>足够的时间和精力独立履行董秘职责</a:t>
+              <a:t>足够的时间和精力独立履行董事会秘书职责</a:t>
             </a:r>
             <a:r>
               <a:rPr lang="zh-CN" altLang="en-US" sz="1250" b="0" kern="1200" dirty="0">
@@ -12113,7 +12081,7 @@
                 <a:ea typeface="华文楷体" panose="02010600040101010101" pitchFamily="2" charset="-122"/>
                 <a:cs typeface="Times New Roman" panose="02020603050405020304" pitchFamily="18" charset="0"/>
               </a:rPr>
-              <a:t>过渡期提醒：</a:t>
+              <a:t>过渡期安排：</a:t>
             </a:r>
             <a:r>
               <a:rPr lang="zh-CN" altLang="en-US" sz="1300" b="0" kern="1200" dirty="0">
@@ -12124,16 +12092,13 @@
                 <a:ea typeface="华文楷体" panose="02010600040101010101" pitchFamily="2" charset="-122"/>
                 <a:cs typeface="Times New Roman" panose="02020603050405020304" pitchFamily="18" charset="0"/>
               </a:rPr>
-              <a:t>现任董秘存在上述兼职情形的，应当在</a:t>
+              <a:t>现任董事会秘书存在上述兼职情形的，应当在</a:t>
             </a:r>
             <a:r>
               <a:rPr lang="zh-CN" altLang="en-US" sz="1300" b="1" kern="1200" dirty="0">
                 <a:solidFill>
-                  <a:srgbClr val="004E98"/>
-                </a:solidFill>
-                <a:highlight>
-                  <a:srgbClr val="FFFF00"/>
-                </a:highlight>
+                  <a:srgbClr val="C00000"/>
+                </a:solidFill>
                 <a:latin typeface="Times New Roman" panose="02020603050405020304" pitchFamily="18" charset="0"/>
                 <a:ea typeface="华文楷体" panose="02010600040101010101" pitchFamily="2" charset="-122"/>
                 <a:cs typeface="Times New Roman" panose="02020603050405020304" pitchFamily="18" charset="0"/>
@@ -12272,7 +12237,7 @@
                 <a:ea typeface="华文楷体" panose="02010600040101010101" pitchFamily="2" charset="-122"/>
                 <a:cs typeface="Times New Roman" panose="02020603050405020304" pitchFamily="18" charset="0"/>
               </a:rPr>
-              <a:t>五、董秘做什么：四大职责</a:t>
+              <a:t>五、董事会秘书的法定职责</a:t>
             </a:r>
           </a:p>
         </p:txBody>
@@ -12325,7 +12290,7 @@
                 <a:ea typeface="华文楷体" panose="02010600040101010101" pitchFamily="2" charset="-122"/>
                 <a:cs typeface="Times New Roman" panose="02020603050405020304" pitchFamily="18" charset="0"/>
               </a:rPr>
-              <a:t>① 信息披露的组织者</a:t>
+              <a:t>① 信息披露事务的组织与办理</a:t>
             </a:r>
           </a:p>
           <a:p>
@@ -12561,7 +12526,7 @@
                 <a:ea typeface="华文楷体" panose="02010600040101010101" pitchFamily="2" charset="-122"/>
                 <a:cs typeface="Times New Roman" panose="02020603050405020304" pitchFamily="18" charset="0"/>
               </a:rPr>
-              <a:t>② 公司治理的守门人</a:t>
+              <a:t>② 公司治理运作的合规保障</a:t>
             </a:r>
           </a:p>
           <a:p>
@@ -12775,7 +12740,7 @@
                 <a:ea typeface="华文楷体" panose="02010600040101010101" pitchFamily="2" charset="-122"/>
                 <a:cs typeface="Times New Roman" panose="02020603050405020304" pitchFamily="18" charset="0"/>
               </a:rPr>
-              <a:t>③ 内外沟通的枢纽</a:t>
+              <a:t>③ 内外部沟通与投资者关系</a:t>
             </a:r>
           </a:p>
           <a:p>
@@ -13022,7 +12987,7 @@
                 <a:ea typeface="华文楷体" panose="02010600040101010101" pitchFamily="2" charset="-122"/>
                 <a:cs typeface="Times New Roman" panose="02020603050405020304" pitchFamily="18" charset="0"/>
               </a:rPr>
-              <a:t>④ 风险的报告人</a:t>
+              <a:t>④ 风险发现与报告</a:t>
             </a:r>
           </a:p>
           <a:p>
@@ -13183,7 +13148,7 @@
                 <a:ea typeface="华文楷体" panose="02010600040101010101" pitchFamily="2" charset="-122"/>
                 <a:cs typeface="Times New Roman" panose="02020603050405020304" pitchFamily="18" charset="0"/>
               </a:rPr>
-              <a:t>公司内审机构发现重大问题线索的，应当同时通报董秘</a:t>
+              <a:t>公司内审机构发现重大问题线索的，应当同时通报董事会秘书</a:t>
             </a:r>
           </a:p>
         </p:txBody>
@@ -13306,7 +13271,7 @@
                 <a:ea typeface="华文楷体" panose="02010600040101010101" pitchFamily="2" charset="-122"/>
                 <a:cs typeface="Times New Roman" panose="02020603050405020304" pitchFamily="18" charset="0"/>
               </a:rPr>
-              <a:t>六、怎么聘：程序、配套与解聘</a:t>
+              <a:t>六、选聘程序、履职保障与解聘安排</a:t>
             </a:r>
           </a:p>
         </p:txBody>
@@ -13364,7 +13329,7 @@
                 <a:ea typeface="华文楷体" panose="02010600040101010101" pitchFamily="2" charset="-122"/>
                 <a:cs typeface="Times New Roman" panose="02020603050405020304" pitchFamily="18" charset="0"/>
               </a:rPr>
-              <a:t>聘任程序：五步走</a:t>
+              <a:t>聘任程序（规则第二十三条）</a:t>
             </a:r>
           </a:p>
         </p:txBody>
@@ -13442,7 +13407,7 @@
                 <a:ea typeface="华文楷体" panose="02010600040101010101" pitchFamily="2" charset="-122"/>
                 <a:cs typeface="Times New Roman" panose="02020603050405020304" pitchFamily="18" charset="0"/>
               </a:rPr>
-              <a:t>物色候选人</a:t>
+              <a:t>确定候选人</a:t>
             </a:r>
           </a:p>
         </p:txBody>
@@ -13598,7 +13563,7 @@
                 <a:ea typeface="华文楷体" panose="02010600040101010101" pitchFamily="2" charset="-122"/>
                 <a:cs typeface="Times New Roman" panose="02020603050405020304" pitchFamily="18" charset="0"/>
               </a:rPr>
-              <a:t>提名委员会遴选、审核</a:t>
+              <a:t>提名委员会遴选与审核</a:t>
             </a:r>
           </a:p>
         </p:txBody>
@@ -13676,7 +13641,7 @@
                 <a:ea typeface="华文楷体" panose="02010600040101010101" pitchFamily="2" charset="-122"/>
                 <a:cs typeface="Times New Roman" panose="02020603050405020304" pitchFamily="18" charset="0"/>
               </a:rPr>
-              <a:t>董事会聘任</a:t>
+              <a:t>董事会作出聘任决议</a:t>
             </a:r>
           </a:p>
         </p:txBody>
@@ -13754,7 +13719,7 @@
                 <a:ea typeface="华文楷体" panose="02010600040101010101" pitchFamily="2" charset="-122"/>
                 <a:cs typeface="Times New Roman" panose="02020603050405020304" pitchFamily="18" charset="0"/>
               </a:rPr>
-              <a:t>公告披露：说明符合条件</a:t>
+              <a:t>公告披露任职情况</a:t>
             </a:r>
           </a:p>
         </p:txBody>
@@ -13890,7 +13855,7 @@
                 <a:ea typeface="华文楷体" panose="02010600040101010101" pitchFamily="2" charset="-122"/>
                 <a:cs typeface="Times New Roman" panose="02020603050405020304" pitchFamily="18" charset="0"/>
               </a:rPr>
-              <a:t>公司必须同步做到的三件事（履职保障）</a:t>
+              <a:t>公司应当同步落实的履职保障（规则第二十七条、第二十九条、第三十三条）</a:t>
             </a:r>
           </a:p>
         </p:txBody>
@@ -13943,7 +13908,7 @@
                 <a:ea typeface="华文楷体" panose="02010600040101010101" pitchFamily="2" charset="-122"/>
                 <a:cs typeface="Times New Roman" panose="02020603050405020304" pitchFamily="18" charset="0"/>
               </a:rPr>
-              <a:t>① 给人、给部门</a:t>
+              <a:t>① 人员与机构保障</a:t>
             </a:r>
           </a:p>
           <a:p>
@@ -13995,7 +13960,7 @@
                 <a:ea typeface="华文楷体" panose="02010600040101010101" pitchFamily="2" charset="-122"/>
                 <a:cs typeface="Times New Roman" panose="02020603050405020304" pitchFamily="18" charset="0"/>
               </a:rPr>
-              <a:t>，设立由董秘</a:t>
+              <a:t>，设立由董事会秘书</a:t>
             </a:r>
             <a:r>
               <a:rPr lang="zh-CN" altLang="en-US" sz="1200" b="1" kern="1200" dirty="0">
@@ -14059,7 +14024,7 @@
                 <a:ea typeface="华文楷体" panose="02010600040101010101" pitchFamily="2" charset="-122"/>
                 <a:cs typeface="Times New Roman" panose="02020603050405020304" pitchFamily="18" charset="0"/>
               </a:rPr>
-              <a:t>② 给信息</a:t>
+              <a:t>② 信息获取保障</a:t>
             </a:r>
           </a:p>
           <a:p>
@@ -14089,7 +14054,7 @@
                 <a:ea typeface="华文楷体" panose="02010600040101010101" pitchFamily="2" charset="-122"/>
                 <a:cs typeface="Times New Roman" panose="02020603050405020304" pitchFamily="18" charset="0"/>
               </a:rPr>
-              <a:t>把董秘履职</a:t>
+              <a:t>将履职</a:t>
             </a:r>
             <a:r>
               <a:rPr lang="zh-CN" altLang="en-US" sz="1200" b="1" kern="1200" dirty="0">
@@ -14111,7 +14076,7 @@
                 <a:ea typeface="华文楷体" panose="02010600040101010101" pitchFamily="2" charset="-122"/>
                 <a:cs typeface="Times New Roman" panose="02020603050405020304" pitchFamily="18" charset="0"/>
               </a:rPr>
-              <a:t>，让他第一时间拿到重大事项信息</a:t>
+              <a:t>，确保及时、准确、全面获取信息</a:t>
             </a:r>
           </a:p>
         </p:txBody>
@@ -14164,7 +14129,7 @@
                 <a:ea typeface="华文楷体" panose="02010600040101010101" pitchFamily="2" charset="-122"/>
                 <a:cs typeface="Times New Roman" panose="02020603050405020304" pitchFamily="18" charset="0"/>
               </a:rPr>
-              <a:t>③ 给考核</a:t>
+              <a:t>③ 履职评价与追责</a:t>
             </a:r>
           </a:p>
           <a:p>
@@ -14194,7 +14159,7 @@
                 <a:ea typeface="华文楷体" panose="02010600040101010101" pitchFamily="2" charset="-122"/>
                 <a:cs typeface="Times New Roman" panose="02020603050405020304" pitchFamily="18" charset="0"/>
               </a:rPr>
-              <a:t>建立董秘</a:t>
+              <a:t>建立</a:t>
             </a:r>
             <a:r>
               <a:rPr lang="zh-CN" altLang="en-US" sz="1200" b="1" kern="1200" dirty="0">
@@ -14274,7 +14239,7 @@
                 <a:ea typeface="华文楷体" panose="02010600040101010101" pitchFamily="2" charset="-122"/>
                 <a:cs typeface="Times New Roman" panose="02020603050405020304" pitchFamily="18" charset="0"/>
               </a:rPr>
-              <a:t>解聘与空缺：选错了怎么办</a:t>
+              <a:t>解聘情形与空缺期安排</a:t>
             </a:r>
           </a:p>
         </p:txBody>
@@ -14400,7 +14365,7 @@
                 <a:ea typeface="华文楷体" panose="02010600040101010101" pitchFamily="2" charset="-122"/>
                 <a:cs typeface="Times New Roman" panose="02020603050405020304" pitchFamily="18" charset="0"/>
               </a:rPr>
-              <a:t>董秘被解聘或辞职的，公司应</a:t>
+              <a:t>董事会秘书被解聘或辞职的，公司应</a:t>
             </a:r>
             <a:r>
               <a:rPr lang="zh-CN" altLang="en-US" sz="1250" b="1" kern="1200" dirty="0">

--- a/output/上市公司董事会秘书选聘指引.pptx
+++ b/output/上市公司董事会秘书选聘指引.pptx
@@ -7737,7 +7737,7 @@
           </a:ln>
         </p:spPr>
         <p:txBody>
-          <a:bodyPr wrap="square" lIns="91440" tIns="45720" rIns="91440" bIns="45720" rtlCol="0" anchor="ctr"/>
+          <a:bodyPr wrap="square" lIns="91440" tIns="0" rIns="91440" bIns="0" rtlCol="0" anchor="ctr"/>
           <a:lstStyle/>
           <a:p>
             <a:pPr marL="0" indent="0" algn="l">
@@ -7768,713 +7768,14 @@
       </p:sp>
       <p:sp>
         <p:nvSpPr>
-          <p:cNvPr id="102" name="Card"/>
+          <p:cNvPr id="102" name="SectionBar"/>
           <p:cNvSpPr/>
           <p:nvPr/>
         </p:nvSpPr>
         <p:spPr>
           <a:xfrm>
-            <a:off x="773430" y="1010000"/>
-            <a:ext cx="3388380" cy="3700000"/>
-          </a:xfrm>
-          <a:prstGeom prst="rect">
-            <a:avLst/>
-          </a:prstGeom>
-          <a:solidFill>
-            <a:srgbClr val="F2F6FB"/>
-          </a:solidFill>
-          <a:ln w="12700">
-            <a:solidFill>
-              <a:srgbClr val="C8D9EA"/>
-            </a:solidFill>
-          </a:ln>
-        </p:spPr>
-        <p:txBody>
-          <a:bodyPr wrap="square" lIns="182880" tIns="137160" rIns="137160" bIns="91440" rtlCol="0" anchor="t"/>
-          <a:lstStyle/>
-          <a:p>
-            <a:pPr marL="0" indent="0" algn="l">
-              <a:lnSpc>
-                <a:spcPct val="100000"/>
-              </a:lnSpc>
-              <a:spcBef>
-                <a:spcPts val="0"/>
-              </a:spcBef>
-              <a:spcAft>
-                <a:spcPts val="0"/>
-              </a:spcAft>
-              <a:buNone/>
-            </a:pPr>
-            <a:r>
-              <a:rPr lang="zh-CN" altLang="en-US" sz="1500" b="1" kern="1200" dirty="0">
-                <a:solidFill>
-                  <a:srgbClr val="004E98"/>
-                </a:solidFill>
-                <a:latin typeface="Times New Roman" panose="02020603050405020304" pitchFamily="18" charset="0"/>
-                <a:ea typeface="华文楷体" panose="02010600040101010101" pitchFamily="2" charset="-122"/>
-                <a:cs typeface="Times New Roman" panose="02020603050405020304" pitchFamily="18" charset="0"/>
-              </a:rPr>
-              <a:t>① 任职资格：逐条核查</a:t>
-            </a:r>
-          </a:p>
-          <a:p>
-            <a:pPr marL="171450" indent="-171450" algn="l">
-              <a:lnSpc>
-                <a:spcPct val="145000"/>
-              </a:lnSpc>
-              <a:spcBef>
-                <a:spcPts val="420"/>
-              </a:spcBef>
-              <a:spcAft>
-                <a:spcPts val="0"/>
-              </a:spcAft>
-              <a:buClr>
-                <a:srgbClr val="197BC0"/>
-              </a:buClr>
-              <a:buSzPct val="60"/>
-              <a:buFont typeface="Wingdings" panose="05000000000000000000" pitchFamily="2" charset="2"/>
-              <a:buChar char="n"/>
-            </a:pPr>
-            <a:r>
-              <a:rPr lang="zh-CN" altLang="en-US" sz="1250" b="0" kern="1200" dirty="0">
-                <a:solidFill>
-                  <a:srgbClr val="262626"/>
-                </a:solidFill>
-                <a:latin typeface="Times New Roman" panose="02020603050405020304" pitchFamily="18" charset="0"/>
-                <a:ea typeface="华文楷体" panose="02010600040101010101" pitchFamily="2" charset="-122"/>
-                <a:cs typeface="Times New Roman" panose="02020603050405020304" pitchFamily="18" charset="0"/>
-              </a:rPr>
-              <a:t>五年以上相关工作经验，或法律职业资格、注会证书＋五年经验</a:t>
-            </a:r>
-          </a:p>
-          <a:p>
-            <a:pPr marL="171450" indent="-171450" algn="l">
-              <a:lnSpc>
-                <a:spcPct val="145000"/>
-              </a:lnSpc>
-              <a:spcBef>
-                <a:spcPts val="250"/>
-              </a:spcBef>
-              <a:spcAft>
-                <a:spcPts val="0"/>
-              </a:spcAft>
-              <a:buClr>
-                <a:srgbClr val="197BC0"/>
-              </a:buClr>
-              <a:buSzPct val="60"/>
-              <a:buFont typeface="Wingdings" panose="05000000000000000000" pitchFamily="2" charset="2"/>
-              <a:buChar char="n"/>
-            </a:pPr>
-            <a:r>
-              <a:rPr lang="zh-CN" altLang="en-US" sz="1250" b="0" kern="1200" dirty="0">
-                <a:solidFill>
-                  <a:srgbClr val="262626"/>
-                </a:solidFill>
-                <a:latin typeface="Times New Roman" panose="02020603050405020304" pitchFamily="18" charset="0"/>
-                <a:ea typeface="华文楷体" panose="02010600040101010101" pitchFamily="2" charset="-122"/>
-                <a:cs typeface="Times New Roman" panose="02020603050405020304" pitchFamily="18" charset="0"/>
-              </a:rPr>
-              <a:t>熟悉证券法律法规和证券交易所业务规则</a:t>
-            </a:r>
-          </a:p>
-          <a:p>
-            <a:pPr marL="171450" indent="-171450" algn="l">
-              <a:lnSpc>
-                <a:spcPct val="145000"/>
-              </a:lnSpc>
-              <a:spcBef>
-                <a:spcPts val="250"/>
-              </a:spcBef>
-              <a:spcAft>
-                <a:spcPts val="0"/>
-              </a:spcAft>
-              <a:buClr>
-                <a:srgbClr val="197BC0"/>
-              </a:buClr>
-              <a:buSzPct val="60"/>
-              <a:buFont typeface="Wingdings" panose="05000000000000000000" pitchFamily="2" charset="2"/>
-              <a:buChar char="n"/>
-            </a:pPr>
-            <a:r>
-              <a:rPr lang="zh-CN" altLang="en-US" sz="1250" b="0" kern="1200" dirty="0">
-                <a:solidFill>
-                  <a:srgbClr val="262626"/>
-                </a:solidFill>
-                <a:latin typeface="Times New Roman" panose="02020603050405020304" pitchFamily="18" charset="0"/>
-                <a:ea typeface="华文楷体" panose="02010600040101010101" pitchFamily="2" charset="-122"/>
-                <a:cs typeface="Times New Roman" panose="02020603050405020304" pitchFamily="18" charset="0"/>
-              </a:rPr>
-              <a:t>不存在《公司法》第178条五种情形</a:t>
-            </a:r>
-          </a:p>
-          <a:p>
-            <a:pPr marL="171450" indent="-171450" algn="l">
-              <a:lnSpc>
-                <a:spcPct val="145000"/>
-              </a:lnSpc>
-              <a:spcBef>
-                <a:spcPts val="250"/>
-              </a:spcBef>
-              <a:spcAft>
-                <a:spcPts val="0"/>
-              </a:spcAft>
-              <a:buClr>
-                <a:srgbClr val="197BC0"/>
-              </a:buClr>
-              <a:buSzPct val="60"/>
-              <a:buFont typeface="Wingdings" panose="05000000000000000000" pitchFamily="2" charset="2"/>
-              <a:buChar char="n"/>
-            </a:pPr>
-            <a:r>
-              <a:rPr lang="zh-CN" altLang="en-US" sz="1250" b="0" kern="1200" dirty="0">
-                <a:solidFill>
-                  <a:srgbClr val="262626"/>
-                </a:solidFill>
-                <a:latin typeface="Times New Roman" panose="02020603050405020304" pitchFamily="18" charset="0"/>
-                <a:ea typeface="华文楷体" panose="02010600040101010101" pitchFamily="2" charset="-122"/>
-                <a:cs typeface="Times New Roman" panose="02020603050405020304" pitchFamily="18" charset="0"/>
-              </a:rPr>
-              <a:t>最近三十六个月无证监会处罚、无交易所公开谴责</a:t>
-            </a:r>
-          </a:p>
-          <a:p>
-            <a:pPr marL="171450" indent="-171450" algn="l">
-              <a:lnSpc>
-                <a:spcPct val="145000"/>
-              </a:lnSpc>
-              <a:spcBef>
-                <a:spcPts val="250"/>
-              </a:spcBef>
-              <a:spcAft>
-                <a:spcPts val="0"/>
-              </a:spcAft>
-              <a:buClr>
-                <a:srgbClr val="197BC0"/>
-              </a:buClr>
-              <a:buSzPct val="60"/>
-              <a:buFont typeface="Wingdings" panose="05000000000000000000" pitchFamily="2" charset="2"/>
-              <a:buChar char="n"/>
-            </a:pPr>
-            <a:r>
-              <a:rPr lang="zh-CN" altLang="en-US" sz="1250" b="0" kern="1200" dirty="0">
-                <a:solidFill>
-                  <a:srgbClr val="262626"/>
-                </a:solidFill>
-                <a:latin typeface="Times New Roman" panose="02020603050405020304" pitchFamily="18" charset="0"/>
-                <a:ea typeface="华文楷体" panose="02010600040101010101" pitchFamily="2" charset="-122"/>
-                <a:cs typeface="Times New Roman" panose="02020603050405020304" pitchFamily="18" charset="0"/>
-              </a:rPr>
-              <a:t>未被市场禁入，未被公开认定不适合</a:t>
-            </a:r>
-          </a:p>
-          <a:p>
-            <a:pPr marL="171450" indent="-171450" algn="l">
-              <a:lnSpc>
-                <a:spcPct val="145000"/>
-              </a:lnSpc>
-              <a:spcBef>
-                <a:spcPts val="250"/>
-              </a:spcBef>
-              <a:spcAft>
-                <a:spcPts val="0"/>
-              </a:spcAft>
-              <a:buClr>
-                <a:srgbClr val="197BC0"/>
-              </a:buClr>
-              <a:buSzPct val="60"/>
-              <a:buFont typeface="Wingdings" panose="05000000000000000000" pitchFamily="2" charset="2"/>
-              <a:buChar char="n"/>
-            </a:pPr>
-            <a:r>
-              <a:rPr lang="zh-CN" altLang="en-US" sz="1250" b="1" kern="1200" dirty="0">
-                <a:solidFill>
-                  <a:srgbClr val="C00000"/>
-                </a:solidFill>
-                <a:latin typeface="Times New Roman" panose="02020603050405020304" pitchFamily="18" charset="0"/>
-                <a:ea typeface="华文楷体" panose="02010600040101010101" pitchFamily="2" charset="-122"/>
-                <a:cs typeface="Times New Roman" panose="02020603050405020304" pitchFamily="18" charset="0"/>
-              </a:rPr>
-              <a:t>不兼任经理、分管经营业务的副经理、财务负责人</a:t>
-            </a:r>
-          </a:p>
-        </p:txBody>
-      </p:sp>
-      <p:sp>
-        <p:nvSpPr>
-          <p:cNvPr id="103" name="Card"/>
-          <p:cNvSpPr/>
-          <p:nvPr/>
-        </p:nvSpPr>
-        <p:spPr>
-          <a:xfrm>
-            <a:off x="4401810" y="1010000"/>
-            <a:ext cx="3388380" cy="3700000"/>
-          </a:xfrm>
-          <a:prstGeom prst="rect">
-            <a:avLst/>
-          </a:prstGeom>
-          <a:solidFill>
-            <a:srgbClr val="F2F6FB"/>
-          </a:solidFill>
-          <a:ln w="12700">
-            <a:solidFill>
-              <a:srgbClr val="C8D9EA"/>
-            </a:solidFill>
-          </a:ln>
-        </p:spPr>
-        <p:txBody>
-          <a:bodyPr wrap="square" lIns="182880" tIns="137160" rIns="137160" bIns="91440" rtlCol="0" anchor="t"/>
-          <a:lstStyle/>
-          <a:p>
-            <a:pPr marL="0" indent="0" algn="l">
-              <a:lnSpc>
-                <a:spcPct val="100000"/>
-              </a:lnSpc>
-              <a:spcBef>
-                <a:spcPts val="0"/>
-              </a:spcBef>
-              <a:spcAft>
-                <a:spcPts val="0"/>
-              </a:spcAft>
-              <a:buNone/>
-            </a:pPr>
-            <a:r>
-              <a:rPr lang="zh-CN" altLang="en-US" sz="1500" b="1" kern="1200" dirty="0">
-                <a:solidFill>
-                  <a:srgbClr val="004E98"/>
-                </a:solidFill>
-                <a:latin typeface="Times New Roman" panose="02020603050405020304" pitchFamily="18" charset="0"/>
-                <a:ea typeface="华文楷体" panose="02010600040101010101" pitchFamily="2" charset="-122"/>
-                <a:cs typeface="Times New Roman" panose="02020603050405020304" pitchFamily="18" charset="0"/>
-              </a:rPr>
-              <a:t>② 履职能力：重点评估</a:t>
-            </a:r>
-          </a:p>
-          <a:p>
-            <a:pPr marL="171450" indent="-171450" algn="l">
-              <a:lnSpc>
-                <a:spcPct val="145000"/>
-              </a:lnSpc>
-              <a:spcBef>
-                <a:spcPts val="420"/>
-              </a:spcBef>
-              <a:spcAft>
-                <a:spcPts val="0"/>
-              </a:spcAft>
-              <a:buClr>
-                <a:srgbClr val="197BC0"/>
-              </a:buClr>
-              <a:buSzPct val="60"/>
-              <a:buFont typeface="Wingdings" panose="05000000000000000000" pitchFamily="2" charset="2"/>
-              <a:buChar char="n"/>
-            </a:pPr>
-            <a:r>
-              <a:rPr lang="zh-CN" altLang="en-US" sz="1250" b="0" kern="1200" dirty="0">
-                <a:solidFill>
-                  <a:srgbClr val="262626"/>
-                </a:solidFill>
-                <a:latin typeface="Times New Roman" panose="02020603050405020304" pitchFamily="18" charset="0"/>
-                <a:ea typeface="华文楷体" panose="02010600040101010101" pitchFamily="2" charset="-122"/>
-                <a:cs typeface="Times New Roman" panose="02020603050405020304" pitchFamily="18" charset="0"/>
-              </a:rPr>
-              <a:t>熟悉信息披露规则，胜任定期报告与临时报告编制</a:t>
-            </a:r>
-          </a:p>
-          <a:p>
-            <a:pPr marL="171450" indent="-171450" algn="l">
-              <a:lnSpc>
-                <a:spcPct val="145000"/>
-              </a:lnSpc>
-              <a:spcBef>
-                <a:spcPts val="250"/>
-              </a:spcBef>
-              <a:spcAft>
-                <a:spcPts val="0"/>
-              </a:spcAft>
-              <a:buClr>
-                <a:srgbClr val="197BC0"/>
-              </a:buClr>
-              <a:buSzPct val="60"/>
-              <a:buFont typeface="Wingdings" panose="05000000000000000000" pitchFamily="2" charset="2"/>
-              <a:buChar char="n"/>
-            </a:pPr>
-            <a:r>
-              <a:rPr lang="zh-CN" altLang="en-US" sz="1250" b="0" kern="1200" dirty="0">
-                <a:solidFill>
-                  <a:srgbClr val="262626"/>
-                </a:solidFill>
-                <a:latin typeface="Times New Roman" panose="02020603050405020304" pitchFamily="18" charset="0"/>
-                <a:ea typeface="华文楷体" panose="02010600040101010101" pitchFamily="2" charset="-122"/>
-                <a:cs typeface="Times New Roman" panose="02020603050405020304" pitchFamily="18" charset="0"/>
-              </a:rPr>
-              <a:t>组织协调能力：保障董事会、股东会合规召开</a:t>
-            </a:r>
-          </a:p>
-          <a:p>
-            <a:pPr marL="171450" indent="-171450" algn="l">
-              <a:lnSpc>
-                <a:spcPct val="145000"/>
-              </a:lnSpc>
-              <a:spcBef>
-                <a:spcPts val="250"/>
-              </a:spcBef>
-              <a:spcAft>
-                <a:spcPts val="0"/>
-              </a:spcAft>
-              <a:buClr>
-                <a:srgbClr val="197BC0"/>
-              </a:buClr>
-              <a:buSzPct val="60"/>
-              <a:buFont typeface="Wingdings" panose="05000000000000000000" pitchFamily="2" charset="2"/>
-              <a:buChar char="n"/>
-            </a:pPr>
-            <a:r>
-              <a:rPr lang="zh-CN" altLang="en-US" sz="1250" b="0" kern="1200" dirty="0">
-                <a:solidFill>
-                  <a:srgbClr val="262626"/>
-                </a:solidFill>
-                <a:latin typeface="Times New Roman" panose="02020603050405020304" pitchFamily="18" charset="0"/>
-                <a:ea typeface="华文楷体" panose="02010600040101010101" pitchFamily="2" charset="-122"/>
-                <a:cs typeface="Times New Roman" panose="02020603050405020304" pitchFamily="18" charset="0"/>
-              </a:rPr>
-              <a:t>沟通能力：应对投资者、监管机构与媒体</a:t>
-            </a:r>
-          </a:p>
-          <a:p>
-            <a:pPr marL="171450" indent="-171450" algn="l">
-              <a:lnSpc>
-                <a:spcPct val="145000"/>
-              </a:lnSpc>
-              <a:spcBef>
-                <a:spcPts val="250"/>
-              </a:spcBef>
-              <a:spcAft>
-                <a:spcPts val="0"/>
-              </a:spcAft>
-              <a:buClr>
-                <a:srgbClr val="197BC0"/>
-              </a:buClr>
-              <a:buSzPct val="60"/>
-              <a:buFont typeface="Wingdings" panose="05000000000000000000" pitchFamily="2" charset="2"/>
-              <a:buChar char="n"/>
-            </a:pPr>
-            <a:r>
-              <a:rPr lang="zh-CN" altLang="en-US" sz="1250" b="0" kern="1200" dirty="0">
-                <a:solidFill>
-                  <a:srgbClr val="262626"/>
-                </a:solidFill>
-                <a:latin typeface="Times New Roman" panose="02020603050405020304" pitchFamily="18" charset="0"/>
-                <a:ea typeface="华文楷体" panose="02010600040101010101" pitchFamily="2" charset="-122"/>
-                <a:cs typeface="Times New Roman" panose="02020603050405020304" pitchFamily="18" charset="0"/>
-              </a:rPr>
-              <a:t>风险意识：敢于提示风险并如实报告</a:t>
-            </a:r>
-          </a:p>
-          <a:p>
-            <a:pPr marL="171450" indent="-171450" algn="l">
-              <a:lnSpc>
-                <a:spcPct val="145000"/>
-              </a:lnSpc>
-              <a:spcBef>
-                <a:spcPts val="250"/>
-              </a:spcBef>
-              <a:spcAft>
-                <a:spcPts val="0"/>
-              </a:spcAft>
-              <a:buClr>
-                <a:srgbClr val="197BC0"/>
-              </a:buClr>
-              <a:buSzPct val="60"/>
-              <a:buFont typeface="Wingdings" panose="05000000000000000000" pitchFamily="2" charset="2"/>
-              <a:buChar char="n"/>
-            </a:pPr>
-            <a:r>
-              <a:rPr lang="zh-CN" altLang="en-US" sz="1250" b="0" kern="1200" dirty="0">
-                <a:solidFill>
-                  <a:srgbClr val="262626"/>
-                </a:solidFill>
-                <a:latin typeface="Times New Roman" panose="02020603050405020304" pitchFamily="18" charset="0"/>
-                <a:ea typeface="华文楷体" panose="02010600040101010101" pitchFamily="2" charset="-122"/>
-                <a:cs typeface="Times New Roman" panose="02020603050405020304" pitchFamily="18" charset="0"/>
-              </a:rPr>
-              <a:t>职业操守：不泄露内幕信息，不参与内幕交易</a:t>
-            </a:r>
-          </a:p>
-          <a:p>
-            <a:pPr marL="171450" indent="-171450" algn="l">
-              <a:lnSpc>
-                <a:spcPct val="145000"/>
-              </a:lnSpc>
-              <a:spcBef>
-                <a:spcPts val="250"/>
-              </a:spcBef>
-              <a:spcAft>
-                <a:spcPts val="0"/>
-              </a:spcAft>
-              <a:buClr>
-                <a:srgbClr val="197BC0"/>
-              </a:buClr>
-              <a:buSzPct val="60"/>
-              <a:buFont typeface="Wingdings" panose="05000000000000000000" pitchFamily="2" charset="2"/>
-              <a:buChar char="n"/>
-            </a:pPr>
-            <a:r>
-              <a:rPr lang="zh-CN" altLang="en-US" sz="1250" b="0" kern="1200" dirty="0">
-                <a:solidFill>
-                  <a:srgbClr val="262626"/>
-                </a:solidFill>
-                <a:latin typeface="Times New Roman" panose="02020603050405020304" pitchFamily="18" charset="0"/>
-                <a:ea typeface="华文楷体" panose="02010600040101010101" pitchFamily="2" charset="-122"/>
-                <a:cs typeface="Times New Roman" panose="02020603050405020304" pitchFamily="18" charset="0"/>
-              </a:rPr>
-              <a:t>时间与精力投入充分，不被其他职务挤占</a:t>
-            </a:r>
-          </a:p>
-        </p:txBody>
-      </p:sp>
-      <p:sp>
-        <p:nvSpPr>
-          <p:cNvPr id="104" name="Card"/>
-          <p:cNvSpPr/>
-          <p:nvPr/>
-        </p:nvSpPr>
-        <p:spPr>
-          <a:xfrm>
-            <a:off x="8030190" y="1010000"/>
-            <a:ext cx="3388380" cy="3700000"/>
-          </a:xfrm>
-          <a:prstGeom prst="rect">
-            <a:avLst/>
-          </a:prstGeom>
-          <a:solidFill>
-            <a:srgbClr val="F2F6FB"/>
-          </a:solidFill>
-          <a:ln w="12700">
-            <a:solidFill>
-              <a:srgbClr val="C8D9EA"/>
-            </a:solidFill>
-          </a:ln>
-        </p:spPr>
-        <p:txBody>
-          <a:bodyPr wrap="square" lIns="182880" tIns="137160" rIns="137160" bIns="91440" rtlCol="0" anchor="t"/>
-          <a:lstStyle/>
-          <a:p>
-            <a:pPr marL="0" indent="0" algn="l">
-              <a:lnSpc>
-                <a:spcPct val="100000"/>
-              </a:lnSpc>
-              <a:spcBef>
-                <a:spcPts val="0"/>
-              </a:spcBef>
-              <a:spcAft>
-                <a:spcPts val="0"/>
-              </a:spcAft>
-              <a:buNone/>
-            </a:pPr>
-            <a:r>
-              <a:rPr lang="zh-CN" altLang="en-US" sz="1500" b="1" kern="1200" dirty="0">
-                <a:solidFill>
-                  <a:srgbClr val="004E98"/>
-                </a:solidFill>
-                <a:latin typeface="Times New Roman" panose="02020603050405020304" pitchFamily="18" charset="0"/>
-                <a:ea typeface="华文楷体" panose="02010600040101010101" pitchFamily="2" charset="-122"/>
-                <a:cs typeface="Times New Roman" panose="02020603050405020304" pitchFamily="18" charset="0"/>
-              </a:rPr>
-              <a:t>③ 核查渠道与方式</a:t>
-            </a:r>
-          </a:p>
-          <a:p>
-            <a:pPr marL="171450" indent="-171450" algn="l">
-              <a:lnSpc>
-                <a:spcPct val="145000"/>
-              </a:lnSpc>
-              <a:spcBef>
-                <a:spcPts val="420"/>
-              </a:spcBef>
-              <a:spcAft>
-                <a:spcPts val="0"/>
-              </a:spcAft>
-              <a:buClr>
-                <a:srgbClr val="197BC0"/>
-              </a:buClr>
-              <a:buSzPct val="60"/>
-              <a:buFont typeface="Wingdings" panose="05000000000000000000" pitchFamily="2" charset="2"/>
-              <a:buChar char="n"/>
-            </a:pPr>
-            <a:r>
-              <a:rPr lang="zh-CN" altLang="en-US" sz="1250" b="0" kern="1200" dirty="0">
-                <a:solidFill>
-                  <a:srgbClr val="262626"/>
-                </a:solidFill>
-                <a:latin typeface="Times New Roman" panose="02020603050405020304" pitchFamily="18" charset="0"/>
-                <a:ea typeface="华文楷体" panose="02010600040101010101" pitchFamily="2" charset="-122"/>
-                <a:cs typeface="Times New Roman" panose="02020603050405020304" pitchFamily="18" charset="0"/>
-              </a:rPr>
-              <a:t>证监会网站：行政处罚、监管措施、市场禁入</a:t>
-            </a:r>
-          </a:p>
-          <a:p>
-            <a:pPr marL="171450" indent="-171450" algn="l">
-              <a:lnSpc>
-                <a:spcPct val="145000"/>
-              </a:lnSpc>
-              <a:spcBef>
-                <a:spcPts val="250"/>
-              </a:spcBef>
-              <a:spcAft>
-                <a:spcPts val="0"/>
-              </a:spcAft>
-              <a:buClr>
-                <a:srgbClr val="197BC0"/>
-              </a:buClr>
-              <a:buSzPct val="60"/>
-              <a:buFont typeface="Wingdings" panose="05000000000000000000" pitchFamily="2" charset="2"/>
-              <a:buChar char="n"/>
-            </a:pPr>
-            <a:r>
-              <a:rPr lang="zh-CN" altLang="en-US" sz="1250" b="0" kern="1200" dirty="0">
-                <a:solidFill>
-                  <a:srgbClr val="262626"/>
-                </a:solidFill>
-                <a:latin typeface="Times New Roman" panose="02020603050405020304" pitchFamily="18" charset="0"/>
-                <a:ea typeface="华文楷体" panose="02010600040101010101" pitchFamily="2" charset="-122"/>
-                <a:cs typeface="Times New Roman" panose="02020603050405020304" pitchFamily="18" charset="0"/>
-              </a:rPr>
-              <a:t>交易所网站：纪律处分、通报批评、监管措施</a:t>
-            </a:r>
-          </a:p>
-          <a:p>
-            <a:pPr marL="171450" indent="-171450" algn="l">
-              <a:lnSpc>
-                <a:spcPct val="145000"/>
-              </a:lnSpc>
-              <a:spcBef>
-                <a:spcPts val="250"/>
-              </a:spcBef>
-              <a:spcAft>
-                <a:spcPts val="0"/>
-              </a:spcAft>
-              <a:buClr>
-                <a:srgbClr val="197BC0"/>
-              </a:buClr>
-              <a:buSzPct val="60"/>
-              <a:buFont typeface="Wingdings" panose="05000000000000000000" pitchFamily="2" charset="2"/>
-              <a:buChar char="n"/>
-            </a:pPr>
-            <a:r>
-              <a:rPr lang="zh-CN" altLang="en-US" sz="1250" b="0" kern="1200" dirty="0">
-                <a:solidFill>
-                  <a:srgbClr val="262626"/>
-                </a:solidFill>
-                <a:latin typeface="Times New Roman" panose="02020603050405020304" pitchFamily="18" charset="0"/>
-                <a:ea typeface="华文楷体" panose="02010600040101010101" pitchFamily="2" charset="-122"/>
-                <a:cs typeface="Times New Roman" panose="02020603050405020304" pitchFamily="18" charset="0"/>
-              </a:rPr>
-              <a:t>中国执行信息公开网：是否失信被执行人</a:t>
-            </a:r>
-          </a:p>
-          <a:p>
-            <a:pPr marL="171450" indent="-171450" algn="l">
-              <a:lnSpc>
-                <a:spcPct val="145000"/>
-              </a:lnSpc>
-              <a:spcBef>
-                <a:spcPts val="250"/>
-              </a:spcBef>
-              <a:spcAft>
-                <a:spcPts val="0"/>
-              </a:spcAft>
-              <a:buClr>
-                <a:srgbClr val="197BC0"/>
-              </a:buClr>
-              <a:buSzPct val="60"/>
-              <a:buFont typeface="Wingdings" panose="05000000000000000000" pitchFamily="2" charset="2"/>
-              <a:buChar char="n"/>
-            </a:pPr>
-            <a:r>
-              <a:rPr lang="zh-CN" altLang="en-US" sz="1250" b="0" kern="1200" dirty="0">
-                <a:solidFill>
-                  <a:srgbClr val="262626"/>
-                </a:solidFill>
-                <a:latin typeface="Times New Roman" panose="02020603050405020304" pitchFamily="18" charset="0"/>
-                <a:ea typeface="华文楷体" panose="02010600040101010101" pitchFamily="2" charset="-122"/>
-                <a:cs typeface="Times New Roman" panose="02020603050405020304" pitchFamily="18" charset="0"/>
-              </a:rPr>
-              <a:t>中国裁判文书网：涉诉与刑事记录</a:t>
-            </a:r>
-          </a:p>
-          <a:p>
-            <a:pPr marL="171450" indent="-171450" algn="l">
-              <a:lnSpc>
-                <a:spcPct val="145000"/>
-              </a:lnSpc>
-              <a:spcBef>
-                <a:spcPts val="250"/>
-              </a:spcBef>
-              <a:spcAft>
-                <a:spcPts val="0"/>
-              </a:spcAft>
-              <a:buClr>
-                <a:srgbClr val="197BC0"/>
-              </a:buClr>
-              <a:buSzPct val="60"/>
-              <a:buFont typeface="Wingdings" panose="05000000000000000000" pitchFamily="2" charset="2"/>
-              <a:buChar char="n"/>
-            </a:pPr>
-            <a:r>
-              <a:rPr lang="zh-CN" altLang="en-US" sz="1250" b="0" kern="1200" dirty="0">
-                <a:solidFill>
-                  <a:srgbClr val="262626"/>
-                </a:solidFill>
-                <a:latin typeface="Times New Roman" panose="02020603050405020304" pitchFamily="18" charset="0"/>
-                <a:ea typeface="华文楷体" panose="02010600040101010101" pitchFamily="2" charset="-122"/>
-                <a:cs typeface="Times New Roman" panose="02020603050405020304" pitchFamily="18" charset="0"/>
-              </a:rPr>
-              <a:t>原任职单位背景访谈，核实真实履职经历</a:t>
-            </a:r>
-          </a:p>
-          <a:p>
-            <a:pPr marL="171450" indent="-171450" algn="l">
-              <a:lnSpc>
-                <a:spcPct val="145000"/>
-              </a:lnSpc>
-              <a:spcBef>
-                <a:spcPts val="250"/>
-              </a:spcBef>
-              <a:spcAft>
-                <a:spcPts val="0"/>
-              </a:spcAft>
-              <a:buClr>
-                <a:srgbClr val="197BC0"/>
-              </a:buClr>
-              <a:buSzPct val="60"/>
-              <a:buFont typeface="Wingdings" panose="05000000000000000000" pitchFamily="2" charset="2"/>
-              <a:buChar char="n"/>
-            </a:pPr>
-            <a:r>
-              <a:rPr lang="zh-CN" altLang="en-US" sz="1250" b="0" kern="1200" dirty="0">
-                <a:solidFill>
-                  <a:srgbClr val="262626"/>
-                </a:solidFill>
-                <a:latin typeface="Times New Roman" panose="02020603050405020304" pitchFamily="18" charset="0"/>
-                <a:ea typeface="华文楷体" panose="02010600040101010101" pitchFamily="2" charset="-122"/>
-                <a:cs typeface="Times New Roman" panose="02020603050405020304" pitchFamily="18" charset="0"/>
-              </a:rPr>
-              <a:t>要求本人出具书面承诺并留档备查</a:t>
-            </a:r>
-          </a:p>
-        </p:txBody>
-      </p:sp>
-      <p:sp>
-        <p:nvSpPr>
-          <p:cNvPr id="105" name="Conclusion"/>
-          <p:cNvSpPr/>
-          <p:nvPr/>
-        </p:nvSpPr>
-        <p:spPr>
-          <a:xfrm>
-            <a:off x="773430" y="4980000"/>
-            <a:ext cx="10645140" cy="720000"/>
+            <a:off x="773430" y="1127990"/>
+            <a:ext cx="10645140" cy="337185"/>
           </a:xfrm>
           <a:prstGeom prst="rect">
             <a:avLst/>
@@ -8494,12 +7795,12 @@
           </a:effectLst>
         </p:spPr>
         <p:txBody>
-          <a:bodyPr wrap="square" lIns="182880" tIns="91440" rIns="182880" bIns="91440" rtlCol="0" anchor="ctr"/>
+          <a:bodyPr wrap="square" lIns="137160" tIns="0" rIns="0" bIns="0" rtlCol="0" anchor="ctr"/>
           <a:lstStyle/>
           <a:p>
-            <a:pPr marL="0" indent="0" algn="ctr">
+            <a:pPr marL="0" indent="0" algn="l">
               <a:lnSpc>
-                <a:spcPct val="120000"/>
+                <a:spcPct val="100000"/>
               </a:lnSpc>
               <a:spcBef>
                 <a:spcPts val="0"/>
@@ -8510,7 +7811,7 @@
               <a:buNone/>
             </a:pPr>
             <a:r>
-              <a:rPr lang="zh-CN" altLang="en-US" sz="1600" b="1" kern="1200" dirty="0">
+              <a:rPr lang="zh-CN" altLang="en-US" sz="1400" b="1" kern="1200" dirty="0">
                 <a:solidFill>
                   <a:srgbClr val="FFFFFF"/>
                 </a:solidFill>
@@ -8518,31 +7819,382 @@
                 <a:ea typeface="华文楷体" panose="02010600040101010101" pitchFamily="2" charset="-122"/>
                 <a:cs typeface="Times New Roman" panose="02020603050405020304" pitchFamily="18" charset="0"/>
               </a:rPr>
-              <a:t>遴选顺序：先核查任职资格，再评估履职能力。</a:t>
-            </a:r>
-            <a:r>
-              <a:rPr lang="zh-CN" altLang="en-US" sz="1400" b="0" kern="1200" dirty="0">
-                <a:solidFill>
-                  <a:srgbClr val="D6E6F5"/>
-                </a:solidFill>
-                <a:latin typeface="Times New Roman" panose="02020603050405020304" pitchFamily="18" charset="0"/>
-                <a:ea typeface="华文楷体" panose="02010600040101010101" pitchFamily="2" charset="-122"/>
-                <a:cs typeface="Times New Roman" panose="02020603050405020304" pitchFamily="18" charset="0"/>
-              </a:rPr>
-              <a:t xml:space="preserve">　资格是准入底线，专业能力与责任意识决定履职质量。</a:t>
-            </a:r>
-          </a:p>
-        </p:txBody>
-      </p:sp>
-      <p:sp>
-        <p:nvSpPr>
-          <p:cNvPr id="106" name="Footnote"/>
+              <a:t>任职资格核查</a:t>
+            </a:r>
+          </a:p>
+        </p:txBody>
+      </p:sp>
+      <p:sp>
+        <p:nvSpPr>
+          <p:cNvPr id="103" name="Items"/>
           <p:cNvSpPr txBox="1"/>
           <p:nvPr/>
         </p:nvSpPr>
         <p:spPr>
           <a:xfrm>
-            <a:off x="773430" y="5960000"/>
+            <a:off x="773430" y="1645175"/>
+            <a:ext cx="10645140" cy="1358592"/>
+          </a:xfrm>
+          <a:prstGeom prst="rect">
+            <a:avLst/>
+          </a:prstGeom>
+          <a:noFill/>
+          <a:ln>
+            <a:noFill/>
+          </a:ln>
+        </p:spPr>
+        <p:txBody>
+          <a:bodyPr wrap="square" lIns="0" tIns="0" rIns="0" bIns="0" rtlCol="0" anchor="t"/>
+          <a:lstStyle/>
+          <a:p>
+            <a:pPr marL="214313" indent="-214313" algn="l">
+              <a:lnSpc>
+                <a:spcPct val="160000"/>
+              </a:lnSpc>
+              <a:spcBef>
+                <a:spcPts val="0"/>
+              </a:spcBef>
+              <a:spcAft>
+                <a:spcPts val="0"/>
+              </a:spcAft>
+              <a:buClr>
+                <a:srgbClr val="004E98"/>
+              </a:buClr>
+              <a:buFont typeface="Wingdings" panose="05000000000000000000" pitchFamily="2" charset="2"/>
+              <a:buChar char="n"/>
+            </a:pPr>
+            <a:r>
+              <a:rPr lang="zh-CN" altLang="en-US" sz="1400" b="0" kern="1200" dirty="0">
+                <a:solidFill>
+                  <a:srgbClr val="262626"/>
+                </a:solidFill>
+                <a:latin typeface="Times New Roman" panose="02020603050405020304" pitchFamily="18" charset="0"/>
+                <a:ea typeface="华文楷体" panose="02010600040101010101" pitchFamily="2" charset="-122"/>
+                <a:cs typeface="Times New Roman" panose="02020603050405020304" pitchFamily="18" charset="0"/>
+              </a:rPr>
+              <a:t>经验年限与资格证书是否满足要求。</a:t>
+            </a:r>
+          </a:p>
+          <a:p>
+            <a:pPr marL="214313" indent="-214313" algn="l">
+              <a:lnSpc>
+                <a:spcPct val="160000"/>
+              </a:lnSpc>
+              <a:spcBef>
+                <a:spcPts val="600"/>
+              </a:spcBef>
+              <a:spcAft>
+                <a:spcPts val="0"/>
+              </a:spcAft>
+              <a:buClr>
+                <a:srgbClr val="004E98"/>
+              </a:buClr>
+              <a:buFont typeface="Wingdings" panose="05000000000000000000" pitchFamily="2" charset="2"/>
+              <a:buChar char="n"/>
+            </a:pPr>
+            <a:r>
+              <a:rPr lang="zh-CN" altLang="en-US" sz="1400" b="0" kern="1200" dirty="0">
+                <a:solidFill>
+                  <a:srgbClr val="262626"/>
+                </a:solidFill>
+                <a:latin typeface="Times New Roman" panose="02020603050405020304" pitchFamily="18" charset="0"/>
+                <a:ea typeface="华文楷体" panose="02010600040101010101" pitchFamily="2" charset="-122"/>
+                <a:cs typeface="Times New Roman" panose="02020603050405020304" pitchFamily="18" charset="0"/>
+              </a:rPr>
+              <a:t>是否存在《公司法》第一百七十八条情形、近三十六个月的处罚与谴责记录、市场禁入。</a:t>
+            </a:r>
+          </a:p>
+          <a:p>
+            <a:pPr marL="214313" indent="-214313" algn="l">
+              <a:lnSpc>
+                <a:spcPct val="160000"/>
+              </a:lnSpc>
+              <a:spcBef>
+                <a:spcPts val="600"/>
+              </a:spcBef>
+              <a:spcAft>
+                <a:spcPts val="0"/>
+              </a:spcAft>
+              <a:buClr>
+                <a:srgbClr val="004E98"/>
+              </a:buClr>
+              <a:buFont typeface="Wingdings" panose="05000000000000000000" pitchFamily="2" charset="2"/>
+              <a:buChar char="n"/>
+            </a:pPr>
+            <a:r>
+              <a:rPr lang="zh-CN" altLang="en-US" sz="1400" b="0" kern="1200" dirty="0">
+                <a:solidFill>
+                  <a:srgbClr val="262626"/>
+                </a:solidFill>
+                <a:latin typeface="Times New Roman" panose="02020603050405020304" pitchFamily="18" charset="0"/>
+                <a:ea typeface="华文楷体" panose="02010600040101010101" pitchFamily="2" charset="-122"/>
+                <a:cs typeface="Times New Roman" panose="02020603050405020304" pitchFamily="18" charset="0"/>
+              </a:rPr>
+              <a:t>是否存在不得兼任的职务。</a:t>
+            </a:r>
+          </a:p>
+        </p:txBody>
+      </p:sp>
+      <p:sp>
+        <p:nvSpPr>
+          <p:cNvPr id="104" name="SectionBar"/>
+          <p:cNvSpPr/>
+          <p:nvPr/>
+        </p:nvSpPr>
+        <p:spPr>
+          <a:xfrm>
+            <a:off x="773430" y="3278074"/>
+            <a:ext cx="10645140" cy="337185"/>
+          </a:xfrm>
+          <a:prstGeom prst="rect">
+            <a:avLst/>
+          </a:prstGeom>
+          <a:solidFill>
+            <a:srgbClr val="004E98"/>
+          </a:solidFill>
+          <a:ln>
+            <a:noFill/>
+          </a:ln>
+          <a:effectLst>
+            <a:outerShdw blurRad="50800" dist="38100" dir="2700000" algn="tl" rotWithShape="0">
+              <a:prstClr val="black">
+                <a:alpha val="40000"/>
+              </a:prstClr>
+            </a:outerShdw>
+          </a:effectLst>
+        </p:spPr>
+        <p:txBody>
+          <a:bodyPr wrap="square" lIns="137160" tIns="0" rIns="0" bIns="0" rtlCol="0" anchor="ctr"/>
+          <a:lstStyle/>
+          <a:p>
+            <a:pPr marL="0" indent="0" algn="l">
+              <a:lnSpc>
+                <a:spcPct val="100000"/>
+              </a:lnSpc>
+              <a:spcBef>
+                <a:spcPts val="0"/>
+              </a:spcBef>
+              <a:spcAft>
+                <a:spcPts val="0"/>
+              </a:spcAft>
+              <a:buNone/>
+            </a:pPr>
+            <a:r>
+              <a:rPr lang="zh-CN" altLang="en-US" sz="1400" b="1" kern="1200" dirty="0">
+                <a:solidFill>
+                  <a:srgbClr val="FFFFFF"/>
+                </a:solidFill>
+                <a:latin typeface="Times New Roman" panose="02020603050405020304" pitchFamily="18" charset="0"/>
+                <a:ea typeface="华文楷体" panose="02010600040101010101" pitchFamily="2" charset="-122"/>
+                <a:cs typeface="Times New Roman" panose="02020603050405020304" pitchFamily="18" charset="0"/>
+              </a:rPr>
+              <a:t>核查渠道</a:t>
+            </a:r>
+          </a:p>
+        </p:txBody>
+      </p:sp>
+      <p:sp>
+        <p:nvSpPr>
+          <p:cNvPr id="105" name="Items"/>
+          <p:cNvSpPr txBox="1"/>
+          <p:nvPr/>
+        </p:nvSpPr>
+        <p:spPr>
+          <a:xfrm>
+            <a:off x="773430" y="3795259"/>
+            <a:ext cx="10645140" cy="897280"/>
+          </a:xfrm>
+          <a:prstGeom prst="rect">
+            <a:avLst/>
+          </a:prstGeom>
+          <a:noFill/>
+          <a:ln>
+            <a:noFill/>
+          </a:ln>
+        </p:spPr>
+        <p:txBody>
+          <a:bodyPr wrap="square" lIns="0" tIns="0" rIns="0" bIns="0" rtlCol="0" anchor="t"/>
+          <a:lstStyle/>
+          <a:p>
+            <a:pPr marL="214313" indent="-214313" algn="l">
+              <a:lnSpc>
+                <a:spcPct val="160000"/>
+              </a:lnSpc>
+              <a:spcBef>
+                <a:spcPts val="0"/>
+              </a:spcBef>
+              <a:spcAft>
+                <a:spcPts val="0"/>
+              </a:spcAft>
+              <a:buClr>
+                <a:srgbClr val="004E98"/>
+              </a:buClr>
+              <a:buFont typeface="Wingdings" panose="05000000000000000000" pitchFamily="2" charset="2"/>
+              <a:buChar char="n"/>
+            </a:pPr>
+            <a:r>
+              <a:rPr lang="zh-CN" altLang="en-US" sz="1400" b="0" kern="1200" dirty="0">
+                <a:solidFill>
+                  <a:srgbClr val="262626"/>
+                </a:solidFill>
+                <a:latin typeface="Times New Roman" panose="02020603050405020304" pitchFamily="18" charset="0"/>
+                <a:ea typeface="华文楷体" panose="02010600040101010101" pitchFamily="2" charset="-122"/>
+                <a:cs typeface="Times New Roman" panose="02020603050405020304" pitchFamily="18" charset="0"/>
+              </a:rPr>
+              <a:t>证监会网站：行政处罚、监管措施、市场禁入；证券交易所网站：纪律处分、通报批评。</a:t>
+            </a:r>
+          </a:p>
+          <a:p>
+            <a:pPr marL="214313" indent="-214313" algn="l">
+              <a:lnSpc>
+                <a:spcPct val="160000"/>
+              </a:lnSpc>
+              <a:spcBef>
+                <a:spcPts val="600"/>
+              </a:spcBef>
+              <a:spcAft>
+                <a:spcPts val="0"/>
+              </a:spcAft>
+              <a:buClr>
+                <a:srgbClr val="004E98"/>
+              </a:buClr>
+              <a:buFont typeface="Wingdings" panose="05000000000000000000" pitchFamily="2" charset="2"/>
+              <a:buChar char="n"/>
+            </a:pPr>
+            <a:r>
+              <a:rPr lang="zh-CN" altLang="en-US" sz="1400" b="0" kern="1200" dirty="0">
+                <a:solidFill>
+                  <a:srgbClr val="262626"/>
+                </a:solidFill>
+                <a:latin typeface="Times New Roman" panose="02020603050405020304" pitchFamily="18" charset="0"/>
+                <a:ea typeface="华文楷体" panose="02010600040101010101" pitchFamily="2" charset="-122"/>
+                <a:cs typeface="Times New Roman" panose="02020603050405020304" pitchFamily="18" charset="0"/>
+              </a:rPr>
+              <a:t>中国执行信息公开网、中国裁判文书网；原任职单位背景访谈；本人书面承诺并留档。</a:t>
+            </a:r>
+          </a:p>
+        </p:txBody>
+      </p:sp>
+      <p:sp>
+        <p:nvSpPr>
+          <p:cNvPr id="106" name="SectionBar"/>
+          <p:cNvSpPr/>
+          <p:nvPr/>
+        </p:nvSpPr>
+        <p:spPr>
+          <a:xfrm>
+            <a:off x="773430" y="4966846"/>
+            <a:ext cx="10645140" cy="337185"/>
+          </a:xfrm>
+          <a:prstGeom prst="rect">
+            <a:avLst/>
+          </a:prstGeom>
+          <a:solidFill>
+            <a:srgbClr val="004E98"/>
+          </a:solidFill>
+          <a:ln>
+            <a:noFill/>
+          </a:ln>
+          <a:effectLst>
+            <a:outerShdw blurRad="50800" dist="38100" dir="2700000" algn="tl" rotWithShape="0">
+              <a:prstClr val="black">
+                <a:alpha val="40000"/>
+              </a:prstClr>
+            </a:outerShdw>
+          </a:effectLst>
+        </p:spPr>
+        <p:txBody>
+          <a:bodyPr wrap="square" lIns="137160" tIns="0" rIns="0" bIns="0" rtlCol="0" anchor="ctr"/>
+          <a:lstStyle/>
+          <a:p>
+            <a:pPr marL="0" indent="0" algn="l">
+              <a:lnSpc>
+                <a:spcPct val="100000"/>
+              </a:lnSpc>
+              <a:spcBef>
+                <a:spcPts val="0"/>
+              </a:spcBef>
+              <a:spcAft>
+                <a:spcPts val="0"/>
+              </a:spcAft>
+              <a:buNone/>
+            </a:pPr>
+            <a:r>
+              <a:rPr lang="zh-CN" altLang="en-US" sz="1400" b="1" kern="1200" dirty="0">
+                <a:solidFill>
+                  <a:srgbClr val="FFFFFF"/>
+                </a:solidFill>
+                <a:latin typeface="Times New Roman" panose="02020603050405020304" pitchFamily="18" charset="0"/>
+                <a:ea typeface="华文楷体" panose="02010600040101010101" pitchFamily="2" charset="-122"/>
+                <a:cs typeface="Times New Roman" panose="02020603050405020304" pitchFamily="18" charset="0"/>
+              </a:rPr>
+              <a:t>资格之外的评估重点</a:t>
+            </a:r>
+          </a:p>
+        </p:txBody>
+      </p:sp>
+      <p:sp>
+        <p:nvSpPr>
+          <p:cNvPr id="107" name="Items"/>
+          <p:cNvSpPr txBox="1"/>
+          <p:nvPr/>
+        </p:nvSpPr>
+        <p:spPr>
+          <a:xfrm>
+            <a:off x="773430" y="5484031"/>
+            <a:ext cx="10645140" cy="435968"/>
+          </a:xfrm>
+          <a:prstGeom prst="rect">
+            <a:avLst/>
+          </a:prstGeom>
+          <a:noFill/>
+          <a:ln>
+            <a:noFill/>
+          </a:ln>
+        </p:spPr>
+        <p:txBody>
+          <a:bodyPr wrap="square" lIns="0" tIns="0" rIns="0" bIns="0" rtlCol="0" anchor="t"/>
+          <a:lstStyle/>
+          <a:p>
+            <a:pPr marL="214313" indent="-214313" algn="l">
+              <a:lnSpc>
+                <a:spcPct val="160000"/>
+              </a:lnSpc>
+              <a:spcBef>
+                <a:spcPts val="0"/>
+              </a:spcBef>
+              <a:spcAft>
+                <a:spcPts val="0"/>
+              </a:spcAft>
+              <a:buClr>
+                <a:srgbClr val="004E98"/>
+              </a:buClr>
+              <a:buFont typeface="Wingdings" panose="05000000000000000000" pitchFamily="2" charset="2"/>
+              <a:buChar char="n"/>
+            </a:pPr>
+            <a:r>
+              <a:rPr lang="zh-CN" altLang="en-US" sz="1400" b="0" kern="1200" dirty="0">
+                <a:solidFill>
+                  <a:srgbClr val="262626"/>
+                </a:solidFill>
+                <a:latin typeface="Times New Roman" panose="02020603050405020304" pitchFamily="18" charset="0"/>
+                <a:ea typeface="华文楷体" panose="02010600040101010101" pitchFamily="2" charset="-122"/>
+                <a:cs typeface="Times New Roman" panose="02020603050405020304" pitchFamily="18" charset="0"/>
+              </a:rPr>
+              <a:t>信息披露实务能力、会议组织与协调能力、对外沟通能力、风险提示意识、时间与精力投入。</a:t>
+            </a:r>
+          </a:p>
+        </p:txBody>
+      </p:sp>
+      <p:sp>
+        <p:nvSpPr>
+          <p:cNvPr id="108" name="Source"/>
+          <p:cNvSpPr txBox="1"/>
+          <p:nvPr/>
+        </p:nvSpPr>
+        <p:spPr>
+          <a:xfrm>
+            <a:off x="773430" y="6180000"/>
             <a:ext cx="10645140" cy="260000"/>
           </a:xfrm>
           <a:prstGeom prst="rect">
@@ -8610,7 +8262,7 @@
       </p:grpSpPr>
       <p:sp>
         <p:nvSpPr>
-          <p:cNvPr id="101" name="标题"/>
+          <p:cNvPr id="111" name="标题"/>
           <p:cNvSpPr txBox="1"/>
           <p:nvPr/>
         </p:nvSpPr>
@@ -8628,7 +8280,7 @@
           </a:ln>
         </p:spPr>
         <p:txBody>
-          <a:bodyPr wrap="square" lIns="91440" tIns="45720" rIns="91440" bIns="45720" rtlCol="0" anchor="ctr"/>
+          <a:bodyPr wrap="square" lIns="91440" tIns="0" rIns="91440" bIns="0" rtlCol="0" anchor="ctr"/>
           <a:lstStyle/>
           <a:p>
             <a:pPr marL="0" indent="0" algn="l">
@@ -8659,34 +8311,30 @@
       </p:sp>
       <p:sp>
         <p:nvSpPr>
-          <p:cNvPr id="102" name="Context"/>
-          <p:cNvSpPr/>
+          <p:cNvPr id="112" name="Lead"/>
+          <p:cNvSpPr txBox="1"/>
           <p:nvPr/>
         </p:nvSpPr>
         <p:spPr>
           <a:xfrm>
-            <a:off x="773430" y="1010000"/>
-            <a:ext cx="10645140" cy="460000"/>
+            <a:off x="773430" y="1045415"/>
+            <a:ext cx="10645140" cy="300000"/>
           </a:xfrm>
           <a:prstGeom prst="rect">
             <a:avLst/>
           </a:prstGeom>
-          <a:solidFill>
-            <a:srgbClr val="E8F1FA"/>
-          </a:solidFill>
-          <a:ln w="12700">
-            <a:solidFill>
-              <a:srgbClr val="C8D9EA"/>
-            </a:solidFill>
+          <a:noFill/>
+          <a:ln>
+            <a:noFill/>
           </a:ln>
         </p:spPr>
         <p:txBody>
-          <a:bodyPr wrap="square" lIns="182880" tIns="68580" rIns="137160" bIns="68580" rtlCol="0" anchor="ctr"/>
+          <a:bodyPr wrap="square" lIns="0" tIns="0" rIns="0" bIns="0" rtlCol="0" anchor="t"/>
           <a:lstStyle/>
           <a:p>
             <a:pPr marL="0" indent="0" algn="l">
               <a:lnSpc>
-                <a:spcPct val="125000"/>
+                <a:spcPct val="120000"/>
               </a:lnSpc>
               <a:spcBef>
                 <a:spcPts val="0"/>
@@ -8699,70 +8347,26 @@
             <a:r>
               <a:rPr lang="zh-CN" altLang="en-US" sz="1250" b="0" kern="1200" dirty="0">
                 <a:solidFill>
-                  <a:srgbClr val="262626"/>
+                  <a:srgbClr val="7F7F7F"/>
                 </a:solidFill>
                 <a:latin typeface="Times New Roman" panose="02020603050405020304" pitchFamily="18" charset="0"/>
                 <a:ea typeface="华文楷体" panose="02010600040101010101" pitchFamily="2" charset="-122"/>
                 <a:cs typeface="Times New Roman" panose="02020603050405020304" pitchFamily="18" charset="0"/>
               </a:rPr>
-              <a:t>《上市公司董事会秘书监管规则》（证监会公告〔2026〕8号）自</a:t>
-            </a:r>
-            <a:r>
-              <a:rPr lang="zh-CN" altLang="en-US" sz="1250" b="1" kern="1200" dirty="0">
-                <a:solidFill>
-                  <a:srgbClr val="004E98"/>
-                </a:solidFill>
-                <a:latin typeface="Times New Roman" panose="02020603050405020304" pitchFamily="18" charset="0"/>
-                <a:ea typeface="华文楷体" panose="02010600040101010101" pitchFamily="2" charset="-122"/>
-                <a:cs typeface="Times New Roman" panose="02020603050405020304" pitchFamily="18" charset="0"/>
-              </a:rPr>
-              <a:t>2026年5月24日</a:t>
-            </a:r>
-            <a:r>
-              <a:rPr lang="zh-CN" altLang="en-US" sz="1250" b="0" kern="1200" dirty="0">
-                <a:solidFill>
-                  <a:srgbClr val="262626"/>
-                </a:solidFill>
-                <a:latin typeface="Times New Roman" panose="02020603050405020304" pitchFamily="18" charset="0"/>
-                <a:ea typeface="华文楷体" panose="02010600040101010101" pitchFamily="2" charset="-122"/>
-                <a:cs typeface="Times New Roman" panose="02020603050405020304" pitchFamily="18" charset="0"/>
-              </a:rPr>
-              <a:t>起施行，共38条；现有任职、兼职安排不符合规定的，应在</a:t>
-            </a:r>
-            <a:r>
-              <a:rPr lang="zh-CN" altLang="en-US" sz="1250" b="1" kern="1200" dirty="0">
-                <a:solidFill>
-                  <a:srgbClr val="004E98"/>
-                </a:solidFill>
-                <a:latin typeface="Times New Roman" panose="02020603050405020304" pitchFamily="18" charset="0"/>
-                <a:ea typeface="华文楷体" panose="02010600040101010101" pitchFamily="2" charset="-122"/>
-                <a:cs typeface="Times New Roman" panose="02020603050405020304" pitchFamily="18" charset="0"/>
-              </a:rPr>
-              <a:t>2027年12月31日</a:t>
-            </a:r>
-            <a:r>
-              <a:rPr lang="zh-CN" altLang="en-US" sz="1250" b="0" kern="1200" dirty="0">
-                <a:solidFill>
-                  <a:srgbClr val="262626"/>
-                </a:solidFill>
-                <a:latin typeface="Times New Roman" panose="02020603050405020304" pitchFamily="18" charset="0"/>
-                <a:ea typeface="华文楷体" panose="02010600040101010101" pitchFamily="2" charset="-122"/>
-                <a:cs typeface="Times New Roman" panose="02020603050405020304" pitchFamily="18" charset="0"/>
-              </a:rPr>
-              <a:t>前调整到位。</a:t>
-            </a:r>
-          </a:p>
-        </p:txBody>
-      </p:sp>
-      <p:sp>
-        <p:nvSpPr>
-          <p:cNvPr id="103" name="SectionBar"/>
+              <a:t>《上市公司董事会秘书监管规则》（证监会公告〔2026〕8号）自2026年5月24日起施行，过渡期至2027年12月31日。</a:t>
+            </a:r>
+          </a:p>
+        </p:txBody>
+      </p:sp>
+      <p:sp>
+        <p:nvSpPr>
+          <p:cNvPr id="113" name="SectionBar"/>
           <p:cNvSpPr/>
           <p:nvPr/>
         </p:nvSpPr>
         <p:spPr>
           <a:xfrm>
-            <a:off x="773430" y="1550000"/>
+            <a:off x="773430" y="1375415"/>
             <a:ext cx="10645140" cy="337185"/>
           </a:xfrm>
           <a:prstGeom prst="rect">
@@ -8783,7 +8387,7 @@
           </a:effectLst>
         </p:spPr>
         <p:txBody>
-          <a:bodyPr wrap="square" lIns="137160" tIns="45720" rIns="91440" bIns="45720" rtlCol="0" anchor="ctr"/>
+          <a:bodyPr wrap="square" lIns="137160" tIns="0" rIns="0" bIns="0" rtlCol="0" anchor="ctr"/>
           <a:lstStyle/>
           <a:p>
             <a:pPr marL="0" indent="0" algn="l">
@@ -8807,41 +8411,37 @@
                 <a:ea typeface="华文楷体" panose="02010600040101010101" pitchFamily="2" charset="-122"/>
                 <a:cs typeface="Times New Roman" panose="02020603050405020304" pitchFamily="18" charset="0"/>
               </a:rPr>
-              <a:t>法律地位：董事会秘书是法定高级管理人员</a:t>
-            </a:r>
-          </a:p>
-        </p:txBody>
-      </p:sp>
-      <p:sp>
-        <p:nvSpPr>
-          <p:cNvPr id="104" name="Fact"/>
-          <p:cNvSpPr/>
+              <a:t>法律地位</a:t>
+            </a:r>
+          </a:p>
+        </p:txBody>
+      </p:sp>
+      <p:sp>
+        <p:nvSpPr>
+          <p:cNvPr id="114" name="Items"/>
+          <p:cNvSpPr txBox="1"/>
           <p:nvPr/>
         </p:nvSpPr>
         <p:spPr>
           <a:xfrm>
-            <a:off x="773430" y="1970000"/>
-            <a:ext cx="2541285" cy="1130000"/>
+            <a:off x="773430" y="1892600"/>
+            <a:ext cx="10645140" cy="721131"/>
           </a:xfrm>
           <a:prstGeom prst="rect">
             <a:avLst/>
           </a:prstGeom>
-          <a:solidFill>
-            <a:srgbClr val="F2F6FB"/>
-          </a:solidFill>
-          <a:ln w="12700">
-            <a:solidFill>
-              <a:srgbClr val="C8D9EA"/>
-            </a:solidFill>
+          <a:noFill/>
+          <a:ln>
+            <a:noFill/>
           </a:ln>
         </p:spPr>
         <p:txBody>
-          <a:bodyPr wrap="square" lIns="160020" tIns="137160" rIns="137160" bIns="91440" rtlCol="0" anchor="t"/>
+          <a:bodyPr wrap="square" lIns="0" tIns="0" rIns="0" bIns="0" rtlCol="0" anchor="t"/>
           <a:lstStyle/>
           <a:p>
-            <a:pPr marL="0" indent="0" algn="l">
+            <a:pPr marL="214313" indent="-214313" algn="l">
               <a:lnSpc>
-                <a:spcPct val="105000"/>
+                <a:spcPct val="150000"/>
               </a:lnSpc>
               <a:spcBef>
                 <a:spcPts val="0"/>
@@ -8849,24 +8449,75 @@
               <a:spcAft>
                 <a:spcPts val="0"/>
               </a:spcAft>
-              <a:buNone/>
+              <a:buClr>
+                <a:srgbClr val="004E98"/>
+              </a:buClr>
+              <a:buFont typeface="Wingdings" panose="05000000000000000000" pitchFamily="2" charset="2"/>
+              <a:buChar char="n"/>
             </a:pPr>
             <a:r>
-              <a:rPr lang="zh-CN" altLang="en-US" sz="1250" b="1" kern="1200" dirty="0">
+              <a:rPr lang="zh-CN" altLang="en-US" sz="1200" b="0" kern="1200" dirty="0">
+                <a:solidFill>
+                  <a:srgbClr val="262626"/>
+                </a:solidFill>
+                <a:latin typeface="Times New Roman" panose="02020603050405020304" pitchFamily="18" charset="0"/>
+                <a:ea typeface="华文楷体" panose="02010600040101010101" pitchFamily="2" charset="-122"/>
+                <a:cs typeface="Times New Roman" panose="02020603050405020304" pitchFamily="18" charset="0"/>
+              </a:rPr>
+              <a:t>董事会秘书是《公司法》规定的</a:t>
+            </a:r>
+            <a:r>
+              <a:rPr lang="zh-CN" altLang="en-US" sz="1200" b="1" kern="1200" dirty="0">
                 <a:solidFill>
                   <a:srgbClr val="004E98"/>
                 </a:solidFill>
+                <a:highlight>
+                  <a:srgbClr val="FFFF00"/>
+                </a:highlight>
                 <a:latin typeface="Times New Roman" panose="02020603050405020304" pitchFamily="18" charset="0"/>
                 <a:ea typeface="华文楷体" panose="02010600040101010101" pitchFamily="2" charset="-122"/>
                 <a:cs typeface="Times New Roman" panose="02020603050405020304" pitchFamily="18" charset="0"/>
               </a:rPr>
-              <a:t>法定高管身份</a:t>
-            </a:r>
-          </a:p>
-          <a:p>
-            <a:pPr marL="0" indent="0" algn="l">
+              <a:t>高级管理人员</a:t>
+            </a:r>
+            <a:r>
+              <a:rPr lang="zh-CN" altLang="en-US" sz="1200" b="0" kern="1200" dirty="0">
+                <a:solidFill>
+                  <a:srgbClr val="262626"/>
+                </a:solidFill>
+                <a:latin typeface="Times New Roman" panose="02020603050405020304" pitchFamily="18" charset="0"/>
+                <a:ea typeface="华文楷体" panose="02010600040101010101" pitchFamily="2" charset="-122"/>
+                <a:cs typeface="Times New Roman" panose="02020603050405020304" pitchFamily="18" charset="0"/>
+              </a:rPr>
+              <a:t>，由</a:t>
+            </a:r>
+            <a:r>
+              <a:rPr lang="zh-CN" altLang="en-US" sz="1200" b="1" kern="1200" dirty="0">
+                <a:solidFill>
+                  <a:srgbClr val="004E98"/>
+                </a:solidFill>
+                <a:latin typeface="Times New Roman" panose="02020603050405020304" pitchFamily="18" charset="0"/>
+                <a:ea typeface="华文楷体" panose="02010600040101010101" pitchFamily="2" charset="-122"/>
+                <a:cs typeface="Times New Roman" panose="02020603050405020304" pitchFamily="18" charset="0"/>
+              </a:rPr>
+              <a:t>董事会聘任</a:t>
+            </a:r>
+            <a:r>
+              <a:rPr lang="zh-CN" altLang="en-US" sz="1200" b="0" kern="1200" dirty="0">
+                <a:solidFill>
+                  <a:srgbClr val="262626"/>
+                </a:solidFill>
+                <a:latin typeface="Times New Roman" panose="02020603050405020304" pitchFamily="18" charset="0"/>
+                <a:ea typeface="华文楷体" panose="02010600040101010101" pitchFamily="2" charset="-122"/>
+                <a:cs typeface="Times New Roman" panose="02020603050405020304" pitchFamily="18" charset="0"/>
+              </a:rPr>
+              <a:t>，向董事会报告工作。</a:t>
+            </a:r>
+          </a:p>
+          <a:p>
+            <a:pPr marL="214313" indent="-214313" algn="l">
               <a:lnSpc>
-                <a:spcPct val="140000"/>
+                <a:spcPct val="150000"/>
               </a:lnSpc>
               <a:spcBef>
                 <a:spcPts val="400"/>
@@ -8874,10 +8525,14 @@
               <a:spcAft>
                 <a:spcPts val="0"/>
               </a:spcAft>
-              <a:buNone/>
+              <a:buClr>
+                <a:srgbClr val="004E98"/>
+              </a:buClr>
+              <a:buFont typeface="Wingdings" panose="05000000000000000000" pitchFamily="2" charset="2"/>
+              <a:buChar char="n"/>
             </a:pPr>
             <a:r>
-              <a:rPr lang="zh-CN" altLang="en-US" sz="1050" b="0" kern="1200" dirty="0">
+              <a:rPr lang="zh-CN" altLang="en-US" sz="1200" b="0" kern="1200" dirty="0">
                 <a:solidFill>
                   <a:srgbClr val="262626"/>
                 </a:solidFill>
@@ -8885,254 +8540,64 @@
                 <a:ea typeface="华文楷体" panose="02010600040101010101" pitchFamily="2" charset="-122"/>
                 <a:cs typeface="Times New Roman" panose="02020603050405020304" pitchFamily="18" charset="0"/>
               </a:rPr>
-              <a:t>《公司法》项下的高级管理人员，与经理、财务负责人同属高管序列</a:t>
-            </a:r>
-          </a:p>
-        </p:txBody>
-      </p:sp>
-      <p:sp>
-        <p:nvSpPr>
-          <p:cNvPr id="105" name="Fact"/>
+              <a:t>上市公司应当设董事会秘书。空缺期间由</a:t>
+            </a:r>
+            <a:r>
+              <a:rPr lang="zh-CN" altLang="en-US" sz="1200" b="1" kern="1200" dirty="0">
+                <a:solidFill>
+                  <a:srgbClr val="004E98"/>
+                </a:solidFill>
+                <a:latin typeface="Times New Roman" panose="02020603050405020304" pitchFamily="18" charset="0"/>
+                <a:ea typeface="华文楷体" panose="02010600040101010101" pitchFamily="2" charset="-122"/>
+                <a:cs typeface="Times New Roman" panose="02020603050405020304" pitchFamily="18" charset="0"/>
+              </a:rPr>
+              <a:t>董事长代行</a:t>
+            </a:r>
+            <a:r>
+              <a:rPr lang="zh-CN" altLang="en-US" sz="1200" b="0" kern="1200" dirty="0">
+                <a:solidFill>
+                  <a:srgbClr val="262626"/>
+                </a:solidFill>
+                <a:latin typeface="Times New Roman" panose="02020603050405020304" pitchFamily="18" charset="0"/>
+                <a:ea typeface="华文楷体" panose="02010600040101010101" pitchFamily="2" charset="-122"/>
+                <a:cs typeface="Times New Roman" panose="02020603050405020304" pitchFamily="18" charset="0"/>
+              </a:rPr>
+              <a:t>职责，并在</a:t>
+            </a:r>
+            <a:r>
+              <a:rPr lang="zh-CN" altLang="en-US" sz="1200" b="1" kern="1200" dirty="0">
+                <a:solidFill>
+                  <a:srgbClr val="004E98"/>
+                </a:solidFill>
+                <a:latin typeface="Times New Roman" panose="02020603050405020304" pitchFamily="18" charset="0"/>
+                <a:ea typeface="华文楷体" panose="02010600040101010101" pitchFamily="2" charset="-122"/>
+                <a:cs typeface="Times New Roman" panose="02020603050405020304" pitchFamily="18" charset="0"/>
+              </a:rPr>
+              <a:t>六个月内</a:t>
+            </a:r>
+            <a:r>
+              <a:rPr lang="zh-CN" altLang="en-US" sz="1200" b="0" kern="1200" dirty="0">
+                <a:solidFill>
+                  <a:srgbClr val="262626"/>
+                </a:solidFill>
+                <a:latin typeface="Times New Roman" panose="02020603050405020304" pitchFamily="18" charset="0"/>
+                <a:ea typeface="华文楷体" panose="02010600040101010101" pitchFamily="2" charset="-122"/>
+                <a:cs typeface="Times New Roman" panose="02020603050405020304" pitchFamily="18" charset="0"/>
+              </a:rPr>
+              <a:t>完成聘任。</a:t>
+            </a:r>
+          </a:p>
+        </p:txBody>
+      </p:sp>
+      <p:sp>
+        <p:nvSpPr>
+          <p:cNvPr id="115" name="SectionBar"/>
           <p:cNvSpPr/>
           <p:nvPr/>
         </p:nvSpPr>
         <p:spPr>
           <a:xfrm>
-            <a:off x="3474715" y="1970000"/>
-            <a:ext cx="2541285" cy="1130000"/>
-          </a:xfrm>
-          <a:prstGeom prst="rect">
-            <a:avLst/>
-          </a:prstGeom>
-          <a:solidFill>
-            <a:srgbClr val="F2F6FB"/>
-          </a:solidFill>
-          <a:ln w="12700">
-            <a:solidFill>
-              <a:srgbClr val="C8D9EA"/>
-            </a:solidFill>
-          </a:ln>
-        </p:spPr>
-        <p:txBody>
-          <a:bodyPr wrap="square" lIns="160020" tIns="137160" rIns="137160" bIns="91440" rtlCol="0" anchor="t"/>
-          <a:lstStyle/>
-          <a:p>
-            <a:pPr marL="0" indent="0" algn="l">
-              <a:lnSpc>
-                <a:spcPct val="105000"/>
-              </a:lnSpc>
-              <a:spcBef>
-                <a:spcPts val="0"/>
-              </a:spcBef>
-              <a:spcAft>
-                <a:spcPts val="0"/>
-              </a:spcAft>
-              <a:buNone/>
-            </a:pPr>
-            <a:r>
-              <a:rPr lang="zh-CN" altLang="en-US" sz="1250" b="1" kern="1200" dirty="0">
-                <a:solidFill>
-                  <a:srgbClr val="004E98"/>
-                </a:solidFill>
-                <a:latin typeface="Times New Roman" panose="02020603050405020304" pitchFamily="18" charset="0"/>
-                <a:ea typeface="华文楷体" panose="02010600040101010101" pitchFamily="2" charset="-122"/>
-                <a:cs typeface="Times New Roman" panose="02020603050405020304" pitchFamily="18" charset="0"/>
-              </a:rPr>
-              <a:t>由董事会聘任</a:t>
-            </a:r>
-          </a:p>
-          <a:p>
-            <a:pPr marL="0" indent="0" algn="l">
-              <a:lnSpc>
-                <a:spcPct val="140000"/>
-              </a:lnSpc>
-              <a:spcBef>
-                <a:spcPts val="400"/>
-              </a:spcBef>
-              <a:spcAft>
-                <a:spcPts val="0"/>
-              </a:spcAft>
-              <a:buNone/>
-            </a:pPr>
-            <a:r>
-              <a:rPr lang="zh-CN" altLang="en-US" sz="1050" b="0" kern="1200" dirty="0">
-                <a:solidFill>
-                  <a:srgbClr val="262626"/>
-                </a:solidFill>
-                <a:latin typeface="Times New Roman" panose="02020603050405020304" pitchFamily="18" charset="0"/>
-                <a:ea typeface="华文楷体" panose="02010600040101010101" pitchFamily="2" charset="-122"/>
-                <a:cs typeface="Times New Roman" panose="02020603050405020304" pitchFamily="18" charset="0"/>
-              </a:rPr>
-              <a:t>董事会聘任与解聘，向董事会报告工作</a:t>
-            </a:r>
-          </a:p>
-        </p:txBody>
-      </p:sp>
-      <p:sp>
-        <p:nvSpPr>
-          <p:cNvPr id="106" name="Fact"/>
-          <p:cNvSpPr/>
-          <p:nvPr/>
-        </p:nvSpPr>
-        <p:spPr>
-          <a:xfrm>
-            <a:off x="6176000" y="1970000"/>
-            <a:ext cx="2541285" cy="1130000"/>
-          </a:xfrm>
-          <a:prstGeom prst="rect">
-            <a:avLst/>
-          </a:prstGeom>
-          <a:solidFill>
-            <a:srgbClr val="F2F6FB"/>
-          </a:solidFill>
-          <a:ln w="12700">
-            <a:solidFill>
-              <a:srgbClr val="C8D9EA"/>
-            </a:solidFill>
-          </a:ln>
-        </p:spPr>
-        <p:txBody>
-          <a:bodyPr wrap="square" lIns="160020" tIns="137160" rIns="137160" bIns="91440" rtlCol="0" anchor="t"/>
-          <a:lstStyle/>
-          <a:p>
-            <a:pPr marL="0" indent="0" algn="l">
-              <a:lnSpc>
-                <a:spcPct val="105000"/>
-              </a:lnSpc>
-              <a:spcBef>
-                <a:spcPts val="0"/>
-              </a:spcBef>
-              <a:spcAft>
-                <a:spcPts val="0"/>
-              </a:spcAft>
-              <a:buNone/>
-            </a:pPr>
-            <a:r>
-              <a:rPr lang="zh-CN" altLang="en-US" sz="1250" b="1" kern="1200" dirty="0">
-                <a:solidFill>
-                  <a:srgbClr val="004E98"/>
-                </a:solidFill>
-                <a:latin typeface="Times New Roman" panose="02020603050405020304" pitchFamily="18" charset="0"/>
-                <a:ea typeface="华文楷体" panose="02010600040101010101" pitchFamily="2" charset="-122"/>
-                <a:cs typeface="Times New Roman" panose="02020603050405020304" pitchFamily="18" charset="0"/>
-              </a:rPr>
-              <a:t>必须设置，不得长期空缺</a:t>
-            </a:r>
-          </a:p>
-          <a:p>
-            <a:pPr marL="0" indent="0" algn="l">
-              <a:lnSpc>
-                <a:spcPct val="140000"/>
-              </a:lnSpc>
-              <a:spcBef>
-                <a:spcPts val="400"/>
-              </a:spcBef>
-              <a:spcAft>
-                <a:spcPts val="0"/>
-              </a:spcAft>
-              <a:buNone/>
-            </a:pPr>
-            <a:r>
-              <a:rPr lang="zh-CN" altLang="en-US" sz="1050" b="0" kern="1200" dirty="0">
-                <a:solidFill>
-                  <a:srgbClr val="262626"/>
-                </a:solidFill>
-                <a:latin typeface="Times New Roman" panose="02020603050405020304" pitchFamily="18" charset="0"/>
-                <a:ea typeface="华文楷体" panose="02010600040101010101" pitchFamily="2" charset="-122"/>
-                <a:cs typeface="Times New Roman" panose="02020603050405020304" pitchFamily="18" charset="0"/>
-              </a:rPr>
-              <a:t>空缺期间由董事长代行，并在六个月内完成补聘</a:t>
-            </a:r>
-          </a:p>
-        </p:txBody>
-      </p:sp>
-      <p:sp>
-        <p:nvSpPr>
-          <p:cNvPr id="107" name="Fact"/>
-          <p:cNvSpPr/>
-          <p:nvPr/>
-        </p:nvSpPr>
-        <p:spPr>
-          <a:xfrm>
-            <a:off x="8877285" y="1970000"/>
-            <a:ext cx="2541285" cy="1130000"/>
-          </a:xfrm>
-          <a:prstGeom prst="rect">
-            <a:avLst/>
-          </a:prstGeom>
-          <a:solidFill>
-            <a:srgbClr val="F2F6FB"/>
-          </a:solidFill>
-          <a:ln w="12700">
-            <a:solidFill>
-              <a:srgbClr val="C8D9EA"/>
-            </a:solidFill>
-          </a:ln>
-        </p:spPr>
-        <p:txBody>
-          <a:bodyPr wrap="square" lIns="160020" tIns="137160" rIns="137160" bIns="91440" rtlCol="0" anchor="t"/>
-          <a:lstStyle/>
-          <a:p>
-            <a:pPr marL="0" indent="0" algn="l">
-              <a:lnSpc>
-                <a:spcPct val="105000"/>
-              </a:lnSpc>
-              <a:spcBef>
-                <a:spcPts val="0"/>
-              </a:spcBef>
-              <a:spcAft>
-                <a:spcPts val="0"/>
-              </a:spcAft>
-              <a:buNone/>
-            </a:pPr>
-            <a:r>
-              <a:rPr lang="zh-CN" altLang="en-US" sz="1250" b="1" kern="1200" dirty="0">
-                <a:solidFill>
-                  <a:srgbClr val="004E98"/>
-                </a:solidFill>
-                <a:latin typeface="Times New Roman" panose="02020603050405020304" pitchFamily="18" charset="0"/>
-                <a:ea typeface="华文楷体" panose="02010600040101010101" pitchFamily="2" charset="-122"/>
-                <a:cs typeface="Times New Roman" panose="02020603050405020304" pitchFamily="18" charset="0"/>
-              </a:rPr>
-              <a:t>依法独立履职受保障</a:t>
-            </a:r>
-          </a:p>
-          <a:p>
-            <a:pPr marL="0" indent="0" algn="l">
-              <a:lnSpc>
-                <a:spcPct val="140000"/>
-              </a:lnSpc>
-              <a:spcBef>
-                <a:spcPts val="400"/>
-              </a:spcBef>
-              <a:spcAft>
-                <a:spcPts val="0"/>
-              </a:spcAft>
-              <a:buNone/>
-            </a:pPr>
-            <a:r>
-              <a:rPr lang="zh-CN" altLang="en-US" sz="1050" b="0" kern="1200" dirty="0">
-                <a:solidFill>
-                  <a:srgbClr val="262626"/>
-                </a:solidFill>
-                <a:latin typeface="Times New Roman" panose="02020603050405020304" pitchFamily="18" charset="0"/>
-                <a:ea typeface="华文楷体" panose="02010600040101010101" pitchFamily="2" charset="-122"/>
-                <a:cs typeface="Times New Roman" panose="02020603050405020304" pitchFamily="18" charset="0"/>
-              </a:rPr>
-              <a:t>有权列席会议、查阅资料、要求相关部门说明，任何人不得阻碍</a:t>
-            </a:r>
-          </a:p>
-        </p:txBody>
-      </p:sp>
-      <p:sp>
-        <p:nvSpPr>
-          <p:cNvPr id="108" name="SectionBar"/>
-          <p:cNvSpPr/>
-          <p:nvPr/>
-        </p:nvSpPr>
-        <p:spPr>
-          <a:xfrm>
-            <a:off x="773430" y="3190000"/>
+            <a:off x="773430" y="2703731"/>
             <a:ext cx="10645140" cy="337185"/>
           </a:xfrm>
           <a:prstGeom prst="rect">
@@ -9153,7 +8618,7 @@
           </a:effectLst>
         </p:spPr>
         <p:txBody>
-          <a:bodyPr wrap="square" lIns="137160" tIns="45720" rIns="91440" bIns="45720" rtlCol="0" anchor="ctr"/>
+          <a:bodyPr wrap="square" lIns="137160" tIns="0" rIns="0" bIns="0" rtlCol="0" anchor="ctr"/>
           <a:lstStyle/>
           <a:p>
             <a:pPr marL="0" indent="0" algn="l">
@@ -9177,21 +8642,21 @@
                 <a:ea typeface="华文楷体" panose="02010600040101010101" pitchFamily="2" charset="-122"/>
                 <a:cs typeface="Times New Roman" panose="02020603050405020304" pitchFamily="18" charset="0"/>
               </a:rPr>
-              <a:t>职责边界：董事会秘书负责的事项与应当区分的事项</a:t>
-            </a:r>
-          </a:p>
-        </p:txBody>
-      </p:sp>
-      <p:sp>
-        <p:nvSpPr>
-          <p:cNvPr id="109" name="Card"/>
+              <a:t>职责边界</a:t>
+            </a:r>
+          </a:p>
+        </p:txBody>
+      </p:sp>
+      <p:sp>
+        <p:nvSpPr>
+          <p:cNvPr id="116" name="Col"/>
           <p:cNvSpPr/>
           <p:nvPr/>
         </p:nvSpPr>
         <p:spPr>
           <a:xfrm>
-            <a:off x="773430" y="3610000"/>
-            <a:ext cx="5172570" cy="1760000"/>
+            <a:off x="773430" y="3220916"/>
+            <a:ext cx="5202570" cy="1769097"/>
           </a:xfrm>
           <a:prstGeom prst="rect">
             <a:avLst/>
@@ -9199,19 +8664,17 @@
           <a:solidFill>
             <a:srgbClr val="F2F6FB"/>
           </a:solidFill>
-          <a:ln w="12700">
-            <a:solidFill>
-              <a:srgbClr val="C8D9EA"/>
-            </a:solidFill>
+          <a:ln>
+            <a:noFill/>
           </a:ln>
         </p:spPr>
         <p:txBody>
-          <a:bodyPr wrap="square" lIns="182880" tIns="137160" rIns="137160" bIns="91440" rtlCol="0" anchor="t"/>
+          <a:bodyPr wrap="square" lIns="182880" tIns="137160" rIns="137160" bIns="91440" rtlCol="0" anchor="ctr"/>
           <a:lstStyle/>
           <a:p>
             <a:pPr marL="0" indent="0" algn="l">
               <a:lnSpc>
-                <a:spcPct val="100000"/>
+                <a:spcPct val="105000"/>
               </a:lnSpc>
               <a:spcBef>
                 <a:spcPts val="0"/>
@@ -9230,29 +8693,24 @@
                 <a:ea typeface="华文楷体" panose="02010600040101010101" pitchFamily="2" charset="-122"/>
                 <a:cs typeface="Times New Roman" panose="02020603050405020304" pitchFamily="18" charset="0"/>
               </a:rPr>
-              <a:t>董事会秘书负责的事项</a:t>
-            </a:r>
-          </a:p>
-          <a:p>
-            <a:pPr marL="171450" indent="-171450" algn="l">
+              <a:t>负责的事项</a:t>
+            </a:r>
+          </a:p>
+          <a:p>
+            <a:pPr marL="0" indent="0" algn="l">
               <a:lnSpc>
-                <a:spcPct val="135000"/>
+                <a:spcPct val="140000"/>
               </a:lnSpc>
               <a:spcBef>
-                <a:spcPts val="340"/>
+                <a:spcPts val="350"/>
               </a:spcBef>
               <a:spcAft>
                 <a:spcPts val="0"/>
               </a:spcAft>
-              <a:buClr>
-                <a:srgbClr val="197BC0"/>
-              </a:buClr>
-              <a:buSzPct val="60"/>
-              <a:buFont typeface="Wingdings" panose="05000000000000000000" pitchFamily="2" charset="2"/>
-              <a:buChar char="n"/>
+              <a:buNone/>
             </a:pPr>
             <a:r>
-              <a:rPr lang="zh-CN" altLang="en-US" sz="1150" b="0" kern="1200" dirty="0">
+              <a:rPr lang="zh-CN" altLang="en-US" sz="1200" b="0" kern="1200" dirty="0">
                 <a:solidFill>
                   <a:srgbClr val="262626"/>
                 </a:solidFill>
@@ -9260,35 +8718,13 @@
                 <a:ea typeface="华文楷体" panose="02010600040101010101" pitchFamily="2" charset="-122"/>
                 <a:cs typeface="Times New Roman" panose="02020603050405020304" pitchFamily="18" charset="0"/>
               </a:rPr>
-              <a:t>信息披露事务：</a:t>
-            </a:r>
-            <a:r>
-              <a:rPr lang="zh-CN" altLang="en-US" sz="1150" b="1" kern="1200" dirty="0">
-                <a:solidFill>
-                  <a:srgbClr val="004E98"/>
-                </a:solidFill>
-                <a:latin typeface="Times New Roman" panose="02020603050405020304" pitchFamily="18" charset="0"/>
-                <a:ea typeface="华文楷体" panose="02010600040101010101" pitchFamily="2" charset="-122"/>
-                <a:cs typeface="Times New Roman" panose="02020603050405020304" pitchFamily="18" charset="0"/>
-              </a:rPr>
-              <a:t>定期报告、临时报告</a:t>
-            </a:r>
-            <a:r>
-              <a:rPr lang="zh-CN" altLang="en-US" sz="1150" b="0" kern="1200" dirty="0">
-                <a:solidFill>
-                  <a:srgbClr val="262626"/>
-                </a:solidFill>
-                <a:latin typeface="Times New Roman" panose="02020603050405020304" pitchFamily="18" charset="0"/>
-                <a:ea typeface="华文楷体" panose="02010600040101010101" pitchFamily="2" charset="-122"/>
-                <a:cs typeface="Times New Roman" panose="02020603050405020304" pitchFamily="18" charset="0"/>
-              </a:rPr>
-              <a:t>的组织编制与披露</a:t>
-            </a:r>
-          </a:p>
-          <a:p>
-            <a:pPr marL="171450" indent="-171450" algn="l">
+              <a:t>信息披露事务：定期报告、临时报告的组织编制与披露</a:t>
+            </a:r>
+          </a:p>
+          <a:p>
+            <a:pPr marL="0" indent="0" algn="l">
               <a:lnSpc>
-                <a:spcPct val="135000"/>
+                <a:spcPct val="140000"/>
               </a:lnSpc>
               <a:spcBef>
                 <a:spcPts val="250"/>
@@ -9296,15 +8732,10 @@
               <a:spcAft>
                 <a:spcPts val="0"/>
               </a:spcAft>
-              <a:buClr>
-                <a:srgbClr val="197BC0"/>
-              </a:buClr>
-              <a:buSzPct val="60"/>
-              <a:buFont typeface="Wingdings" panose="05000000000000000000" pitchFamily="2" charset="2"/>
-              <a:buChar char="n"/>
+              <a:buNone/>
             </a:pPr>
             <a:r>
-              <a:rPr lang="zh-CN" altLang="en-US" sz="1150" b="0" kern="1200" dirty="0">
+              <a:rPr lang="zh-CN" altLang="en-US" sz="1200" b="0" kern="1200" dirty="0">
                 <a:solidFill>
                   <a:srgbClr val="262626"/>
                 </a:solidFill>
@@ -9312,13 +8743,13 @@
                 <a:ea typeface="华文楷体" panose="02010600040101010101" pitchFamily="2" charset="-122"/>
                 <a:cs typeface="Times New Roman" panose="02020603050405020304" pitchFamily="18" charset="0"/>
               </a:rPr>
-              <a:t>会议与治理：股东会、董事会的召集、召开与会议记录</a:t>
-            </a:r>
-          </a:p>
-          <a:p>
-            <a:pPr marL="171450" indent="-171450" algn="l">
+              <a:t>公司治理运作：股东会、董事会的召集、召开与会议记录</a:t>
+            </a:r>
+          </a:p>
+          <a:p>
+            <a:pPr marL="0" indent="0" algn="l">
               <a:lnSpc>
-                <a:spcPct val="135000"/>
+                <a:spcPct val="140000"/>
               </a:lnSpc>
               <a:spcBef>
                 <a:spcPts val="250"/>
@@ -9326,15 +8757,10 @@
               <a:spcAft>
                 <a:spcPts val="0"/>
               </a:spcAft>
-              <a:buClr>
-                <a:srgbClr val="197BC0"/>
-              </a:buClr>
-              <a:buSzPct val="60"/>
-              <a:buFont typeface="Wingdings" panose="05000000000000000000" pitchFamily="2" charset="2"/>
-              <a:buChar char="n"/>
+              <a:buNone/>
             </a:pPr>
             <a:r>
-              <a:rPr lang="zh-CN" altLang="en-US" sz="1150" b="0" kern="1200" dirty="0">
+              <a:rPr lang="zh-CN" altLang="en-US" sz="1200" b="0" kern="1200" dirty="0">
                 <a:solidFill>
                   <a:srgbClr val="262626"/>
                 </a:solidFill>
@@ -9342,62 +8768,21 @@
                 <a:ea typeface="华文楷体" panose="02010600040101010101" pitchFamily="2" charset="-122"/>
                 <a:cs typeface="Times New Roman" panose="02020603050405020304" pitchFamily="18" charset="0"/>
               </a:rPr>
-              <a:t>内外沟通：股东、投资者、董事与</a:t>
-            </a:r>
-            <a:r>
-              <a:rPr lang="zh-CN" altLang="en-US" sz="1150" b="1" kern="1200" dirty="0">
-                <a:solidFill>
-                  <a:srgbClr val="004E98"/>
-                </a:solidFill>
-                <a:latin typeface="Times New Roman" panose="02020603050405020304" pitchFamily="18" charset="0"/>
-                <a:ea typeface="华文楷体" panose="02010600040101010101" pitchFamily="2" charset="-122"/>
-                <a:cs typeface="Times New Roman" panose="02020603050405020304" pitchFamily="18" charset="0"/>
-              </a:rPr>
-              <a:t>证监会、证券交易所</a:t>
-            </a:r>
-          </a:p>
-          <a:p>
-            <a:pPr marL="171450" indent="-171450" algn="l">
-              <a:lnSpc>
-                <a:spcPct val="135000"/>
-              </a:lnSpc>
-              <a:spcBef>
-                <a:spcPts val="250"/>
-              </a:spcBef>
-              <a:spcAft>
-                <a:spcPts val="0"/>
-              </a:spcAft>
-              <a:buClr>
-                <a:srgbClr val="197BC0"/>
-              </a:buClr>
-              <a:buSzPct val="60"/>
-              <a:buFont typeface="Wingdings" panose="05000000000000000000" pitchFamily="2" charset="2"/>
-              <a:buChar char="n"/>
-            </a:pPr>
-            <a:r>
-              <a:rPr lang="zh-CN" altLang="en-US" sz="1150" b="0" kern="1200" dirty="0">
-                <a:solidFill>
-                  <a:srgbClr val="262626"/>
-                </a:solidFill>
-                <a:latin typeface="Times New Roman" panose="02020603050405020304" pitchFamily="18" charset="0"/>
-                <a:ea typeface="华文楷体" panose="02010600040101010101" pitchFamily="2" charset="-122"/>
-                <a:cs typeface="Times New Roman" panose="02020603050405020304" pitchFamily="18" charset="0"/>
-              </a:rPr>
-              <a:t>内幕信息与保密：内幕信息知情人档案的登记与保管</a:t>
-            </a:r>
-          </a:p>
-        </p:txBody>
-      </p:sp>
-      <p:sp>
-        <p:nvSpPr>
-          <p:cNvPr id="110" name="Card"/>
+              <a:t>内外沟通：股东、投资者、董事与证监会、证券交易所</a:t>
+            </a:r>
+          </a:p>
+        </p:txBody>
+      </p:sp>
+      <p:sp>
+        <p:nvSpPr>
+          <p:cNvPr id="117" name="Col"/>
           <p:cNvSpPr/>
           <p:nvPr/>
         </p:nvSpPr>
         <p:spPr>
           <a:xfrm>
-            <a:off x="6246000" y="3610000"/>
-            <a:ext cx="5172570" cy="1760000"/>
+            <a:off x="6216000" y="3220916"/>
+            <a:ext cx="5202570" cy="1769097"/>
           </a:xfrm>
           <a:prstGeom prst="rect">
             <a:avLst/>
@@ -9405,14 +8790,145 @@
           <a:solidFill>
             <a:srgbClr val="F2F6FB"/>
           </a:solidFill>
-          <a:ln w="12700">
-            <a:solidFill>
-              <a:srgbClr val="C8D9EA"/>
-            </a:solidFill>
+          <a:ln>
+            <a:noFill/>
           </a:ln>
         </p:spPr>
         <p:txBody>
-          <a:bodyPr wrap="square" lIns="182880" tIns="137160" rIns="137160" bIns="91440" rtlCol="0" anchor="t"/>
+          <a:bodyPr wrap="square" lIns="182880" tIns="137160" rIns="137160" bIns="91440" rtlCol="0" anchor="ctr"/>
+          <a:lstStyle/>
+          <a:p>
+            <a:pPr marL="0" indent="0" algn="l">
+              <a:lnSpc>
+                <a:spcPct val="105000"/>
+              </a:lnSpc>
+              <a:spcBef>
+                <a:spcPts val="0"/>
+              </a:spcBef>
+              <a:spcAft>
+                <a:spcPts val="0"/>
+              </a:spcAft>
+              <a:buNone/>
+            </a:pPr>
+            <a:r>
+              <a:rPr lang="zh-CN" altLang="en-US" sz="1400" b="1" kern="1200" dirty="0">
+                <a:solidFill>
+                  <a:srgbClr val="004E98"/>
+                </a:solidFill>
+                <a:latin typeface="Times New Roman" panose="02020603050405020304" pitchFamily="18" charset="0"/>
+                <a:ea typeface="华文楷体" panose="02010600040101010101" pitchFamily="2" charset="-122"/>
+                <a:cs typeface="Times New Roman" panose="02020603050405020304" pitchFamily="18" charset="0"/>
+              </a:rPr>
+              <a:t>应当与之分开的事项</a:t>
+            </a:r>
+          </a:p>
+          <a:p>
+            <a:pPr marL="0" indent="0" algn="l">
+              <a:lnSpc>
+                <a:spcPct val="140000"/>
+              </a:lnSpc>
+              <a:spcBef>
+                <a:spcPts val="350"/>
+              </a:spcBef>
+              <a:spcAft>
+                <a:spcPts val="0"/>
+              </a:spcAft>
+              <a:buNone/>
+            </a:pPr>
+            <a:r>
+              <a:rPr lang="zh-CN" altLang="en-US" sz="1200" b="0" kern="1200" dirty="0">
+                <a:solidFill>
+                  <a:srgbClr val="262626"/>
+                </a:solidFill>
+                <a:latin typeface="Times New Roman" panose="02020603050405020304" pitchFamily="18" charset="0"/>
+                <a:ea typeface="华文楷体" panose="02010600040101010101" pitchFamily="2" charset="-122"/>
+                <a:cs typeface="Times New Roman" panose="02020603050405020304" pitchFamily="18" charset="0"/>
+              </a:rPr>
+              <a:t>经营决策与业务执行——属经理层职责</a:t>
+            </a:r>
+          </a:p>
+          <a:p>
+            <a:pPr marL="0" indent="0" algn="l">
+              <a:lnSpc>
+                <a:spcPct val="140000"/>
+              </a:lnSpc>
+              <a:spcBef>
+                <a:spcPts val="250"/>
+              </a:spcBef>
+              <a:spcAft>
+                <a:spcPts val="0"/>
+              </a:spcAft>
+              <a:buNone/>
+            </a:pPr>
+            <a:r>
+              <a:rPr lang="zh-CN" altLang="en-US" sz="1200" b="0" kern="1200" dirty="0">
+                <a:solidFill>
+                  <a:srgbClr val="262626"/>
+                </a:solidFill>
+                <a:latin typeface="Times New Roman" panose="02020603050405020304" pitchFamily="18" charset="0"/>
+                <a:ea typeface="华文楷体" panose="02010600040101010101" pitchFamily="2" charset="-122"/>
+                <a:cs typeface="Times New Roman" panose="02020603050405020304" pitchFamily="18" charset="0"/>
+              </a:rPr>
+              <a:t>财务核算与资金管理——属财务负责人职责</a:t>
+            </a:r>
+          </a:p>
+          <a:p>
+            <a:pPr marL="0" indent="0" algn="l">
+              <a:lnSpc>
+                <a:spcPct val="140000"/>
+              </a:lnSpc>
+              <a:spcBef>
+                <a:spcPts val="250"/>
+              </a:spcBef>
+              <a:spcAft>
+                <a:spcPts val="0"/>
+              </a:spcAft>
+              <a:buNone/>
+            </a:pPr>
+            <a:r>
+              <a:rPr lang="zh-CN" altLang="en-US" sz="1200" b="1" kern="1200" dirty="0">
+                <a:solidFill>
+                  <a:srgbClr val="C00000"/>
+                </a:solidFill>
+                <a:latin typeface="Times New Roman" panose="02020603050405020304" pitchFamily="18" charset="0"/>
+                <a:ea typeface="华文楷体" panose="02010600040101010101" pitchFamily="2" charset="-122"/>
+                <a:cs typeface="Times New Roman" panose="02020603050405020304" pitchFamily="18" charset="0"/>
+              </a:rPr>
+              <a:t>故不得兼任经理、分管经营业务的副经理、财务负责人</a:t>
+            </a:r>
+          </a:p>
+        </p:txBody>
+      </p:sp>
+      <p:sp>
+        <p:nvSpPr>
+          <p:cNvPr id="118" name="SectionBar"/>
+          <p:cNvSpPr/>
+          <p:nvPr/>
+        </p:nvSpPr>
+        <p:spPr>
+          <a:xfrm>
+            <a:off x="773430" y="5140013"/>
+            <a:ext cx="10645140" cy="337185"/>
+          </a:xfrm>
+          <a:prstGeom prst="rect">
+            <a:avLst/>
+          </a:prstGeom>
+          <a:solidFill>
+            <a:srgbClr val="004E98"/>
+          </a:solidFill>
+          <a:ln>
+            <a:noFill/>
+          </a:ln>
+          <a:effectLst>
+            <a:outerShdw blurRad="50800" dist="38100" dir="2700000" algn="tl" rotWithShape="0">
+              <a:prstClr val="black">
+                <a:alpha val="40000"/>
+              </a:prstClr>
+            </a:outerShdw>
+          </a:effectLst>
+        </p:spPr>
+        <p:txBody>
+          <a:bodyPr wrap="square" lIns="137160" tIns="0" rIns="0" bIns="0" rtlCol="0" anchor="ctr"/>
           <a:lstStyle/>
           <a:p>
             <a:pPr marL="0" indent="0" algn="l">
@@ -9430,167 +8946,43 @@
             <a:r>
               <a:rPr lang="zh-CN" altLang="en-US" sz="1400" b="1" kern="1200" dirty="0">
                 <a:solidFill>
-                  <a:srgbClr val="004E98"/>
+                  <a:srgbClr val="FFFFFF"/>
                 </a:solidFill>
                 <a:latin typeface="Times New Roman" panose="02020603050405020304" pitchFamily="18" charset="0"/>
                 <a:ea typeface="华文楷体" panose="02010600040101010101" pitchFamily="2" charset="-122"/>
                 <a:cs typeface="Times New Roman" panose="02020603050405020304" pitchFamily="18" charset="0"/>
               </a:rPr>
-              <a:t>应当与其职责相区分的事项</a:t>
-            </a:r>
-          </a:p>
-          <a:p>
-            <a:pPr marL="171450" indent="-171450" algn="l">
-              <a:lnSpc>
-                <a:spcPct val="135000"/>
-              </a:lnSpc>
-              <a:spcBef>
-                <a:spcPts val="340"/>
-              </a:spcBef>
-              <a:spcAft>
-                <a:spcPts val="0"/>
-              </a:spcAft>
-              <a:buClr>
-                <a:srgbClr val="197BC0"/>
-              </a:buClr>
-              <a:buSzPct val="60"/>
-              <a:buFont typeface="Wingdings" panose="05000000000000000000" pitchFamily="2" charset="2"/>
-              <a:buChar char="n"/>
-            </a:pPr>
-            <a:r>
-              <a:rPr lang="zh-CN" altLang="en-US" sz="1150" b="0" kern="1200" dirty="0">
-                <a:solidFill>
-                  <a:srgbClr val="262626"/>
-                </a:solidFill>
-                <a:latin typeface="Times New Roman" panose="02020603050405020304" pitchFamily="18" charset="0"/>
-                <a:ea typeface="华文楷体" panose="02010600040101010101" pitchFamily="2" charset="-122"/>
-                <a:cs typeface="Times New Roman" panose="02020603050405020304" pitchFamily="18" charset="0"/>
-              </a:rPr>
-              <a:t>经营决策与业务执行——属经理层职责</a:t>
-            </a:r>
-          </a:p>
-          <a:p>
-            <a:pPr marL="171450" indent="-171450" algn="l">
-              <a:lnSpc>
-                <a:spcPct val="135000"/>
-              </a:lnSpc>
-              <a:spcBef>
-                <a:spcPts val="250"/>
-              </a:spcBef>
-              <a:spcAft>
-                <a:spcPts val="0"/>
-              </a:spcAft>
-              <a:buClr>
-                <a:srgbClr val="197BC0"/>
-              </a:buClr>
-              <a:buSzPct val="60"/>
-              <a:buFont typeface="Wingdings" panose="05000000000000000000" pitchFamily="2" charset="2"/>
-              <a:buChar char="n"/>
-            </a:pPr>
-            <a:r>
-              <a:rPr lang="zh-CN" altLang="en-US" sz="1150" b="0" kern="1200" dirty="0">
-                <a:solidFill>
-                  <a:srgbClr val="262626"/>
-                </a:solidFill>
-                <a:latin typeface="Times New Roman" panose="02020603050405020304" pitchFamily="18" charset="0"/>
-                <a:ea typeface="华文楷体" panose="02010600040101010101" pitchFamily="2" charset="-122"/>
-                <a:cs typeface="Times New Roman" panose="02020603050405020304" pitchFamily="18" charset="0"/>
-              </a:rPr>
-              <a:t>财务核算与资金管理——属财务负责人职责</a:t>
-            </a:r>
-          </a:p>
-          <a:p>
-            <a:pPr marL="171450" indent="-171450" algn="l">
-              <a:lnSpc>
-                <a:spcPct val="135000"/>
-              </a:lnSpc>
-              <a:spcBef>
-                <a:spcPts val="250"/>
-              </a:spcBef>
-              <a:spcAft>
-                <a:spcPts val="0"/>
-              </a:spcAft>
-              <a:buClr>
-                <a:srgbClr val="197BC0"/>
-              </a:buClr>
-              <a:buSzPct val="60"/>
-              <a:buFont typeface="Wingdings" panose="05000000000000000000" pitchFamily="2" charset="2"/>
-              <a:buChar char="n"/>
-            </a:pPr>
-            <a:r>
-              <a:rPr lang="zh-CN" altLang="en-US" sz="1150" b="1" kern="1200" dirty="0">
-                <a:solidFill>
-                  <a:srgbClr val="C00000"/>
-                </a:solidFill>
-                <a:latin typeface="Times New Roman" panose="02020603050405020304" pitchFamily="18" charset="0"/>
-                <a:ea typeface="华文楷体" panose="02010600040101010101" pitchFamily="2" charset="-122"/>
-                <a:cs typeface="Times New Roman" panose="02020603050405020304" pitchFamily="18" charset="0"/>
-              </a:rPr>
-              <a:t>故不得兼任经理、分管经营业务的副经理、财务负责人</a:t>
-            </a:r>
-          </a:p>
-          <a:p>
-            <a:pPr marL="171450" indent="-171450" algn="l">
-              <a:lnSpc>
-                <a:spcPct val="135000"/>
-              </a:lnSpc>
-              <a:spcBef>
-                <a:spcPts val="250"/>
-              </a:spcBef>
-              <a:spcAft>
-                <a:spcPts val="0"/>
-              </a:spcAft>
-              <a:buClr>
-                <a:srgbClr val="197BC0"/>
-              </a:buClr>
-              <a:buSzPct val="60"/>
-              <a:buFont typeface="Wingdings" panose="05000000000000000000" pitchFamily="2" charset="2"/>
-              <a:buChar char="n"/>
-            </a:pPr>
-            <a:r>
-              <a:rPr lang="zh-CN" altLang="en-US" sz="1150" b="0" kern="1200" dirty="0">
-                <a:solidFill>
-                  <a:srgbClr val="262626"/>
-                </a:solidFill>
-                <a:latin typeface="Times New Roman" panose="02020603050405020304" pitchFamily="18" charset="0"/>
-                <a:ea typeface="华文楷体" panose="02010600040101010101" pitchFamily="2" charset="-122"/>
-                <a:cs typeface="Times New Roman" panose="02020603050405020304" pitchFamily="18" charset="0"/>
-              </a:rPr>
-              <a:t>兼任其他职务的，应明确区分职责并保证时间精力</a:t>
-            </a:r>
-          </a:p>
-        </p:txBody>
-      </p:sp>
-      <p:sp>
-        <p:nvSpPr>
-          <p:cNvPr id="111" name="Liability"/>
-          <p:cNvSpPr/>
+              <a:t>履职责任</a:t>
+            </a:r>
+          </a:p>
+        </p:txBody>
+      </p:sp>
+      <p:sp>
+        <p:nvSpPr>
+          <p:cNvPr id="119" name="Items"/>
+          <p:cNvSpPr txBox="1"/>
           <p:nvPr/>
         </p:nvSpPr>
         <p:spPr>
           <a:xfrm>
-            <a:off x="773430" y="5460000"/>
-            <a:ext cx="10645140" cy="460000"/>
+            <a:off x="773430" y="5657198"/>
+            <a:ext cx="10645140" cy="362117"/>
           </a:xfrm>
           <a:prstGeom prst="rect">
             <a:avLst/>
           </a:prstGeom>
-          <a:solidFill>
-            <a:srgbClr val="FDF1F1"/>
-          </a:solidFill>
-          <a:ln w="9525">
-            <a:solidFill>
-              <a:srgbClr val="C00000"/>
-            </a:solidFill>
+          <a:noFill/>
+          <a:ln>
+            <a:noFill/>
           </a:ln>
         </p:spPr>
         <p:txBody>
-          <a:bodyPr wrap="square" lIns="182880" tIns="68580" rIns="182880" bIns="68580" rtlCol="0" anchor="ctr"/>
+          <a:bodyPr wrap="square" lIns="0" tIns="0" rIns="0" bIns="0" rtlCol="0" anchor="t"/>
           <a:lstStyle/>
           <a:p>
-            <a:pPr marL="0" indent="0" algn="ctr">
+            <a:pPr marL="214313" indent="-214313" algn="l">
               <a:lnSpc>
-                <a:spcPct val="120000"/>
+                <a:spcPct val="150000"/>
               </a:lnSpc>
               <a:spcBef>
                 <a:spcPts val="0"/>
@@ -9598,10 +8990,47 @@
               <a:spcAft>
                 <a:spcPts val="0"/>
               </a:spcAft>
-              <a:buNone/>
+              <a:buClr>
+                <a:srgbClr val="004E98"/>
+              </a:buClr>
+              <a:buFont typeface="Wingdings" panose="05000000000000000000" pitchFamily="2" charset="2"/>
+              <a:buChar char="n"/>
             </a:pPr>
             <a:r>
-              <a:rPr lang="zh-CN" altLang="en-US" sz="1400" b="1" kern="1200" dirty="0">
+              <a:rPr lang="zh-CN" altLang="en-US" sz="1200" b="0" kern="1200" dirty="0">
+                <a:solidFill>
+                  <a:srgbClr val="262626"/>
+                </a:solidFill>
+                <a:latin typeface="Times New Roman" panose="02020603050405020304" pitchFamily="18" charset="0"/>
+                <a:ea typeface="华文楷体" panose="02010600040101010101" pitchFamily="2" charset="-122"/>
+                <a:cs typeface="Times New Roman" panose="02020603050405020304" pitchFamily="18" charset="0"/>
+              </a:rPr>
+              <a:t>对</a:t>
+            </a:r>
+            <a:r>
+              <a:rPr lang="zh-CN" altLang="en-US" sz="1200" b="1" kern="1200" dirty="0">
+                <a:solidFill>
+                  <a:srgbClr val="004E98"/>
+                </a:solidFill>
+                <a:latin typeface="Times New Roman" panose="02020603050405020304" pitchFamily="18" charset="0"/>
+                <a:ea typeface="华文楷体" panose="02010600040101010101" pitchFamily="2" charset="-122"/>
+                <a:cs typeface="Times New Roman" panose="02020603050405020304" pitchFamily="18" charset="0"/>
+              </a:rPr>
+              <a:t>临时报告</a:t>
+            </a:r>
+            <a:r>
+              <a:rPr lang="zh-CN" altLang="en-US" sz="1200" b="0" kern="1200" dirty="0">
+                <a:solidFill>
+                  <a:srgbClr val="262626"/>
+                </a:solidFill>
+                <a:latin typeface="Times New Roman" panose="02020603050405020304" pitchFamily="18" charset="0"/>
+                <a:ea typeface="华文楷体" panose="02010600040101010101" pitchFamily="2" charset="-122"/>
+                <a:cs typeface="Times New Roman" panose="02020603050405020304" pitchFamily="18" charset="0"/>
+              </a:rPr>
+              <a:t>信息披露的真实、准确、完整承担</a:t>
+            </a:r>
+            <a:r>
+              <a:rPr lang="zh-CN" altLang="en-US" sz="1200" b="1" kern="1200" dirty="0">
                 <a:solidFill>
                   <a:srgbClr val="C00000"/>
                 </a:solidFill>
@@ -9609,20 +9038,31 @@
                 <a:ea typeface="华文楷体" panose="02010600040101010101" pitchFamily="2" charset="-122"/>
                 <a:cs typeface="Times New Roman" panose="02020603050405020304" pitchFamily="18" charset="0"/>
               </a:rPr>
-              <a:t>董事长、经理、董事会秘书对临时报告信息披露的真实、准确、完整、及时、公平承担主要责任。</a:t>
-            </a:r>
-          </a:p>
-        </p:txBody>
-      </p:sp>
-      <p:sp>
-        <p:nvSpPr>
-          <p:cNvPr id="112" name="Footnote"/>
+              <a:t>主要责任</a:t>
+            </a:r>
+            <a:r>
+              <a:rPr lang="zh-CN" altLang="en-US" sz="1200" b="0" kern="1200" dirty="0">
+                <a:solidFill>
+                  <a:srgbClr val="262626"/>
+                </a:solidFill>
+                <a:latin typeface="Times New Roman" panose="02020603050405020304" pitchFamily="18" charset="0"/>
+                <a:ea typeface="华文楷体" panose="02010600040101010101" pitchFamily="2" charset="-122"/>
+                <a:cs typeface="Times New Roman" panose="02020603050405020304" pitchFamily="18" charset="0"/>
+              </a:rPr>
+              <a:t>；未勤勉尽责的，依法追责。</a:t>
+            </a:r>
+          </a:p>
+        </p:txBody>
+      </p:sp>
+      <p:sp>
+        <p:nvSpPr>
+          <p:cNvPr id="120" name="Source"/>
           <p:cNvSpPr txBox="1"/>
           <p:nvPr/>
         </p:nvSpPr>
         <p:spPr>
           <a:xfrm>
-            <a:off x="773430" y="6010000"/>
+            <a:off x="773430" y="6180000"/>
             <a:ext cx="10645140" cy="260000"/>
           </a:xfrm>
           <a:prstGeom prst="rect">
@@ -9658,7 +9098,7 @@
                 <a:ea typeface="华文楷体" panose="02010600040101010101" pitchFamily="2" charset="-122"/>
                 <a:cs typeface="Times New Roman" panose="02020603050405020304" pitchFamily="18" charset="0"/>
               </a:rPr>
-              <a:t>依据：《公司法》第二百六十五条；《上市公司董事会秘书监管规则》第二条、第七条、第二十五条、第二十六条、第二十八条、第三十八条。</a:t>
+              <a:t>依据：《上市公司董事会秘书监管规则》第二条、第七条、第二十五条、第二十六条、第三十六条。</a:t>
             </a:r>
           </a:p>
         </p:txBody>
@@ -9690,7 +9130,7 @@
       </p:grpSpPr>
       <p:sp>
         <p:nvSpPr>
-          <p:cNvPr id="101" name="标题"/>
+          <p:cNvPr id="104" name="标题"/>
           <p:cNvSpPr txBox="1"/>
           <p:nvPr/>
         </p:nvSpPr>
@@ -9708,7 +9148,7 @@
           </a:ln>
         </p:spPr>
         <p:txBody>
-          <a:bodyPr wrap="square" lIns="91440" tIns="45720" rIns="91440" bIns="45720" rtlCol="0" anchor="ctr"/>
+          <a:bodyPr wrap="square" lIns="91440" tIns="0" rIns="91440" bIns="0" rtlCol="0" anchor="ctr"/>
           <a:lstStyle/>
           <a:p>
             <a:pPr marL="0" indent="0" algn="l">
@@ -9739,13 +9179,13 @@
       </p:sp>
       <p:sp>
         <p:nvSpPr>
-          <p:cNvPr id="102" name="SectionBar"/>
+          <p:cNvPr id="105" name="SectionBar"/>
           <p:cNvSpPr/>
           <p:nvPr/>
         </p:nvSpPr>
         <p:spPr>
           <a:xfrm>
-            <a:off x="773430" y="1010000"/>
+            <a:off x="773430" y="1070365"/>
             <a:ext cx="10645140" cy="337185"/>
           </a:xfrm>
           <a:prstGeom prst="rect">
@@ -9766,7 +9206,7 @@
           </a:effectLst>
         </p:spPr>
         <p:txBody>
-          <a:bodyPr wrap="square" lIns="137160" tIns="45720" rIns="91440" bIns="45720" rtlCol="0" anchor="ctr"/>
+          <a:bodyPr wrap="square" lIns="137160" tIns="0" rIns="0" bIns="0" rtlCol="0" anchor="ctr"/>
           <a:lstStyle/>
           <a:p>
             <a:pPr marL="0" indent="0" algn="l">
@@ -9790,21 +9230,21 @@
                 <a:ea typeface="华文楷体" panose="02010600040101010101" pitchFamily="2" charset="-122"/>
                 <a:cs typeface="Times New Roman" panose="02020603050405020304" pitchFamily="18" charset="0"/>
               </a:rPr>
-              <a:t>专业背景要求：下列三类情形符合其一即可（规则第二十二条第一项）</a:t>
-            </a:r>
-          </a:p>
-        </p:txBody>
-      </p:sp>
-      <p:sp>
-        <p:nvSpPr>
-          <p:cNvPr id="103" name="Path"/>
+              <a:t>专业背景与年限（规则第二十二条第一项）：下列三类情形符合其一即可</a:t>
+            </a:r>
+          </a:p>
+        </p:txBody>
+      </p:sp>
+      <p:sp>
+        <p:nvSpPr>
+          <p:cNvPr id="106" name="Col"/>
           <p:cNvSpPr/>
           <p:nvPr/>
         </p:nvSpPr>
         <p:spPr>
           <a:xfrm>
-            <a:off x="773430" y="1470000"/>
-            <a:ext cx="3401713" cy="1180000"/>
+            <a:off x="773430" y="1587550"/>
+            <a:ext cx="3388380" cy="1816012"/>
           </a:xfrm>
           <a:prstGeom prst="rect">
             <a:avLst/>
@@ -9812,14 +9252,12 @@
           <a:solidFill>
             <a:srgbClr val="F2F6FB"/>
           </a:solidFill>
-          <a:ln w="12700">
-            <a:solidFill>
-              <a:srgbClr val="C8D9EA"/>
-            </a:solidFill>
+          <a:ln>
+            <a:noFill/>
           </a:ln>
         </p:spPr>
         <p:txBody>
-          <a:bodyPr wrap="square" lIns="182880" tIns="137160" rIns="137160" bIns="91440" rtlCol="0" anchor="t"/>
+          <a:bodyPr wrap="square" lIns="182880" tIns="137160" rIns="137160" bIns="91440" rtlCol="0" anchor="ctr"/>
           <a:lstStyle/>
           <a:p>
             <a:pPr marL="0" indent="0" algn="l">
@@ -9835,7 +9273,7 @@
               <a:buNone/>
             </a:pPr>
             <a:r>
-              <a:rPr lang="zh-CN" altLang="en-US" sz="1450" b="1" kern="1200" dirty="0">
+              <a:rPr lang="zh-CN" altLang="en-US" sz="1400" b="1" kern="1200" dirty="0">
                 <a:solidFill>
                   <a:srgbClr val="004E98"/>
                 </a:solidFill>
@@ -9849,10 +9287,10 @@
           <a:p>
             <a:pPr marL="0" indent="0" algn="l">
               <a:lnSpc>
-                <a:spcPct val="145000"/>
+                <a:spcPct val="140000"/>
               </a:lnSpc>
               <a:spcBef>
-                <a:spcPts val="400"/>
+                <a:spcPts val="350"/>
               </a:spcBef>
               <a:spcAft>
                 <a:spcPts val="0"/>
@@ -9868,21 +9306,49 @@
                 <a:ea typeface="华文楷体" panose="02010600040101010101" pitchFamily="2" charset="-122"/>
                 <a:cs typeface="Times New Roman" panose="02020603050405020304" pitchFamily="18" charset="0"/>
               </a:rPr>
-              <a:t>财务、会计、审计、法律合规、金融从业，或其他与履行董事会秘书职责相关的工作经验</a:t>
-            </a:r>
-          </a:p>
-        </p:txBody>
-      </p:sp>
-      <p:sp>
-        <p:nvSpPr>
-          <p:cNvPr id="104" name="Path"/>
+              <a:t>财务、会计、审计、法律合规、金融从业，或其他与履行董事会秘书职责相关的经验</a:t>
+            </a:r>
+          </a:p>
+          <a:p>
+            <a:pPr marL="0" indent="0" algn="l">
+              <a:lnSpc>
+                <a:spcPct val="140000"/>
+              </a:lnSpc>
+              <a:spcBef>
+                <a:spcPts val="250"/>
+              </a:spcBef>
+              <a:spcAft>
+                <a:spcPts val="0"/>
+              </a:spcAft>
+              <a:buNone/>
+            </a:pPr>
+            <a:r>
+              <a:rPr lang="zh-CN" altLang="en-US" sz="1200" b="1" kern="1200" dirty="0">
+                <a:solidFill>
+                  <a:srgbClr val="004E98"/>
+                </a:solidFill>
+                <a:highlight>
+                  <a:srgbClr val="FFFF00"/>
+                </a:highlight>
+                <a:latin typeface="Times New Roman" panose="02020603050405020304" pitchFamily="18" charset="0"/>
+                <a:ea typeface="华文楷体" panose="02010600040101010101" pitchFamily="2" charset="-122"/>
+                <a:cs typeface="Times New Roman" panose="02020603050405020304" pitchFamily="18" charset="0"/>
+              </a:rPr>
+              <a:t>＋ 五年以上工作经验</a:t>
+            </a:r>
+          </a:p>
+        </p:txBody>
+      </p:sp>
+      <p:sp>
+        <p:nvSpPr>
+          <p:cNvPr id="107" name="Col"/>
           <p:cNvSpPr/>
           <p:nvPr/>
         </p:nvSpPr>
         <p:spPr>
           <a:xfrm>
-            <a:off x="4395143" y="1470000"/>
-            <a:ext cx="3401713" cy="1180000"/>
+            <a:off x="4401810" y="1587550"/>
+            <a:ext cx="3388380" cy="1816012"/>
           </a:xfrm>
           <a:prstGeom prst="rect">
             <a:avLst/>
@@ -9890,14 +9356,12 @@
           <a:solidFill>
             <a:srgbClr val="F2F6FB"/>
           </a:solidFill>
-          <a:ln w="12700">
-            <a:solidFill>
-              <a:srgbClr val="C8D9EA"/>
-            </a:solidFill>
+          <a:ln>
+            <a:noFill/>
           </a:ln>
         </p:spPr>
         <p:txBody>
-          <a:bodyPr wrap="square" lIns="182880" tIns="137160" rIns="137160" bIns="91440" rtlCol="0" anchor="t"/>
+          <a:bodyPr wrap="square" lIns="182880" tIns="137160" rIns="137160" bIns="91440" rtlCol="0" anchor="ctr"/>
           <a:lstStyle/>
           <a:p>
             <a:pPr marL="0" indent="0" algn="l">
@@ -9913,7 +9377,7 @@
               <a:buNone/>
             </a:pPr>
             <a:r>
-              <a:rPr lang="zh-CN" altLang="en-US" sz="1450" b="1" kern="1200" dirty="0">
+              <a:rPr lang="zh-CN" altLang="en-US" sz="1400" b="1" kern="1200" dirty="0">
                 <a:solidFill>
                   <a:srgbClr val="004E98"/>
                 </a:solidFill>
@@ -9927,10 +9391,10 @@
           <a:p>
             <a:pPr marL="0" indent="0" algn="l">
               <a:lnSpc>
-                <a:spcPct val="145000"/>
+                <a:spcPct val="140000"/>
               </a:lnSpc>
               <a:spcBef>
-                <a:spcPts val="400"/>
+                <a:spcPts val="350"/>
               </a:spcBef>
               <a:spcAft>
                 <a:spcPts val="0"/>
@@ -9949,18 +9413,46 @@
               <a:t>取得法律职业资格证书</a:t>
             </a:r>
           </a:p>
-        </p:txBody>
-      </p:sp>
-      <p:sp>
-        <p:nvSpPr>
-          <p:cNvPr id="105" name="Path"/>
+          <a:p>
+            <a:pPr marL="0" indent="0" algn="l">
+              <a:lnSpc>
+                <a:spcPct val="140000"/>
+              </a:lnSpc>
+              <a:spcBef>
+                <a:spcPts val="250"/>
+              </a:spcBef>
+              <a:spcAft>
+                <a:spcPts val="0"/>
+              </a:spcAft>
+              <a:buNone/>
+            </a:pPr>
+            <a:r>
+              <a:rPr lang="zh-CN" altLang="en-US" sz="1200" b="1" kern="1200" dirty="0">
+                <a:solidFill>
+                  <a:srgbClr val="004E98"/>
+                </a:solidFill>
+                <a:highlight>
+                  <a:srgbClr val="FFFF00"/>
+                </a:highlight>
+                <a:latin typeface="Times New Roman" panose="02020603050405020304" pitchFamily="18" charset="0"/>
+                <a:ea typeface="华文楷体" panose="02010600040101010101" pitchFamily="2" charset="-122"/>
+                <a:cs typeface="Times New Roman" panose="02020603050405020304" pitchFamily="18" charset="0"/>
+              </a:rPr>
+              <a:t>＋ 五年以上工作经验</a:t>
+            </a:r>
+          </a:p>
+        </p:txBody>
+      </p:sp>
+      <p:sp>
+        <p:nvSpPr>
+          <p:cNvPr id="108" name="Col"/>
           <p:cNvSpPr/>
           <p:nvPr/>
         </p:nvSpPr>
         <p:spPr>
           <a:xfrm>
-            <a:off x="8016856" y="1470000"/>
-            <a:ext cx="3401713" cy="1180000"/>
+            <a:off x="8030190" y="1587550"/>
+            <a:ext cx="3388380" cy="1816012"/>
           </a:xfrm>
           <a:prstGeom prst="rect">
             <a:avLst/>
@@ -9968,14 +9460,12 @@
           <a:solidFill>
             <a:srgbClr val="F2F6FB"/>
           </a:solidFill>
-          <a:ln w="12700">
-            <a:solidFill>
-              <a:srgbClr val="C8D9EA"/>
-            </a:solidFill>
+          <a:ln>
+            <a:noFill/>
           </a:ln>
         </p:spPr>
         <p:txBody>
-          <a:bodyPr wrap="square" lIns="182880" tIns="137160" rIns="137160" bIns="91440" rtlCol="0" anchor="t"/>
+          <a:bodyPr wrap="square" lIns="182880" tIns="137160" rIns="137160" bIns="91440" rtlCol="0" anchor="ctr"/>
           <a:lstStyle/>
           <a:p>
             <a:pPr marL="0" indent="0" algn="l">
@@ -9991,7 +9481,7 @@
               <a:buNone/>
             </a:pPr>
             <a:r>
-              <a:rPr lang="zh-CN" altLang="en-US" sz="1450" b="1" kern="1200" dirty="0">
+              <a:rPr lang="zh-CN" altLang="en-US" sz="1400" b="1" kern="1200" dirty="0">
                 <a:solidFill>
                   <a:srgbClr val="004E98"/>
                 </a:solidFill>
@@ -10005,10 +9495,10 @@
           <a:p>
             <a:pPr marL="0" indent="0" algn="l">
               <a:lnSpc>
-                <a:spcPct val="145000"/>
+                <a:spcPct val="140000"/>
               </a:lnSpc>
               <a:spcBef>
-                <a:spcPts val="400"/>
+                <a:spcPts val="350"/>
               </a:spcBef>
               <a:spcAft>
                 <a:spcPts val="0"/>
@@ -10027,46 +9517,13 @@
               <a:t>取得注册会计师证书</a:t>
             </a:r>
           </a:p>
-        </p:txBody>
-      </p:sp>
-      <p:sp>
-        <p:nvSpPr>
-          <p:cNvPr id="106" name="KeyBar"/>
-          <p:cNvSpPr/>
-          <p:nvPr/>
-        </p:nvSpPr>
-        <p:spPr>
-          <a:xfrm>
-            <a:off x="773430" y="2760000"/>
-            <a:ext cx="10645140" cy="620000"/>
-          </a:xfrm>
-          <a:prstGeom prst="rect">
-            <a:avLst/>
-          </a:prstGeom>
-          <a:solidFill>
-            <a:srgbClr val="004E98"/>
-          </a:solidFill>
-          <a:ln>
-            <a:noFill/>
-          </a:ln>
-          <a:effectLst>
-            <a:outerShdw blurRad="50800" dist="38100" dir="2700000" algn="tl" rotWithShape="0">
-              <a:prstClr val="black">
-                <a:alpha val="40000"/>
-              </a:prstClr>
-            </a:outerShdw>
-          </a:effectLst>
-        </p:spPr>
-        <p:txBody>
-          <a:bodyPr wrap="square" lIns="182880" tIns="91440" rIns="182880" bIns="91440" rtlCol="0" anchor="ctr"/>
-          <a:lstStyle/>
-          <a:p>
-            <a:pPr marL="0" indent="0" algn="ctr">
+          <a:p>
+            <a:pPr marL="0" indent="0" algn="l">
               <a:lnSpc>
-                <a:spcPct val="115000"/>
+                <a:spcPct val="140000"/>
               </a:lnSpc>
               <a:spcBef>
-                <a:spcPts val="0"/>
+                <a:spcPts val="250"/>
               </a:spcBef>
               <a:spcAft>
                 <a:spcPts val="0"/>
@@ -10074,28 +9531,31 @@
               <a:buNone/>
             </a:pPr>
             <a:r>
-              <a:rPr lang="zh-CN" altLang="en-US" sz="1800" b="1" kern="1200" dirty="0">
-                <a:solidFill>
-                  <a:srgbClr val="FFFFFF"/>
-                </a:solidFill>
+              <a:rPr lang="zh-CN" altLang="en-US" sz="1200" b="1" kern="1200" dirty="0">
+                <a:solidFill>
+                  <a:srgbClr val="004E98"/>
+                </a:solidFill>
+                <a:highlight>
+                  <a:srgbClr val="FFFF00"/>
+                </a:highlight>
                 <a:latin typeface="Times New Roman" panose="02020603050405020304" pitchFamily="18" charset="0"/>
                 <a:ea typeface="华文楷体" panose="02010600040101010101" pitchFamily="2" charset="-122"/>
                 <a:cs typeface="Times New Roman" panose="02020603050405020304" pitchFamily="18" charset="0"/>
               </a:rPr>
-              <a:t>三类情形均须同时具备：五年以上工作经验</a:t>
-            </a:r>
-          </a:p>
-        </p:txBody>
-      </p:sp>
-      <p:sp>
-        <p:nvSpPr>
-          <p:cNvPr id="107" name="SectionBar"/>
+              <a:t>＋ 五年以上工作经验</a:t>
+            </a:r>
+          </a:p>
+        </p:txBody>
+      </p:sp>
+      <p:sp>
+        <p:nvSpPr>
+          <p:cNvPr id="109" name="SectionBar"/>
           <p:cNvSpPr/>
           <p:nvPr/>
         </p:nvSpPr>
         <p:spPr>
           <a:xfrm>
-            <a:off x="773430" y="3540000"/>
+            <a:off x="773430" y="3745632"/>
             <a:ext cx="10645140" cy="337185"/>
           </a:xfrm>
           <a:prstGeom prst="rect">
@@ -10116,7 +9576,7 @@
           </a:effectLst>
         </p:spPr>
         <p:txBody>
-          <a:bodyPr wrap="square" lIns="137160" tIns="45720" rIns="91440" bIns="45720" rtlCol="0" anchor="ctr"/>
+          <a:bodyPr wrap="square" lIns="137160" tIns="0" rIns="0" bIns="0" rtlCol="0" anchor="ctr"/>
           <a:lstStyle/>
           <a:p>
             <a:pPr marL="0" indent="0" algn="l">
@@ -10140,21 +9600,21 @@
                 <a:ea typeface="华文楷体" panose="02010600040101010101" pitchFamily="2" charset="-122"/>
                 <a:cs typeface="Times New Roman" panose="02020603050405020304" pitchFamily="18" charset="0"/>
               </a:rPr>
-              <a:t>同时应当具备的素质要求与聘任时的披露义务</a:t>
-            </a:r>
-          </a:p>
-        </p:txBody>
-      </p:sp>
-      <p:sp>
-        <p:nvSpPr>
-          <p:cNvPr id="108" name="Bullets"/>
+              <a:t>其他要求</a:t>
+            </a:r>
+          </a:p>
+        </p:txBody>
+      </p:sp>
+      <p:sp>
+        <p:nvSpPr>
+          <p:cNvPr id="110" name="Items"/>
           <p:cNvSpPr txBox="1"/>
           <p:nvPr/>
         </p:nvSpPr>
         <p:spPr>
           <a:xfrm>
-            <a:off x="773430" y="4100000"/>
-            <a:ext cx="10645140" cy="1500000"/>
+            <a:off x="773430" y="4262817"/>
+            <a:ext cx="10645140" cy="1657183"/>
           </a:xfrm>
           <a:prstGeom prst="rect">
             <a:avLst/>
@@ -10168,9 +9628,9 @@
           <a:bodyPr wrap="square" lIns="0" tIns="0" rIns="0" bIns="0" rtlCol="0" anchor="t"/>
           <a:lstStyle/>
           <a:p>
-            <a:pPr marL="190500" indent="-176530" algn="l">
+            <a:pPr marL="214313" indent="-214313" algn="l">
               <a:lnSpc>
-                <a:spcPct val="200000"/>
+                <a:spcPct val="170000"/>
               </a:lnSpc>
               <a:spcBef>
                 <a:spcPts val="0"/>
@@ -10185,7 +9645,7 @@
               <a:buChar char="n"/>
             </a:pPr>
             <a:r>
-              <a:rPr lang="zh-CN" altLang="en-US" sz="1400" b="0" kern="1200" dirty="0">
+              <a:rPr lang="zh-CN" altLang="en-US" sz="1600" b="0" kern="1200" dirty="0">
                 <a:solidFill>
                   <a:srgbClr val="262626"/>
                 </a:solidFill>
@@ -10193,60 +9653,16 @@
                 <a:ea typeface="华文楷体" panose="02010600040101010101" pitchFamily="2" charset="-122"/>
                 <a:cs typeface="Times New Roman" panose="02020603050405020304" pitchFamily="18" charset="0"/>
               </a:rPr>
-              <a:t>具有</a:t>
-            </a:r>
-            <a:r>
-              <a:rPr lang="zh-CN" altLang="en-US" sz="1400" b="1" kern="1200" dirty="0">
-                <a:solidFill>
-                  <a:srgbClr val="004E98"/>
-                </a:solidFill>
-                <a:latin typeface="Times New Roman" panose="02020603050405020304" pitchFamily="18" charset="0"/>
-                <a:ea typeface="华文楷体" panose="02010600040101010101" pitchFamily="2" charset="-122"/>
-                <a:cs typeface="Times New Roman" panose="02020603050405020304" pitchFamily="18" charset="0"/>
-              </a:rPr>
-              <a:t>良好的职业道德和个人品德</a:t>
-            </a:r>
-            <a:r>
-              <a:rPr lang="zh-CN" altLang="en-US" sz="1400" b="0" kern="1200" dirty="0">
-                <a:solidFill>
-                  <a:srgbClr val="262626"/>
-                </a:solidFill>
-                <a:latin typeface="Times New Roman" panose="02020603050405020304" pitchFamily="18" charset="0"/>
-                <a:ea typeface="华文楷体" panose="02010600040101010101" pitchFamily="2" charset="-122"/>
-                <a:cs typeface="Times New Roman" panose="02020603050405020304" pitchFamily="18" charset="0"/>
-              </a:rPr>
-              <a:t>，</a:t>
-            </a:r>
-            <a:r>
-              <a:rPr lang="zh-CN" altLang="en-US" sz="1400" b="1" kern="1200" dirty="0">
-                <a:solidFill>
-                  <a:srgbClr val="004E98"/>
-                </a:solidFill>
-                <a:latin typeface="Times New Roman" panose="02020603050405020304" pitchFamily="18" charset="0"/>
-                <a:ea typeface="华文楷体" panose="02010600040101010101" pitchFamily="2" charset="-122"/>
-                <a:cs typeface="Times New Roman" panose="02020603050405020304" pitchFamily="18" charset="0"/>
-              </a:rPr>
-              <a:t>熟悉证券法律法规和证券交易所业务规则</a:t>
-            </a:r>
-            <a:r>
-              <a:rPr lang="zh-CN" altLang="en-US" sz="1400" b="0" kern="1200" dirty="0">
-                <a:solidFill>
-                  <a:srgbClr val="262626"/>
-                </a:solidFill>
-                <a:latin typeface="Times New Roman" panose="02020603050405020304" pitchFamily="18" charset="0"/>
-                <a:ea typeface="华文楷体" panose="02010600040101010101" pitchFamily="2" charset="-122"/>
-                <a:cs typeface="Times New Roman" panose="02020603050405020304" pitchFamily="18" charset="0"/>
-              </a:rPr>
-              <a:t>。</a:t>
-            </a:r>
-          </a:p>
-          <a:p>
-            <a:pPr marL="190500" indent="-176530" algn="l">
+              <a:t>具有良好的职业道德和个人品德，熟悉证券法律法规和证券交易所业务规则。</a:t>
+            </a:r>
+          </a:p>
+          <a:p>
+            <a:pPr marL="214313" indent="-214313" algn="l">
               <a:lnSpc>
-                <a:spcPct val="200000"/>
+                <a:spcPct val="170000"/>
               </a:lnSpc>
               <a:spcBef>
-                <a:spcPts val="0"/>
+                <a:spcPts val="800"/>
               </a:spcBef>
               <a:spcAft>
                 <a:spcPts val="0"/>
@@ -10258,7 +9674,7 @@
               <a:buChar char="n"/>
             </a:pPr>
             <a:r>
-              <a:rPr lang="zh-CN" altLang="en-US" sz="1400" b="0" kern="1200" dirty="0">
+              <a:rPr lang="zh-CN" altLang="en-US" sz="1600" b="0" kern="1200" dirty="0">
                 <a:solidFill>
                   <a:srgbClr val="262626"/>
                 </a:solidFill>
@@ -10266,16 +9682,13 @@
                 <a:ea typeface="华文楷体" panose="02010600040101010101" pitchFamily="2" charset="-122"/>
                 <a:cs typeface="Times New Roman" panose="02020603050405020304" pitchFamily="18" charset="0"/>
               </a:rPr>
-              <a:t>聘任董事会秘书时，公司应当就候选人符合上述各项情形</a:t>
-            </a:r>
-            <a:r>
-              <a:rPr lang="zh-CN" altLang="en-US" sz="1400" b="1" kern="1200" dirty="0">
+              <a:t>聘任时应当就候选人符合上述各项情形</a:t>
+            </a:r>
+            <a:r>
+              <a:rPr lang="zh-CN" altLang="en-US" sz="1600" b="1" kern="1200" dirty="0">
                 <a:solidFill>
                   <a:srgbClr val="004E98"/>
                 </a:solidFill>
-                <a:highlight>
-                  <a:srgbClr val="FFFF00"/>
-                </a:highlight>
                 <a:latin typeface="Times New Roman" panose="02020603050405020304" pitchFamily="18" charset="0"/>
                 <a:ea typeface="华文楷体" panose="02010600040101010101" pitchFamily="2" charset="-122"/>
                 <a:cs typeface="Times New Roman" panose="02020603050405020304" pitchFamily="18" charset="0"/>
@@ -10283,7 +9696,7 @@
               <a:t>作出说明并予以披露</a:t>
             </a:r>
             <a:r>
-              <a:rPr lang="zh-CN" altLang="en-US" sz="1400" b="0" kern="1200" dirty="0">
+              <a:rPr lang="zh-CN" altLang="en-US" sz="1600" b="0" kern="1200" dirty="0">
                 <a:solidFill>
                   <a:srgbClr val="262626"/>
                 </a:solidFill>
@@ -10295,12 +9708,12 @@
             </a:r>
           </a:p>
           <a:p>
-            <a:pPr marL="190500" indent="-176530" algn="l">
+            <a:pPr marL="214313" indent="-214313" algn="l">
               <a:lnSpc>
-                <a:spcPct val="200000"/>
+                <a:spcPct val="170000"/>
               </a:lnSpc>
               <a:spcBef>
-                <a:spcPts val="0"/>
+                <a:spcPts val="800"/>
               </a:spcBef>
               <a:spcAft>
                 <a:spcPts val="0"/>
@@ -10312,7 +9725,7 @@
               <a:buChar char="n"/>
             </a:pPr>
             <a:r>
-              <a:rPr lang="zh-CN" altLang="en-US" sz="1400" b="0" kern="1200" dirty="0">
+              <a:rPr lang="zh-CN" altLang="en-US" sz="1600" b="0" kern="1200" dirty="0">
                 <a:solidFill>
                   <a:srgbClr val="262626"/>
                 </a:solidFill>
@@ -10320,42 +9733,20 @@
                 <a:ea typeface="华文楷体" panose="02010600040101010101" pitchFamily="2" charset="-122"/>
                 <a:cs typeface="Times New Roman" panose="02020603050405020304" pitchFamily="18" charset="0"/>
               </a:rPr>
-              <a:t>长期在上市公司担任</a:t>
-            </a:r>
-            <a:r>
-              <a:rPr lang="zh-CN" altLang="en-US" sz="1400" b="1" kern="1200" dirty="0">
-                <a:solidFill>
-                  <a:srgbClr val="004E98"/>
-                </a:solidFill>
-                <a:latin typeface="Times New Roman" panose="02020603050405020304" pitchFamily="18" charset="0"/>
-                <a:ea typeface="华文楷体" panose="02010600040101010101" pitchFamily="2" charset="-122"/>
-                <a:cs typeface="Times New Roman" panose="02020603050405020304" pitchFamily="18" charset="0"/>
-              </a:rPr>
-              <a:t>董事会秘书或证券事务代表</a:t>
-            </a:r>
-            <a:r>
-              <a:rPr lang="zh-CN" altLang="en-US" sz="1400" b="0" kern="1200" dirty="0">
-                <a:solidFill>
-                  <a:srgbClr val="262626"/>
-                </a:solidFill>
-                <a:latin typeface="Times New Roman" panose="02020603050405020304" pitchFamily="18" charset="0"/>
-                <a:ea typeface="华文楷体" panose="02010600040101010101" pitchFamily="2" charset="-122"/>
-                <a:cs typeface="Times New Roman" panose="02020603050405020304" pitchFamily="18" charset="0"/>
-              </a:rPr>
-              <a:t>的，可认定为“其他与履行董事会秘书职责相关的工作经验”。（证监会起草说明）</a:t>
-            </a:r>
-          </a:p>
-        </p:txBody>
-      </p:sp>
-      <p:sp>
-        <p:nvSpPr>
-          <p:cNvPr id="109" name="Footnote"/>
+              <a:t>长期担任上市公司董事会秘书或证券事务代表的，可认定为相关工作经验。</a:t>
+            </a:r>
+          </a:p>
+        </p:txBody>
+      </p:sp>
+      <p:sp>
+        <p:nvSpPr>
+          <p:cNvPr id="111" name="Source"/>
           <p:cNvSpPr txBox="1"/>
           <p:nvPr/>
         </p:nvSpPr>
         <p:spPr>
           <a:xfrm>
-            <a:off x="773430" y="5880000"/>
+            <a:off x="773430" y="6180000"/>
             <a:ext cx="10645140" cy="260000"/>
           </a:xfrm>
           <a:prstGeom prst="rect">
@@ -10441,7 +9832,7 @@
           </a:ln>
         </p:spPr>
         <p:txBody>
-          <a:bodyPr wrap="square" lIns="91440" tIns="45720" rIns="91440" bIns="45720" rtlCol="0" anchor="ctr"/>
+          <a:bodyPr wrap="square" lIns="91440" tIns="0" rIns="91440" bIns="0" rtlCol="0" anchor="ctr"/>
           <a:lstStyle/>
           <a:p>
             <a:pPr marL="0" indent="0" algn="l">
@@ -10465,36 +9856,41 @@
                 <a:ea typeface="华文楷体" panose="02010600040101010101" pitchFamily="2" charset="-122"/>
                 <a:cs typeface="Times New Roman" panose="02020603050405020304" pitchFamily="18" charset="0"/>
               </a:rPr>
-              <a:t>三、任职资格（二）：不得担任董事会秘书的情形</a:t>
-            </a:r>
-          </a:p>
-        </p:txBody>
-      </p:sp>
-      <p:sp>
-        <p:nvSpPr>
-          <p:cNvPr id="102" name="Card"/>
+              <a:t>三、任职资格（二）：不得担任的情形</a:t>
+            </a:r>
+          </a:p>
+        </p:txBody>
+      </p:sp>
+      <p:sp>
+        <p:nvSpPr>
+          <p:cNvPr id="102" name="SectionBar"/>
           <p:cNvSpPr/>
           <p:nvPr/>
         </p:nvSpPr>
         <p:spPr>
           <a:xfrm>
-            <a:off x="773430" y="1010000"/>
-            <a:ext cx="5172570" cy="3700000"/>
+            <a:off x="773430" y="1054373"/>
+            <a:ext cx="10645140" cy="337185"/>
           </a:xfrm>
           <a:prstGeom prst="rect">
             <a:avLst/>
           </a:prstGeom>
           <a:solidFill>
-            <a:srgbClr val="F2F6FB"/>
+            <a:srgbClr val="004E98"/>
           </a:solidFill>
-          <a:ln w="12700">
-            <a:solidFill>
-              <a:srgbClr val="C8D9EA"/>
-            </a:solidFill>
+          <a:ln>
+            <a:noFill/>
           </a:ln>
+          <a:effectLst>
+            <a:outerShdw blurRad="50800" dist="38100" dir="2700000" algn="tl" rotWithShape="0">
+              <a:prstClr val="black">
+                <a:alpha val="40000"/>
+              </a:prstClr>
+            </a:outerShdw>
+          </a:effectLst>
         </p:spPr>
         <p:txBody>
-          <a:bodyPr wrap="square" lIns="182880" tIns="137160" rIns="137160" bIns="91440" rtlCol="0" anchor="t"/>
+          <a:bodyPr wrap="square" lIns="137160" tIns="0" rIns="0" bIns="0" rtlCol="0" anchor="ctr"/>
           <a:lstStyle/>
           <a:p>
             <a:pPr marL="0" indent="0" algn="l">
@@ -10510,67 +9906,89 @@
               <a:buNone/>
             </a:pPr>
             <a:r>
-              <a:rPr lang="zh-CN" altLang="en-US" sz="1500" b="1" kern="1200" dirty="0">
-                <a:solidFill>
-                  <a:srgbClr val="004E98"/>
+              <a:rPr lang="zh-CN" altLang="en-US" sz="1400" b="1" kern="1200" dirty="0">
+                <a:solidFill>
+                  <a:srgbClr val="FFFFFF"/>
                 </a:solidFill>
                 <a:latin typeface="Times New Roman" panose="02020603050405020304" pitchFamily="18" charset="0"/>
                 <a:ea typeface="华文楷体" panose="02010600040101010101" pitchFamily="2" charset="-122"/>
                 <a:cs typeface="Times New Roman" panose="02020603050405020304" pitchFamily="18" charset="0"/>
               </a:rPr>
-              <a:t>Ａ ｜ 《公司法》第一百七十八条规定的五种情形</a:t>
-            </a:r>
-          </a:p>
-          <a:p>
-            <a:pPr marL="171450" indent="-171450" algn="l">
+              <a:t>《公司法》第一百七十八条规定的情形</a:t>
+            </a:r>
+          </a:p>
+        </p:txBody>
+      </p:sp>
+      <p:sp>
+        <p:nvSpPr>
+          <p:cNvPr id="103" name="Items"/>
+          <p:cNvSpPr txBox="1"/>
+          <p:nvPr/>
+        </p:nvSpPr>
+        <p:spPr>
+          <a:xfrm>
+            <a:off x="773430" y="1571558"/>
+            <a:ext cx="10645140" cy="1819905"/>
+          </a:xfrm>
+          <a:prstGeom prst="rect">
+            <a:avLst/>
+          </a:prstGeom>
+          <a:noFill/>
+          <a:ln>
+            <a:noFill/>
+          </a:ln>
+        </p:spPr>
+        <p:txBody>
+          <a:bodyPr wrap="square" lIns="0" tIns="0" rIns="0" bIns="0" rtlCol="0" anchor="t"/>
+          <a:lstStyle/>
+          <a:p>
+            <a:pPr marL="214313" indent="-214313" algn="l">
               <a:lnSpc>
-                <a:spcPct val="155000"/>
+                <a:spcPct val="160000"/>
               </a:lnSpc>
               <a:spcBef>
-                <a:spcPts val="450"/>
+                <a:spcPts val="0"/>
               </a:spcBef>
               <a:spcAft>
                 <a:spcPts val="0"/>
               </a:spcAft>
               <a:buClr>
-                <a:srgbClr val="197BC0"/>
+                <a:srgbClr val="004E98"/>
               </a:buClr>
-              <a:buSzPct val="60"/>
               <a:buFont typeface="Wingdings" panose="05000000000000000000" pitchFamily="2" charset="2"/>
               <a:buChar char="n"/>
             </a:pPr>
             <a:r>
-              <a:rPr lang="zh-CN" altLang="en-US" sz="1350" b="1" kern="1200" dirty="0">
-                <a:solidFill>
-                  <a:srgbClr val="004E98"/>
+              <a:rPr lang="zh-CN" altLang="en-US" sz="1400" b="0" kern="1200" dirty="0">
+                <a:solidFill>
+                  <a:srgbClr val="262626"/>
                 </a:solidFill>
                 <a:latin typeface="Times New Roman" panose="02020603050405020304" pitchFamily="18" charset="0"/>
                 <a:ea typeface="华文楷体" panose="02010600040101010101" pitchFamily="2" charset="-122"/>
                 <a:cs typeface="Times New Roman" panose="02020603050405020304" pitchFamily="18" charset="0"/>
               </a:rPr>
-              <a:t>无民事行为能力或者限制民事行为能力</a:t>
-            </a:r>
-          </a:p>
-          <a:p>
-            <a:pPr marL="171450" indent="-171450" algn="l">
+              <a:t>无民事行为能力或者限制民事行为能力。</a:t>
+            </a:r>
+          </a:p>
+          <a:p>
+            <a:pPr marL="214313" indent="-214313" algn="l">
               <a:lnSpc>
-                <a:spcPct val="155000"/>
+                <a:spcPct val="160000"/>
               </a:lnSpc>
               <a:spcBef>
-                <a:spcPts val="250"/>
+                <a:spcPts val="600"/>
               </a:spcBef>
               <a:spcAft>
                 <a:spcPts val="0"/>
               </a:spcAft>
               <a:buClr>
-                <a:srgbClr val="197BC0"/>
+                <a:srgbClr val="004E98"/>
               </a:buClr>
-              <a:buSzPct val="60"/>
               <a:buFont typeface="Wingdings" panose="05000000000000000000" pitchFamily="2" charset="2"/>
               <a:buChar char="n"/>
             </a:pPr>
             <a:r>
-              <a:rPr lang="zh-CN" altLang="en-US" sz="1350" b="0" kern="1200" dirty="0">
+              <a:rPr lang="zh-CN" altLang="en-US" sz="1400" b="0" kern="1200" dirty="0">
                 <a:solidFill>
                   <a:srgbClr val="262626"/>
                 </a:solidFill>
@@ -10578,10 +9996,10 @@
                 <a:ea typeface="华文楷体" panose="02010600040101010101" pitchFamily="2" charset="-122"/>
                 <a:cs typeface="Times New Roman" panose="02020603050405020304" pitchFamily="18" charset="0"/>
               </a:rPr>
-              <a:t>因</a:t>
-            </a:r>
-            <a:r>
-              <a:rPr lang="zh-CN" altLang="en-US" sz="1350" b="1" kern="1200" dirty="0">
+              <a:t>因贪污、贿赂、侵占财产、挪用财产或破坏社会主义市场经济秩序被判处刑罚，执行期满</a:t>
+            </a:r>
+            <a:r>
+              <a:rPr lang="zh-CN" altLang="en-US" sz="1400" b="1" kern="1200" dirty="0">
                 <a:solidFill>
                   <a:srgbClr val="004E98"/>
                 </a:solidFill>
@@ -10589,10 +10007,10 @@
                 <a:ea typeface="华文楷体" panose="02010600040101010101" pitchFamily="2" charset="-122"/>
                 <a:cs typeface="Times New Roman" panose="02020603050405020304" pitchFamily="18" charset="0"/>
               </a:rPr>
-              <a:t>贪污、贿赂、侵占财产、挪用财产或破坏社会主义市场经济秩序</a:t>
-            </a:r>
-            <a:r>
-              <a:rPr lang="zh-CN" altLang="en-US" sz="1350" b="0" kern="1200" dirty="0">
+              <a:t>未逾五年</a:t>
+            </a:r>
+            <a:r>
+              <a:rPr lang="zh-CN" altLang="en-US" sz="1400" b="0" kern="1200" dirty="0">
                 <a:solidFill>
                   <a:srgbClr val="262626"/>
                 </a:solidFill>
@@ -10600,54 +10018,28 @@
                 <a:ea typeface="华文楷体" panose="02010600040101010101" pitchFamily="2" charset="-122"/>
                 <a:cs typeface="Times New Roman" panose="02020603050405020304" pitchFamily="18" charset="0"/>
               </a:rPr>
-              <a:t>被判处刑罚，</a:t>
-            </a:r>
-            <a:r>
-              <a:rPr lang="zh-CN" altLang="en-US" sz="1350" b="1" kern="1200" dirty="0">
-                <a:solidFill>
-                  <a:srgbClr val="004E98"/>
-                </a:solidFill>
-                <a:highlight>
-                  <a:srgbClr val="FFFF00"/>
-                </a:highlight>
-                <a:latin typeface="Times New Roman" panose="02020603050405020304" pitchFamily="18" charset="0"/>
-                <a:ea typeface="华文楷体" panose="02010600040101010101" pitchFamily="2" charset="-122"/>
-                <a:cs typeface="Times New Roman" panose="02020603050405020304" pitchFamily="18" charset="0"/>
-              </a:rPr>
-              <a:t>执行期满未逾五年</a:t>
-            </a:r>
-            <a:r>
-              <a:rPr lang="zh-CN" altLang="en-US" sz="1350" b="0" kern="1200" dirty="0">
-                <a:solidFill>
-                  <a:srgbClr val="262626"/>
-                </a:solidFill>
-                <a:latin typeface="Times New Roman" panose="02020603050405020304" pitchFamily="18" charset="0"/>
-                <a:ea typeface="华文楷体" panose="02010600040101010101" pitchFamily="2" charset="-122"/>
-                <a:cs typeface="Times New Roman" panose="02020603050405020304" pitchFamily="18" charset="0"/>
-              </a:rPr>
-              <a:t>（缓刑的，考验期满未逾二年）</a:t>
-            </a:r>
-          </a:p>
-          <a:p>
-            <a:pPr marL="171450" indent="-171450" algn="l">
+              <a:t>（缓刑的，考验期满未逾二年）。</a:t>
+            </a:r>
+          </a:p>
+          <a:p>
+            <a:pPr marL="214313" indent="-214313" algn="l">
               <a:lnSpc>
-                <a:spcPct val="155000"/>
+                <a:spcPct val="160000"/>
               </a:lnSpc>
               <a:spcBef>
-                <a:spcPts val="250"/>
+                <a:spcPts val="600"/>
               </a:spcBef>
               <a:spcAft>
                 <a:spcPts val="0"/>
               </a:spcAft>
               <a:buClr>
-                <a:srgbClr val="197BC0"/>
+                <a:srgbClr val="004E98"/>
               </a:buClr>
-              <a:buSzPct val="60"/>
               <a:buFont typeface="Wingdings" panose="05000000000000000000" pitchFamily="2" charset="2"/>
               <a:buChar char="n"/>
             </a:pPr>
             <a:r>
-              <a:rPr lang="zh-CN" altLang="en-US" sz="1350" b="0" kern="1200" dirty="0">
+              <a:rPr lang="zh-CN" altLang="en-US" sz="1400" b="0" kern="1200" dirty="0">
                 <a:solidFill>
                   <a:srgbClr val="262626"/>
                 </a:solidFill>
@@ -10655,43 +10047,72 @@
                 <a:ea typeface="华文楷体" panose="02010600040101010101" pitchFamily="2" charset="-122"/>
                 <a:cs typeface="Times New Roman" panose="02020603050405020304" pitchFamily="18" charset="0"/>
               </a:rPr>
-              <a:t>担任破产清算公司的董事或厂长、经理，对破产负有个人责任，</a:t>
-            </a:r>
-            <a:r>
-              <a:rPr lang="zh-CN" altLang="en-US" sz="1350" b="1" kern="1200" dirty="0">
+              <a:t>对所任职公司破产负有个人责任，清算完结</a:t>
+            </a:r>
+            <a:r>
+              <a:rPr lang="zh-CN" altLang="en-US" sz="1400" b="1" kern="1200" dirty="0">
                 <a:solidFill>
                   <a:srgbClr val="004E98"/>
                 </a:solidFill>
-                <a:highlight>
-                  <a:srgbClr val="FFFF00"/>
-                </a:highlight>
                 <a:latin typeface="Times New Roman" panose="02020603050405020304" pitchFamily="18" charset="0"/>
                 <a:ea typeface="华文楷体" panose="02010600040101010101" pitchFamily="2" charset="-122"/>
                 <a:cs typeface="Times New Roman" panose="02020603050405020304" pitchFamily="18" charset="0"/>
               </a:rPr>
-              <a:t>清算完结未逾三年</a:t>
-            </a:r>
-          </a:p>
-          <a:p>
-            <a:pPr marL="171450" indent="-171450" algn="l">
+              <a:t>未逾三年</a:t>
+            </a:r>
+            <a:r>
+              <a:rPr lang="zh-CN" altLang="en-US" sz="1400" b="0" kern="1200" dirty="0">
+                <a:solidFill>
+                  <a:srgbClr val="262626"/>
+                </a:solidFill>
+                <a:latin typeface="Times New Roman" panose="02020603050405020304" pitchFamily="18" charset="0"/>
+                <a:ea typeface="华文楷体" panose="02010600040101010101" pitchFamily="2" charset="-122"/>
+                <a:cs typeface="Times New Roman" panose="02020603050405020304" pitchFamily="18" charset="0"/>
+              </a:rPr>
+              <a:t>；因违法被吊销执照、责令关闭负有个人责任，</a:t>
+            </a:r>
+            <a:r>
+              <a:rPr lang="zh-CN" altLang="en-US" sz="1400" b="1" kern="1200" dirty="0">
+                <a:solidFill>
+                  <a:srgbClr val="004E98"/>
+                </a:solidFill>
+                <a:latin typeface="Times New Roman" panose="02020603050405020304" pitchFamily="18" charset="0"/>
+                <a:ea typeface="华文楷体" panose="02010600040101010101" pitchFamily="2" charset="-122"/>
+                <a:cs typeface="Times New Roman" panose="02020603050405020304" pitchFamily="18" charset="0"/>
+              </a:rPr>
+              <a:t>未逾三年</a:t>
+            </a:r>
+            <a:r>
+              <a:rPr lang="zh-CN" altLang="en-US" sz="1400" b="0" kern="1200" dirty="0">
+                <a:solidFill>
+                  <a:srgbClr val="262626"/>
+                </a:solidFill>
+                <a:latin typeface="Times New Roman" panose="02020603050405020304" pitchFamily="18" charset="0"/>
+                <a:ea typeface="华文楷体" panose="02010600040101010101" pitchFamily="2" charset="-122"/>
+                <a:cs typeface="Times New Roman" panose="02020603050405020304" pitchFamily="18" charset="0"/>
+              </a:rPr>
+              <a:t>。</a:t>
+            </a:r>
+          </a:p>
+          <a:p>
+            <a:pPr marL="214313" indent="-214313" algn="l">
               <a:lnSpc>
-                <a:spcPct val="155000"/>
+                <a:spcPct val="160000"/>
               </a:lnSpc>
               <a:spcBef>
-                <a:spcPts val="250"/>
+                <a:spcPts val="600"/>
               </a:spcBef>
               <a:spcAft>
                 <a:spcPts val="0"/>
               </a:spcAft>
               <a:buClr>
-                <a:srgbClr val="197BC0"/>
+                <a:srgbClr val="004E98"/>
               </a:buClr>
-              <a:buSzPct val="60"/>
               <a:buFont typeface="Wingdings" panose="05000000000000000000" pitchFamily="2" charset="2"/>
               <a:buChar char="n"/>
             </a:pPr>
             <a:r>
-              <a:rPr lang="zh-CN" altLang="en-US" sz="1350" b="0" kern="1200" dirty="0">
+              <a:rPr lang="zh-CN" altLang="en-US" sz="1400" b="0" kern="1200" dirty="0">
                 <a:solidFill>
                   <a:srgbClr val="262626"/>
                 </a:solidFill>
@@ -10699,43 +10120,21 @@
                 <a:ea typeface="华文楷体" panose="02010600040101010101" pitchFamily="2" charset="-122"/>
                 <a:cs typeface="Times New Roman" panose="02020603050405020304" pitchFamily="18" charset="0"/>
               </a:rPr>
-              <a:t>担任因违法被吊销执照、责令关闭公司的法定代表人并负有个人责任，</a:t>
-            </a:r>
-            <a:r>
-              <a:rPr lang="zh-CN" altLang="en-US" sz="1350" b="1" kern="1200" dirty="0">
+              <a:t>因数额较大债务到期未清偿，被列为</a:t>
+            </a:r>
+            <a:r>
+              <a:rPr lang="zh-CN" altLang="en-US" sz="1400" b="1" kern="1200" dirty="0">
                 <a:solidFill>
                   <a:srgbClr val="004E98"/>
                 </a:solidFill>
-                <a:highlight>
-                  <a:srgbClr val="FFFF00"/>
-                </a:highlight>
                 <a:latin typeface="Times New Roman" panose="02020603050405020304" pitchFamily="18" charset="0"/>
                 <a:ea typeface="华文楷体" panose="02010600040101010101" pitchFamily="2" charset="-122"/>
                 <a:cs typeface="Times New Roman" panose="02020603050405020304" pitchFamily="18" charset="0"/>
               </a:rPr>
-              <a:t>未逾三年</a:t>
-            </a:r>
-          </a:p>
-          <a:p>
-            <a:pPr marL="171450" indent="-171450" algn="l">
-              <a:lnSpc>
-                <a:spcPct val="155000"/>
-              </a:lnSpc>
-              <a:spcBef>
-                <a:spcPts val="250"/>
-              </a:spcBef>
-              <a:spcAft>
-                <a:spcPts val="0"/>
-              </a:spcAft>
-              <a:buClr>
-                <a:srgbClr val="197BC0"/>
-              </a:buClr>
-              <a:buSzPct val="60"/>
-              <a:buFont typeface="Wingdings" panose="05000000000000000000" pitchFamily="2" charset="2"/>
-              <a:buChar char="n"/>
-            </a:pPr>
-            <a:r>
-              <a:rPr lang="zh-CN" altLang="en-US" sz="1350" b="0" kern="1200" dirty="0">
+              <a:t>失信被执行人</a:t>
+            </a:r>
+            <a:r>
+              <a:rPr lang="zh-CN" altLang="en-US" sz="1400" b="0" kern="1200" dirty="0">
                 <a:solidFill>
                   <a:srgbClr val="262626"/>
                 </a:solidFill>
@@ -10743,47 +10142,41 @@
                 <a:ea typeface="华文楷体" panose="02010600040101010101" pitchFamily="2" charset="-122"/>
                 <a:cs typeface="Times New Roman" panose="02020603050405020304" pitchFamily="18" charset="0"/>
               </a:rPr>
-              <a:t>因数额较大债务到期未清偿，被人民法院列为</a:t>
-            </a:r>
-            <a:r>
-              <a:rPr lang="zh-CN" altLang="en-US" sz="1350" b="1" kern="1200" dirty="0">
-                <a:solidFill>
-                  <a:srgbClr val="004E98"/>
-                </a:solidFill>
-                <a:latin typeface="Times New Roman" panose="02020603050405020304" pitchFamily="18" charset="0"/>
-                <a:ea typeface="华文楷体" panose="02010600040101010101" pitchFamily="2" charset="-122"/>
-                <a:cs typeface="Times New Roman" panose="02020603050405020304" pitchFamily="18" charset="0"/>
-              </a:rPr>
-              <a:t>失信被执行人</a:t>
-            </a:r>
-          </a:p>
-        </p:txBody>
-      </p:sp>
-      <p:sp>
-        <p:nvSpPr>
-          <p:cNvPr id="103" name="Card"/>
+              <a:t>。</a:t>
+            </a:r>
+          </a:p>
+        </p:txBody>
+      </p:sp>
+      <p:sp>
+        <p:nvSpPr>
+          <p:cNvPr id="104" name="SectionBar"/>
           <p:cNvSpPr/>
           <p:nvPr/>
         </p:nvSpPr>
         <p:spPr>
           <a:xfrm>
-            <a:off x="6246000" y="1010000"/>
-            <a:ext cx="5172570" cy="3700000"/>
+            <a:off x="773430" y="3582910"/>
+            <a:ext cx="10645140" cy="337185"/>
           </a:xfrm>
           <a:prstGeom prst="rect">
             <a:avLst/>
           </a:prstGeom>
           <a:solidFill>
-            <a:srgbClr val="F2F6FB"/>
+            <a:srgbClr val="004E98"/>
           </a:solidFill>
-          <a:ln w="12700">
-            <a:solidFill>
-              <a:srgbClr val="C8D9EA"/>
-            </a:solidFill>
+          <a:ln>
+            <a:noFill/>
           </a:ln>
+          <a:effectLst>
+            <a:outerShdw blurRad="50800" dist="38100" dir="2700000" algn="tl" rotWithShape="0">
+              <a:prstClr val="black">
+                <a:alpha val="40000"/>
+              </a:prstClr>
+            </a:outerShdw>
+          </a:effectLst>
         </p:spPr>
         <p:txBody>
-          <a:bodyPr wrap="square" lIns="182880" tIns="137160" rIns="137160" bIns="91440" rtlCol="0" anchor="t"/>
+          <a:bodyPr wrap="square" lIns="137160" tIns="0" rIns="0" bIns="0" rtlCol="0" anchor="ctr"/>
           <a:lstStyle/>
           <a:p>
             <a:pPr marL="0" indent="0" algn="l">
@@ -10799,351 +10192,45 @@
               <a:buNone/>
             </a:pPr>
             <a:r>
-              <a:rPr lang="zh-CN" altLang="en-US" sz="1500" b="1" kern="1200" dirty="0">
-                <a:solidFill>
-                  <a:srgbClr val="004E98"/>
+              <a:rPr lang="zh-CN" altLang="en-US" sz="1400" b="1" kern="1200" dirty="0">
+                <a:solidFill>
+                  <a:srgbClr val="FFFFFF"/>
                 </a:solidFill>
                 <a:latin typeface="Times New Roman" panose="02020603050405020304" pitchFamily="18" charset="0"/>
                 <a:ea typeface="华文楷体" panose="02010600040101010101" pitchFamily="2" charset="-122"/>
                 <a:cs typeface="Times New Roman" panose="02020603050405020304" pitchFamily="18" charset="0"/>
               </a:rPr>
-              <a:t>Ｂ ｜ 规则第二十二条规定的监管与自律处分记录</a:t>
-            </a:r>
-          </a:p>
-          <a:p>
-            <a:pPr marL="171450" indent="-171450" algn="l">
-              <a:lnSpc>
-                <a:spcPct val="155000"/>
-              </a:lnSpc>
-              <a:spcBef>
-                <a:spcPts val="450"/>
-              </a:spcBef>
-              <a:spcAft>
-                <a:spcPts val="0"/>
-              </a:spcAft>
-              <a:buClr>
-                <a:srgbClr val="197BC0"/>
-              </a:buClr>
-              <a:buSzPct val="60"/>
-              <a:buFont typeface="Wingdings" panose="05000000000000000000" pitchFamily="2" charset="2"/>
-              <a:buChar char="n"/>
-            </a:pPr>
-            <a:r>
-              <a:rPr lang="zh-CN" altLang="en-US" sz="1350" b="0" kern="1200" dirty="0">
-                <a:solidFill>
-                  <a:srgbClr val="262626"/>
-                </a:solidFill>
-                <a:latin typeface="Times New Roman" panose="02020603050405020304" pitchFamily="18" charset="0"/>
-                <a:ea typeface="华文楷体" panose="02010600040101010101" pitchFamily="2" charset="-122"/>
-                <a:cs typeface="Times New Roman" panose="02020603050405020304" pitchFamily="18" charset="0"/>
-              </a:rPr>
-              <a:t>最近</a:t>
-            </a:r>
-            <a:r>
-              <a:rPr lang="zh-CN" altLang="en-US" sz="1350" b="1" kern="1200" dirty="0">
-                <a:solidFill>
-                  <a:srgbClr val="004E98"/>
-                </a:solidFill>
-                <a:highlight>
-                  <a:srgbClr val="FFFF00"/>
-                </a:highlight>
-                <a:latin typeface="Times New Roman" panose="02020603050405020304" pitchFamily="18" charset="0"/>
-                <a:ea typeface="华文楷体" panose="02010600040101010101" pitchFamily="2" charset="-122"/>
-                <a:cs typeface="Times New Roman" panose="02020603050405020304" pitchFamily="18" charset="0"/>
-              </a:rPr>
-              <a:t>三十六个月</a:t>
-            </a:r>
-            <a:r>
-              <a:rPr lang="zh-CN" altLang="en-US" sz="1350" b="0" kern="1200" dirty="0">
-                <a:solidFill>
-                  <a:srgbClr val="262626"/>
-                </a:solidFill>
-                <a:latin typeface="Times New Roman" panose="02020603050405020304" pitchFamily="18" charset="0"/>
-                <a:ea typeface="华文楷体" panose="02010600040101010101" pitchFamily="2" charset="-122"/>
-                <a:cs typeface="Times New Roman" panose="02020603050405020304" pitchFamily="18" charset="0"/>
-              </a:rPr>
-              <a:t>被中国证监会</a:t>
-            </a:r>
-            <a:r>
-              <a:rPr lang="zh-CN" altLang="en-US" sz="1350" b="1" kern="1200" dirty="0">
-                <a:solidFill>
-                  <a:srgbClr val="004E98"/>
-                </a:solidFill>
-                <a:latin typeface="Times New Roman" panose="02020603050405020304" pitchFamily="18" charset="0"/>
-                <a:ea typeface="华文楷体" panose="02010600040101010101" pitchFamily="2" charset="-122"/>
-                <a:cs typeface="Times New Roman" panose="02020603050405020304" pitchFamily="18" charset="0"/>
-              </a:rPr>
-              <a:t>行政处罚</a:t>
-            </a:r>
-            <a:r>
-              <a:rPr lang="zh-CN" altLang="en-US" sz="1350" b="0" kern="1200" dirty="0">
-                <a:solidFill>
-                  <a:srgbClr val="262626"/>
-                </a:solidFill>
-                <a:latin typeface="Times New Roman" panose="02020603050405020304" pitchFamily="18" charset="0"/>
-                <a:ea typeface="华文楷体" panose="02010600040101010101" pitchFamily="2" charset="-122"/>
-                <a:cs typeface="Times New Roman" panose="02020603050405020304" pitchFamily="18" charset="0"/>
-              </a:rPr>
-              <a:t>，或者被采取</a:t>
-            </a:r>
-            <a:r>
-              <a:rPr lang="zh-CN" altLang="en-US" sz="1350" b="1" kern="1200" dirty="0">
-                <a:solidFill>
-                  <a:srgbClr val="004E98"/>
-                </a:solidFill>
-                <a:latin typeface="Times New Roman" panose="02020603050405020304" pitchFamily="18" charset="0"/>
-                <a:ea typeface="华文楷体" panose="02010600040101010101" pitchFamily="2" charset="-122"/>
-                <a:cs typeface="Times New Roman" panose="02020603050405020304" pitchFamily="18" charset="0"/>
-              </a:rPr>
-              <a:t>三次以上</a:t>
-            </a:r>
-            <a:r>
-              <a:rPr lang="zh-CN" altLang="en-US" sz="1350" b="0" kern="1200" dirty="0">
-                <a:solidFill>
-                  <a:srgbClr val="262626"/>
-                </a:solidFill>
-                <a:latin typeface="Times New Roman" panose="02020603050405020304" pitchFamily="18" charset="0"/>
-                <a:ea typeface="华文楷体" panose="02010600040101010101" pitchFamily="2" charset="-122"/>
-                <a:cs typeface="Times New Roman" panose="02020603050405020304" pitchFamily="18" charset="0"/>
-              </a:rPr>
-              <a:t>行政监督管理措施</a:t>
-            </a:r>
-          </a:p>
-          <a:p>
-            <a:pPr marL="171450" indent="-171450" algn="l">
-              <a:lnSpc>
-                <a:spcPct val="155000"/>
-              </a:lnSpc>
-              <a:spcBef>
-                <a:spcPts val="250"/>
-              </a:spcBef>
-              <a:spcAft>
-                <a:spcPts val="0"/>
-              </a:spcAft>
-              <a:buClr>
-                <a:srgbClr val="197BC0"/>
-              </a:buClr>
-              <a:buSzPct val="60"/>
-              <a:buFont typeface="Wingdings" panose="05000000000000000000" pitchFamily="2" charset="2"/>
-              <a:buChar char="n"/>
-            </a:pPr>
-            <a:r>
-              <a:rPr lang="zh-CN" altLang="en-US" sz="1350" b="0" kern="1200" dirty="0">
-                <a:solidFill>
-                  <a:srgbClr val="262626"/>
-                </a:solidFill>
-                <a:latin typeface="Times New Roman" panose="02020603050405020304" pitchFamily="18" charset="0"/>
-                <a:ea typeface="华文楷体" panose="02010600040101010101" pitchFamily="2" charset="-122"/>
-                <a:cs typeface="Times New Roman" panose="02020603050405020304" pitchFamily="18" charset="0"/>
-              </a:rPr>
-              <a:t>最近</a:t>
-            </a:r>
-            <a:r>
-              <a:rPr lang="zh-CN" altLang="en-US" sz="1350" b="1" kern="1200" dirty="0">
-                <a:solidFill>
-                  <a:srgbClr val="004E98"/>
-                </a:solidFill>
-                <a:highlight>
-                  <a:srgbClr val="FFFF00"/>
-                </a:highlight>
-                <a:latin typeface="Times New Roman" panose="02020603050405020304" pitchFamily="18" charset="0"/>
-                <a:ea typeface="华文楷体" panose="02010600040101010101" pitchFamily="2" charset="-122"/>
-                <a:cs typeface="Times New Roman" panose="02020603050405020304" pitchFamily="18" charset="0"/>
-              </a:rPr>
-              <a:t>三十六个月</a:t>
-            </a:r>
-            <a:r>
-              <a:rPr lang="zh-CN" altLang="en-US" sz="1350" b="0" kern="1200" dirty="0">
-                <a:solidFill>
-                  <a:srgbClr val="262626"/>
-                </a:solidFill>
-                <a:latin typeface="Times New Roman" panose="02020603050405020304" pitchFamily="18" charset="0"/>
-                <a:ea typeface="华文楷体" panose="02010600040101010101" pitchFamily="2" charset="-122"/>
-                <a:cs typeface="Times New Roman" panose="02020603050405020304" pitchFamily="18" charset="0"/>
-              </a:rPr>
-              <a:t>被证券交易所</a:t>
-            </a:r>
-            <a:r>
-              <a:rPr lang="zh-CN" altLang="en-US" sz="1350" b="1" kern="1200" dirty="0">
-                <a:solidFill>
-                  <a:srgbClr val="004E98"/>
-                </a:solidFill>
-                <a:latin typeface="Times New Roman" panose="02020603050405020304" pitchFamily="18" charset="0"/>
-                <a:ea typeface="华文楷体" panose="02010600040101010101" pitchFamily="2" charset="-122"/>
-                <a:cs typeface="Times New Roman" panose="02020603050405020304" pitchFamily="18" charset="0"/>
-              </a:rPr>
-              <a:t>公开谴责</a:t>
-            </a:r>
-            <a:r>
-              <a:rPr lang="zh-CN" altLang="en-US" sz="1350" b="0" kern="1200" dirty="0">
-                <a:solidFill>
-                  <a:srgbClr val="262626"/>
-                </a:solidFill>
-                <a:latin typeface="Times New Roman" panose="02020603050405020304" pitchFamily="18" charset="0"/>
-                <a:ea typeface="华文楷体" panose="02010600040101010101" pitchFamily="2" charset="-122"/>
-                <a:cs typeface="Times New Roman" panose="02020603050405020304" pitchFamily="18" charset="0"/>
-              </a:rPr>
-              <a:t>，或者</a:t>
-            </a:r>
-            <a:r>
-              <a:rPr lang="zh-CN" altLang="en-US" sz="1350" b="1" kern="1200" dirty="0">
-                <a:solidFill>
-                  <a:srgbClr val="004E98"/>
-                </a:solidFill>
-                <a:latin typeface="Times New Roman" panose="02020603050405020304" pitchFamily="18" charset="0"/>
-                <a:ea typeface="华文楷体" panose="02010600040101010101" pitchFamily="2" charset="-122"/>
-                <a:cs typeface="Times New Roman" panose="02020603050405020304" pitchFamily="18" charset="0"/>
-              </a:rPr>
-              <a:t>三次以上通报批评</a:t>
-            </a:r>
-          </a:p>
-          <a:p>
-            <a:pPr marL="171450" indent="-171450" algn="l">
-              <a:lnSpc>
-                <a:spcPct val="155000"/>
-              </a:lnSpc>
-              <a:spcBef>
-                <a:spcPts val="250"/>
-              </a:spcBef>
-              <a:spcAft>
-                <a:spcPts val="0"/>
-              </a:spcAft>
-              <a:buClr>
-                <a:srgbClr val="197BC0"/>
-              </a:buClr>
-              <a:buSzPct val="60"/>
-              <a:buFont typeface="Wingdings" panose="05000000000000000000" pitchFamily="2" charset="2"/>
-              <a:buChar char="n"/>
-            </a:pPr>
-            <a:r>
-              <a:rPr lang="zh-CN" altLang="en-US" sz="1350" b="0" kern="1200" dirty="0">
-                <a:solidFill>
-                  <a:srgbClr val="262626"/>
-                </a:solidFill>
-                <a:latin typeface="Times New Roman" panose="02020603050405020304" pitchFamily="18" charset="0"/>
-                <a:ea typeface="华文楷体" panose="02010600040101010101" pitchFamily="2" charset="-122"/>
-                <a:cs typeface="Times New Roman" panose="02020603050405020304" pitchFamily="18" charset="0"/>
-              </a:rPr>
-              <a:t>被证监会采取</a:t>
-            </a:r>
-            <a:r>
-              <a:rPr lang="zh-CN" altLang="en-US" sz="1350" b="1" kern="1200" dirty="0">
-                <a:solidFill>
-                  <a:srgbClr val="004E98"/>
-                </a:solidFill>
-                <a:latin typeface="Times New Roman" panose="02020603050405020304" pitchFamily="18" charset="0"/>
-                <a:ea typeface="华文楷体" panose="02010600040101010101" pitchFamily="2" charset="-122"/>
-                <a:cs typeface="Times New Roman" panose="02020603050405020304" pitchFamily="18" charset="0"/>
-              </a:rPr>
-              <a:t>证券市场禁入</a:t>
-            </a:r>
-            <a:r>
-              <a:rPr lang="zh-CN" altLang="en-US" sz="1350" b="0" kern="1200" dirty="0">
-                <a:solidFill>
-                  <a:srgbClr val="262626"/>
-                </a:solidFill>
-                <a:latin typeface="Times New Roman" panose="02020603050405020304" pitchFamily="18" charset="0"/>
-                <a:ea typeface="华文楷体" panose="02010600040101010101" pitchFamily="2" charset="-122"/>
-                <a:cs typeface="Times New Roman" panose="02020603050405020304" pitchFamily="18" charset="0"/>
-              </a:rPr>
-              <a:t>措施且期限未届满；或被交易所</a:t>
-            </a:r>
-            <a:r>
-              <a:rPr lang="zh-CN" altLang="en-US" sz="1350" b="1" kern="1200" dirty="0">
-                <a:solidFill>
-                  <a:srgbClr val="004E98"/>
-                </a:solidFill>
-                <a:latin typeface="Times New Roman" panose="02020603050405020304" pitchFamily="18" charset="0"/>
-                <a:ea typeface="华文楷体" panose="02010600040101010101" pitchFamily="2" charset="-122"/>
-                <a:cs typeface="Times New Roman" panose="02020603050405020304" pitchFamily="18" charset="0"/>
-              </a:rPr>
-              <a:t>公开认定为不适合</a:t>
-            </a:r>
-            <a:r>
-              <a:rPr lang="zh-CN" altLang="en-US" sz="1350" b="0" kern="1200" dirty="0">
-                <a:solidFill>
-                  <a:srgbClr val="262626"/>
-                </a:solidFill>
-                <a:latin typeface="Times New Roman" panose="02020603050405020304" pitchFamily="18" charset="0"/>
-                <a:ea typeface="华文楷体" panose="02010600040101010101" pitchFamily="2" charset="-122"/>
-                <a:cs typeface="Times New Roman" panose="02020603050405020304" pitchFamily="18" charset="0"/>
-              </a:rPr>
-              <a:t>担任上市公司董监高且期限未届满</a:t>
-            </a:r>
-          </a:p>
-          <a:p>
-            <a:pPr marL="171450" indent="-171450" algn="l">
-              <a:lnSpc>
-                <a:spcPct val="155000"/>
-              </a:lnSpc>
-              <a:spcBef>
-                <a:spcPts val="250"/>
-              </a:spcBef>
-              <a:spcAft>
-                <a:spcPts val="0"/>
-              </a:spcAft>
-              <a:buClr>
-                <a:srgbClr val="197BC0"/>
-              </a:buClr>
-              <a:buSzPct val="60"/>
-              <a:buFont typeface="Wingdings" panose="05000000000000000000" pitchFamily="2" charset="2"/>
-              <a:buChar char="n"/>
-            </a:pPr>
-            <a:r>
-              <a:rPr lang="zh-CN" altLang="en-US" sz="1350" b="1" kern="1200" dirty="0">
-                <a:solidFill>
-                  <a:srgbClr val="004E98"/>
-                </a:solidFill>
-                <a:latin typeface="Times New Roman" panose="02020603050405020304" pitchFamily="18" charset="0"/>
-                <a:ea typeface="华文楷体" panose="02010600040101010101" pitchFamily="2" charset="-122"/>
-                <a:cs typeface="Times New Roman" panose="02020603050405020304" pitchFamily="18" charset="0"/>
-              </a:rPr>
-              <a:t>兜底条款：</a:t>
-            </a:r>
-            <a:r>
-              <a:rPr lang="zh-CN" altLang="en-US" sz="1350" b="0" kern="1200" dirty="0">
-                <a:solidFill>
-                  <a:srgbClr val="262626"/>
-                </a:solidFill>
-                <a:latin typeface="Times New Roman" panose="02020603050405020304" pitchFamily="18" charset="0"/>
-                <a:ea typeface="华文楷体" panose="02010600040101010101" pitchFamily="2" charset="-122"/>
-                <a:cs typeface="Times New Roman" panose="02020603050405020304" pitchFamily="18" charset="0"/>
-              </a:rPr>
-              <a:t>法律法规、证券交易所业务规则规定的其他情形</a:t>
-            </a:r>
-          </a:p>
-        </p:txBody>
-      </p:sp>
-      <p:sp>
-        <p:nvSpPr>
-          <p:cNvPr id="104" name="Warn"/>
-          <p:cNvSpPr/>
+              <a:t>规则第二十二条规定的处分记录</a:t>
+            </a:r>
+          </a:p>
+        </p:txBody>
+      </p:sp>
+      <p:sp>
+        <p:nvSpPr>
+          <p:cNvPr id="105" name="Items"/>
+          <p:cNvSpPr txBox="1"/>
           <p:nvPr/>
         </p:nvSpPr>
         <p:spPr>
           <a:xfrm>
-            <a:off x="773430" y="4980000"/>
-            <a:ext cx="10645140" cy="700000"/>
+            <a:off x="773430" y="4100095"/>
+            <a:ext cx="10645140" cy="1819905"/>
           </a:xfrm>
           <a:prstGeom prst="rect">
             <a:avLst/>
           </a:prstGeom>
-          <a:solidFill>
-            <a:srgbClr val="FDF1F1"/>
-          </a:solidFill>
-          <a:ln w="9525">
-            <a:solidFill>
-              <a:srgbClr val="C00000"/>
-            </a:solidFill>
+          <a:noFill/>
+          <a:ln>
+            <a:noFill/>
           </a:ln>
         </p:spPr>
         <p:txBody>
-          <a:bodyPr wrap="square" lIns="182880" tIns="91440" rIns="182880" bIns="91440" rtlCol="0" anchor="ctr"/>
+          <a:bodyPr wrap="square" lIns="0" tIns="0" rIns="0" bIns="0" rtlCol="0" anchor="t"/>
           <a:lstStyle/>
           <a:p>
-            <a:pPr marL="0" indent="0" algn="ctr">
+            <a:pPr marL="214313" indent="-214313" algn="l">
               <a:lnSpc>
-                <a:spcPct val="120000"/>
+                <a:spcPct val="160000"/>
               </a:lnSpc>
               <a:spcBef>
                 <a:spcPts val="0"/>
@@ -11151,7 +10238,11 @@
               <a:spcAft>
                 <a:spcPts val="0"/>
               </a:spcAft>
-              <a:buNone/>
+              <a:buClr>
+                <a:srgbClr val="004E98"/>
+              </a:buClr>
+              <a:buFont typeface="Wingdings" panose="05000000000000000000" pitchFamily="2" charset="2"/>
+              <a:buChar char="n"/>
             </a:pPr>
             <a:r>
               <a:rPr lang="zh-CN" altLang="en-US" sz="1400" b="0" kern="1200" dirty="0">
@@ -11162,64 +10253,154 @@
                 <a:ea typeface="华文楷体" panose="02010600040101010101" pitchFamily="2" charset="-122"/>
                 <a:cs typeface="Times New Roman" panose="02020603050405020304" pitchFamily="18" charset="0"/>
               </a:rPr>
-              <a:t>违反上述规定聘任的，</a:t>
+              <a:t>最近</a:t>
             </a:r>
             <a:r>
               <a:rPr lang="zh-CN" altLang="en-US" sz="1400" b="1" kern="1200" dirty="0">
                 <a:solidFill>
+                  <a:srgbClr val="004E98"/>
+                </a:solidFill>
+                <a:highlight>
+                  <a:srgbClr val="FFFF00"/>
+                </a:highlight>
+                <a:latin typeface="Times New Roman" panose="02020603050405020304" pitchFamily="18" charset="0"/>
+                <a:ea typeface="华文楷体" panose="02010600040101010101" pitchFamily="2" charset="-122"/>
+                <a:cs typeface="Times New Roman" panose="02020603050405020304" pitchFamily="18" charset="0"/>
+              </a:rPr>
+              <a:t>三十六个月</a:t>
+            </a:r>
+            <a:r>
+              <a:rPr lang="zh-CN" altLang="en-US" sz="1400" b="0" kern="1200" dirty="0">
+                <a:solidFill>
+                  <a:srgbClr val="262626"/>
+                </a:solidFill>
+                <a:latin typeface="Times New Roman" panose="02020603050405020304" pitchFamily="18" charset="0"/>
+                <a:ea typeface="华文楷体" panose="02010600040101010101" pitchFamily="2" charset="-122"/>
+                <a:cs typeface="Times New Roman" panose="02020603050405020304" pitchFamily="18" charset="0"/>
+              </a:rPr>
+              <a:t>被中国证监会行政处罚，或被采取三次以上行政监督管理措施。</a:t>
+            </a:r>
+          </a:p>
+          <a:p>
+            <a:pPr marL="214313" indent="-214313" algn="l">
+              <a:lnSpc>
+                <a:spcPct val="160000"/>
+              </a:lnSpc>
+              <a:spcBef>
+                <a:spcPts val="600"/>
+              </a:spcBef>
+              <a:spcAft>
+                <a:spcPts val="0"/>
+              </a:spcAft>
+              <a:buClr>
+                <a:srgbClr val="004E98"/>
+              </a:buClr>
+              <a:buFont typeface="Wingdings" panose="05000000000000000000" pitchFamily="2" charset="2"/>
+              <a:buChar char="n"/>
+            </a:pPr>
+            <a:r>
+              <a:rPr lang="zh-CN" altLang="en-US" sz="1400" b="0" kern="1200" dirty="0">
+                <a:solidFill>
+                  <a:srgbClr val="262626"/>
+                </a:solidFill>
+                <a:latin typeface="Times New Roman" panose="02020603050405020304" pitchFamily="18" charset="0"/>
+                <a:ea typeface="华文楷体" panose="02010600040101010101" pitchFamily="2" charset="-122"/>
+                <a:cs typeface="Times New Roman" panose="02020603050405020304" pitchFamily="18" charset="0"/>
+              </a:rPr>
+              <a:t>最近</a:t>
+            </a:r>
+            <a:r>
+              <a:rPr lang="zh-CN" altLang="en-US" sz="1400" b="1" kern="1200" dirty="0">
+                <a:solidFill>
+                  <a:srgbClr val="004E98"/>
+                </a:solidFill>
+                <a:latin typeface="Times New Roman" panose="02020603050405020304" pitchFamily="18" charset="0"/>
+                <a:ea typeface="华文楷体" panose="02010600040101010101" pitchFamily="2" charset="-122"/>
+                <a:cs typeface="Times New Roman" panose="02020603050405020304" pitchFamily="18" charset="0"/>
+              </a:rPr>
+              <a:t>三十六个月</a:t>
+            </a:r>
+            <a:r>
+              <a:rPr lang="zh-CN" altLang="en-US" sz="1400" b="0" kern="1200" dirty="0">
+                <a:solidFill>
+                  <a:srgbClr val="262626"/>
+                </a:solidFill>
+                <a:latin typeface="Times New Roman" panose="02020603050405020304" pitchFamily="18" charset="0"/>
+                <a:ea typeface="华文楷体" panose="02010600040101010101" pitchFamily="2" charset="-122"/>
+                <a:cs typeface="Times New Roman" panose="02020603050405020304" pitchFamily="18" charset="0"/>
+              </a:rPr>
+              <a:t>被证券交易所公开谴责，或三次以上通报批评。</a:t>
+            </a:r>
+          </a:p>
+          <a:p>
+            <a:pPr marL="214313" indent="-214313" algn="l">
+              <a:lnSpc>
+                <a:spcPct val="160000"/>
+              </a:lnSpc>
+              <a:spcBef>
+                <a:spcPts val="600"/>
+              </a:spcBef>
+              <a:spcAft>
+                <a:spcPts val="0"/>
+              </a:spcAft>
+              <a:buClr>
+                <a:srgbClr val="004E98"/>
+              </a:buClr>
+              <a:buFont typeface="Wingdings" panose="05000000000000000000" pitchFamily="2" charset="2"/>
+              <a:buChar char="n"/>
+            </a:pPr>
+            <a:r>
+              <a:rPr lang="zh-CN" altLang="en-US" sz="1400" b="0" kern="1200" dirty="0">
+                <a:solidFill>
+                  <a:srgbClr val="262626"/>
+                </a:solidFill>
+                <a:latin typeface="Times New Roman" panose="02020603050405020304" pitchFamily="18" charset="0"/>
+                <a:ea typeface="华文楷体" panose="02010600040101010101" pitchFamily="2" charset="-122"/>
+                <a:cs typeface="Times New Roman" panose="02020603050405020304" pitchFamily="18" charset="0"/>
+              </a:rPr>
+              <a:t>被证监会采取证券市场禁入，或被交易所公开认定不适合担任董监高，期限未届满。</a:t>
+            </a:r>
+          </a:p>
+          <a:p>
+            <a:pPr marL="214313" indent="-214313" algn="l">
+              <a:lnSpc>
+                <a:spcPct val="160000"/>
+              </a:lnSpc>
+              <a:spcBef>
+                <a:spcPts val="600"/>
+              </a:spcBef>
+              <a:spcAft>
+                <a:spcPts val="0"/>
+              </a:spcAft>
+              <a:buClr>
+                <a:srgbClr val="004E98"/>
+              </a:buClr>
+              <a:buFont typeface="Wingdings" panose="05000000000000000000" pitchFamily="2" charset="2"/>
+              <a:buChar char="n"/>
+            </a:pPr>
+            <a:r>
+              <a:rPr lang="zh-CN" altLang="en-US" sz="1400" b="1" kern="1200" dirty="0">
+                <a:solidFill>
                   <a:srgbClr val="C00000"/>
                 </a:solidFill>
                 <a:latin typeface="Times New Roman" panose="02020603050405020304" pitchFamily="18" charset="0"/>
                 <a:ea typeface="华文楷体" panose="02010600040101010101" pitchFamily="2" charset="-122"/>
                 <a:cs typeface="Times New Roman" panose="02020603050405020304" pitchFamily="18" charset="0"/>
               </a:rPr>
-              <a:t>聘任无效</a:t>
-            </a:r>
-            <a:r>
-              <a:rPr lang="zh-CN" altLang="en-US" sz="1400" b="0" kern="1200" dirty="0">
-                <a:solidFill>
-                  <a:srgbClr val="262626"/>
-                </a:solidFill>
-                <a:latin typeface="Times New Roman" panose="02020603050405020304" pitchFamily="18" charset="0"/>
-                <a:ea typeface="华文楷体" panose="02010600040101010101" pitchFamily="2" charset="-122"/>
-                <a:cs typeface="Times New Roman" panose="02020603050405020304" pitchFamily="18" charset="0"/>
-              </a:rPr>
-              <a:t>；任职期间出现上述情形的，公司</a:t>
-            </a:r>
-            <a:r>
-              <a:rPr lang="zh-CN" altLang="en-US" sz="1400" b="1" kern="1200" dirty="0">
-                <a:solidFill>
-                  <a:srgbClr val="C00000"/>
-                </a:solidFill>
-                <a:latin typeface="Times New Roman" panose="02020603050405020304" pitchFamily="18" charset="0"/>
-                <a:ea typeface="华文楷体" panose="02010600040101010101" pitchFamily="2" charset="-122"/>
-                <a:cs typeface="Times New Roman" panose="02020603050405020304" pitchFamily="18" charset="0"/>
-              </a:rPr>
-              <a:t>应当解除其职务</a:t>
-            </a:r>
-            <a:r>
-              <a:rPr lang="zh-CN" altLang="en-US" sz="1400" b="0" kern="1200" dirty="0">
-                <a:solidFill>
-                  <a:srgbClr val="262626"/>
-                </a:solidFill>
-                <a:latin typeface="Times New Roman" panose="02020603050405020304" pitchFamily="18" charset="0"/>
-                <a:ea typeface="华文楷体" panose="02010600040101010101" pitchFamily="2" charset="-122"/>
-                <a:cs typeface="Times New Roman" panose="02020603050405020304" pitchFamily="18" charset="0"/>
-              </a:rPr>
-              <a:t>。上述情形应当在拟聘前逐条核查并留痕。</a:t>
-            </a:r>
-          </a:p>
-        </p:txBody>
-      </p:sp>
-      <p:sp>
-        <p:nvSpPr>
-          <p:cNvPr id="105" name="Footnote"/>
+              <a:t>违反上述规定聘任的，聘任无效；任职期间出现的，公司应当解除其职务。</a:t>
+            </a:r>
+          </a:p>
+        </p:txBody>
+      </p:sp>
+      <p:sp>
+        <p:nvSpPr>
+          <p:cNvPr id="106" name="Source"/>
           <p:cNvSpPr txBox="1"/>
           <p:nvPr/>
         </p:nvSpPr>
         <p:spPr>
           <a:xfrm>
-            <a:off x="773430" y="5920000"/>
+            <a:off x="773430" y="6180000"/>
             <a:ext cx="10645140" cy="260000"/>
           </a:xfrm>
           <a:prstGeom prst="rect">
@@ -11287,7 +10468,7 @@
       </p:grpSpPr>
       <p:sp>
         <p:nvSpPr>
-          <p:cNvPr id="101" name="标题"/>
+          <p:cNvPr id="104" name="标题"/>
           <p:cNvSpPr txBox="1"/>
           <p:nvPr/>
         </p:nvSpPr>
@@ -11305,7 +10486,7 @@
           </a:ln>
         </p:spPr>
         <p:txBody>
-          <a:bodyPr wrap="square" lIns="91440" tIns="45720" rIns="91440" bIns="45720" rtlCol="0" anchor="ctr"/>
+          <a:bodyPr wrap="square" lIns="91440" tIns="0" rIns="91440" bIns="0" rtlCol="0" anchor="ctr"/>
           <a:lstStyle/>
           <a:p>
             <a:pPr marL="0" indent="0" algn="l">
@@ -11336,13 +10517,13 @@
       </p:sp>
       <p:sp>
         <p:nvSpPr>
-          <p:cNvPr id="102" name="SectionBar"/>
+          <p:cNvPr id="105" name="SectionBar"/>
           <p:cNvSpPr/>
           <p:nvPr/>
         </p:nvSpPr>
         <p:spPr>
           <a:xfrm>
-            <a:off x="773430" y="1010000"/>
+            <a:off x="773430" y="1135169"/>
             <a:ext cx="10645140" cy="337185"/>
           </a:xfrm>
           <a:prstGeom prst="rect">
@@ -11363,7 +10544,7 @@
           </a:effectLst>
         </p:spPr>
         <p:txBody>
-          <a:bodyPr wrap="square" lIns="137160" tIns="45720" rIns="91440" bIns="45720" rtlCol="0" anchor="ctr"/>
+          <a:bodyPr wrap="square" lIns="137160" tIns="0" rIns="0" bIns="0" rtlCol="0" anchor="ctr"/>
           <a:lstStyle/>
           <a:p>
             <a:pPr marL="0" indent="0" algn="l">
@@ -11387,41 +10568,39 @@
                 <a:ea typeface="华文楷体" panose="02010600040101010101" pitchFamily="2" charset="-122"/>
                 <a:cs typeface="Times New Roman" panose="02020603050405020304" pitchFamily="18" charset="0"/>
               </a:rPr>
-              <a:t>不得兼任的三类职务（规则第二十六条）</a:t>
-            </a:r>
-          </a:p>
-        </p:txBody>
-      </p:sp>
-      <p:sp>
-        <p:nvSpPr>
-          <p:cNvPr id="103" name="Ban"/>
+              <a:t>不得兼任的职务（规则第二十六条）</a:t>
+            </a:r>
+          </a:p>
+        </p:txBody>
+      </p:sp>
+      <p:sp>
+        <p:nvSpPr>
+          <p:cNvPr id="106" name="Col"/>
           <p:cNvSpPr/>
           <p:nvPr/>
         </p:nvSpPr>
         <p:spPr>
           <a:xfrm>
-            <a:off x="773430" y="1450000"/>
-            <a:ext cx="3388380" cy="1330000"/>
+            <a:off x="773430" y="1652354"/>
+            <a:ext cx="3388380" cy="1383985"/>
           </a:xfrm>
           <a:prstGeom prst="rect">
             <a:avLst/>
           </a:prstGeom>
           <a:solidFill>
-            <a:srgbClr val="FDF1F1"/>
+            <a:srgbClr val="F2F6FB"/>
           </a:solidFill>
-          <a:ln w="9525">
-            <a:solidFill>
-              <a:srgbClr val="C00000"/>
-            </a:solidFill>
+          <a:ln>
+            <a:noFill/>
           </a:ln>
         </p:spPr>
         <p:txBody>
-          <a:bodyPr wrap="square" lIns="137160" tIns="137160" rIns="137160" bIns="91440" rtlCol="0" anchor="ctr"/>
+          <a:bodyPr wrap="square" lIns="182880" tIns="137160" rIns="137160" bIns="91440" rtlCol="0" anchor="ctr"/>
           <a:lstStyle/>
           <a:p>
-            <a:pPr marL="0" indent="0" algn="ctr">
+            <a:pPr marL="0" indent="0" algn="l">
               <a:lnSpc>
-                <a:spcPct val="100000"/>
+                <a:spcPct val="105000"/>
               </a:lnSpc>
               <a:spcBef>
                 <a:spcPts val="0"/>
@@ -11432,7 +10611,7 @@
               <a:buNone/>
             </a:pPr>
             <a:r>
-              <a:rPr lang="zh-CN" altLang="en-US" sz="2000" b="1" kern="1200" dirty="0">
+              <a:rPr lang="zh-CN" altLang="en-US" sz="1400" b="1" kern="1200" dirty="0">
                 <a:solidFill>
                   <a:srgbClr val="C00000"/>
                 </a:solidFill>
@@ -11440,16 +10619,16 @@
                 <a:ea typeface="华文楷体" panose="02010600040101010101" pitchFamily="2" charset="-122"/>
                 <a:cs typeface="Times New Roman" panose="02020603050405020304" pitchFamily="18" charset="0"/>
               </a:rPr>
-              <a:t>✕</a:t>
-            </a:r>
-          </a:p>
-          <a:p>
-            <a:pPr marL="0" indent="0" algn="ctr">
+              <a:t>✕　经理（总经理）</a:t>
+            </a:r>
+          </a:p>
+          <a:p>
+            <a:pPr marL="0" indent="0" algn="l">
               <a:lnSpc>
-                <a:spcPct val="110000"/>
+                <a:spcPct val="140000"/>
               </a:lnSpc>
               <a:spcBef>
-                <a:spcPts val="300"/>
+                <a:spcPts val="350"/>
               </a:spcBef>
               <a:spcAft>
                 <a:spcPts val="0"/>
@@ -11457,39 +10636,14 @@
               <a:buNone/>
             </a:pPr>
             <a:r>
-              <a:rPr lang="zh-CN" altLang="en-US" sz="1600" b="1" kern="1200" dirty="0">
-                <a:solidFill>
-                  <a:srgbClr val="C00000"/>
+              <a:rPr lang="zh-CN" altLang="en-US" sz="1200" b="0" kern="1200" dirty="0">
+                <a:solidFill>
+                  <a:srgbClr val="262626"/>
                 </a:solidFill>
                 <a:latin typeface="Times New Roman" panose="02020603050405020304" pitchFamily="18" charset="0"/>
                 <a:ea typeface="华文楷体" panose="02010600040101010101" pitchFamily="2" charset="-122"/>
                 <a:cs typeface="Times New Roman" panose="02020603050405020304" pitchFamily="18" charset="0"/>
               </a:rPr>
-              <a:t>经　理（总经理）</a:t>
-            </a:r>
-          </a:p>
-          <a:p>
-            <a:pPr marL="0" indent="0" algn="ctr">
-              <a:lnSpc>
-                <a:spcPct val="100000"/>
-              </a:lnSpc>
-              <a:spcBef>
-                <a:spcPts val="250"/>
-              </a:spcBef>
-              <a:spcAft>
-                <a:spcPts val="0"/>
-              </a:spcAft>
-              <a:buNone/>
-            </a:pPr>
-            <a:r>
-              <a:rPr lang="zh-CN" altLang="en-US" sz="1100" b="0" kern="1200" dirty="0">
-                <a:solidFill>
-                  <a:srgbClr val="7F7F7F"/>
-                </a:solidFill>
-                <a:latin typeface="Times New Roman" panose="02020603050405020304" pitchFamily="18" charset="0"/>
-                <a:ea typeface="华文楷体" panose="02010600040101010101" pitchFamily="2" charset="-122"/>
-                <a:cs typeface="Times New Roman" panose="02020603050405020304" pitchFamily="18" charset="0"/>
-              </a:rPr>
               <a:t>全面负责公司经营管理</a:t>
             </a:r>
           </a:p>
@@ -11497,34 +10651,32 @@
       </p:sp>
       <p:sp>
         <p:nvSpPr>
-          <p:cNvPr id="104" name="Ban"/>
+          <p:cNvPr id="107" name="Col"/>
           <p:cNvSpPr/>
           <p:nvPr/>
         </p:nvSpPr>
         <p:spPr>
           <a:xfrm>
-            <a:off x="4401810" y="1450000"/>
-            <a:ext cx="3388380" cy="1330000"/>
+            <a:off x="4401810" y="1652354"/>
+            <a:ext cx="3388380" cy="1383985"/>
           </a:xfrm>
           <a:prstGeom prst="rect">
             <a:avLst/>
           </a:prstGeom>
           <a:solidFill>
-            <a:srgbClr val="FDF1F1"/>
+            <a:srgbClr val="F2F6FB"/>
           </a:solidFill>
-          <a:ln w="9525">
-            <a:solidFill>
-              <a:srgbClr val="C00000"/>
-            </a:solidFill>
+          <a:ln>
+            <a:noFill/>
           </a:ln>
         </p:spPr>
         <p:txBody>
-          <a:bodyPr wrap="square" lIns="137160" tIns="137160" rIns="137160" bIns="91440" rtlCol="0" anchor="ctr"/>
+          <a:bodyPr wrap="square" lIns="182880" tIns="137160" rIns="137160" bIns="91440" rtlCol="0" anchor="ctr"/>
           <a:lstStyle/>
           <a:p>
-            <a:pPr marL="0" indent="0" algn="ctr">
+            <a:pPr marL="0" indent="0" algn="l">
               <a:lnSpc>
-                <a:spcPct val="100000"/>
+                <a:spcPct val="105000"/>
               </a:lnSpc>
               <a:spcBef>
                 <a:spcPts val="0"/>
@@ -11535,7 +10687,7 @@
               <a:buNone/>
             </a:pPr>
             <a:r>
-              <a:rPr lang="zh-CN" altLang="en-US" sz="2000" b="1" kern="1200" dirty="0">
+              <a:rPr lang="zh-CN" altLang="en-US" sz="1400" b="1" kern="1200" dirty="0">
                 <a:solidFill>
                   <a:srgbClr val="C00000"/>
                 </a:solidFill>
@@ -11543,16 +10695,16 @@
                 <a:ea typeface="华文楷体" panose="02010600040101010101" pitchFamily="2" charset="-122"/>
                 <a:cs typeface="Times New Roman" panose="02020603050405020304" pitchFamily="18" charset="0"/>
               </a:rPr>
-              <a:t>✕</a:t>
-            </a:r>
-          </a:p>
-          <a:p>
-            <a:pPr marL="0" indent="0" algn="ctr">
+              <a:t>✕　分管经营业务的副经理</a:t>
+            </a:r>
+          </a:p>
+          <a:p>
+            <a:pPr marL="0" indent="0" algn="l">
               <a:lnSpc>
-                <a:spcPct val="110000"/>
+                <a:spcPct val="140000"/>
               </a:lnSpc>
               <a:spcBef>
-                <a:spcPts val="300"/>
+                <a:spcPts val="350"/>
               </a:spcBef>
               <a:spcAft>
                 <a:spcPts val="0"/>
@@ -11560,39 +10712,14 @@
               <a:buNone/>
             </a:pPr>
             <a:r>
-              <a:rPr lang="zh-CN" altLang="en-US" sz="1600" b="1" kern="1200" dirty="0">
-                <a:solidFill>
-                  <a:srgbClr val="C00000"/>
+              <a:rPr lang="zh-CN" altLang="en-US" sz="1200" b="0" kern="1200" dirty="0">
+                <a:solidFill>
+                  <a:srgbClr val="262626"/>
                 </a:solidFill>
                 <a:latin typeface="Times New Roman" panose="02020603050405020304" pitchFamily="18" charset="0"/>
                 <a:ea typeface="华文楷体" panose="02010600040101010101" pitchFamily="2" charset="-122"/>
                 <a:cs typeface="Times New Roman" panose="02020603050405020304" pitchFamily="18" charset="0"/>
               </a:rPr>
-              <a:t>分管经营业务的副经理</a:t>
-            </a:r>
-          </a:p>
-          <a:p>
-            <a:pPr marL="0" indent="0" algn="ctr">
-              <a:lnSpc>
-                <a:spcPct val="100000"/>
-              </a:lnSpc>
-              <a:spcBef>
-                <a:spcPts val="250"/>
-              </a:spcBef>
-              <a:spcAft>
-                <a:spcPts val="0"/>
-              </a:spcAft>
-              <a:buNone/>
-            </a:pPr>
-            <a:r>
-              <a:rPr lang="zh-CN" altLang="en-US" sz="1100" b="0" kern="1200" dirty="0">
-                <a:solidFill>
-                  <a:srgbClr val="7F7F7F"/>
-                </a:solidFill>
-                <a:latin typeface="Times New Roman" panose="02020603050405020304" pitchFamily="18" charset="0"/>
-                <a:ea typeface="华文楷体" panose="02010600040101010101" pitchFamily="2" charset="-122"/>
-                <a:cs typeface="Times New Roman" panose="02020603050405020304" pitchFamily="18" charset="0"/>
-              </a:rPr>
               <a:t>直接主管具体经营业务</a:t>
             </a:r>
           </a:p>
@@ -11600,34 +10727,32 @@
       </p:sp>
       <p:sp>
         <p:nvSpPr>
-          <p:cNvPr id="105" name="Ban"/>
+          <p:cNvPr id="108" name="Col"/>
           <p:cNvSpPr/>
           <p:nvPr/>
         </p:nvSpPr>
         <p:spPr>
           <a:xfrm>
-            <a:off x="8030190" y="1450000"/>
-            <a:ext cx="3388380" cy="1330000"/>
+            <a:off x="8030190" y="1652354"/>
+            <a:ext cx="3388380" cy="1383985"/>
           </a:xfrm>
           <a:prstGeom prst="rect">
             <a:avLst/>
           </a:prstGeom>
           <a:solidFill>
-            <a:srgbClr val="FDF1F1"/>
+            <a:srgbClr val="F2F6FB"/>
           </a:solidFill>
-          <a:ln w="9525">
-            <a:solidFill>
-              <a:srgbClr val="C00000"/>
-            </a:solidFill>
+          <a:ln>
+            <a:noFill/>
           </a:ln>
         </p:spPr>
         <p:txBody>
-          <a:bodyPr wrap="square" lIns="137160" tIns="137160" rIns="137160" bIns="91440" rtlCol="0" anchor="ctr"/>
+          <a:bodyPr wrap="square" lIns="182880" tIns="137160" rIns="137160" bIns="91440" rtlCol="0" anchor="ctr"/>
           <a:lstStyle/>
           <a:p>
-            <a:pPr marL="0" indent="0" algn="ctr">
+            <a:pPr marL="0" indent="0" algn="l">
               <a:lnSpc>
-                <a:spcPct val="100000"/>
+                <a:spcPct val="105000"/>
               </a:lnSpc>
               <a:spcBef>
                 <a:spcPts val="0"/>
@@ -11638,7 +10763,7 @@
               <a:buNone/>
             </a:pPr>
             <a:r>
-              <a:rPr lang="zh-CN" altLang="en-US" sz="2000" b="1" kern="1200" dirty="0">
+              <a:rPr lang="zh-CN" altLang="en-US" sz="1400" b="1" kern="1200" dirty="0">
                 <a:solidFill>
                   <a:srgbClr val="C00000"/>
                 </a:solidFill>
@@ -11646,16 +10771,16 @@
                 <a:ea typeface="华文楷体" panose="02010600040101010101" pitchFamily="2" charset="-122"/>
                 <a:cs typeface="Times New Roman" panose="02020603050405020304" pitchFamily="18" charset="0"/>
               </a:rPr>
-              <a:t>✕</a:t>
-            </a:r>
-          </a:p>
-          <a:p>
-            <a:pPr marL="0" indent="0" algn="ctr">
+              <a:t>✕　财务负责人</a:t>
+            </a:r>
+          </a:p>
+          <a:p>
+            <a:pPr marL="0" indent="0" algn="l">
               <a:lnSpc>
-                <a:spcPct val="110000"/>
+                <a:spcPct val="140000"/>
               </a:lnSpc>
               <a:spcBef>
-                <a:spcPts val="300"/>
+                <a:spcPts val="350"/>
               </a:spcBef>
               <a:spcAft>
                 <a:spcPts val="0"/>
@@ -11663,39 +10788,14 @@
               <a:buNone/>
             </a:pPr>
             <a:r>
-              <a:rPr lang="zh-CN" altLang="en-US" sz="1600" b="1" kern="1200" dirty="0">
-                <a:solidFill>
-                  <a:srgbClr val="C00000"/>
+              <a:rPr lang="zh-CN" altLang="en-US" sz="1200" b="0" kern="1200" dirty="0">
+                <a:solidFill>
+                  <a:srgbClr val="262626"/>
                 </a:solidFill>
                 <a:latin typeface="Times New Roman" panose="02020603050405020304" pitchFamily="18" charset="0"/>
                 <a:ea typeface="华文楷体" panose="02010600040101010101" pitchFamily="2" charset="-122"/>
                 <a:cs typeface="Times New Roman" panose="02020603050405020304" pitchFamily="18" charset="0"/>
               </a:rPr>
-              <a:t>财务负责人</a:t>
-            </a:r>
-          </a:p>
-          <a:p>
-            <a:pPr marL="0" indent="0" algn="ctr">
-              <a:lnSpc>
-                <a:spcPct val="100000"/>
-              </a:lnSpc>
-              <a:spcBef>
-                <a:spcPts val="250"/>
-              </a:spcBef>
-              <a:spcAft>
-                <a:spcPts val="0"/>
-              </a:spcAft>
-              <a:buNone/>
-            </a:pPr>
-            <a:r>
-              <a:rPr lang="zh-CN" altLang="en-US" sz="1100" b="0" kern="1200" dirty="0">
-                <a:solidFill>
-                  <a:srgbClr val="7F7F7F"/>
-                </a:solidFill>
-                <a:latin typeface="Times New Roman" panose="02020603050405020304" pitchFamily="18" charset="0"/>
-                <a:ea typeface="华文楷体" panose="02010600040101010101" pitchFamily="2" charset="-122"/>
-                <a:cs typeface="Times New Roman" panose="02020603050405020304" pitchFamily="18" charset="0"/>
-              </a:rPr>
               <a:t>主管财务核算与资金</a:t>
             </a:r>
           </a:p>
@@ -11703,88 +10803,13 @@
       </p:sp>
       <p:sp>
         <p:nvSpPr>
-          <p:cNvPr id="106" name="Why"/>
+          <p:cNvPr id="109" name="SectionBar"/>
           <p:cNvSpPr/>
           <p:nvPr/>
         </p:nvSpPr>
         <p:spPr>
           <a:xfrm>
-            <a:off x="773430" y="2930000"/>
-            <a:ext cx="10645140" cy="520000"/>
-          </a:xfrm>
-          <a:prstGeom prst="rect">
-            <a:avLst/>
-          </a:prstGeom>
-          <a:solidFill>
-            <a:srgbClr val="E8F1FA"/>
-          </a:solidFill>
-          <a:ln w="12700">
-            <a:solidFill>
-              <a:srgbClr val="C8D9EA"/>
-            </a:solidFill>
-          </a:ln>
-        </p:spPr>
-        <p:txBody>
-          <a:bodyPr wrap="square" lIns="182880" tIns="91440" rIns="182880" bIns="91440" rtlCol="0" anchor="ctr"/>
-          <a:lstStyle/>
-          <a:p>
-            <a:pPr marL="0" indent="0" algn="ctr">
-              <a:lnSpc>
-                <a:spcPct val="120000"/>
-              </a:lnSpc>
-              <a:spcBef>
-                <a:spcPts val="0"/>
-              </a:spcBef>
-              <a:spcAft>
-                <a:spcPts val="0"/>
-              </a:spcAft>
-              <a:buNone/>
-            </a:pPr>
-            <a:r>
-              <a:rPr lang="zh-CN" altLang="en-US" sz="1300" b="0" kern="1200" dirty="0">
-                <a:solidFill>
-                  <a:srgbClr val="262626"/>
-                </a:solidFill>
-                <a:latin typeface="Times New Roman" panose="02020603050405020304" pitchFamily="18" charset="0"/>
-                <a:ea typeface="华文楷体" panose="02010600040101010101" pitchFamily="2" charset="-122"/>
-                <a:cs typeface="Times New Roman" panose="02020603050405020304" pitchFamily="18" charset="0"/>
-              </a:rPr>
-              <a:t>上述三类职务直接主管经营与财务，与董事会秘书</a:t>
-            </a:r>
-            <a:r>
-              <a:rPr lang="zh-CN" altLang="en-US" sz="1300" b="1" kern="1200" dirty="0">
-                <a:solidFill>
-                  <a:srgbClr val="004E98"/>
-                </a:solidFill>
-                <a:latin typeface="Times New Roman" panose="02020603050405020304" pitchFamily="18" charset="0"/>
-                <a:ea typeface="华文楷体" panose="02010600040101010101" pitchFamily="2" charset="-122"/>
-                <a:cs typeface="Times New Roman" panose="02020603050405020304" pitchFamily="18" charset="0"/>
-              </a:rPr>
-              <a:t>监督信息披露、保障治理合规</a:t>
-            </a:r>
-            <a:r>
-              <a:rPr lang="zh-CN" altLang="en-US" sz="1300" b="0" kern="1200" dirty="0">
-                <a:solidFill>
-                  <a:srgbClr val="262626"/>
-                </a:solidFill>
-                <a:latin typeface="Times New Roman" panose="02020603050405020304" pitchFamily="18" charset="0"/>
-                <a:ea typeface="华文楷体" panose="02010600040101010101" pitchFamily="2" charset="-122"/>
-                <a:cs typeface="Times New Roman" panose="02020603050405020304" pitchFamily="18" charset="0"/>
-              </a:rPr>
-              <a:t>的职责存在利益冲突。</a:t>
-            </a:r>
-          </a:p>
-        </p:txBody>
-      </p:sp>
-      <p:sp>
-        <p:nvSpPr>
-          <p:cNvPr id="107" name="SectionBar"/>
-          <p:cNvSpPr/>
-          <p:nvPr/>
-        </p:nvSpPr>
-        <p:spPr>
-          <a:xfrm>
-            <a:off x="773430" y="3620000"/>
+            <a:off x="773430" y="3745632"/>
             <a:ext cx="10645140" cy="337185"/>
           </a:xfrm>
           <a:prstGeom prst="rect">
@@ -11805,7 +10830,7 @@
           </a:effectLst>
         </p:spPr>
         <p:txBody>
-          <a:bodyPr wrap="square" lIns="137160" tIns="45720" rIns="91440" bIns="45720" rtlCol="0" anchor="ctr"/>
+          <a:bodyPr wrap="square" lIns="137160" tIns="0" rIns="0" bIns="0" rtlCol="0" anchor="ctr"/>
           <a:lstStyle/>
           <a:p>
             <a:pPr marL="0" indent="0" algn="l">
@@ -11829,41 +10854,37 @@
                 <a:ea typeface="华文楷体" panose="02010600040101010101" pitchFamily="2" charset="-122"/>
                 <a:cs typeface="Times New Roman" panose="02020603050405020304" pitchFamily="18" charset="0"/>
               </a:rPr>
-              <a:t>兼任公司其他职务的，应当同时满足两项条件</a:t>
-            </a:r>
-          </a:p>
-        </p:txBody>
-      </p:sp>
-      <p:sp>
-        <p:nvSpPr>
-          <p:cNvPr id="108" name="Card"/>
-          <p:cNvSpPr/>
+              <a:t>兼任公司其他职务的，应当同时满足</a:t>
+            </a:r>
+          </a:p>
+        </p:txBody>
+      </p:sp>
+      <p:sp>
+        <p:nvSpPr>
+          <p:cNvPr id="110" name="Items"/>
+          <p:cNvSpPr txBox="1"/>
           <p:nvPr/>
         </p:nvSpPr>
         <p:spPr>
           <a:xfrm>
-            <a:off x="773430" y="4070000"/>
-            <a:ext cx="5172570" cy="1080000"/>
+            <a:off x="773430" y="4262817"/>
+            <a:ext cx="10645140" cy="1657183"/>
           </a:xfrm>
           <a:prstGeom prst="rect">
             <a:avLst/>
           </a:prstGeom>
-          <a:solidFill>
-            <a:srgbClr val="F2F6FB"/>
-          </a:solidFill>
-          <a:ln w="12700">
-            <a:solidFill>
-              <a:srgbClr val="C8D9EA"/>
-            </a:solidFill>
+          <a:noFill/>
+          <a:ln>
+            <a:noFill/>
           </a:ln>
         </p:spPr>
         <p:txBody>
-          <a:bodyPr wrap="square" lIns="182880" tIns="137160" rIns="137160" bIns="91440" rtlCol="0" anchor="t"/>
+          <a:bodyPr wrap="square" lIns="0" tIns="0" rIns="0" bIns="0" rtlCol="0" anchor="t"/>
           <a:lstStyle/>
           <a:p>
-            <a:pPr marL="0" indent="0" algn="l">
+            <a:pPr marL="214313" indent="-214313" algn="l">
               <a:lnSpc>
-                <a:spcPct val="100000"/>
+                <a:spcPct val="170000"/>
               </a:lnSpc>
               <a:spcBef>
                 <a:spcPts val="0"/>
@@ -11871,40 +10892,14 @@
               <a:spcAft>
                 <a:spcPts val="0"/>
               </a:spcAft>
-              <a:buNone/>
-            </a:pPr>
-            <a:r>
-              <a:rPr lang="zh-CN" altLang="en-US" sz="1400" b="1" kern="1200" dirty="0">
-                <a:solidFill>
-                  <a:srgbClr val="004E98"/>
-                </a:solidFill>
-                <a:latin typeface="Times New Roman" panose="02020603050405020304" pitchFamily="18" charset="0"/>
-                <a:ea typeface="华文楷体" panose="02010600040101010101" pitchFamily="2" charset="-122"/>
-                <a:cs typeface="Times New Roman" panose="02020603050405020304" pitchFamily="18" charset="0"/>
-              </a:rPr>
-              <a:t>① 职责边界应当明确区分</a:t>
-            </a:r>
-          </a:p>
-          <a:p>
-            <a:pPr marL="171450" indent="-171450" algn="l">
-              <a:lnSpc>
-                <a:spcPct val="140000"/>
-              </a:lnSpc>
-              <a:spcBef>
-                <a:spcPts val="350"/>
-              </a:spcBef>
-              <a:spcAft>
-                <a:spcPts val="0"/>
-              </a:spcAft>
               <a:buClr>
-                <a:srgbClr val="197BC0"/>
+                <a:srgbClr val="004E98"/>
               </a:buClr>
-              <a:buSzPct val="60"/>
               <a:buFont typeface="Wingdings" panose="05000000000000000000" pitchFamily="2" charset="2"/>
               <a:buChar char="n"/>
             </a:pPr>
             <a:r>
-              <a:rPr lang="zh-CN" altLang="en-US" sz="1250" b="0" kern="1200" dirty="0">
+              <a:rPr lang="zh-CN" altLang="en-US" sz="1600" b="0" kern="1200" dirty="0">
                 <a:solidFill>
                   <a:srgbClr val="262626"/>
                 </a:solidFill>
@@ -11912,93 +10907,28 @@
                 <a:ea typeface="华文楷体" panose="02010600040101010101" pitchFamily="2" charset="-122"/>
                 <a:cs typeface="Times New Roman" panose="02020603050405020304" pitchFamily="18" charset="0"/>
               </a:rPr>
-              <a:t>明确区分董事会秘书职责与其他职务职责，避免</a:t>
-            </a:r>
-            <a:r>
-              <a:rPr lang="zh-CN" altLang="en-US" sz="1250" b="1" kern="1200" dirty="0">
-                <a:solidFill>
-                  <a:srgbClr val="004E98"/>
-                </a:solidFill>
-                <a:latin typeface="Times New Roman" panose="02020603050405020304" pitchFamily="18" charset="0"/>
-                <a:ea typeface="华文楷体" panose="02010600040101010101" pitchFamily="2" charset="-122"/>
-                <a:cs typeface="Times New Roman" panose="02020603050405020304" pitchFamily="18" charset="0"/>
-              </a:rPr>
-              <a:t>职责混同、责任不清</a:t>
-            </a:r>
-          </a:p>
-        </p:txBody>
-      </p:sp>
-      <p:sp>
-        <p:nvSpPr>
-          <p:cNvPr id="109" name="Card"/>
-          <p:cNvSpPr/>
-          <p:nvPr/>
-        </p:nvSpPr>
-        <p:spPr>
-          <a:xfrm>
-            <a:off x="6246000" y="4070000"/>
-            <a:ext cx="5172570" cy="1080000"/>
-          </a:xfrm>
-          <a:prstGeom prst="rect">
-            <a:avLst/>
-          </a:prstGeom>
-          <a:solidFill>
-            <a:srgbClr val="F2F6FB"/>
-          </a:solidFill>
-          <a:ln w="12700">
-            <a:solidFill>
-              <a:srgbClr val="C8D9EA"/>
-            </a:solidFill>
-          </a:ln>
-        </p:spPr>
-        <p:txBody>
-          <a:bodyPr wrap="square" lIns="182880" tIns="137160" rIns="137160" bIns="91440" rtlCol="0" anchor="t"/>
-          <a:lstStyle/>
-          <a:p>
-            <a:pPr marL="0" indent="0" algn="l">
+              <a:t>明确区分董事会秘书与其他职务的职责。</a:t>
+            </a:r>
+          </a:p>
+          <a:p>
+            <a:pPr marL="214313" indent="-214313" algn="l">
               <a:lnSpc>
-                <a:spcPct val="100000"/>
+                <a:spcPct val="170000"/>
               </a:lnSpc>
               <a:spcBef>
-                <a:spcPts val="0"/>
+                <a:spcPts val="800"/>
               </a:spcBef>
               <a:spcAft>
                 <a:spcPts val="0"/>
               </a:spcAft>
-              <a:buNone/>
-            </a:pPr>
-            <a:r>
-              <a:rPr lang="zh-CN" altLang="en-US" sz="1400" b="1" kern="1200" dirty="0">
-                <a:solidFill>
-                  <a:srgbClr val="004E98"/>
-                </a:solidFill>
-                <a:latin typeface="Times New Roman" panose="02020603050405020304" pitchFamily="18" charset="0"/>
-                <a:ea typeface="华文楷体" panose="02010600040101010101" pitchFamily="2" charset="-122"/>
-                <a:cs typeface="Times New Roman" panose="02020603050405020304" pitchFamily="18" charset="0"/>
-              </a:rPr>
-              <a:t>② 时间与精力应当充分保证</a:t>
-            </a:r>
-          </a:p>
-          <a:p>
-            <a:pPr marL="171450" indent="-171450" algn="l">
-              <a:lnSpc>
-                <a:spcPct val="140000"/>
-              </a:lnSpc>
-              <a:spcBef>
-                <a:spcPts val="350"/>
-              </a:spcBef>
-              <a:spcAft>
-                <a:spcPts val="0"/>
-              </a:spcAft>
               <a:buClr>
-                <a:srgbClr val="197BC0"/>
+                <a:srgbClr val="004E98"/>
               </a:buClr>
-              <a:buSzPct val="60"/>
               <a:buFont typeface="Wingdings" panose="05000000000000000000" pitchFamily="2" charset="2"/>
               <a:buChar char="n"/>
             </a:pPr>
             <a:r>
-              <a:rPr lang="zh-CN" altLang="en-US" sz="1250" b="0" kern="1200" dirty="0">
+              <a:rPr lang="zh-CN" altLang="en-US" sz="1600" b="0" kern="1200" dirty="0">
                 <a:solidFill>
                   <a:srgbClr val="262626"/>
                 </a:solidFill>
@@ -12006,10 +10936,10 @@
                 <a:ea typeface="华文楷体" panose="02010600040101010101" pitchFamily="2" charset="-122"/>
                 <a:cs typeface="Times New Roman" panose="02020603050405020304" pitchFamily="18" charset="0"/>
               </a:rPr>
-              <a:t>确保有</a:t>
-            </a:r>
-            <a:r>
-              <a:rPr lang="zh-CN" altLang="en-US" sz="1250" b="1" kern="1200" dirty="0">
+              <a:t>保证有</a:t>
+            </a:r>
+            <a:r>
+              <a:rPr lang="zh-CN" altLang="en-US" sz="1600" b="1" kern="1200" dirty="0">
                 <a:solidFill>
                   <a:srgbClr val="004E98"/>
                 </a:solidFill>
@@ -12017,10 +10947,10 @@
                 <a:ea typeface="华文楷体" panose="02010600040101010101" pitchFamily="2" charset="-122"/>
                 <a:cs typeface="Times New Roman" panose="02020603050405020304" pitchFamily="18" charset="0"/>
               </a:rPr>
-              <a:t>足够的时间和精力独立履行董事会秘书职责</a:t>
-            </a:r>
-            <a:r>
-              <a:rPr lang="zh-CN" altLang="en-US" sz="1250" b="0" kern="1200" dirty="0">
+              <a:t>足够的时间和精力</a:t>
+            </a:r>
+            <a:r>
+              <a:rPr lang="zh-CN" altLang="en-US" sz="1600" b="0" kern="1200" dirty="0">
                 <a:solidFill>
                   <a:srgbClr val="262626"/>
                 </a:solidFill>
@@ -12028,106 +10958,71 @@
                 <a:ea typeface="华文楷体" panose="02010600040101010101" pitchFamily="2" charset="-122"/>
                 <a:cs typeface="Times New Roman" panose="02020603050405020304" pitchFamily="18" charset="0"/>
               </a:rPr>
-              <a:t>，不被其他工作挤占</a:t>
-            </a:r>
-          </a:p>
-        </p:txBody>
-      </p:sp>
-      <p:sp>
-        <p:nvSpPr>
-          <p:cNvPr id="110" name="Note"/>
-          <p:cNvSpPr/>
+              <a:t>独立履行董事会秘书职责。</a:t>
+            </a:r>
+          </a:p>
+          <a:p>
+            <a:pPr marL="214313" indent="-214313" algn="l">
+              <a:lnSpc>
+                <a:spcPct val="170000"/>
+              </a:lnSpc>
+              <a:spcBef>
+                <a:spcPts val="800"/>
+              </a:spcBef>
+              <a:spcAft>
+                <a:spcPts val="0"/>
+              </a:spcAft>
+              <a:buClr>
+                <a:srgbClr val="004E98"/>
+              </a:buClr>
+              <a:buFont typeface="Wingdings" panose="05000000000000000000" pitchFamily="2" charset="2"/>
+              <a:buChar char="n"/>
+            </a:pPr>
+            <a:r>
+              <a:rPr lang="zh-CN" altLang="en-US" sz="1600" b="0" kern="1200" dirty="0">
+                <a:solidFill>
+                  <a:srgbClr val="262626"/>
+                </a:solidFill>
+                <a:latin typeface="Times New Roman" panose="02020603050405020304" pitchFamily="18" charset="0"/>
+                <a:ea typeface="华文楷体" panose="02010600040101010101" pitchFamily="2" charset="-122"/>
+                <a:cs typeface="Times New Roman" panose="02020603050405020304" pitchFamily="18" charset="0"/>
+              </a:rPr>
+              <a:t>现任安排不符合规定的，应当在</a:t>
+            </a:r>
+            <a:r>
+              <a:rPr lang="zh-CN" altLang="en-US" sz="1600" b="1" kern="1200" dirty="0">
+                <a:solidFill>
+                  <a:srgbClr val="004E98"/>
+                </a:solidFill>
+                <a:latin typeface="Times New Roman" panose="02020603050405020304" pitchFamily="18" charset="0"/>
+                <a:ea typeface="华文楷体" panose="02010600040101010101" pitchFamily="2" charset="-122"/>
+                <a:cs typeface="Times New Roman" panose="02020603050405020304" pitchFamily="18" charset="0"/>
+              </a:rPr>
+              <a:t>2027年12月31日</a:t>
+            </a:r>
+            <a:r>
+              <a:rPr lang="zh-CN" altLang="en-US" sz="1600" b="0" kern="1200" dirty="0">
+                <a:solidFill>
+                  <a:srgbClr val="262626"/>
+                </a:solidFill>
+                <a:latin typeface="Times New Roman" panose="02020603050405020304" pitchFamily="18" charset="0"/>
+                <a:ea typeface="华文楷体" panose="02010600040101010101" pitchFamily="2" charset="-122"/>
+                <a:cs typeface="Times New Roman" panose="02020603050405020304" pitchFamily="18" charset="0"/>
+              </a:rPr>
+              <a:t>前调整到位。</a:t>
+            </a:r>
+          </a:p>
+        </p:txBody>
+      </p:sp>
+      <p:sp>
+        <p:nvSpPr>
+          <p:cNvPr id="111" name="Source"/>
+          <p:cNvSpPr txBox="1"/>
           <p:nvPr/>
         </p:nvSpPr>
         <p:spPr>
           <a:xfrm>
-            <a:off x="773430" y="5330000"/>
-            <a:ext cx="10645140" cy="520000"/>
-          </a:xfrm>
-          <a:prstGeom prst="rect">
-            <a:avLst/>
-          </a:prstGeom>
-          <a:solidFill>
-            <a:srgbClr val="FDF1F1"/>
-          </a:solidFill>
-          <a:ln w="9525">
-            <a:solidFill>
-              <a:srgbClr val="C00000"/>
-            </a:solidFill>
-          </a:ln>
-        </p:spPr>
-        <p:txBody>
-          <a:bodyPr wrap="square" lIns="182880" tIns="91440" rIns="182880" bIns="91440" rtlCol="0" anchor="ctr"/>
-          <a:lstStyle/>
-          <a:p>
-            <a:pPr marL="0" indent="0" algn="ctr">
-              <a:lnSpc>
-                <a:spcPct val="120000"/>
-              </a:lnSpc>
-              <a:spcBef>
-                <a:spcPts val="0"/>
-              </a:spcBef>
-              <a:spcAft>
-                <a:spcPts val="0"/>
-              </a:spcAft>
-              <a:buNone/>
-            </a:pPr>
-            <a:r>
-              <a:rPr lang="zh-CN" altLang="en-US" sz="1300" b="1" kern="1200" dirty="0">
-                <a:solidFill>
-                  <a:srgbClr val="C00000"/>
-                </a:solidFill>
-                <a:latin typeface="Times New Roman" panose="02020603050405020304" pitchFamily="18" charset="0"/>
-                <a:ea typeface="华文楷体" panose="02010600040101010101" pitchFamily="2" charset="-122"/>
-                <a:cs typeface="Times New Roman" panose="02020603050405020304" pitchFamily="18" charset="0"/>
-              </a:rPr>
-              <a:t>过渡期安排：</a:t>
-            </a:r>
-            <a:r>
-              <a:rPr lang="zh-CN" altLang="en-US" sz="1300" b="0" kern="1200" dirty="0">
-                <a:solidFill>
-                  <a:srgbClr val="262626"/>
-                </a:solidFill>
-                <a:latin typeface="Times New Roman" panose="02020603050405020304" pitchFamily="18" charset="0"/>
-                <a:ea typeface="华文楷体" panose="02010600040101010101" pitchFamily="2" charset="-122"/>
-                <a:cs typeface="Times New Roman" panose="02020603050405020304" pitchFamily="18" charset="0"/>
-              </a:rPr>
-              <a:t>现任董事会秘书存在上述兼职情形的，应当在</a:t>
-            </a:r>
-            <a:r>
-              <a:rPr lang="zh-CN" altLang="en-US" sz="1300" b="1" kern="1200" dirty="0">
-                <a:solidFill>
-                  <a:srgbClr val="C00000"/>
-                </a:solidFill>
-                <a:latin typeface="Times New Roman" panose="02020603050405020304" pitchFamily="18" charset="0"/>
-                <a:ea typeface="华文楷体" panose="02010600040101010101" pitchFamily="2" charset="-122"/>
-                <a:cs typeface="Times New Roman" panose="02020603050405020304" pitchFamily="18" charset="0"/>
-              </a:rPr>
-              <a:t>2027年12月31日</a:t>
-            </a:r>
-            <a:r>
-              <a:rPr lang="zh-CN" altLang="en-US" sz="1300" b="0" kern="1200" dirty="0">
-                <a:solidFill>
-                  <a:srgbClr val="262626"/>
-                </a:solidFill>
-                <a:latin typeface="Times New Roman" panose="02020603050405020304" pitchFamily="18" charset="0"/>
-                <a:ea typeface="华文楷体" panose="02010600040101010101" pitchFamily="2" charset="-122"/>
-                <a:cs typeface="Times New Roman" panose="02020603050405020304" pitchFamily="18" charset="0"/>
-              </a:rPr>
-              <a:t>前调整到位。</a:t>
-            </a:r>
-          </a:p>
-        </p:txBody>
-      </p:sp>
-      <p:sp>
-        <p:nvSpPr>
-          <p:cNvPr id="111" name="Footnote"/>
-          <p:cNvSpPr txBox="1"/>
-          <p:nvPr/>
-        </p:nvSpPr>
-        <p:spPr>
-          <a:xfrm>
-            <a:off x="773430" y="6000000"/>
+            <a:off x="773430" y="6180000"/>
             <a:ext cx="10645140" cy="260000"/>
           </a:xfrm>
           <a:prstGeom prst="rect">
@@ -12213,7 +11108,7 @@
           </a:ln>
         </p:spPr>
         <p:txBody>
-          <a:bodyPr wrap="square" lIns="91440" tIns="45720" rIns="91440" bIns="45720" rtlCol="0" anchor="ctr"/>
+          <a:bodyPr wrap="square" lIns="91440" tIns="0" rIns="91440" bIns="0" rtlCol="0" anchor="ctr"/>
           <a:lstStyle/>
           <a:p>
             <a:pPr marL="0" indent="0" algn="l">
@@ -12244,29 +11139,34 @@
       </p:sp>
       <p:sp>
         <p:nvSpPr>
-          <p:cNvPr id="102" name="Card"/>
+          <p:cNvPr id="102" name="SectionBar"/>
           <p:cNvSpPr/>
           <p:nvPr/>
         </p:nvSpPr>
         <p:spPr>
           <a:xfrm>
-            <a:off x="773430" y="1010000"/>
-            <a:ext cx="5192570" cy="2250000"/>
+            <a:off x="773430" y="1103189"/>
+            <a:ext cx="10645140" cy="337185"/>
           </a:xfrm>
           <a:prstGeom prst="rect">
             <a:avLst/>
           </a:prstGeom>
           <a:solidFill>
-            <a:srgbClr val="F2F6FB"/>
+            <a:srgbClr val="004E98"/>
           </a:solidFill>
-          <a:ln w="12700">
-            <a:solidFill>
-              <a:srgbClr val="C8D9EA"/>
-            </a:solidFill>
+          <a:ln>
+            <a:noFill/>
           </a:ln>
+          <a:effectLst>
+            <a:outerShdw blurRad="50800" dist="38100" dir="2700000" algn="tl" rotWithShape="0">
+              <a:prstClr val="black">
+                <a:alpha val="40000"/>
+              </a:prstClr>
+            </a:outerShdw>
+          </a:effectLst>
         </p:spPr>
         <p:txBody>
-          <a:bodyPr wrap="square" lIns="182880" tIns="137160" rIns="137160" bIns="91440" rtlCol="0" anchor="t"/>
+          <a:bodyPr wrap="square" lIns="137160" tIns="0" rIns="0" bIns="0" rtlCol="0" anchor="ctr"/>
           <a:lstStyle/>
           <a:p>
             <a:pPr marL="0" indent="0" algn="l">
@@ -12282,37 +11182,71 @@
               <a:buNone/>
             </a:pPr>
             <a:r>
-              <a:rPr lang="zh-CN" altLang="en-US" sz="1500" b="1" kern="1200" dirty="0">
-                <a:solidFill>
-                  <a:srgbClr val="004E98"/>
+              <a:rPr lang="zh-CN" altLang="en-US" sz="1400" b="1" kern="1200" dirty="0">
+                <a:solidFill>
+                  <a:srgbClr val="FFFFFF"/>
                 </a:solidFill>
                 <a:latin typeface="Times New Roman" panose="02020603050405020304" pitchFamily="18" charset="0"/>
                 <a:ea typeface="华文楷体" panose="02010600040101010101" pitchFamily="2" charset="-122"/>
                 <a:cs typeface="Times New Roman" panose="02020603050405020304" pitchFamily="18" charset="0"/>
               </a:rPr>
-              <a:t>① 信息披露事务的组织与办理</a:t>
-            </a:r>
-          </a:p>
-          <a:p>
-            <a:pPr marL="171450" indent="-171450" algn="l">
+              <a:t>四项主要职责</a:t>
+            </a:r>
+          </a:p>
+        </p:txBody>
+      </p:sp>
+      <p:sp>
+        <p:nvSpPr>
+          <p:cNvPr id="103" name="Items"/>
+          <p:cNvSpPr txBox="1"/>
+          <p:nvPr/>
+        </p:nvSpPr>
+        <p:spPr>
+          <a:xfrm>
+            <a:off x="773430" y="1620374"/>
+            <a:ext cx="10645140" cy="2227509"/>
+          </a:xfrm>
+          <a:prstGeom prst="rect">
+            <a:avLst/>
+          </a:prstGeom>
+          <a:noFill/>
+          <a:ln>
+            <a:noFill/>
+          </a:ln>
+        </p:spPr>
+        <p:txBody>
+          <a:bodyPr wrap="square" lIns="0" tIns="0" rIns="0" bIns="0" rtlCol="0" anchor="t"/>
+          <a:lstStyle/>
+          <a:p>
+            <a:pPr marL="214313" indent="-214313" algn="l">
               <a:lnSpc>
-                <a:spcPct val="130000"/>
+                <a:spcPct val="170000"/>
               </a:lnSpc>
               <a:spcBef>
-                <a:spcPts val="330"/>
+                <a:spcPts val="0"/>
               </a:spcBef>
               <a:spcAft>
                 <a:spcPts val="0"/>
               </a:spcAft>
               <a:buClr>
-                <a:srgbClr val="197BC0"/>
+                <a:srgbClr val="004E98"/>
               </a:buClr>
-              <a:buSzPct val="60"/>
               <a:buFont typeface="Wingdings" panose="05000000000000000000" pitchFamily="2" charset="2"/>
               <a:buChar char="n"/>
             </a:pPr>
             <a:r>
-              <a:rPr lang="zh-CN" altLang="en-US" sz="1150" b="0" kern="1200" dirty="0">
+              <a:rPr lang="zh-CN" altLang="en-US" sz="1600" b="1" kern="1200" dirty="0">
+                <a:solidFill>
+                  <a:srgbClr val="004E98"/>
+                </a:solidFill>
+                <a:latin typeface="Times New Roman" panose="02020603050405020304" pitchFamily="18" charset="0"/>
+                <a:ea typeface="华文楷体" panose="02010600040101010101" pitchFamily="2" charset="-122"/>
+                <a:cs typeface="Times New Roman" panose="02020603050405020304" pitchFamily="18" charset="0"/>
+              </a:rPr>
+              <a:t>信息披露：</a:t>
+            </a:r>
+            <a:r>
+              <a:rPr lang="zh-CN" altLang="en-US" sz="1600" b="0" kern="1200" dirty="0">
                 <a:solidFill>
                   <a:srgbClr val="262626"/>
                 </a:solidFill>
@@ -12320,40 +11254,39 @@
                 <a:ea typeface="华文楷体" panose="02010600040101010101" pitchFamily="2" charset="-122"/>
                 <a:cs typeface="Times New Roman" panose="02020603050405020304" pitchFamily="18" charset="0"/>
               </a:rPr>
-              <a:t>组织编制和披露</a:t>
-            </a:r>
-            <a:r>
-              <a:rPr lang="zh-CN" altLang="en-US" sz="1150" b="1" kern="1200" dirty="0">
-                <a:solidFill>
-                  <a:srgbClr val="004E98"/>
-                </a:solidFill>
-                <a:latin typeface="Times New Roman" panose="02020603050405020304" pitchFamily="18" charset="0"/>
-                <a:ea typeface="华文楷体" panose="02010600040101010101" pitchFamily="2" charset="-122"/>
-                <a:cs typeface="Times New Roman" panose="02020603050405020304" pitchFamily="18" charset="0"/>
-              </a:rPr>
-              <a:t>定期报告、临时报告</a:t>
-            </a:r>
-          </a:p>
-          <a:p>
-            <a:pPr marL="171450" indent="-171450" algn="l">
+              <a:t>组织编制和披露定期报告、临时报告，办理暂缓与豁免，管理内幕信息知情人档案。</a:t>
+            </a:r>
+          </a:p>
+          <a:p>
+            <a:pPr marL="214313" indent="-214313" algn="l">
               <a:lnSpc>
-                <a:spcPct val="130000"/>
+                <a:spcPct val="170000"/>
               </a:lnSpc>
               <a:spcBef>
-                <a:spcPts val="250"/>
+                <a:spcPts val="800"/>
               </a:spcBef>
               <a:spcAft>
                 <a:spcPts val="0"/>
               </a:spcAft>
               <a:buClr>
-                <a:srgbClr val="197BC0"/>
+                <a:srgbClr val="004E98"/>
               </a:buClr>
-              <a:buSzPct val="60"/>
               <a:buFont typeface="Wingdings" panose="05000000000000000000" pitchFamily="2" charset="2"/>
               <a:buChar char="n"/>
             </a:pPr>
             <a:r>
-              <a:rPr lang="zh-CN" altLang="en-US" sz="1150" b="0" kern="1200" dirty="0">
+              <a:rPr lang="zh-CN" altLang="en-US" sz="1600" b="1" kern="1200" dirty="0">
+                <a:solidFill>
+                  <a:srgbClr val="004E98"/>
+                </a:solidFill>
+                <a:latin typeface="Times New Roman" panose="02020603050405020304" pitchFamily="18" charset="0"/>
+                <a:ea typeface="华文楷体" panose="02010600040101010101" pitchFamily="2" charset="-122"/>
+                <a:cs typeface="Times New Roman" panose="02020603050405020304" pitchFamily="18" charset="0"/>
+              </a:rPr>
+              <a:t>公司治理：</a:t>
+            </a:r>
+            <a:r>
+              <a:rPr lang="zh-CN" altLang="en-US" sz="1600" b="0" kern="1200" dirty="0">
                 <a:solidFill>
                   <a:srgbClr val="262626"/>
                 </a:solidFill>
@@ -12361,51 +11294,39 @@
                 <a:ea typeface="华文楷体" panose="02010600040101010101" pitchFamily="2" charset="-122"/>
                 <a:cs typeface="Times New Roman" panose="02020603050405020304" pitchFamily="18" charset="0"/>
               </a:rPr>
-              <a:t>办理披露的</a:t>
-            </a:r>
-            <a:r>
-              <a:rPr lang="zh-CN" altLang="en-US" sz="1150" b="1" kern="1200" dirty="0">
-                <a:solidFill>
-                  <a:srgbClr val="004E98"/>
-                </a:solidFill>
-                <a:latin typeface="Times New Roman" panose="02020603050405020304" pitchFamily="18" charset="0"/>
-                <a:ea typeface="华文楷体" panose="02010600040101010101" pitchFamily="2" charset="-122"/>
-                <a:cs typeface="Times New Roman" panose="02020603050405020304" pitchFamily="18" charset="0"/>
-              </a:rPr>
-              <a:t>暂缓、豁免</a:t>
-            </a:r>
-            <a:r>
-              <a:rPr lang="zh-CN" altLang="en-US" sz="1150" b="0" kern="1200" dirty="0">
-                <a:solidFill>
-                  <a:srgbClr val="262626"/>
-                </a:solidFill>
-                <a:latin typeface="Times New Roman" panose="02020603050405020304" pitchFamily="18" charset="0"/>
-                <a:ea typeface="华文楷体" panose="02010600040101010101" pitchFamily="2" charset="-122"/>
-                <a:cs typeface="Times New Roman" panose="02020603050405020304" pitchFamily="18" charset="0"/>
-              </a:rPr>
-              <a:t>事宜，管理内幕信息知情人档案</a:t>
-            </a:r>
-          </a:p>
-          <a:p>
-            <a:pPr marL="171450" indent="-171450" algn="l">
+              <a:t>筹备董事会、股东会，保证召集、召开和表决程序合规，负责会议记录。</a:t>
+            </a:r>
+          </a:p>
+          <a:p>
+            <a:pPr marL="214313" indent="-214313" algn="l">
               <a:lnSpc>
-                <a:spcPct val="130000"/>
+                <a:spcPct val="170000"/>
               </a:lnSpc>
               <a:spcBef>
-                <a:spcPts val="250"/>
+                <a:spcPts val="800"/>
               </a:spcBef>
               <a:spcAft>
                 <a:spcPts val="0"/>
               </a:spcAft>
               <a:buClr>
-                <a:srgbClr val="197BC0"/>
+                <a:srgbClr val="004E98"/>
               </a:buClr>
-              <a:buSzPct val="60"/>
               <a:buFont typeface="Wingdings" panose="05000000000000000000" pitchFamily="2" charset="2"/>
               <a:buChar char="n"/>
             </a:pPr>
             <a:r>
-              <a:rPr lang="zh-CN" altLang="en-US" sz="1150" b="0" kern="1200" dirty="0">
+              <a:rPr lang="zh-CN" altLang="en-US" sz="1600" b="1" kern="1200" dirty="0">
+                <a:solidFill>
+                  <a:srgbClr val="004E98"/>
+                </a:solidFill>
+                <a:latin typeface="Times New Roman" panose="02020603050405020304" pitchFamily="18" charset="0"/>
+                <a:ea typeface="华文楷体" panose="02010600040101010101" pitchFamily="2" charset="-122"/>
+                <a:cs typeface="Times New Roman" panose="02020603050405020304" pitchFamily="18" charset="0"/>
+              </a:rPr>
+              <a:t>内外沟通：</a:t>
+            </a:r>
+            <a:r>
+              <a:rPr lang="zh-CN" altLang="en-US" sz="1600" b="0" kern="1200" dirty="0">
                 <a:solidFill>
                   <a:srgbClr val="262626"/>
                 </a:solidFill>
@@ -12413,29 +11334,39 @@
                 <a:ea typeface="华文楷体" panose="02010600040101010101" pitchFamily="2" charset="-122"/>
                 <a:cs typeface="Times New Roman" panose="02020603050405020304" pitchFamily="18" charset="0"/>
               </a:rPr>
-              <a:t>关注媒体报道和市场传闻，及时核实并建议澄清</a:t>
-            </a:r>
-          </a:p>
-          <a:p>
-            <a:pPr marL="171450" indent="-171450" algn="l">
+              <a:t>对接股东、投资者、董事与证监会、证券交易所，组织投资者关系管理。</a:t>
+            </a:r>
+          </a:p>
+          <a:p>
+            <a:pPr marL="214313" indent="-214313" algn="l">
               <a:lnSpc>
-                <a:spcPct val="130000"/>
+                <a:spcPct val="170000"/>
               </a:lnSpc>
               <a:spcBef>
-                <a:spcPts val="250"/>
+                <a:spcPts val="800"/>
               </a:spcBef>
               <a:spcAft>
                 <a:spcPts val="0"/>
               </a:spcAft>
               <a:buClr>
-                <a:srgbClr val="197BC0"/>
+                <a:srgbClr val="004E98"/>
               </a:buClr>
-              <a:buSzPct val="60"/>
               <a:buFont typeface="Wingdings" panose="05000000000000000000" pitchFamily="2" charset="2"/>
               <a:buChar char="n"/>
             </a:pPr>
             <a:r>
-              <a:rPr lang="zh-CN" altLang="en-US" sz="1150" b="0" kern="1200" dirty="0">
+              <a:rPr lang="zh-CN" altLang="en-US" sz="1600" b="1" kern="1200" dirty="0">
+                <a:solidFill>
+                  <a:srgbClr val="004E98"/>
+                </a:solidFill>
+                <a:latin typeface="Times New Roman" panose="02020603050405020304" pitchFamily="18" charset="0"/>
+                <a:ea typeface="华文楷体" panose="02010600040101010101" pitchFamily="2" charset="-122"/>
+                <a:cs typeface="Times New Roman" panose="02020603050405020304" pitchFamily="18" charset="0"/>
+              </a:rPr>
+              <a:t>风险报告：</a:t>
+            </a:r>
+            <a:r>
+              <a:rPr lang="zh-CN" altLang="en-US" sz="1600" b="0" kern="1200" dirty="0">
                 <a:solidFill>
                   <a:srgbClr val="262626"/>
                 </a:solidFill>
@@ -12443,66 +11374,41 @@
                 <a:ea typeface="华文楷体" panose="02010600040101010101" pitchFamily="2" charset="-122"/>
                 <a:cs typeface="Times New Roman" panose="02020603050405020304" pitchFamily="18" charset="0"/>
               </a:rPr>
-              <a:t>保证披露文件在交易所网站和符合规定条件的媒体发布</a:t>
-            </a:r>
-          </a:p>
-          <a:p>
-            <a:pPr marL="171450" indent="-171450" algn="l">
-              <a:lnSpc>
-                <a:spcPct val="130000"/>
-              </a:lnSpc>
-              <a:spcBef>
-                <a:spcPts val="250"/>
-              </a:spcBef>
-              <a:spcAft>
-                <a:spcPts val="0"/>
-              </a:spcAft>
-              <a:buClr>
-                <a:srgbClr val="197BC0"/>
-              </a:buClr>
-              <a:buSzPct val="60"/>
-              <a:buFont typeface="Wingdings" panose="05000000000000000000" pitchFamily="2" charset="2"/>
-              <a:buChar char="n"/>
-            </a:pPr>
-            <a:r>
-              <a:rPr lang="zh-CN" altLang="en-US" sz="1150" b="1" kern="1200" dirty="0">
-                <a:solidFill>
-                  <a:srgbClr val="C00000"/>
-                </a:solidFill>
-                <a:latin typeface="Times New Roman" panose="02020603050405020304" pitchFamily="18" charset="0"/>
-                <a:ea typeface="华文楷体" panose="02010600040101010101" pitchFamily="2" charset="-122"/>
-                <a:cs typeface="Times New Roman" panose="02020603050405020304" pitchFamily="18" charset="0"/>
-              </a:rPr>
-              <a:t>对临时报告的真实、准确、完整承担主要责任</a:t>
-            </a:r>
-          </a:p>
-        </p:txBody>
-      </p:sp>
-      <p:sp>
-        <p:nvSpPr>
-          <p:cNvPr id="103" name="Card"/>
+              <a:t>向审计委员会报告财务与内控问题；披露违规或履职受阻的，向证监会、证券交易所报告。</a:t>
+            </a:r>
+          </a:p>
+        </p:txBody>
+      </p:sp>
+      <p:sp>
+        <p:nvSpPr>
+          <p:cNvPr id="104" name="SectionBar"/>
           <p:cNvSpPr/>
           <p:nvPr/>
         </p:nvSpPr>
         <p:spPr>
           <a:xfrm>
-            <a:off x="6226000" y="1010000"/>
-            <a:ext cx="5192570" cy="2250000"/>
+            <a:off x="773430" y="4315957"/>
+            <a:ext cx="10645140" cy="337185"/>
           </a:xfrm>
           <a:prstGeom prst="rect">
             <a:avLst/>
           </a:prstGeom>
           <a:solidFill>
-            <a:srgbClr val="F2F6FB"/>
+            <a:srgbClr val="004E98"/>
           </a:solidFill>
-          <a:ln w="12700">
-            <a:solidFill>
-              <a:srgbClr val="C8D9EA"/>
-            </a:solidFill>
+          <a:ln>
+            <a:noFill/>
           </a:ln>
+          <a:effectLst>
+            <a:outerShdw blurRad="50800" dist="38100" dir="2700000" algn="tl" rotWithShape="0">
+              <a:prstClr val="black">
+                <a:alpha val="40000"/>
+              </a:prstClr>
+            </a:outerShdw>
+          </a:effectLst>
         </p:spPr>
         <p:txBody>
-          <a:bodyPr wrap="square" lIns="182880" tIns="137160" rIns="137160" bIns="91440" rtlCol="0" anchor="t"/>
+          <a:bodyPr wrap="square" lIns="137160" tIns="0" rIns="0" bIns="0" rtlCol="0" anchor="ctr"/>
           <a:lstStyle/>
           <a:p>
             <a:pPr marL="0" indent="0" algn="l">
@@ -12518,210 +11424,45 @@
               <a:buNone/>
             </a:pPr>
             <a:r>
-              <a:rPr lang="zh-CN" altLang="en-US" sz="1500" b="1" kern="1200" dirty="0">
-                <a:solidFill>
-                  <a:srgbClr val="004E98"/>
+              <a:rPr lang="zh-CN" altLang="en-US" sz="1400" b="1" kern="1200" dirty="0">
+                <a:solidFill>
+                  <a:srgbClr val="FFFFFF"/>
                 </a:solidFill>
                 <a:latin typeface="Times New Roman" panose="02020603050405020304" pitchFamily="18" charset="0"/>
                 <a:ea typeface="华文楷体" panose="02010600040101010101" pitchFamily="2" charset="-122"/>
                 <a:cs typeface="Times New Roman" panose="02020603050405020304" pitchFamily="18" charset="0"/>
               </a:rPr>
-              <a:t>② 公司治理运作的合规保障</a:t>
-            </a:r>
-          </a:p>
-          <a:p>
-            <a:pPr marL="171450" indent="-171450" algn="l">
-              <a:lnSpc>
-                <a:spcPct val="130000"/>
-              </a:lnSpc>
-              <a:spcBef>
-                <a:spcPts val="330"/>
-              </a:spcBef>
-              <a:spcAft>
-                <a:spcPts val="0"/>
-              </a:spcAft>
-              <a:buClr>
-                <a:srgbClr val="197BC0"/>
-              </a:buClr>
-              <a:buSzPct val="60"/>
-              <a:buFont typeface="Wingdings" panose="05000000000000000000" pitchFamily="2" charset="2"/>
-              <a:buChar char="n"/>
-            </a:pPr>
-            <a:r>
-              <a:rPr lang="zh-CN" altLang="en-US" sz="1150" b="0" kern="1200" dirty="0">
-                <a:solidFill>
-                  <a:srgbClr val="262626"/>
-                </a:solidFill>
-                <a:latin typeface="Times New Roman" panose="02020603050405020304" pitchFamily="18" charset="0"/>
-                <a:ea typeface="华文楷体" panose="02010600040101010101" pitchFamily="2" charset="-122"/>
-                <a:cs typeface="Times New Roman" panose="02020603050405020304" pitchFamily="18" charset="0"/>
-              </a:rPr>
-              <a:t>筹备董事会、股东会，保证</a:t>
-            </a:r>
-            <a:r>
-              <a:rPr lang="zh-CN" altLang="en-US" sz="1150" b="1" kern="1200" dirty="0">
-                <a:solidFill>
-                  <a:srgbClr val="004E98"/>
-                </a:solidFill>
-                <a:latin typeface="Times New Roman" panose="02020603050405020304" pitchFamily="18" charset="0"/>
-                <a:ea typeface="华文楷体" panose="02010600040101010101" pitchFamily="2" charset="-122"/>
-                <a:cs typeface="Times New Roman" panose="02020603050405020304" pitchFamily="18" charset="0"/>
-              </a:rPr>
-              <a:t>召集、召开和表决程序合规</a:t>
-            </a:r>
-          </a:p>
-          <a:p>
-            <a:pPr marL="171450" indent="-171450" algn="l">
-              <a:lnSpc>
-                <a:spcPct val="130000"/>
-              </a:lnSpc>
-              <a:spcBef>
-                <a:spcPts val="250"/>
-              </a:spcBef>
-              <a:spcAft>
-                <a:spcPts val="0"/>
-              </a:spcAft>
-              <a:buClr>
-                <a:srgbClr val="197BC0"/>
-              </a:buClr>
-              <a:buSzPct val="60"/>
-              <a:buFont typeface="Wingdings" panose="05000000000000000000" pitchFamily="2" charset="2"/>
-              <a:buChar char="n"/>
-            </a:pPr>
-            <a:r>
-              <a:rPr lang="zh-CN" altLang="en-US" sz="1150" b="0" kern="1200" dirty="0">
-                <a:solidFill>
-                  <a:srgbClr val="262626"/>
-                </a:solidFill>
-                <a:latin typeface="Times New Roman" panose="02020603050405020304" pitchFamily="18" charset="0"/>
-                <a:ea typeface="华文楷体" panose="02010600040101010101" pitchFamily="2" charset="-122"/>
-                <a:cs typeface="Times New Roman" panose="02020603050405020304" pitchFamily="18" charset="0"/>
-              </a:rPr>
-              <a:t>负责会议记录，管理股东名册及持股变动核实</a:t>
-            </a:r>
-          </a:p>
-          <a:p>
-            <a:pPr marL="171450" indent="-171450" algn="l">
-              <a:lnSpc>
-                <a:spcPct val="130000"/>
-              </a:lnSpc>
-              <a:spcBef>
-                <a:spcPts val="250"/>
-              </a:spcBef>
-              <a:spcAft>
-                <a:spcPts val="0"/>
-              </a:spcAft>
-              <a:buClr>
-                <a:srgbClr val="197BC0"/>
-              </a:buClr>
-              <a:buSzPct val="60"/>
-              <a:buFont typeface="Wingdings" panose="05000000000000000000" pitchFamily="2" charset="2"/>
-              <a:buChar char="n"/>
-            </a:pPr>
-            <a:r>
-              <a:rPr lang="zh-CN" altLang="en-US" sz="1150" b="0" kern="1200" dirty="0">
-                <a:solidFill>
-                  <a:srgbClr val="262626"/>
-                </a:solidFill>
-                <a:latin typeface="Times New Roman" panose="02020603050405020304" pitchFamily="18" charset="0"/>
-                <a:ea typeface="华文楷体" panose="02010600040101010101" pitchFamily="2" charset="-122"/>
-                <a:cs typeface="Times New Roman" panose="02020603050405020304" pitchFamily="18" charset="0"/>
-              </a:rPr>
-              <a:t>发现章程、治理架构不合规的，向董事会报告并提整改建议</a:t>
-            </a:r>
-          </a:p>
-          <a:p>
-            <a:pPr marL="171450" indent="-171450" algn="l">
-              <a:lnSpc>
-                <a:spcPct val="130000"/>
-              </a:lnSpc>
-              <a:spcBef>
-                <a:spcPts val="250"/>
-              </a:spcBef>
-              <a:spcAft>
-                <a:spcPts val="0"/>
-              </a:spcAft>
-              <a:buClr>
-                <a:srgbClr val="197BC0"/>
-              </a:buClr>
-              <a:buSzPct val="60"/>
-              <a:buFont typeface="Wingdings" panose="05000000000000000000" pitchFamily="2" charset="2"/>
-              <a:buChar char="n"/>
-            </a:pPr>
-            <a:r>
-              <a:rPr lang="zh-CN" altLang="en-US" sz="1150" b="0" kern="1200" dirty="0">
-                <a:solidFill>
-                  <a:srgbClr val="262626"/>
-                </a:solidFill>
-                <a:latin typeface="Times New Roman" panose="02020603050405020304" pitchFamily="18" charset="0"/>
-                <a:ea typeface="华文楷体" panose="02010600040101010101" pitchFamily="2" charset="-122"/>
-                <a:cs typeface="Times New Roman" panose="02020603050405020304" pitchFamily="18" charset="0"/>
-              </a:rPr>
-              <a:t>及时汇集属于董事会、股东会职权范围内的事项，建议董事长召集会议</a:t>
-            </a:r>
-          </a:p>
-          <a:p>
-            <a:pPr marL="171450" indent="-171450" algn="l">
-              <a:lnSpc>
-                <a:spcPct val="130000"/>
-              </a:lnSpc>
-              <a:spcBef>
-                <a:spcPts val="250"/>
-              </a:spcBef>
-              <a:spcAft>
-                <a:spcPts val="0"/>
-              </a:spcAft>
-              <a:buClr>
-                <a:srgbClr val="197BC0"/>
-              </a:buClr>
-              <a:buSzPct val="60"/>
-              <a:buFont typeface="Wingdings" panose="05000000000000000000" pitchFamily="2" charset="2"/>
-              <a:buChar char="n"/>
-            </a:pPr>
-            <a:r>
-              <a:rPr lang="zh-CN" altLang="en-US" sz="1150" b="0" kern="1200" dirty="0">
-                <a:solidFill>
-                  <a:srgbClr val="262626"/>
-                </a:solidFill>
-                <a:latin typeface="Times New Roman" panose="02020603050405020304" pitchFamily="18" charset="0"/>
-                <a:ea typeface="华文楷体" panose="02010600040101010101" pitchFamily="2" charset="-122"/>
-                <a:cs typeface="Times New Roman" panose="02020603050405020304" pitchFamily="18" charset="0"/>
-              </a:rPr>
-              <a:t>督促董事、高管遵守规则，定期组织培训</a:t>
-            </a:r>
-          </a:p>
-        </p:txBody>
-      </p:sp>
-      <p:sp>
-        <p:nvSpPr>
-          <p:cNvPr id="104" name="Card"/>
-          <p:cNvSpPr/>
+              <a:t>履职要求</a:t>
+            </a:r>
+          </a:p>
+        </p:txBody>
+      </p:sp>
+      <p:sp>
+        <p:nvSpPr>
+          <p:cNvPr id="105" name="Items"/>
+          <p:cNvSpPr txBox="1"/>
           <p:nvPr/>
         </p:nvSpPr>
         <p:spPr>
           <a:xfrm>
-            <a:off x="773430" y="3460000"/>
-            <a:ext cx="5192570" cy="2250000"/>
+            <a:off x="773430" y="4833142"/>
+            <a:ext cx="10645140" cy="1086858"/>
           </a:xfrm>
           <a:prstGeom prst="rect">
             <a:avLst/>
           </a:prstGeom>
-          <a:solidFill>
-            <a:srgbClr val="F2F6FB"/>
-          </a:solidFill>
-          <a:ln w="12700">
-            <a:solidFill>
-              <a:srgbClr val="C8D9EA"/>
-            </a:solidFill>
+          <a:noFill/>
+          <a:ln>
+            <a:noFill/>
           </a:ln>
         </p:spPr>
         <p:txBody>
-          <a:bodyPr wrap="square" lIns="182880" tIns="137160" rIns="137160" bIns="91440" rtlCol="0" anchor="t"/>
+          <a:bodyPr wrap="square" lIns="0" tIns="0" rIns="0" bIns="0" rtlCol="0" anchor="t"/>
           <a:lstStyle/>
           <a:p>
-            <a:pPr marL="0" indent="0" algn="l">
+            <a:pPr marL="214313" indent="-214313" algn="l">
               <a:lnSpc>
-                <a:spcPct val="100000"/>
+                <a:spcPct val="170000"/>
               </a:lnSpc>
               <a:spcBef>
                 <a:spcPts val="0"/>
@@ -12729,40 +11470,14 @@
               <a:spcAft>
                 <a:spcPts val="0"/>
               </a:spcAft>
-              <a:buNone/>
-            </a:pPr>
-            <a:r>
-              <a:rPr lang="zh-CN" altLang="en-US" sz="1500" b="1" kern="1200" dirty="0">
-                <a:solidFill>
-                  <a:srgbClr val="004E98"/>
-                </a:solidFill>
-                <a:latin typeface="Times New Roman" panose="02020603050405020304" pitchFamily="18" charset="0"/>
-                <a:ea typeface="华文楷体" panose="02010600040101010101" pitchFamily="2" charset="-122"/>
-                <a:cs typeface="Times New Roman" panose="02020603050405020304" pitchFamily="18" charset="0"/>
-              </a:rPr>
-              <a:t>③ 内外部沟通与投资者关系</a:t>
-            </a:r>
-          </a:p>
-          <a:p>
-            <a:pPr marL="171450" indent="-171450" algn="l">
-              <a:lnSpc>
-                <a:spcPct val="130000"/>
-              </a:lnSpc>
-              <a:spcBef>
-                <a:spcPts val="330"/>
-              </a:spcBef>
-              <a:spcAft>
-                <a:spcPts val="0"/>
-              </a:spcAft>
               <a:buClr>
-                <a:srgbClr val="197BC0"/>
+                <a:srgbClr val="004E98"/>
               </a:buClr>
-              <a:buSzPct val="60"/>
               <a:buFont typeface="Wingdings" panose="05000000000000000000" pitchFamily="2" charset="2"/>
               <a:buChar char="n"/>
             </a:pPr>
             <a:r>
-              <a:rPr lang="zh-CN" altLang="en-US" sz="1150" b="0" kern="1200" dirty="0">
+              <a:rPr lang="zh-CN" altLang="en-US" sz="1600" b="0" kern="1200" dirty="0">
                 <a:solidFill>
                   <a:srgbClr val="262626"/>
                 </a:solidFill>
@@ -12770,29 +11485,28 @@
                 <a:ea typeface="华文楷体" panose="02010600040101010101" pitchFamily="2" charset="-122"/>
                 <a:cs typeface="Times New Roman" panose="02020603050405020304" pitchFamily="18" charset="0"/>
               </a:rPr>
-              <a:t>对接股东、实际控制人、投资者与董事</a:t>
-            </a:r>
-          </a:p>
-          <a:p>
-            <a:pPr marL="171450" indent="-171450" algn="l">
+              <a:t>应当列席股东会、董事会会议，有权查阅资料、要求相关部门说明，任何人不得阻碍。</a:t>
+            </a:r>
+          </a:p>
+          <a:p>
+            <a:pPr marL="214313" indent="-214313" algn="l">
               <a:lnSpc>
-                <a:spcPct val="130000"/>
+                <a:spcPct val="170000"/>
               </a:lnSpc>
               <a:spcBef>
-                <a:spcPts val="250"/>
+                <a:spcPts val="800"/>
               </a:spcBef>
               <a:spcAft>
                 <a:spcPts val="0"/>
               </a:spcAft>
               <a:buClr>
-                <a:srgbClr val="197BC0"/>
+                <a:srgbClr val="004E98"/>
               </a:buClr>
-              <a:buSzPct val="60"/>
               <a:buFont typeface="Wingdings" panose="05000000000000000000" pitchFamily="2" charset="2"/>
               <a:buChar char="n"/>
             </a:pPr>
             <a:r>
-              <a:rPr lang="zh-CN" altLang="en-US" sz="1150" b="0" kern="1200" dirty="0">
+              <a:rPr lang="zh-CN" altLang="en-US" sz="1600" b="0" kern="1200" dirty="0">
                 <a:solidFill>
                   <a:srgbClr val="262626"/>
                 </a:solidFill>
@@ -12800,368 +11514,20 @@
                 <a:ea typeface="华文楷体" panose="02010600040101010101" pitchFamily="2" charset="-122"/>
                 <a:cs typeface="Times New Roman" panose="02020603050405020304" pitchFamily="18" charset="0"/>
               </a:rPr>
-              <a:t>对接</a:t>
-            </a:r>
-            <a:r>
-              <a:rPr lang="zh-CN" altLang="en-US" sz="1150" b="1" kern="1200" dirty="0">
-                <a:solidFill>
-                  <a:srgbClr val="004E98"/>
-                </a:solidFill>
-                <a:latin typeface="Times New Roman" panose="02020603050405020304" pitchFamily="18" charset="0"/>
-                <a:ea typeface="华文楷体" panose="02010600040101010101" pitchFamily="2" charset="-122"/>
-                <a:cs typeface="Times New Roman" panose="02020603050405020304" pitchFamily="18" charset="0"/>
-              </a:rPr>
-              <a:t>中国证监会、证券交易所</a:t>
-            </a:r>
-            <a:r>
-              <a:rPr lang="zh-CN" altLang="en-US" sz="1150" b="0" kern="1200" dirty="0">
-                <a:solidFill>
-                  <a:srgbClr val="262626"/>
-                </a:solidFill>
-                <a:latin typeface="Times New Roman" panose="02020603050405020304" pitchFamily="18" charset="0"/>
-                <a:ea typeface="华文楷体" panose="02010600040101010101" pitchFamily="2" charset="-122"/>
-                <a:cs typeface="Times New Roman" panose="02020603050405020304" pitchFamily="18" charset="0"/>
-              </a:rPr>
-              <a:t>，保持渠道畅通</a:t>
-            </a:r>
-          </a:p>
-          <a:p>
-            <a:pPr marL="171450" indent="-171450" algn="l">
-              <a:lnSpc>
-                <a:spcPct val="130000"/>
-              </a:lnSpc>
-              <a:spcBef>
-                <a:spcPts val="250"/>
-              </a:spcBef>
-              <a:spcAft>
-                <a:spcPts val="0"/>
-              </a:spcAft>
-              <a:buClr>
-                <a:srgbClr val="197BC0"/>
-              </a:buClr>
-              <a:buSzPct val="60"/>
-              <a:buFont typeface="Wingdings" panose="05000000000000000000" pitchFamily="2" charset="2"/>
-              <a:buChar char="n"/>
-            </a:pPr>
-            <a:r>
-              <a:rPr lang="zh-CN" altLang="en-US" sz="1150" b="0" kern="1200" dirty="0">
-                <a:solidFill>
-                  <a:srgbClr val="262626"/>
-                </a:solidFill>
-                <a:latin typeface="Times New Roman" panose="02020603050405020304" pitchFamily="18" charset="0"/>
-                <a:ea typeface="华文楷体" panose="02010600040101010101" pitchFamily="2" charset="-122"/>
-                <a:cs typeface="Times New Roman" panose="02020603050405020304" pitchFamily="18" charset="0"/>
-              </a:rPr>
-              <a:t>组织和协调</a:t>
-            </a:r>
-            <a:r>
-              <a:rPr lang="zh-CN" altLang="en-US" sz="1150" b="1" kern="1200" dirty="0">
-                <a:solidFill>
-                  <a:srgbClr val="004E98"/>
-                </a:solidFill>
-                <a:latin typeface="Times New Roman" panose="02020603050405020304" pitchFamily="18" charset="0"/>
-                <a:ea typeface="华文楷体" panose="02010600040101010101" pitchFamily="2" charset="-122"/>
-                <a:cs typeface="Times New Roman" panose="02020603050405020304" pitchFamily="18" charset="0"/>
-              </a:rPr>
-              <a:t>投资者关系管理</a:t>
-            </a:r>
-            <a:r>
-              <a:rPr lang="zh-CN" altLang="en-US" sz="1150" b="0" kern="1200" dirty="0">
-                <a:solidFill>
-                  <a:srgbClr val="262626"/>
-                </a:solidFill>
-                <a:latin typeface="Times New Roman" panose="02020603050405020304" pitchFamily="18" charset="0"/>
-                <a:ea typeface="华文楷体" panose="02010600040101010101" pitchFamily="2" charset="-122"/>
-                <a:cs typeface="Times New Roman" panose="02020603050405020304" pitchFamily="18" charset="0"/>
-              </a:rPr>
-              <a:t>工作</a:t>
-            </a:r>
-          </a:p>
-          <a:p>
-            <a:pPr marL="171450" indent="-171450" algn="l">
-              <a:lnSpc>
-                <a:spcPct val="130000"/>
-              </a:lnSpc>
-              <a:spcBef>
-                <a:spcPts val="250"/>
-              </a:spcBef>
-              <a:spcAft>
-                <a:spcPts val="0"/>
-              </a:spcAft>
-              <a:buClr>
-                <a:srgbClr val="197BC0"/>
-              </a:buClr>
-              <a:buSzPct val="60"/>
-              <a:buFont typeface="Wingdings" panose="05000000000000000000" pitchFamily="2" charset="2"/>
-              <a:buChar char="n"/>
-            </a:pPr>
-            <a:r>
-              <a:rPr lang="zh-CN" altLang="en-US" sz="1150" b="0" kern="1200" dirty="0">
-                <a:solidFill>
-                  <a:srgbClr val="262626"/>
-                </a:solidFill>
-                <a:latin typeface="Times New Roman" panose="02020603050405020304" pitchFamily="18" charset="0"/>
-                <a:ea typeface="华文楷体" panose="02010600040101010101" pitchFamily="2" charset="-122"/>
-                <a:cs typeface="Times New Roman" panose="02020603050405020304" pitchFamily="18" charset="0"/>
-              </a:rPr>
-              <a:t>协助独立董事履职，保证其获得足够信息与资源</a:t>
-            </a:r>
-          </a:p>
-          <a:p>
-            <a:pPr marL="171450" indent="-171450" algn="l">
-              <a:lnSpc>
-                <a:spcPct val="130000"/>
-              </a:lnSpc>
-              <a:spcBef>
-                <a:spcPts val="250"/>
-              </a:spcBef>
-              <a:spcAft>
-                <a:spcPts val="0"/>
-              </a:spcAft>
-              <a:buClr>
-                <a:srgbClr val="197BC0"/>
-              </a:buClr>
-              <a:buSzPct val="60"/>
-              <a:buFont typeface="Wingdings" panose="05000000000000000000" pitchFamily="2" charset="2"/>
-              <a:buChar char="n"/>
-            </a:pPr>
-            <a:r>
-              <a:rPr lang="zh-CN" altLang="en-US" sz="1150" b="0" kern="1200" dirty="0">
-                <a:solidFill>
-                  <a:srgbClr val="262626"/>
-                </a:solidFill>
-                <a:latin typeface="Times New Roman" panose="02020603050405020304" pitchFamily="18" charset="0"/>
-                <a:ea typeface="华文楷体" panose="02010600040101010101" pitchFamily="2" charset="-122"/>
-                <a:cs typeface="Times New Roman" panose="02020603050405020304" pitchFamily="18" charset="0"/>
-              </a:rPr>
-              <a:t>维持与股东、投资者及监管机构的联络渠道畅通</a:t>
-            </a:r>
-          </a:p>
-        </p:txBody>
-      </p:sp>
-      <p:sp>
-        <p:nvSpPr>
-          <p:cNvPr id="105" name="Card"/>
-          <p:cNvSpPr/>
+              <a:t>公司应当将其履职嵌入日常经营管理流程，保证信息获取及时、准确、全面。</a:t>
+            </a:r>
+          </a:p>
+        </p:txBody>
+      </p:sp>
+      <p:sp>
+        <p:nvSpPr>
+          <p:cNvPr id="106" name="Source"/>
+          <p:cNvSpPr txBox="1"/>
           <p:nvPr/>
         </p:nvSpPr>
         <p:spPr>
           <a:xfrm>
-            <a:off x="6226000" y="3460000"/>
-            <a:ext cx="5192570" cy="2250000"/>
-          </a:xfrm>
-          <a:prstGeom prst="rect">
-            <a:avLst/>
-          </a:prstGeom>
-          <a:solidFill>
-            <a:srgbClr val="F2F6FB"/>
-          </a:solidFill>
-          <a:ln w="12700">
-            <a:solidFill>
-              <a:srgbClr val="C8D9EA"/>
-            </a:solidFill>
-          </a:ln>
-        </p:spPr>
-        <p:txBody>
-          <a:bodyPr wrap="square" lIns="182880" tIns="137160" rIns="137160" bIns="91440" rtlCol="0" anchor="t"/>
-          <a:lstStyle/>
-          <a:p>
-            <a:pPr marL="0" indent="0" algn="l">
-              <a:lnSpc>
-                <a:spcPct val="100000"/>
-              </a:lnSpc>
-              <a:spcBef>
-                <a:spcPts val="0"/>
-              </a:spcBef>
-              <a:spcAft>
-                <a:spcPts val="0"/>
-              </a:spcAft>
-              <a:buNone/>
-            </a:pPr>
-            <a:r>
-              <a:rPr lang="zh-CN" altLang="en-US" sz="1500" b="1" kern="1200" dirty="0">
-                <a:solidFill>
-                  <a:srgbClr val="004E98"/>
-                </a:solidFill>
-                <a:latin typeface="Times New Roman" panose="02020603050405020304" pitchFamily="18" charset="0"/>
-                <a:ea typeface="华文楷体" panose="02010600040101010101" pitchFamily="2" charset="-122"/>
-                <a:cs typeface="Times New Roman" panose="02020603050405020304" pitchFamily="18" charset="0"/>
-              </a:rPr>
-              <a:t>④ 风险发现与报告</a:t>
-            </a:r>
-          </a:p>
-          <a:p>
-            <a:pPr marL="171450" indent="-171450" algn="l">
-              <a:lnSpc>
-                <a:spcPct val="130000"/>
-              </a:lnSpc>
-              <a:spcBef>
-                <a:spcPts val="330"/>
-              </a:spcBef>
-              <a:spcAft>
-                <a:spcPts val="0"/>
-              </a:spcAft>
-              <a:buClr>
-                <a:srgbClr val="197BC0"/>
-              </a:buClr>
-              <a:buSzPct val="60"/>
-              <a:buFont typeface="Wingdings" panose="05000000000000000000" pitchFamily="2" charset="2"/>
-              <a:buChar char="n"/>
-            </a:pPr>
-            <a:r>
-              <a:rPr lang="zh-CN" altLang="en-US" sz="1150" b="0" kern="1200" dirty="0">
-                <a:solidFill>
-                  <a:srgbClr val="262626"/>
-                </a:solidFill>
-                <a:latin typeface="Times New Roman" panose="02020603050405020304" pitchFamily="18" charset="0"/>
-                <a:ea typeface="华文楷体" panose="02010600040101010101" pitchFamily="2" charset="-122"/>
-                <a:cs typeface="Times New Roman" panose="02020603050405020304" pitchFamily="18" charset="0"/>
-              </a:rPr>
-              <a:t>发现财务信息、内部控制问题，及时报告</a:t>
-            </a:r>
-            <a:r>
-              <a:rPr lang="zh-CN" altLang="en-US" sz="1150" b="1" kern="1200" dirty="0">
-                <a:solidFill>
-                  <a:srgbClr val="004E98"/>
-                </a:solidFill>
-                <a:latin typeface="Times New Roman" panose="02020603050405020304" pitchFamily="18" charset="0"/>
-                <a:ea typeface="华文楷体" panose="02010600040101010101" pitchFamily="2" charset="-122"/>
-                <a:cs typeface="Times New Roman" panose="02020603050405020304" pitchFamily="18" charset="0"/>
-              </a:rPr>
-              <a:t>审计委员会</a:t>
-            </a:r>
-          </a:p>
-          <a:p>
-            <a:pPr marL="171450" indent="-171450" algn="l">
-              <a:lnSpc>
-                <a:spcPct val="130000"/>
-              </a:lnSpc>
-              <a:spcBef>
-                <a:spcPts val="250"/>
-              </a:spcBef>
-              <a:spcAft>
-                <a:spcPts val="0"/>
-              </a:spcAft>
-              <a:buClr>
-                <a:srgbClr val="197BC0"/>
-              </a:buClr>
-              <a:buSzPct val="60"/>
-              <a:buFont typeface="Wingdings" panose="05000000000000000000" pitchFamily="2" charset="2"/>
-              <a:buChar char="n"/>
-            </a:pPr>
-            <a:r>
-              <a:rPr lang="zh-CN" altLang="en-US" sz="1150" b="0" kern="1200" dirty="0">
-                <a:solidFill>
-                  <a:srgbClr val="262626"/>
-                </a:solidFill>
-                <a:latin typeface="Times New Roman" panose="02020603050405020304" pitchFamily="18" charset="0"/>
-                <a:ea typeface="华文楷体" panose="02010600040101010101" pitchFamily="2" charset="-122"/>
-                <a:cs typeface="Times New Roman" panose="02020603050405020304" pitchFamily="18" charset="0"/>
-              </a:rPr>
-              <a:t>发现无法按时披露、披露存在虚假记载等，报告证监会和交易所</a:t>
-            </a:r>
-          </a:p>
-          <a:p>
-            <a:pPr marL="171450" indent="-171450" algn="l">
-              <a:lnSpc>
-                <a:spcPct val="130000"/>
-              </a:lnSpc>
-              <a:spcBef>
-                <a:spcPts val="250"/>
-              </a:spcBef>
-              <a:spcAft>
-                <a:spcPts val="0"/>
-              </a:spcAft>
-              <a:buClr>
-                <a:srgbClr val="197BC0"/>
-              </a:buClr>
-              <a:buSzPct val="60"/>
-              <a:buFont typeface="Wingdings" panose="05000000000000000000" pitchFamily="2" charset="2"/>
-              <a:buChar char="n"/>
-            </a:pPr>
-            <a:r>
-              <a:rPr lang="zh-CN" altLang="en-US" sz="1150" b="0" kern="1200" dirty="0">
-                <a:solidFill>
-                  <a:srgbClr val="262626"/>
-                </a:solidFill>
-                <a:latin typeface="Times New Roman" panose="02020603050405020304" pitchFamily="18" charset="0"/>
-                <a:ea typeface="华文楷体" panose="02010600040101010101" pitchFamily="2" charset="-122"/>
-                <a:cs typeface="Times New Roman" panose="02020603050405020304" pitchFamily="18" charset="0"/>
-              </a:rPr>
-              <a:t>提出的合规建议未被采纳的，也要向监管报告</a:t>
-            </a:r>
-          </a:p>
-          <a:p>
-            <a:pPr marL="171450" indent="-171450" algn="l">
-              <a:lnSpc>
-                <a:spcPct val="130000"/>
-              </a:lnSpc>
-              <a:spcBef>
-                <a:spcPts val="250"/>
-              </a:spcBef>
-              <a:spcAft>
-                <a:spcPts val="0"/>
-              </a:spcAft>
-              <a:buClr>
-                <a:srgbClr val="197BC0"/>
-              </a:buClr>
-              <a:buSzPct val="60"/>
-              <a:buFont typeface="Wingdings" panose="05000000000000000000" pitchFamily="2" charset="2"/>
-              <a:buChar char="n"/>
-            </a:pPr>
-            <a:r>
-              <a:rPr lang="zh-CN" altLang="en-US" sz="1150" b="0" kern="1200" dirty="0">
-                <a:solidFill>
-                  <a:srgbClr val="262626"/>
-                </a:solidFill>
-                <a:latin typeface="Times New Roman" panose="02020603050405020304" pitchFamily="18" charset="0"/>
-                <a:ea typeface="华文楷体" panose="02010600040101010101" pitchFamily="2" charset="-122"/>
-                <a:cs typeface="Times New Roman" panose="02020603050405020304" pitchFamily="18" charset="0"/>
-              </a:rPr>
-              <a:t>履职受到妨碍的，先报董事长；仍受阻的，报告监管</a:t>
-            </a:r>
-          </a:p>
-          <a:p>
-            <a:pPr marL="171450" indent="-171450" algn="l">
-              <a:lnSpc>
-                <a:spcPct val="130000"/>
-              </a:lnSpc>
-              <a:spcBef>
-                <a:spcPts val="250"/>
-              </a:spcBef>
-              <a:spcAft>
-                <a:spcPts val="0"/>
-              </a:spcAft>
-              <a:buClr>
-                <a:srgbClr val="197BC0"/>
-              </a:buClr>
-              <a:buSzPct val="60"/>
-              <a:buFont typeface="Wingdings" panose="05000000000000000000" pitchFamily="2" charset="2"/>
-              <a:buChar char="n"/>
-            </a:pPr>
-            <a:r>
-              <a:rPr lang="zh-CN" altLang="en-US" sz="1150" b="0" kern="1200" dirty="0">
-                <a:solidFill>
-                  <a:srgbClr val="262626"/>
-                </a:solidFill>
-                <a:latin typeface="Times New Roman" panose="02020603050405020304" pitchFamily="18" charset="0"/>
-                <a:ea typeface="华文楷体" panose="02010600040101010101" pitchFamily="2" charset="-122"/>
-                <a:cs typeface="Times New Roman" panose="02020603050405020304" pitchFamily="18" charset="0"/>
-              </a:rPr>
-              <a:t>公司内审机构发现重大问题线索的，应当同时通报董事会秘书</a:t>
-            </a:r>
-          </a:p>
-        </p:txBody>
-      </p:sp>
-      <p:sp>
-        <p:nvSpPr>
-          <p:cNvPr id="106" name="Footnote"/>
-          <p:cNvSpPr txBox="1"/>
-          <p:nvPr/>
-        </p:nvSpPr>
-        <p:spPr>
-          <a:xfrm>
-            <a:off x="773430" y="6050000"/>
+            <a:off x="773430" y="6180000"/>
             <a:ext cx="10645140" cy="260000"/>
           </a:xfrm>
           <a:prstGeom prst="rect">
@@ -13247,7 +11613,7 @@
           </a:ln>
         </p:spPr>
         <p:txBody>
-          <a:bodyPr wrap="square" lIns="91440" tIns="45720" rIns="91440" bIns="45720" rtlCol="0" anchor="ctr"/>
+          <a:bodyPr wrap="square" lIns="91440" tIns="0" rIns="91440" bIns="0" rtlCol="0" anchor="ctr"/>
           <a:lstStyle/>
           <a:p>
             <a:pPr marL="0" indent="0" algn="l">
@@ -13271,7 +11637,7 @@
                 <a:ea typeface="华文楷体" panose="02010600040101010101" pitchFamily="2" charset="-122"/>
                 <a:cs typeface="Times New Roman" panose="02020603050405020304" pitchFamily="18" charset="0"/>
               </a:rPr>
-              <a:t>六、选聘程序、履职保障与解聘安排</a:t>
+              <a:t>六、选聘程序与解聘安排</a:t>
             </a:r>
           </a:p>
         </p:txBody>
@@ -13284,7 +11650,7 @@
         </p:nvSpPr>
         <p:spPr>
           <a:xfrm>
-            <a:off x="773430" y="1010000"/>
+            <a:off x="773430" y="1127990"/>
             <a:ext cx="10645140" cy="337185"/>
           </a:xfrm>
           <a:prstGeom prst="rect">
@@ -13305,7 +11671,7 @@
           </a:effectLst>
         </p:spPr>
         <p:txBody>
-          <a:bodyPr wrap="square" lIns="137160" tIns="45720" rIns="91440" bIns="45720" rtlCol="0" anchor="ctr"/>
+          <a:bodyPr wrap="square" lIns="137160" tIns="0" rIns="0" bIns="0" rtlCol="0" anchor="ctr"/>
           <a:lstStyle/>
           <a:p>
             <a:pPr marL="0" indent="0" algn="l">
@@ -13329,41 +11695,37 @@
                 <a:ea typeface="华文楷体" panose="02010600040101010101" pitchFamily="2" charset="-122"/>
                 <a:cs typeface="Times New Roman" panose="02020603050405020304" pitchFamily="18" charset="0"/>
               </a:rPr>
-              <a:t>聘任程序（规则第二十三条）</a:t>
-            </a:r>
-          </a:p>
-        </p:txBody>
-      </p:sp>
-      <p:sp>
-        <p:nvSpPr>
-          <p:cNvPr id="103" name="Step"/>
-          <p:cNvSpPr/>
+              <a:t>聘任程序</a:t>
+            </a:r>
+          </a:p>
+        </p:txBody>
+      </p:sp>
+      <p:sp>
+        <p:nvSpPr>
+          <p:cNvPr id="103" name="Items"/>
+          <p:cNvSpPr txBox="1"/>
           <p:nvPr/>
         </p:nvSpPr>
         <p:spPr>
           <a:xfrm>
-            <a:off x="773430" y="1450000"/>
-            <a:ext cx="2025028" cy="900000"/>
+            <a:off x="773430" y="1645175"/>
+            <a:ext cx="10645140" cy="897280"/>
           </a:xfrm>
           <a:prstGeom prst="rect">
             <a:avLst/>
           </a:prstGeom>
-          <a:solidFill>
-            <a:srgbClr val="F2F6FB"/>
-          </a:solidFill>
-          <a:ln w="12700">
-            <a:solidFill>
-              <a:srgbClr val="C8D9EA"/>
-            </a:solidFill>
+          <a:noFill/>
+          <a:ln>
+            <a:noFill/>
           </a:ln>
         </p:spPr>
         <p:txBody>
-          <a:bodyPr wrap="square" lIns="91440" tIns="91440" rIns="91440" bIns="91440" rtlCol="0" anchor="ctr"/>
+          <a:bodyPr wrap="square" lIns="0" tIns="0" rIns="0" bIns="0" rtlCol="0" anchor="t"/>
           <a:lstStyle/>
           <a:p>
-            <a:pPr marL="0" indent="0" algn="ctr">
+            <a:pPr marL="214313" indent="-214313" algn="l">
               <a:lnSpc>
-                <a:spcPct val="100000"/>
+                <a:spcPct val="160000"/>
               </a:lnSpc>
               <a:spcBef>
                 <a:spcPts val="0"/>
@@ -13371,446 +11733,119 @@
               <a:spcAft>
                 <a:spcPts val="0"/>
               </a:spcAft>
-              <a:buNone/>
+              <a:buClr>
+                <a:srgbClr val="004E98"/>
+              </a:buClr>
+              <a:buFont typeface="Wingdings" panose="05000000000000000000" pitchFamily="2" charset="2"/>
+              <a:buChar char="n"/>
             </a:pPr>
             <a:r>
-              <a:rPr lang="zh-CN" altLang="en-US" sz="1800" b="1" kern="1200" dirty="0">
-                <a:solidFill>
-                  <a:srgbClr val="197BC0"/>
+              <a:rPr lang="zh-CN" altLang="en-US" sz="1400" b="1" kern="1200" dirty="0">
+                <a:solidFill>
+                  <a:srgbClr val="004E98"/>
                 </a:solidFill>
                 <a:latin typeface="Times New Roman" panose="02020603050405020304" pitchFamily="18" charset="0"/>
                 <a:ea typeface="华文楷体" panose="02010600040101010101" pitchFamily="2" charset="-122"/>
                 <a:cs typeface="Times New Roman" panose="02020603050405020304" pitchFamily="18" charset="0"/>
               </a:rPr>
-              <a:t>01</a:t>
-            </a:r>
-          </a:p>
-          <a:p>
-            <a:pPr marL="0" indent="0" algn="ctr">
+              <a:t>提名委员会</a:t>
+            </a:r>
+            <a:r>
+              <a:rPr lang="zh-CN" altLang="en-US" sz="1400" b="0" kern="1200" dirty="0">
+                <a:solidFill>
+                  <a:srgbClr val="262626"/>
+                </a:solidFill>
+                <a:latin typeface="Times New Roman" panose="02020603050405020304" pitchFamily="18" charset="0"/>
+                <a:ea typeface="华文楷体" panose="02010600040101010101" pitchFamily="2" charset="-122"/>
+                <a:cs typeface="Times New Roman" panose="02020603050405020304" pitchFamily="18" charset="0"/>
+              </a:rPr>
+              <a:t>（未设置的，由</a:t>
+            </a:r>
+            <a:r>
+              <a:rPr lang="zh-CN" altLang="en-US" sz="1400" b="1" kern="1200" dirty="0">
+                <a:solidFill>
+                  <a:srgbClr val="004E98"/>
+                </a:solidFill>
+                <a:latin typeface="Times New Roman" panose="02020603050405020304" pitchFamily="18" charset="0"/>
+                <a:ea typeface="华文楷体" panose="02010600040101010101" pitchFamily="2" charset="-122"/>
+                <a:cs typeface="Times New Roman" panose="02020603050405020304" pitchFamily="18" charset="0"/>
+              </a:rPr>
+              <a:t>独立董事专门会议</a:t>
+            </a:r>
+            <a:r>
+              <a:rPr lang="zh-CN" altLang="en-US" sz="1400" b="0" kern="1200" dirty="0">
+                <a:solidFill>
+                  <a:srgbClr val="262626"/>
+                </a:solidFill>
+                <a:latin typeface="Times New Roman" panose="02020603050405020304" pitchFamily="18" charset="0"/>
+                <a:ea typeface="华文楷体" panose="02010600040101010101" pitchFamily="2" charset="-122"/>
+                <a:cs typeface="Times New Roman" panose="02020603050405020304" pitchFamily="18" charset="0"/>
+              </a:rPr>
+              <a:t>）对人选及任职资格进行遴选、审核，并向董事会提出建议。</a:t>
+            </a:r>
+          </a:p>
+          <a:p>
+            <a:pPr marL="214313" indent="-214313" algn="l">
               <a:lnSpc>
-                <a:spcPct val="125000"/>
+                <a:spcPct val="160000"/>
               </a:lnSpc>
               <a:spcBef>
-                <a:spcPts val="250"/>
+                <a:spcPts val="600"/>
               </a:spcBef>
               <a:spcAft>
                 <a:spcPts val="0"/>
               </a:spcAft>
-              <a:buNone/>
+              <a:buClr>
+                <a:srgbClr val="004E98"/>
+              </a:buClr>
+              <a:buFont typeface="Wingdings" panose="05000000000000000000" pitchFamily="2" charset="2"/>
+              <a:buChar char="n"/>
             </a:pPr>
             <a:r>
-              <a:rPr lang="zh-CN" altLang="en-US" sz="1200" b="1" kern="1200" dirty="0">
-                <a:solidFill>
-                  <a:srgbClr val="00335F"/>
+              <a:rPr lang="zh-CN" altLang="en-US" sz="1400" b="0" kern="1200" dirty="0">
+                <a:solidFill>
+                  <a:srgbClr val="262626"/>
                 </a:solidFill>
                 <a:latin typeface="Times New Roman" panose="02020603050405020304" pitchFamily="18" charset="0"/>
                 <a:ea typeface="华文楷体" panose="02010600040101010101" pitchFamily="2" charset="-122"/>
                 <a:cs typeface="Times New Roman" panose="02020603050405020304" pitchFamily="18" charset="0"/>
               </a:rPr>
-              <a:t>确定候选人</a:t>
-            </a:r>
-          </a:p>
-        </p:txBody>
-      </p:sp>
-      <p:sp>
-        <p:nvSpPr>
-          <p:cNvPr id="104" name="Step"/>
+              <a:t>董事会作出聘任决议，并就候选人符合任职条件的情况</a:t>
+            </a:r>
+            <a:r>
+              <a:rPr lang="zh-CN" altLang="en-US" sz="1400" b="1" kern="1200" dirty="0">
+                <a:solidFill>
+                  <a:srgbClr val="004E98"/>
+                </a:solidFill>
+                <a:latin typeface="Times New Roman" panose="02020603050405020304" pitchFamily="18" charset="0"/>
+                <a:ea typeface="华文楷体" panose="02010600040101010101" pitchFamily="2" charset="-122"/>
+                <a:cs typeface="Times New Roman" panose="02020603050405020304" pitchFamily="18" charset="0"/>
+              </a:rPr>
+              <a:t>公告披露</a:t>
+            </a:r>
+            <a:r>
+              <a:rPr lang="zh-CN" altLang="en-US" sz="1400" b="0" kern="1200" dirty="0">
+                <a:solidFill>
+                  <a:srgbClr val="262626"/>
+                </a:solidFill>
+                <a:latin typeface="Times New Roman" panose="02020603050405020304" pitchFamily="18" charset="0"/>
+                <a:ea typeface="华文楷体" panose="02010600040101010101" pitchFamily="2" charset="-122"/>
+                <a:cs typeface="Times New Roman" panose="02020603050405020304" pitchFamily="18" charset="0"/>
+              </a:rPr>
+              <a:t>。</a:t>
+            </a:r>
+          </a:p>
+        </p:txBody>
+      </p:sp>
+      <p:sp>
+        <p:nvSpPr>
+          <p:cNvPr id="104" name="SectionBar"/>
           <p:cNvSpPr/>
           <p:nvPr/>
         </p:nvSpPr>
         <p:spPr>
           <a:xfrm>
-            <a:off x="2928458" y="1450000"/>
-            <a:ext cx="2025028" cy="900000"/>
-          </a:xfrm>
-          <a:prstGeom prst="rect">
-            <a:avLst/>
-          </a:prstGeom>
-          <a:solidFill>
-            <a:srgbClr val="F2F6FB"/>
-          </a:solidFill>
-          <a:ln w="12700">
-            <a:solidFill>
-              <a:srgbClr val="C8D9EA"/>
-            </a:solidFill>
-          </a:ln>
-        </p:spPr>
-        <p:txBody>
-          <a:bodyPr wrap="square" lIns="91440" tIns="91440" rIns="91440" bIns="91440" rtlCol="0" anchor="ctr"/>
-          <a:lstStyle/>
-          <a:p>
-            <a:pPr marL="0" indent="0" algn="ctr">
-              <a:lnSpc>
-                <a:spcPct val="100000"/>
-              </a:lnSpc>
-              <a:spcBef>
-                <a:spcPts val="0"/>
-              </a:spcBef>
-              <a:spcAft>
-                <a:spcPts val="0"/>
-              </a:spcAft>
-              <a:buNone/>
-            </a:pPr>
-            <a:r>
-              <a:rPr lang="zh-CN" altLang="en-US" sz="1800" b="1" kern="1200" dirty="0">
-                <a:solidFill>
-                  <a:srgbClr val="197BC0"/>
-                </a:solidFill>
-                <a:latin typeface="Times New Roman" panose="02020603050405020304" pitchFamily="18" charset="0"/>
-                <a:ea typeface="华文楷体" panose="02010600040101010101" pitchFamily="2" charset="-122"/>
-                <a:cs typeface="Times New Roman" panose="02020603050405020304" pitchFamily="18" charset="0"/>
-              </a:rPr>
-              <a:t>02</a:t>
-            </a:r>
-          </a:p>
-          <a:p>
-            <a:pPr marL="0" indent="0" algn="ctr">
-              <a:lnSpc>
-                <a:spcPct val="125000"/>
-              </a:lnSpc>
-              <a:spcBef>
-                <a:spcPts val="250"/>
-              </a:spcBef>
-              <a:spcAft>
-                <a:spcPts val="0"/>
-              </a:spcAft>
-              <a:buNone/>
-            </a:pPr>
-            <a:r>
-              <a:rPr lang="zh-CN" altLang="en-US" sz="1200" b="1" kern="1200" dirty="0">
-                <a:solidFill>
-                  <a:srgbClr val="00335F"/>
-                </a:solidFill>
-                <a:latin typeface="Times New Roman" panose="02020603050405020304" pitchFamily="18" charset="0"/>
-                <a:ea typeface="华文楷体" panose="02010600040101010101" pitchFamily="2" charset="-122"/>
-                <a:cs typeface="Times New Roman" panose="02020603050405020304" pitchFamily="18" charset="0"/>
-              </a:rPr>
-              <a:t>逐条核查任职资格</a:t>
-            </a:r>
-          </a:p>
-        </p:txBody>
-      </p:sp>
-      <p:sp>
-        <p:nvSpPr>
-          <p:cNvPr id="105" name="Step"/>
-          <p:cNvSpPr/>
-          <p:nvPr/>
-        </p:nvSpPr>
-        <p:spPr>
-          <a:xfrm>
-            <a:off x="5083486" y="1450000"/>
-            <a:ext cx="2025028" cy="900000"/>
-          </a:xfrm>
-          <a:prstGeom prst="rect">
-            <a:avLst/>
-          </a:prstGeom>
-          <a:solidFill>
-            <a:srgbClr val="F2F6FB"/>
-          </a:solidFill>
-          <a:ln w="12700">
-            <a:solidFill>
-              <a:srgbClr val="C8D9EA"/>
-            </a:solidFill>
-          </a:ln>
-        </p:spPr>
-        <p:txBody>
-          <a:bodyPr wrap="square" lIns="91440" tIns="91440" rIns="91440" bIns="91440" rtlCol="0" anchor="ctr"/>
-          <a:lstStyle/>
-          <a:p>
-            <a:pPr marL="0" indent="0" algn="ctr">
-              <a:lnSpc>
-                <a:spcPct val="100000"/>
-              </a:lnSpc>
-              <a:spcBef>
-                <a:spcPts val="0"/>
-              </a:spcBef>
-              <a:spcAft>
-                <a:spcPts val="0"/>
-              </a:spcAft>
-              <a:buNone/>
-            </a:pPr>
-            <a:r>
-              <a:rPr lang="zh-CN" altLang="en-US" sz="1800" b="1" kern="1200" dirty="0">
-                <a:solidFill>
-                  <a:srgbClr val="197BC0"/>
-                </a:solidFill>
-                <a:latin typeface="Times New Roman" panose="02020603050405020304" pitchFamily="18" charset="0"/>
-                <a:ea typeface="华文楷体" panose="02010600040101010101" pitchFamily="2" charset="-122"/>
-                <a:cs typeface="Times New Roman" panose="02020603050405020304" pitchFamily="18" charset="0"/>
-              </a:rPr>
-              <a:t>03</a:t>
-            </a:r>
-          </a:p>
-          <a:p>
-            <a:pPr marL="0" indent="0" algn="ctr">
-              <a:lnSpc>
-                <a:spcPct val="125000"/>
-              </a:lnSpc>
-              <a:spcBef>
-                <a:spcPts val="250"/>
-              </a:spcBef>
-              <a:spcAft>
-                <a:spcPts val="0"/>
-              </a:spcAft>
-              <a:buNone/>
-            </a:pPr>
-            <a:r>
-              <a:rPr lang="zh-CN" altLang="en-US" sz="1200" b="1" kern="1200" dirty="0">
-                <a:solidFill>
-                  <a:srgbClr val="00335F"/>
-                </a:solidFill>
-                <a:latin typeface="Times New Roman" panose="02020603050405020304" pitchFamily="18" charset="0"/>
-                <a:ea typeface="华文楷体" panose="02010600040101010101" pitchFamily="2" charset="-122"/>
-                <a:cs typeface="Times New Roman" panose="02020603050405020304" pitchFamily="18" charset="0"/>
-              </a:rPr>
-              <a:t>提名委员会遴选与审核</a:t>
-            </a:r>
-          </a:p>
-        </p:txBody>
-      </p:sp>
-      <p:sp>
-        <p:nvSpPr>
-          <p:cNvPr id="106" name="Step"/>
-          <p:cNvSpPr/>
-          <p:nvPr/>
-        </p:nvSpPr>
-        <p:spPr>
-          <a:xfrm>
-            <a:off x="7238514" y="1450000"/>
-            <a:ext cx="2025028" cy="900000"/>
-          </a:xfrm>
-          <a:prstGeom prst="rect">
-            <a:avLst/>
-          </a:prstGeom>
-          <a:solidFill>
-            <a:srgbClr val="F2F6FB"/>
-          </a:solidFill>
-          <a:ln w="12700">
-            <a:solidFill>
-              <a:srgbClr val="C8D9EA"/>
-            </a:solidFill>
-          </a:ln>
-        </p:spPr>
-        <p:txBody>
-          <a:bodyPr wrap="square" lIns="91440" tIns="91440" rIns="91440" bIns="91440" rtlCol="0" anchor="ctr"/>
-          <a:lstStyle/>
-          <a:p>
-            <a:pPr marL="0" indent="0" algn="ctr">
-              <a:lnSpc>
-                <a:spcPct val="100000"/>
-              </a:lnSpc>
-              <a:spcBef>
-                <a:spcPts val="0"/>
-              </a:spcBef>
-              <a:spcAft>
-                <a:spcPts val="0"/>
-              </a:spcAft>
-              <a:buNone/>
-            </a:pPr>
-            <a:r>
-              <a:rPr lang="zh-CN" altLang="en-US" sz="1800" b="1" kern="1200" dirty="0">
-                <a:solidFill>
-                  <a:srgbClr val="197BC0"/>
-                </a:solidFill>
-                <a:latin typeface="Times New Roman" panose="02020603050405020304" pitchFamily="18" charset="0"/>
-                <a:ea typeface="华文楷体" panose="02010600040101010101" pitchFamily="2" charset="-122"/>
-                <a:cs typeface="Times New Roman" panose="02020603050405020304" pitchFamily="18" charset="0"/>
-              </a:rPr>
-              <a:t>04</a:t>
-            </a:r>
-          </a:p>
-          <a:p>
-            <a:pPr marL="0" indent="0" algn="ctr">
-              <a:lnSpc>
-                <a:spcPct val="125000"/>
-              </a:lnSpc>
-              <a:spcBef>
-                <a:spcPts val="250"/>
-              </a:spcBef>
-              <a:spcAft>
-                <a:spcPts val="0"/>
-              </a:spcAft>
-              <a:buNone/>
-            </a:pPr>
-            <a:r>
-              <a:rPr lang="zh-CN" altLang="en-US" sz="1200" b="1" kern="1200" dirty="0">
-                <a:solidFill>
-                  <a:srgbClr val="00335F"/>
-                </a:solidFill>
-                <a:latin typeface="Times New Roman" panose="02020603050405020304" pitchFamily="18" charset="0"/>
-                <a:ea typeface="华文楷体" panose="02010600040101010101" pitchFamily="2" charset="-122"/>
-                <a:cs typeface="Times New Roman" panose="02020603050405020304" pitchFamily="18" charset="0"/>
-              </a:rPr>
-              <a:t>董事会作出聘任决议</a:t>
-            </a:r>
-          </a:p>
-        </p:txBody>
-      </p:sp>
-      <p:sp>
-        <p:nvSpPr>
-          <p:cNvPr id="107" name="Step"/>
-          <p:cNvSpPr/>
-          <p:nvPr/>
-        </p:nvSpPr>
-        <p:spPr>
-          <a:xfrm>
-            <a:off x="9393542" y="1450000"/>
-            <a:ext cx="2025028" cy="900000"/>
-          </a:xfrm>
-          <a:prstGeom prst="rect">
-            <a:avLst/>
-          </a:prstGeom>
-          <a:solidFill>
-            <a:srgbClr val="F2F6FB"/>
-          </a:solidFill>
-          <a:ln w="12700">
-            <a:solidFill>
-              <a:srgbClr val="C8D9EA"/>
-            </a:solidFill>
-          </a:ln>
-        </p:spPr>
-        <p:txBody>
-          <a:bodyPr wrap="square" lIns="91440" tIns="91440" rIns="91440" bIns="91440" rtlCol="0" anchor="ctr"/>
-          <a:lstStyle/>
-          <a:p>
-            <a:pPr marL="0" indent="0" algn="ctr">
-              <a:lnSpc>
-                <a:spcPct val="100000"/>
-              </a:lnSpc>
-              <a:spcBef>
-                <a:spcPts val="0"/>
-              </a:spcBef>
-              <a:spcAft>
-                <a:spcPts val="0"/>
-              </a:spcAft>
-              <a:buNone/>
-            </a:pPr>
-            <a:r>
-              <a:rPr lang="zh-CN" altLang="en-US" sz="1800" b="1" kern="1200" dirty="0">
-                <a:solidFill>
-                  <a:srgbClr val="197BC0"/>
-                </a:solidFill>
-                <a:latin typeface="Times New Roman" panose="02020603050405020304" pitchFamily="18" charset="0"/>
-                <a:ea typeface="华文楷体" panose="02010600040101010101" pitchFamily="2" charset="-122"/>
-                <a:cs typeface="Times New Roman" panose="02020603050405020304" pitchFamily="18" charset="0"/>
-              </a:rPr>
-              <a:t>05</a:t>
-            </a:r>
-          </a:p>
-          <a:p>
-            <a:pPr marL="0" indent="0" algn="ctr">
-              <a:lnSpc>
-                <a:spcPct val="125000"/>
-              </a:lnSpc>
-              <a:spcBef>
-                <a:spcPts val="250"/>
-              </a:spcBef>
-              <a:spcAft>
-                <a:spcPts val="0"/>
-              </a:spcAft>
-              <a:buNone/>
-            </a:pPr>
-            <a:r>
-              <a:rPr lang="zh-CN" altLang="en-US" sz="1200" b="1" kern="1200" dirty="0">
-                <a:solidFill>
-                  <a:srgbClr val="00335F"/>
-                </a:solidFill>
-                <a:latin typeface="Times New Roman" panose="02020603050405020304" pitchFamily="18" charset="0"/>
-                <a:ea typeface="华文楷体" panose="02010600040101010101" pitchFamily="2" charset="-122"/>
-                <a:cs typeface="Times New Roman" panose="02020603050405020304" pitchFamily="18" charset="0"/>
-              </a:rPr>
-              <a:t>公告披露任职情况</a:t>
-            </a:r>
-          </a:p>
-        </p:txBody>
-      </p:sp>
-      <p:sp>
-        <p:nvSpPr>
-          <p:cNvPr id="108" name="StepNote"/>
-          <p:cNvSpPr/>
-          <p:nvPr/>
-        </p:nvSpPr>
-        <p:spPr>
-          <a:xfrm>
-            <a:off x="773430" y="2440000"/>
-            <a:ext cx="10645140" cy="430000"/>
-          </a:xfrm>
-          <a:prstGeom prst="rect">
-            <a:avLst/>
-          </a:prstGeom>
-          <a:solidFill>
-            <a:srgbClr val="E8F1FA"/>
-          </a:solidFill>
-          <a:ln w="12700">
-            <a:solidFill>
-              <a:srgbClr val="C8D9EA"/>
-            </a:solidFill>
-          </a:ln>
-        </p:spPr>
-        <p:txBody>
-          <a:bodyPr wrap="square" lIns="182880" tIns="68580" rIns="137160" bIns="68580" rtlCol="0" anchor="ctr"/>
-          <a:lstStyle/>
-          <a:p>
-            <a:pPr marL="0" indent="0" algn="l">
-              <a:lnSpc>
-                <a:spcPct val="120000"/>
-              </a:lnSpc>
-              <a:spcBef>
-                <a:spcPts val="0"/>
-              </a:spcBef>
-              <a:spcAft>
-                <a:spcPts val="0"/>
-              </a:spcAft>
-              <a:buNone/>
-            </a:pPr>
-            <a:r>
-              <a:rPr lang="zh-CN" altLang="en-US" sz="1250" b="0" kern="1200" dirty="0">
-                <a:solidFill>
-                  <a:srgbClr val="262626"/>
-                </a:solidFill>
-                <a:latin typeface="Times New Roman" panose="02020603050405020304" pitchFamily="18" charset="0"/>
-                <a:ea typeface="华文楷体" panose="02010600040101010101" pitchFamily="2" charset="-122"/>
-                <a:cs typeface="Times New Roman" panose="02020603050405020304" pitchFamily="18" charset="0"/>
-              </a:rPr>
-              <a:t>说明：未在董事会中设置提名委员会的，由</a:t>
-            </a:r>
-            <a:r>
-              <a:rPr lang="zh-CN" altLang="en-US" sz="1250" b="1" kern="1200" dirty="0">
-                <a:solidFill>
-                  <a:srgbClr val="004E98"/>
-                </a:solidFill>
-                <a:highlight>
-                  <a:srgbClr val="FFFF00"/>
-                </a:highlight>
-                <a:latin typeface="Times New Roman" panose="02020603050405020304" pitchFamily="18" charset="0"/>
-                <a:ea typeface="华文楷体" panose="02010600040101010101" pitchFamily="2" charset="-122"/>
-                <a:cs typeface="Times New Roman" panose="02020603050405020304" pitchFamily="18" charset="0"/>
-              </a:rPr>
-              <a:t>独立董事专门会议</a:t>
-            </a:r>
-            <a:r>
-              <a:rPr lang="zh-CN" altLang="en-US" sz="1250" b="0" kern="1200" dirty="0">
-                <a:solidFill>
-                  <a:srgbClr val="262626"/>
-                </a:solidFill>
-                <a:latin typeface="Times New Roman" panose="02020603050405020304" pitchFamily="18" charset="0"/>
-                <a:ea typeface="华文楷体" panose="02010600040101010101" pitchFamily="2" charset="-122"/>
-                <a:cs typeface="Times New Roman" panose="02020603050405020304" pitchFamily="18" charset="0"/>
-              </a:rPr>
-              <a:t>履行遴选、审核并向董事会提出建议的职责。（规则第二十三条）</a:t>
-            </a:r>
-          </a:p>
-        </p:txBody>
-      </p:sp>
-      <p:sp>
-        <p:nvSpPr>
-          <p:cNvPr id="109" name="SectionBar"/>
-          <p:cNvSpPr/>
-          <p:nvPr/>
-        </p:nvSpPr>
-        <p:spPr>
-          <a:xfrm>
-            <a:off x="773430" y="2990000"/>
+            <a:off x="773430" y="2816762"/>
             <a:ext cx="10645140" cy="337185"/>
           </a:xfrm>
           <a:prstGeom prst="rect">
@@ -13831,7 +11866,7 @@
           </a:effectLst>
         </p:spPr>
         <p:txBody>
-          <a:bodyPr wrap="square" lIns="137160" tIns="45720" rIns="91440" bIns="45720" rtlCol="0" anchor="ctr"/>
+          <a:bodyPr wrap="square" lIns="137160" tIns="0" rIns="0" bIns="0" rtlCol="0" anchor="ctr"/>
           <a:lstStyle/>
           <a:p>
             <a:pPr marL="0" indent="0" algn="l">
@@ -13855,41 +11890,37 @@
                 <a:ea typeface="华文楷体" panose="02010600040101010101" pitchFamily="2" charset="-122"/>
                 <a:cs typeface="Times New Roman" panose="02020603050405020304" pitchFamily="18" charset="0"/>
               </a:rPr>
-              <a:t>公司应当同步落实的履职保障（规则第二十七条、第二十九条、第三十三条）</a:t>
-            </a:r>
-          </a:p>
-        </p:txBody>
-      </p:sp>
-      <p:sp>
-        <p:nvSpPr>
-          <p:cNvPr id="110" name="Card"/>
-          <p:cNvSpPr/>
+              <a:t>公司应当同步落实的履职保障</a:t>
+            </a:r>
+          </a:p>
+        </p:txBody>
+      </p:sp>
+      <p:sp>
+        <p:nvSpPr>
+          <p:cNvPr id="105" name="Items"/>
+          <p:cNvSpPr txBox="1"/>
           <p:nvPr/>
         </p:nvSpPr>
         <p:spPr>
           <a:xfrm>
-            <a:off x="773430" y="3430000"/>
-            <a:ext cx="3401713" cy="1120000"/>
+            <a:off x="773430" y="3333947"/>
+            <a:ext cx="10645140" cy="897280"/>
           </a:xfrm>
           <a:prstGeom prst="rect">
             <a:avLst/>
           </a:prstGeom>
-          <a:solidFill>
-            <a:srgbClr val="F2F6FB"/>
-          </a:solidFill>
-          <a:ln w="12700">
-            <a:solidFill>
-              <a:srgbClr val="C8D9EA"/>
-            </a:solidFill>
+          <a:noFill/>
+          <a:ln>
+            <a:noFill/>
           </a:ln>
         </p:spPr>
         <p:txBody>
-          <a:bodyPr wrap="square" lIns="182880" tIns="137160" rIns="137160" bIns="91440" rtlCol="0" anchor="t"/>
+          <a:bodyPr wrap="square" lIns="0" tIns="0" rIns="0" bIns="0" rtlCol="0" anchor="t"/>
           <a:lstStyle/>
           <a:p>
-            <a:pPr marL="0" indent="0" algn="l">
+            <a:pPr marL="214313" indent="-214313" algn="l">
               <a:lnSpc>
-                <a:spcPct val="100000"/>
+                <a:spcPct val="160000"/>
               </a:lnSpc>
               <a:spcBef>
                 <a:spcPts val="0"/>
@@ -13897,40 +11928,14 @@
               <a:spcAft>
                 <a:spcPts val="0"/>
               </a:spcAft>
-              <a:buNone/>
-            </a:pPr>
-            <a:r>
-              <a:rPr lang="zh-CN" altLang="en-US" sz="1400" b="1" kern="1200" dirty="0">
-                <a:solidFill>
-                  <a:srgbClr val="004E98"/>
-                </a:solidFill>
-                <a:latin typeface="Times New Roman" panose="02020603050405020304" pitchFamily="18" charset="0"/>
-                <a:ea typeface="华文楷体" panose="02010600040101010101" pitchFamily="2" charset="-122"/>
-                <a:cs typeface="Times New Roman" panose="02020603050405020304" pitchFamily="18" charset="0"/>
-              </a:rPr>
-              <a:t>① 人员与机构保障</a:t>
-            </a:r>
-          </a:p>
-          <a:p>
-            <a:pPr marL="171450" indent="-171450" algn="l">
-              <a:lnSpc>
-                <a:spcPct val="140000"/>
-              </a:lnSpc>
-              <a:spcBef>
-                <a:spcPts val="350"/>
-              </a:spcBef>
-              <a:spcAft>
-                <a:spcPts val="0"/>
-              </a:spcAft>
               <a:buClr>
-                <a:srgbClr val="197BC0"/>
+                <a:srgbClr val="004E98"/>
               </a:buClr>
-              <a:buSzPct val="60"/>
               <a:buFont typeface="Wingdings" panose="05000000000000000000" pitchFamily="2" charset="2"/>
               <a:buChar char="n"/>
             </a:pPr>
             <a:r>
-              <a:rPr lang="zh-CN" altLang="en-US" sz="1200" b="0" kern="1200" dirty="0">
+              <a:rPr lang="zh-CN" altLang="en-US" sz="1400" b="0" kern="1200" dirty="0">
                 <a:solidFill>
                   <a:srgbClr val="262626"/>
                 </a:solidFill>
@@ -13938,115 +11943,28 @@
                 <a:ea typeface="华文楷体" panose="02010600040101010101" pitchFamily="2" charset="-122"/>
                 <a:cs typeface="Times New Roman" panose="02020603050405020304" pitchFamily="18" charset="0"/>
               </a:rPr>
-              <a:t>聘请</a:t>
-            </a:r>
-            <a:r>
-              <a:rPr lang="zh-CN" altLang="en-US" sz="1200" b="1" kern="1200" dirty="0">
-                <a:solidFill>
-                  <a:srgbClr val="004E98"/>
-                </a:solidFill>
-                <a:latin typeface="Times New Roman" panose="02020603050405020304" pitchFamily="18" charset="0"/>
-                <a:ea typeface="华文楷体" panose="02010600040101010101" pitchFamily="2" charset="-122"/>
-                <a:cs typeface="Times New Roman" panose="02020603050405020304" pitchFamily="18" charset="0"/>
-              </a:rPr>
-              <a:t>证券事务代表</a:t>
-            </a:r>
-            <a:r>
-              <a:rPr lang="zh-CN" altLang="en-US" sz="1200" b="0" kern="1200" dirty="0">
-                <a:solidFill>
-                  <a:srgbClr val="262626"/>
-                </a:solidFill>
-                <a:latin typeface="Times New Roman" panose="02020603050405020304" pitchFamily="18" charset="0"/>
-                <a:ea typeface="华文楷体" panose="02010600040101010101" pitchFamily="2" charset="-122"/>
-                <a:cs typeface="Times New Roman" panose="02020603050405020304" pitchFamily="18" charset="0"/>
-              </a:rPr>
-              <a:t>，设立由董事会秘书</a:t>
-            </a:r>
-            <a:r>
-              <a:rPr lang="zh-CN" altLang="en-US" sz="1200" b="1" kern="1200" dirty="0">
-                <a:solidFill>
-                  <a:srgbClr val="004E98"/>
-                </a:solidFill>
-                <a:latin typeface="Times New Roman" panose="02020603050405020304" pitchFamily="18" charset="0"/>
-                <a:ea typeface="华文楷体" panose="02010600040101010101" pitchFamily="2" charset="-122"/>
-                <a:cs typeface="Times New Roman" panose="02020603050405020304" pitchFamily="18" charset="0"/>
-              </a:rPr>
-              <a:t>分管的工作部门</a:t>
-            </a:r>
-          </a:p>
-        </p:txBody>
-      </p:sp>
-      <p:sp>
-        <p:nvSpPr>
-          <p:cNvPr id="111" name="Card"/>
-          <p:cNvSpPr/>
-          <p:nvPr/>
-        </p:nvSpPr>
-        <p:spPr>
-          <a:xfrm>
-            <a:off x="4395143" y="3430000"/>
-            <a:ext cx="3401713" cy="1120000"/>
-          </a:xfrm>
-          <a:prstGeom prst="rect">
-            <a:avLst/>
-          </a:prstGeom>
-          <a:solidFill>
-            <a:srgbClr val="F2F6FB"/>
-          </a:solidFill>
-          <a:ln w="12700">
-            <a:solidFill>
-              <a:srgbClr val="C8D9EA"/>
-            </a:solidFill>
-          </a:ln>
-        </p:spPr>
-        <p:txBody>
-          <a:bodyPr wrap="square" lIns="182880" tIns="137160" rIns="137160" bIns="91440" rtlCol="0" anchor="t"/>
-          <a:lstStyle/>
-          <a:p>
-            <a:pPr marL="0" indent="0" algn="l">
+              <a:t>聘请证券事务代表，设立由董事会秘书分管的工作部门。</a:t>
+            </a:r>
+          </a:p>
+          <a:p>
+            <a:pPr marL="214313" indent="-214313" algn="l">
               <a:lnSpc>
-                <a:spcPct val="100000"/>
+                <a:spcPct val="160000"/>
               </a:lnSpc>
               <a:spcBef>
-                <a:spcPts val="0"/>
+                <a:spcPts val="600"/>
               </a:spcBef>
               <a:spcAft>
                 <a:spcPts val="0"/>
               </a:spcAft>
-              <a:buNone/>
-            </a:pPr>
-            <a:r>
-              <a:rPr lang="zh-CN" altLang="en-US" sz="1400" b="1" kern="1200" dirty="0">
-                <a:solidFill>
-                  <a:srgbClr val="004E98"/>
-                </a:solidFill>
-                <a:latin typeface="Times New Roman" panose="02020603050405020304" pitchFamily="18" charset="0"/>
-                <a:ea typeface="华文楷体" panose="02010600040101010101" pitchFamily="2" charset="-122"/>
-                <a:cs typeface="Times New Roman" panose="02020603050405020304" pitchFamily="18" charset="0"/>
-              </a:rPr>
-              <a:t>② 信息获取保障</a:t>
-            </a:r>
-          </a:p>
-          <a:p>
-            <a:pPr marL="171450" indent="-171450" algn="l">
-              <a:lnSpc>
-                <a:spcPct val="140000"/>
-              </a:lnSpc>
-              <a:spcBef>
-                <a:spcPts val="350"/>
-              </a:spcBef>
-              <a:spcAft>
-                <a:spcPts val="0"/>
-              </a:spcAft>
               <a:buClr>
-                <a:srgbClr val="197BC0"/>
+                <a:srgbClr val="004E98"/>
               </a:buClr>
-              <a:buSzPct val="60"/>
               <a:buFont typeface="Wingdings" panose="05000000000000000000" pitchFamily="2" charset="2"/>
               <a:buChar char="n"/>
             </a:pPr>
             <a:r>
-              <a:rPr lang="zh-CN" altLang="en-US" sz="1200" b="0" kern="1200" dirty="0">
+              <a:rPr lang="zh-CN" altLang="en-US" sz="1400" b="0" kern="1200" dirty="0">
                 <a:solidFill>
                   <a:srgbClr val="262626"/>
                 </a:solidFill>
@@ -14054,147 +11972,20 @@
                 <a:ea typeface="华文楷体" panose="02010600040101010101" pitchFamily="2" charset="-122"/>
                 <a:cs typeface="Times New Roman" panose="02020603050405020304" pitchFamily="18" charset="0"/>
               </a:rPr>
-              <a:t>将履职</a:t>
-            </a:r>
-            <a:r>
-              <a:rPr lang="zh-CN" altLang="en-US" sz="1200" b="1" kern="1200" dirty="0">
-                <a:solidFill>
-                  <a:srgbClr val="004E98"/>
-                </a:solidFill>
-                <a:latin typeface="Times New Roman" panose="02020603050405020304" pitchFamily="18" charset="0"/>
-                <a:ea typeface="华文楷体" panose="02010600040101010101" pitchFamily="2" charset="-122"/>
-                <a:cs typeface="Times New Roman" panose="02020603050405020304" pitchFamily="18" charset="0"/>
-              </a:rPr>
-              <a:t>嵌入日常经营管理流程</a:t>
-            </a:r>
-            <a:r>
-              <a:rPr lang="zh-CN" altLang="en-US" sz="1200" b="0" kern="1200" dirty="0">
-                <a:solidFill>
-                  <a:srgbClr val="262626"/>
-                </a:solidFill>
-                <a:latin typeface="Times New Roman" panose="02020603050405020304" pitchFamily="18" charset="0"/>
-                <a:ea typeface="华文楷体" panose="02010600040101010101" pitchFamily="2" charset="-122"/>
-                <a:cs typeface="Times New Roman" panose="02020603050405020304" pitchFamily="18" charset="0"/>
-              </a:rPr>
-              <a:t>，确保及时、准确、全面获取信息</a:t>
-            </a:r>
-          </a:p>
-        </p:txBody>
-      </p:sp>
-      <p:sp>
-        <p:nvSpPr>
-          <p:cNvPr id="112" name="Card"/>
+              <a:t>建立董事会秘书履职定期评价与责任追究机制。</a:t>
+            </a:r>
+          </a:p>
+        </p:txBody>
+      </p:sp>
+      <p:sp>
+        <p:nvSpPr>
+          <p:cNvPr id="106" name="SectionBar"/>
           <p:cNvSpPr/>
           <p:nvPr/>
         </p:nvSpPr>
         <p:spPr>
           <a:xfrm>
-            <a:off x="8016856" y="3430000"/>
-            <a:ext cx="3401713" cy="1120000"/>
-          </a:xfrm>
-          <a:prstGeom prst="rect">
-            <a:avLst/>
-          </a:prstGeom>
-          <a:solidFill>
-            <a:srgbClr val="F2F6FB"/>
-          </a:solidFill>
-          <a:ln w="12700">
-            <a:solidFill>
-              <a:srgbClr val="C8D9EA"/>
-            </a:solidFill>
-          </a:ln>
-        </p:spPr>
-        <p:txBody>
-          <a:bodyPr wrap="square" lIns="182880" tIns="137160" rIns="137160" bIns="91440" rtlCol="0" anchor="t"/>
-          <a:lstStyle/>
-          <a:p>
-            <a:pPr marL="0" indent="0" algn="l">
-              <a:lnSpc>
-                <a:spcPct val="100000"/>
-              </a:lnSpc>
-              <a:spcBef>
-                <a:spcPts val="0"/>
-              </a:spcBef>
-              <a:spcAft>
-                <a:spcPts val="0"/>
-              </a:spcAft>
-              <a:buNone/>
-            </a:pPr>
-            <a:r>
-              <a:rPr lang="zh-CN" altLang="en-US" sz="1400" b="1" kern="1200" dirty="0">
-                <a:solidFill>
-                  <a:srgbClr val="004E98"/>
-                </a:solidFill>
-                <a:latin typeface="Times New Roman" panose="02020603050405020304" pitchFamily="18" charset="0"/>
-                <a:ea typeface="华文楷体" panose="02010600040101010101" pitchFamily="2" charset="-122"/>
-                <a:cs typeface="Times New Roman" panose="02020603050405020304" pitchFamily="18" charset="0"/>
-              </a:rPr>
-              <a:t>③ 履职评价与追责</a:t>
-            </a:r>
-          </a:p>
-          <a:p>
-            <a:pPr marL="171450" indent="-171450" algn="l">
-              <a:lnSpc>
-                <a:spcPct val="140000"/>
-              </a:lnSpc>
-              <a:spcBef>
-                <a:spcPts val="350"/>
-              </a:spcBef>
-              <a:spcAft>
-                <a:spcPts val="0"/>
-              </a:spcAft>
-              <a:buClr>
-                <a:srgbClr val="197BC0"/>
-              </a:buClr>
-              <a:buSzPct val="60"/>
-              <a:buFont typeface="Wingdings" panose="05000000000000000000" pitchFamily="2" charset="2"/>
-              <a:buChar char="n"/>
-            </a:pPr>
-            <a:r>
-              <a:rPr lang="zh-CN" altLang="en-US" sz="1200" b="0" kern="1200" dirty="0">
-                <a:solidFill>
-                  <a:srgbClr val="262626"/>
-                </a:solidFill>
-                <a:latin typeface="Times New Roman" panose="02020603050405020304" pitchFamily="18" charset="0"/>
-                <a:ea typeface="华文楷体" panose="02010600040101010101" pitchFamily="2" charset="-122"/>
-                <a:cs typeface="Times New Roman" panose="02020603050405020304" pitchFamily="18" charset="0"/>
-              </a:rPr>
-              <a:t>建立</a:t>
-            </a:r>
-            <a:r>
-              <a:rPr lang="zh-CN" altLang="en-US" sz="1200" b="1" kern="1200" dirty="0">
-                <a:solidFill>
-                  <a:srgbClr val="004E98"/>
-                </a:solidFill>
-                <a:latin typeface="Times New Roman" panose="02020603050405020304" pitchFamily="18" charset="0"/>
-                <a:ea typeface="华文楷体" panose="02010600040101010101" pitchFamily="2" charset="-122"/>
-                <a:cs typeface="Times New Roman" panose="02020603050405020304" pitchFamily="18" charset="0"/>
-              </a:rPr>
-              <a:t>履职定期评价与责任追究机制</a:t>
-            </a:r>
-            <a:r>
-              <a:rPr lang="zh-CN" altLang="en-US" sz="1200" b="0" kern="1200" dirty="0">
-                <a:solidFill>
-                  <a:srgbClr val="262626"/>
-                </a:solidFill>
-                <a:latin typeface="Times New Roman" panose="02020603050405020304" pitchFamily="18" charset="0"/>
-                <a:ea typeface="华文楷体" panose="02010600040101010101" pitchFamily="2" charset="-122"/>
-                <a:cs typeface="Times New Roman" panose="02020603050405020304" pitchFamily="18" charset="0"/>
-              </a:rPr>
-              <a:t>，未勤勉尽责的及时追责</a:t>
-            </a:r>
-          </a:p>
-        </p:txBody>
-      </p:sp>
-      <p:sp>
-        <p:nvSpPr>
-          <p:cNvPr id="113" name="SectionBar"/>
-          <p:cNvSpPr/>
-          <p:nvPr/>
-        </p:nvSpPr>
-        <p:spPr>
-          <a:xfrm>
-            <a:off x="773430" y="4750000"/>
+            <a:off x="773430" y="4505534"/>
             <a:ext cx="10645140" cy="337185"/>
           </a:xfrm>
           <a:prstGeom prst="rect">
@@ -14215,7 +12006,7 @@
           </a:effectLst>
         </p:spPr>
         <p:txBody>
-          <a:bodyPr wrap="square" lIns="137160" tIns="45720" rIns="91440" bIns="45720" rtlCol="0" anchor="ctr"/>
+          <a:bodyPr wrap="square" lIns="137160" tIns="0" rIns="0" bIns="0" rtlCol="0" anchor="ctr"/>
           <a:lstStyle/>
           <a:p>
             <a:pPr marL="0" indent="0" algn="l">
@@ -14239,21 +12030,21 @@
                 <a:ea typeface="华文楷体" panose="02010600040101010101" pitchFamily="2" charset="-122"/>
                 <a:cs typeface="Times New Roman" panose="02020603050405020304" pitchFamily="18" charset="0"/>
               </a:rPr>
-              <a:t>解聘情形与空缺期安排</a:t>
-            </a:r>
-          </a:p>
-        </p:txBody>
-      </p:sp>
-      <p:sp>
-        <p:nvSpPr>
-          <p:cNvPr id="114" name="Bullets"/>
+              <a:t>解聘与空缺</a:t>
+            </a:r>
+          </a:p>
+        </p:txBody>
+      </p:sp>
+      <p:sp>
+        <p:nvSpPr>
+          <p:cNvPr id="107" name="Items"/>
           <p:cNvSpPr txBox="1"/>
           <p:nvPr/>
         </p:nvSpPr>
         <p:spPr>
           <a:xfrm>
-            <a:off x="773430" y="5180000"/>
-            <a:ext cx="10645140" cy="900000"/>
+            <a:off x="773430" y="5022719"/>
+            <a:ext cx="10645140" cy="897280"/>
           </a:xfrm>
           <a:prstGeom prst="rect">
             <a:avLst/>
@@ -14267,9 +12058,9 @@
           <a:bodyPr wrap="square" lIns="0" tIns="0" rIns="0" bIns="0" rtlCol="0" anchor="t"/>
           <a:lstStyle/>
           <a:p>
-            <a:pPr marL="190500" indent="-176530" algn="l">
+            <a:pPr marL="214313" indent="-214313" algn="l">
               <a:lnSpc>
-                <a:spcPct val="150000"/>
+                <a:spcPct val="160000"/>
               </a:lnSpc>
               <a:spcBef>
                 <a:spcPts val="0"/>
@@ -14284,7 +12075,7 @@
               <a:buChar char="n"/>
             </a:pPr>
             <a:r>
-              <a:rPr lang="zh-CN" altLang="en-US" sz="1250" b="0" kern="1200" dirty="0">
+              <a:rPr lang="zh-CN" altLang="en-US" sz="1400" b="0" kern="1200" dirty="0">
                 <a:solidFill>
                   <a:srgbClr val="262626"/>
                 </a:solidFill>
@@ -14292,60 +12083,16 @@
                 <a:ea typeface="华文楷体" panose="02010600040101010101" pitchFamily="2" charset="-122"/>
                 <a:cs typeface="Times New Roman" panose="02020603050405020304" pitchFamily="18" charset="0"/>
               </a:rPr>
-              <a:t>出现下列情形，董事会</a:t>
-            </a:r>
-            <a:r>
-              <a:rPr lang="zh-CN" altLang="en-US" sz="1250" b="1" kern="1200" dirty="0">
-                <a:solidFill>
-                  <a:srgbClr val="C00000"/>
-                </a:solidFill>
-                <a:latin typeface="Times New Roman" panose="02020603050405020304" pitchFamily="18" charset="0"/>
-                <a:ea typeface="华文楷体" panose="02010600040101010101" pitchFamily="2" charset="-122"/>
-                <a:cs typeface="Times New Roman" panose="02020603050405020304" pitchFamily="18" charset="0"/>
-              </a:rPr>
-              <a:t>应当立即开会</a:t>
-            </a:r>
-            <a:r>
-              <a:rPr lang="zh-CN" altLang="en-US" sz="1250" b="0" kern="1200" dirty="0">
-                <a:solidFill>
-                  <a:srgbClr val="262626"/>
-                </a:solidFill>
-                <a:latin typeface="Times New Roman" panose="02020603050405020304" pitchFamily="18" charset="0"/>
-                <a:ea typeface="华文楷体" panose="02010600040101010101" pitchFamily="2" charset="-122"/>
-                <a:cs typeface="Times New Roman" panose="02020603050405020304" pitchFamily="18" charset="0"/>
-              </a:rPr>
-              <a:t>决定是否解聘：不再符合任职条件；</a:t>
-            </a:r>
-            <a:r>
-              <a:rPr lang="zh-CN" altLang="en-US" sz="1250" b="1" kern="1200" dirty="0">
-                <a:solidFill>
-                  <a:srgbClr val="004E98"/>
-                </a:solidFill>
-                <a:latin typeface="Times New Roman" panose="02020603050405020304" pitchFamily="18" charset="0"/>
-                <a:ea typeface="华文楷体" panose="02010600040101010101" pitchFamily="2" charset="-122"/>
-                <a:cs typeface="Times New Roman" panose="02020603050405020304" pitchFamily="18" charset="0"/>
-              </a:rPr>
-              <a:t>连续三个月以上不能履职</a:t>
-            </a:r>
-            <a:r>
-              <a:rPr lang="zh-CN" altLang="en-US" sz="1250" b="0" kern="1200" dirty="0">
-                <a:solidFill>
-                  <a:srgbClr val="262626"/>
-                </a:solidFill>
-                <a:latin typeface="Times New Roman" panose="02020603050405020304" pitchFamily="18" charset="0"/>
-                <a:ea typeface="华文楷体" panose="02010600040101010101" pitchFamily="2" charset="-122"/>
-                <a:cs typeface="Times New Roman" panose="02020603050405020304" pitchFamily="18" charset="0"/>
-              </a:rPr>
-              <a:t>；履职存在重大错误或疏漏造成重大损失等。</a:t>
-            </a:r>
-          </a:p>
-          <a:p>
-            <a:pPr marL="190500" indent="-176530" algn="l">
+              <a:t>不再符合任职条件、连续三个月以上不能履职、履职存在重大错误或疏漏造成重大损失的，董事会应当立即开会决定是否解聘。</a:t>
+            </a:r>
+          </a:p>
+          <a:p>
+            <a:pPr marL="214313" indent="-214313" algn="l">
               <a:lnSpc>
-                <a:spcPct val="150000"/>
+                <a:spcPct val="160000"/>
               </a:lnSpc>
               <a:spcBef>
-                <a:spcPts val="0"/>
+                <a:spcPts val="600"/>
               </a:spcBef>
               <a:spcAft>
                 <a:spcPts val="0"/>
@@ -14357,7 +12104,7 @@
               <a:buChar char="n"/>
             </a:pPr>
             <a:r>
-              <a:rPr lang="zh-CN" altLang="en-US" sz="1250" b="0" kern="1200" dirty="0">
+              <a:rPr lang="zh-CN" altLang="en-US" sz="1400" b="0" kern="1200" dirty="0">
                 <a:solidFill>
                   <a:srgbClr val="262626"/>
                 </a:solidFill>
@@ -14365,32 +12112,10 @@
                 <a:ea typeface="华文楷体" panose="02010600040101010101" pitchFamily="2" charset="-122"/>
                 <a:cs typeface="Times New Roman" panose="02020603050405020304" pitchFamily="18" charset="0"/>
               </a:rPr>
-              <a:t>董事会秘书被解聘或辞职的，公司应</a:t>
-            </a:r>
-            <a:r>
-              <a:rPr lang="zh-CN" altLang="en-US" sz="1250" b="1" kern="1200" dirty="0">
-                <a:solidFill>
-                  <a:srgbClr val="004E98"/>
-                </a:solidFill>
-                <a:latin typeface="Times New Roman" panose="02020603050405020304" pitchFamily="18" charset="0"/>
-                <a:ea typeface="华文楷体" panose="02010600040101010101" pitchFamily="2" charset="-122"/>
-                <a:cs typeface="Times New Roman" panose="02020603050405020304" pitchFamily="18" charset="0"/>
-              </a:rPr>
-              <a:t>及时报告交易所并公告</a:t>
-            </a:r>
-            <a:r>
-              <a:rPr lang="zh-CN" altLang="en-US" sz="1250" b="0" kern="1200" dirty="0">
-                <a:solidFill>
-                  <a:srgbClr val="262626"/>
-                </a:solidFill>
-                <a:latin typeface="Times New Roman" panose="02020603050405020304" pitchFamily="18" charset="0"/>
-                <a:ea typeface="华文楷体" panose="02010600040101010101" pitchFamily="2" charset="-122"/>
-                <a:cs typeface="Times New Roman" panose="02020603050405020304" pitchFamily="18" charset="0"/>
-              </a:rPr>
-              <a:t>，并在</a:t>
-            </a:r>
-            <a:r>
-              <a:rPr lang="zh-CN" altLang="en-US" sz="1250" b="1" kern="1200" dirty="0">
+              <a:t>解聘或辞职的，应及时报告证券交易所并公告，并在</a:t>
+            </a:r>
+            <a:r>
+              <a:rPr lang="zh-CN" altLang="en-US" sz="1400" b="1" kern="1200" dirty="0">
                 <a:solidFill>
                   <a:srgbClr val="004E98"/>
                 </a:solidFill>
@@ -14404,7 +12129,7 @@
               <a:t>六个月内</a:t>
             </a:r>
             <a:r>
-              <a:rPr lang="zh-CN" altLang="en-US" sz="1250" b="0" kern="1200" dirty="0">
+              <a:rPr lang="zh-CN" altLang="en-US" sz="1400" b="0" kern="1200" dirty="0">
                 <a:solidFill>
                   <a:srgbClr val="262626"/>
                 </a:solidFill>
@@ -14412,42 +12137,20 @@
                 <a:ea typeface="华文楷体" panose="02010600040101010101" pitchFamily="2" charset="-122"/>
                 <a:cs typeface="Times New Roman" panose="02020603050405020304" pitchFamily="18" charset="0"/>
               </a:rPr>
-              <a:t>完成新聘；空缺期间由</a:t>
-            </a:r>
-            <a:r>
-              <a:rPr lang="zh-CN" altLang="en-US" sz="1250" b="1" kern="1200" dirty="0">
-                <a:solidFill>
-                  <a:srgbClr val="004E98"/>
-                </a:solidFill>
-                <a:latin typeface="Times New Roman" panose="02020603050405020304" pitchFamily="18" charset="0"/>
-                <a:ea typeface="华文楷体" panose="02010600040101010101" pitchFamily="2" charset="-122"/>
-                <a:cs typeface="Times New Roman" panose="02020603050405020304" pitchFamily="18" charset="0"/>
-              </a:rPr>
-              <a:t>董事长代行</a:t>
-            </a:r>
-            <a:r>
-              <a:rPr lang="zh-CN" altLang="en-US" sz="1250" b="0" kern="1200" dirty="0">
-                <a:solidFill>
-                  <a:srgbClr val="262626"/>
-                </a:solidFill>
-                <a:latin typeface="Times New Roman" panose="02020603050405020304" pitchFamily="18" charset="0"/>
-                <a:ea typeface="华文楷体" panose="02010600040101010101" pitchFamily="2" charset="-122"/>
-                <a:cs typeface="Times New Roman" panose="02020603050405020304" pitchFamily="18" charset="0"/>
-              </a:rPr>
-              <a:t>职责。</a:t>
-            </a:r>
-          </a:p>
-        </p:txBody>
-      </p:sp>
-      <p:sp>
-        <p:nvSpPr>
-          <p:cNvPr id="115" name="Footnote"/>
+              <a:t>完成新的聘任；空缺期间由董事长代行职责。</a:t>
+            </a:r>
+          </a:p>
+        </p:txBody>
+      </p:sp>
+      <p:sp>
+        <p:nvSpPr>
+          <p:cNvPr id="108" name="Source"/>
           <p:cNvSpPr txBox="1"/>
           <p:nvPr/>
         </p:nvSpPr>
         <p:spPr>
           <a:xfrm>
-            <a:off x="773430" y="6230000"/>
+            <a:off x="773430" y="6180000"/>
             <a:ext cx="10645140" cy="260000"/>
           </a:xfrm>
           <a:prstGeom prst="rect">
@@ -14483,7 +12186,7 @@
                 <a:ea typeface="华文楷体" panose="02010600040101010101" pitchFamily="2" charset="-122"/>
                 <a:cs typeface="Times New Roman" panose="02020603050405020304" pitchFamily="18" charset="0"/>
               </a:rPr>
-              <a:t>依据：《上市公司董事会秘书监管规则》第二十三条至第二十五条、第二十七条、第二十九条、第三十三条。</a:t>
+              <a:t>依据：《上市公司董事会秘书监管规则》第二十三条至第二十五条、第二十七条、第三十三条。</a:t>
             </a:r>
           </a:p>
         </p:txBody>
